--- a/probability_and_statistics/5_inference/Stats-Sampling_1_Methods.pptx
+++ b/probability_and_statistics/5_inference/Stats-Sampling_1_Methods.pptx
@@ -5,20 +5,22 @@
     <p:sldMasterId id="2147483648" r:id="rId1"/>
   </p:sldMasterIdLst>
   <p:handoutMasterIdLst>
-    <p:handoutMasterId r:id="rId13"/>
+    <p:handoutMasterId r:id="rId15"/>
   </p:handoutMasterIdLst>
   <p:sldIdLst>
     <p:sldId id="257" r:id="rId2"/>
     <p:sldId id="259" r:id="rId3"/>
-    <p:sldId id="278" r:id="rId4"/>
-    <p:sldId id="260" r:id="rId5"/>
-    <p:sldId id="261" r:id="rId6"/>
-    <p:sldId id="272" r:id="rId7"/>
-    <p:sldId id="273" r:id="rId8"/>
-    <p:sldId id="274" r:id="rId9"/>
-    <p:sldId id="277" r:id="rId10"/>
-    <p:sldId id="264" r:id="rId11"/>
-    <p:sldId id="276" r:id="rId12"/>
+    <p:sldId id="279" r:id="rId4"/>
+    <p:sldId id="278" r:id="rId5"/>
+    <p:sldId id="260" r:id="rId6"/>
+    <p:sldId id="261" r:id="rId7"/>
+    <p:sldId id="272" r:id="rId8"/>
+    <p:sldId id="273" r:id="rId9"/>
+    <p:sldId id="274" r:id="rId10"/>
+    <p:sldId id="277" r:id="rId11"/>
+    <p:sldId id="280" r:id="rId12"/>
+    <p:sldId id="264" r:id="rId13"/>
+    <p:sldId id="276" r:id="rId14"/>
   </p:sldIdLst>
   <p:sldSz cx="12192000" cy="6858000"/>
   <p:notesSz cx="6858000" cy="9144000"/>
@@ -4009,7 +4011,7 @@
           <a:p>
             <a:fld id="{7BAEECA8-D063-486F-AE31-5020270C1449}" type="datetimeFigureOut">
               <a:rPr lang="en-US" smtClean="0"/>
-              <a:t>10/20/2025</a:t>
+              <a:t>4/7/2026</a:t>
             </a:fld>
             <a:endParaRPr lang="en-US"/>
           </a:p>
@@ -5020,15 +5022,15 @@
           <inkml:channelProperty channel="OE" name="resolution" value="1000" units="1/deg"/>
         </inkml:channelProperties>
       </inkml:inkSource>
-      <inkml:timestamp xml:id="ts0" timeString="2025-10-20T04:54:49.429"/>
+      <inkml:timestamp xml:id="ts0" timeString="2025-10-19T19:36:26.993"/>
     </inkml:context>
     <inkml:brush xml:id="br0">
       <inkml:brushProperty name="width" value="0.2" units="cm"/>
       <inkml:brushProperty name="height" value="0.2" units="cm"/>
-      <inkml:brushProperty name="color" value="#FFC114"/>
+      <inkml:brushProperty name="color" value="#66CC00"/>
     </inkml:brush>
   </inkml:definitions>
-  <inkml:trace contextRef="#ctx0" brushRef="#br0">1 1 6129 0 0,'0'0'56'0'0,"3"5"124"0"0</inkml:trace>
+  <inkml:trace contextRef="#ctx0" brushRef="#br0">2659 98 6673 0 0,'15'-12'561'0'0,"-17"9"-474"0"0,0 1 1 0 0,-1-1-1 0 0,1 0 0 0 0,-1 1 0 0 0,0 0 1 0 0,0-1-1 0 0,0 1 0 0 0,0 0 1 0 0,-1 0-1 0 0,1 1 0 0 0,-1-1 1 0 0,0 1-1 0 0,1-1 0 0 0,-1 1 0 0 0,-7-1 1 0 0,-8-3 61 0 0,-34-4 0 0 0,-44-6-33 0 0,-67-6 97 0 0,93 19-213 0 0,-1 2-1 0 0,-89 11 0 0 0,-70 18-34 0 0,149-17 52 0 0,26-5-6 0 0,-142 18-27 0 0,147-20 16 0 0,-53 13 1 0 0,52-7-10 0 0,-174 32-13 0 0,165-30-13 0 0,-112 37-1 0 0,161-46 36 0 0,-22 8-22 0 0,2 2-1 0 0,0 0 1 0 0,-50 30-1 0 0,40-15 9 0 0,3 2 0 0 0,1 1 1 0 0,1 2-1 0 0,-44 52 0 0 0,50-50-29 0 0,-33 48 0 0 0,-21 63-101 0 0,78-130 117 0 0,-4 5-58 0 0,-12 42-1 0 0,3-4 4 0 0,14-43 61 0 0,-7 38 0 0 0,7-29 3 0 0,0 15-15 0 0,1 0 0 0 0,2 61 1 0 0,0 2 10 0 0,2-46 12 0 0,1-34-8 0 0,-2 0 0 0 0,-5 31 0 0 0,2-25 19 0 0,3 0-1 0 0,0 40 1 0 0,2-52 1 0 0,-6 132 7 0 0,-2 104 6 0 0,8-196 35 0 0,17 111 0 0 0,-11-132-31 0 0,3 1 1 0 0,1-1 0 0 0,2 0 0 0 0,2-1-1 0 0,2-1 1 0 0,21 37 0 0 0,7 1-20 0 0,-12-16-1 0 0,60 76 0 0 0,59 66-40 0 0,-133-172 29 0 0,0 1 1 0 0,-2 1-1 0 0,-2 0 1 0 0,-1 0-1 0 0,-2 1 0 0 0,0 1 1 0 0,-3 0-1 0 0,5 34 0 0 0,-1 97-16 0 0,13-53-1 0 0,-24-97 31 0 0,1-1 0 0 0,1 0 0 0 0,1 0 0 0 0,0 0 0 0 0,0 0 0 0 0,2 0 0 0 0,9 15-1 0 0,0 1 11 0 0,-13-22-12 0 0,-1-1 0 0 0,2 0-1 0 0,-1-1 1 0 0,0 2-1 0 0,1-1 1 0 0,4 3-1 0 0,63 74 79 0 0,-45-55-64 0 0,-15-16-1 0 0,-1 1-1 0 0,1-2 1 0 0,2 1-1 0 0,-1-1 1 0 0,17 10-1 0 0,53 34 22 0 0,7 5 0 0 0,-40-27-21 0 0,-34-21-7 0 0,0-2-1 0 0,19 11 1 0 0,0-1 0 0 0,-12-6 2 0 0,36 14 0 0 0,-31-16 14 0 0,-1-1 0 0 0,1-2 1 0 0,36 6-1 0 0,-33-7-17 0 0,16 0 48 0 0,60 2-1 0 0,-84-7-27 0 0,20 2 0 0 0,14 1-2 0 0,-25-3-33 0 0,87 0 52 0 0,27-8-7 0 0,-110 5-38 0 0,58-6 52 0 0,95-21-1 0 0,45-32 316 0 0,-170 38-274 0 0,0-3 0 0 0,-2-2 0 0 0,68-43 0 0 0,-88 48 54 0 0,-1-3-1 0 0,0-1 0 0 0,-3-1 1 0 0,54-53-1 0 0,-54 44-81 0 0,94-106 131 0 0,-50 55-28 0 0,-53 59-93 0 0,1-1 0 0 0,-3-1 0 0 0,32-50 0 0 0,31-118 257 0 0,-61 134-280 0 0,-20 47-49 0 0,99-262 195 0 0,-85 227-110 0 0,39-74 0 0 0,3-3 203 0 0,0 8 8 0 0,-35 62-171 0 0,39-100 681 0 0,-37 46-173 0 0,-18 63-478 0 0,27-149-37 0 0,-37 181-41 0 0,3-6 75 0 0,-2 0 0 0 0,-2 0 1 0 0,0 0-1 0 0,-2-1 0 0 0,-1 0 1 0 0,-6-25-1 0 0,4 29 54 0 0,-3-39 1 0 0,3 14-37 0 0,-5 0 267 0 0,-3 1 0 0 0,-1 0 0 0 0,-24-55 1 0 0,36 100-431 0 0,-3-10 67 0 0,1 1 1 0 0,-3 0-1 0 0,2 0 0 0 0,-2 0 0 0 0,0 1 1 0 0,-12-15-1 0 0,13 18-51 0 0,1 0 1 0 0,0 0-1 0 0,1 0 1 0 0,0-1-1 0 0,-4-8 0 0 0,6 11-9 0 0,-8-14 46 0 0,0 0-1 0 0,-17-22 1 0 0,4 6 16 0 0,-43-75 78 0 0,59 99-145 0 0,-67-102 207 0 0,59 93-155 0 0,0 2 1 0 0,-1 0-1 0 0,-32-28 0 0 0,15 11 2 0 0,26 27-61 0 0,1 1 0 0 0,-1-1 0 0 0,0 2 0 0 0,-8-7 0 0 0,-25-25 5 0 0,8 6-23 0 0,12 14 10 0 0,-9-7-7 0 0,2-1 8 0 0,3 3-26 0 0,0 2-1 0 0,-39-28 0 0 0,54 43 31 0 0,-67-46-6 0 0,-36-11-93 0 0,27 28 1 0 0,-16 1-57 0 0,49 17 88 0 0,28 10 17 0 0,-22-8-15 0 0,41 13 66 0 0,-2 0 0 0 0,-39-14-63 0 0,22 11 61 0 0,-27-7-28 0 0,49 11 33 0 0,-2-1 1 0 0,-3 0-3 0 0,4 1 3 0 0,-10-4 333 0 0,-2 2-1335 0 0,69-14-12216 0 0,-31 11 10259 0 0</inkml:trace>
 </inkml:ink>
 </file>
 
@@ -5052,15 +5054,15 @@
           <inkml:channelProperty channel="OE" name="resolution" value="1000" units="1/deg"/>
         </inkml:channelProperties>
       </inkml:inkSource>
-      <inkml:timestamp xml:id="ts0" timeString="2025-10-20T05:01:05.591"/>
+      <inkml:timestamp xml:id="ts0" timeString="2025-10-19T19:36:29.623"/>
     </inkml:context>
     <inkml:brush xml:id="br0">
       <inkml:brushProperty name="width" value="0.2" units="cm"/>
       <inkml:brushProperty name="height" value="0.2" units="cm"/>
-      <inkml:brushProperty name="color" value="#FFC114"/>
+      <inkml:brushProperty name="color" value="#66CC00"/>
     </inkml:brush>
   </inkml:definitions>
-  <inkml:trace contextRef="#ctx0" brushRef="#br0">6652 7 6589 0 0,'1'0'-59'0'0,"0"-1"0"0"0,-1 0 0 0 0,1 1 0 0 0,0-1 0 0 0,0 0 0 0 0,0 1 0 0 0,0-1 0 0 0,1 1 0 0 0,-1 0 1 0 0,0-1-1 0 0,0 1 0 0 0,0 0 0 0 0,0 0 0 0 0,0-1 0 0 0,0 1 0 0 0,2 0 0 0 0,27 250-86 0 0,-1-62 94 0 0,5 31 153 0 0,-16-85-52 0 0,-9-51 7 0 0,-7-61 64 0 0,0 0 0 0 0,-2-1 0 0 0,-4 40 0 0 0,2-57-55 0 0,0 1 0 0 0,0-1 1 0 0,0 0-1 0 0,-1 0 0 0 0,0 0 0 0 0,0 0 1 0 0,0 0-1 0 0,0 0 0 0 0,-1-1 1 0 0,0 1-1 0 0,1-1 0 0 0,-1 0 0 0 0,0 0 1 0 0,-1-1-1 0 0,-6 5 0 0 0,-77 33 563 0 0,84-38-615 0 0,-27 9 204 0 0,-1-1-1 0 0,-1-2 0 0 0,-49 7 0 0 0,-105 2 316 0 0,144-15-466 0 0,-359 18 355 0 0,-662 5 256 0 0,222-37-262 0 0,-366 51-284 0 0,872-33-91 0 0,-109 8 24 0 0,89 4-20 0 0,-150 16 31 0 0,477-30-76 0 0,-445 81-86 0 0,438-76 60 0 0,0 3 0 0 0,0 0 0 0 0,1 2-1 0 0,1 2 1 0 0,1 1 0 0 0,0 2 0 0 0,-44 32 0 0 0,65-41 9 0 0,1 1 1 0 0,0 0 0 0 0,0 1-1 0 0,1 0 1 0 0,1 1-1 0 0,0-1 1 0 0,-11 23 0 0 0,4-3-4 0 0,0 2 1 0 0,-10 36-1 0 0,6-3-6 0 0,3 0 0 0 0,-10 83 0 0 0,19-106 6 0 0,-3 36 14 0 0,-3 58 10 0 0,12 139-51 0 0,2-275 51 0 0,0 2-492 0 0,0 13 1603 0 0</inkml:trace>
+  <inkml:trace contextRef="#ctx0" brushRef="#br0">418 48 1440 0 0,'6'-8'3411'0'0,"-6"8"-3220"0"0,0-1-1 0 0,0 1 0 0 0,0-1 1 0 0,0 0-1 0 0,0 0 0 0 0,-20-16 388 0 0,19 16-506 0 0,-38-9 213 0 0,22 7-278 0 0,0 1 1 0 0,1 0-1 0 0,-1 1 0 0 0,1 1 1 0 0,-2 1-1 0 0,1 0 0 0 0,1 1 1 0 0,0 0-1 0 0,-2 1 0 0 0,3 1 1 0 0,-1 1-1 0 0,0 0 0 0 0,0 0 1 0 0,1 2-1 0 0,0 0 0 0 0,-26 15 1 0 0,36-19-19 0 0,0-1 0 0 0,1 1 0 0 0,0 0 0 0 0,0 0 0 0 0,0 0 0 0 0,0 0-1 0 0,0 0 1 0 0,1 1 0 0 0,-1 0 0 0 0,1 0 0 0 0,1 0 0 0 0,-1-1 0 0 0,0 2 0 0 0,-1 4 0 0 0,3-8-3 0 0,1 1-2 0 0,-3 2 0 0 0,2-3 5 0 0,1 1 6 0 0,1 0 0 0 0,-1 0 0 0 0,1 0 0 0 0,-1-1 0 0 0,1 2 0 0 0,0-1 0 0 0,0-1 0 0 0,-1 1-1 0 0,2 0 1 0 0,-1-1 0 0 0,0 1 0 0 0,0 0 0 0 0,1-1 0 0 0,-1 0 0 0 0,1 1 0 0 0,-1-1 0 0 0,1 1 0 0 0,-1-2 0 0 0,1 2 0 0 0,0-2 0 0 0,0 2 0 0 0,-1-1 0 0 0,2-1 0 0 0,-2 1 0 0 0,2 0-1 0 0,-1-1 1 0 0,0 1 0 0 0,4 0 0 0 0,4 2 11 0 0,1-2 0 0 0,-1 0 0 0 0,1 1 0 0 0,12-1 0 0 0,78 0-9 0 0,-98-1 1 0 0,41 0-12 0 0,-44 0 14 0 0,1-1 1 0 0,-1 1 0 0 0,0 0-1 0 0,1 0 1 0 0,-1 0-1 0 0,0 0 1 0 0,0 0-1 0 0,0 0 1 0 0,1 0-1 0 0,-1 0 1 0 0,1-1-1 0 0,-1 1 1 0 0,1 0-1 0 0,-1 0 1 0 0,0 0-1 0 0,1 0 1 0 0,-1 0-1 0 0,0 0 1 0 0,0 0 0 0 0,1 0-1 0 0,-1 0 1 0 0,1 0-1 0 0,-1 0 1 0 0,0 1-1 0 0,1-1 1 0 0,-1 0-1 0 0,1 0 1 0 0,20 2 3 0 0,-8-1-8 0 0,-2 0-9 0 0,2-1-1 0 0,-1 2 1 0 0,-1 0-1 0 0,1 0 0 0 0,0 1 1 0 0,-1 0-1 0 0,13 6 1 0 0,-20-8 7 0 0,1 0-3 0 0,0 0-1 0 0,2 1 0 0 0,-2 0 1 0 0,1 0-1 0 0,-1 0 0 0 0,0 1 1 0 0,0 0-1 0 0,0 0 0 0 0,-1 0 1 0 0,1 0-1 0 0,0 1 0 0 0,0 0 1 0 0,-2-1-1 0 0,1 1 0 0 0,6 9 1 0 0,-3-4-9 0 0,-4-7 11 0 0,-1 2 0 0 0,0-1 1 0 0,1 0-1 0 0,-2 1 0 0 0,2-1 1 0 0,-2 1-1 0 0,0 0 0 0 0,2 6 1 0 0,-1-8 7 0 0,-2 0 0 0 0,1 0 1 0 0,0 0-1 0 0,0 1 1 0 0,-1-1-1 0 0,1 0 0 0 0,-1 1 1 0 0,0-1-1 0 0,0 1 1 0 0,0-1-1 0 0,0 0 0 0 0,0 1 1 0 0,-1-1-1 0 0,1 1 1 0 0,-1-1-1 0 0,-1 3 0 0 0,-1 2 29 0 0,3-5-21 0 0,-1 0-1 0 0,0-1 1 0 0,-1 1-1 0 0,2 0 1 0 0,-1 0-1 0 0,-1-1 1 0 0,1 1 0 0 0,0 0-1 0 0,-1-1 1 0 0,1 1-1 0 0,-1-1 1 0 0,0 0 0 0 0,0 1-1 0 0,1-1 1 0 0,-1 0-1 0 0,-2 1 1 0 0,-35 12 93 0 0,18-7-44 0 0,-2 0 173 0 0,0-1 0 0 0,-1 0 1 0 0,1-2-1 0 0,-1-1 0 0 0,1-1 1 0 0,-44 0-1 0 0,8-6 1243 0 0,58 4-1357 0 0,-41-10-835 0 0</inkml:trace>
 </inkml:ink>
 </file>
 
@@ -5084,15 +5086,15 @@
           <inkml:channelProperty channel="OE" name="resolution" value="1000" units="1/deg"/>
         </inkml:channelProperties>
       </inkml:inkSource>
-      <inkml:timestamp xml:id="ts0" timeString="2025-10-20T05:01:06.839"/>
+      <inkml:timestamp xml:id="ts0" timeString="2025-10-19T19:36:31.040"/>
     </inkml:context>
     <inkml:brush xml:id="br0">
       <inkml:brushProperty name="width" value="0.2" units="cm"/>
       <inkml:brushProperty name="height" value="0.2" units="cm"/>
-      <inkml:brushProperty name="color" value="#FFC114"/>
+      <inkml:brushProperty name="color" value="#66CC00"/>
     </inkml:brush>
   </inkml:definitions>
-  <inkml:trace contextRef="#ctx0" brushRef="#br0">0 12 6393 0 0,'0'0'-220'0'0,"10"-5"-184"0"0,-4 1 406 0 0,-5 4 136 0 0,-1-1-139 0 0,0 1 0 0 0,0 0 0 0 0,1 0 0 0 0,-1 0 1 0 0,0 0-1 0 0,0-1 0 0 0,0 1 0 0 0,1 0 0 0 0,-1 0 0 0 0,0 0 0 0 0,0 0 0 0 0,0 0 0 0 0,1 0 0 0 0,-1-1 0 0 0,0 1 0 0 0,0 0 0 0 0,1 0 0 0 0,-1 0 1 0 0,0 0-1 0 0,0 0 0 0 0,1 0 0 0 0,-1 0 0 0 0,0 0 0 0 0,0 0 0 0 0,1 0 0 0 0,-1 0 0 0 0,0 1 0 0 0,0-1 0 0 0,1 0 0 0 0,-1 0 0 0 0,0 0 0 0 0,0 0 1 0 0,1 0-1 0 0,-1 0 0 0 0,0 0 0 0 0,0 1 0 0 0,0-1 0 0 0,0 0 0 0 0,1 0 0 0 0,-1 0 0 0 0,0 0 0 0 0,0 1 0 0 0,0-1 0 0 0,0 0 0 0 0,1 0 0 0 0,-1 0 1 0 0,0 1-1 0 0,0-1 0 0 0,0 0 0 0 0,0 0 0 0 0,0 1 0 0 0,13 13-22 0 0,11 42-7 0 0,-2 1 1 0 0,23 100-1 0 0,-30-74 141 0 0,-5 1-1 0 0,-2 1 0 0 0,-5-1 1 0 0,-8 101-1 0 0,-14 87 311 0 0,-11-30 172 0 0,19-170-49 0 0,11-70-554 0 0,-6-39-5983 0 0</inkml:trace>
+  <inkml:trace contextRef="#ctx0" brushRef="#br0">213 61 5773 0 0,'3'-5'-406'0'0,"-2"5"456"0"0,-1-1 0 0 0,0 1 0 0 0,1-1-1 0 0,-1 1 1 0 0,1-1 0 0 0,-1 0 0 0 0,1 0-1 0 0,-1 1 1 0 0,1-1 0 0 0,-1 0 0 0 0,0 1-1 0 0,0-1 1 0 0,0 0 0 0 0,0 1 0 0 0,0-1-1 0 0,0 0 1 0 0,0 0 0 0 0,0 1 0 0 0,0-1-1 0 0,0 0 1 0 0,0 1 0 0 0,0-1 0 0 0,0 0-1 0 0,0 0 1 0 0,0 1 0 0 0,-1-2 0 0 0,0 0 87 0 0,0 1-92 0 0,0 0-1 0 0,1 0 1 0 0,-1-1 0 0 0,0 1 0 0 0,0-1-1 0 0,1 2 1 0 0,-2-2 0 0 0,1 2-1 0 0,0-2 1 0 0,0 2 0 0 0,-1-2 0 0 0,2 1-1 0 0,-2 1 1 0 0,0-1 0 0 0,2 0 0 0 0,-2 1-1 0 0,-1-2 1 0 0,-29-10 250 0 0,21 10-294 0 0,0 1 0 0 0,0 1-1 0 0,0-1 1 0 0,-11 2 0 0 0,17 1-13 0 0,1 0 0 0 0,-2 0 0 0 0,1 0 1 0 0,2 0-1 0 0,-2 1 0 0 0,1 0 0 0 0,-1 0 0 0 0,1 0 0 0 0,1 0 0 0 0,-5 5 1 0 0,1-2-5 0 0,2 0-1 0 0,0 0 1 0 0,0 1 0 0 0,-1 0 0 0 0,-4 9 0 0 0,9-11-4 0 0,-2 0-1 0 0,2 1 0 0 0,-1 0 1 0 0,2-1-1 0 0,-1 1 0 0 0,0 0 1 0 0,1-1-1 0 0,0 1 0 0 0,0-1 0 0 0,1 1 1 0 0,0 0-1 0 0,2 9 0 0 0,-3-11 9 0 0,2-1 0 0 0,0 2-1 0 0,-1-1 1 0 0,1-1-1 0 0,1 2 1 0 0,-1-2-1 0 0,0 1 1 0 0,1-1 0 0 0,0 1-1 0 0,0-1 1 0 0,0 0-1 0 0,0 0 1 0 0,0 0-1 0 0,1 0 1 0 0,0 0 0 0 0,0-1-1 0 0,5 3 1 0 0,-5-2 14 0 0,2-1 0 0 0,-1 0-1 0 0,1 0 1 0 0,-1 0 0 0 0,1 0 0 0 0,0-1 0 0 0,11 2 0 0 0,-15-3 2 0 0,1-1 1 0 0,0 1-1 0 0,-1 0 0 0 0,0-1 1 0 0,1 1-1 0 0,0-1 0 0 0,-1 0 1 0 0,0 1-1 0 0,1-1 0 0 0,-1 0 1 0 0,0 0-1 0 0,1-1 0 0 0,-1 1 1 0 0,0 0-1 0 0,1-1 0 0 0,-2 1 1 0 0,2-1-1 0 0,-2 0 0 0 0,1 1 1 0 0,-1-1-1 0 0,3-3 0 0 0,13-18 339 0 0,0 1 1 0 0,-2-2-1 0 0,-1 0 0 0 0,13-31 0 0 0,-15 29 459 0 0,-11 24-742 0 0,-1 19-388 0 0,0-1 0 0 0,2 1 0 0 0,5 26 0 0 0,-3-31 288 0 0,0-2 0 0 0,1 1 0 0 0,0-1 0 0 0,9 11 0 0 0,-13-18-140 0 0,1 0 1 0 0,1 0-1 0 0,0 0 0 0 0,-1 0 0 0 0,1-1 0 0 0,0 1 0 0 0,0-1 0 0 0,1 0 0 0 0,-1 0 0 0 0,0 0 0 0 0,0-1 0 0 0,1 2 0 0 0,0-2 0 0 0,-1 0 0 0 0,1 0 0 0 0,0 0 0 0 0,4 1 0 0 0,15-5-3134 0 0</inkml:trace>
 </inkml:ink>
 </file>
 
@@ -5116,15 +5118,15 @@
           <inkml:channelProperty channel="OE" name="resolution" value="1000" units="1/deg"/>
         </inkml:channelProperties>
       </inkml:inkSource>
-      <inkml:timestamp xml:id="ts0" timeString="2025-10-20T05:01:08.375"/>
+      <inkml:timestamp xml:id="ts0" timeString="2025-10-19T19:36:32.750"/>
     </inkml:context>
     <inkml:brush xml:id="br0">
       <inkml:brushProperty name="width" value="0.2" units="cm"/>
       <inkml:brushProperty name="height" value="0.2" units="cm"/>
-      <inkml:brushProperty name="color" value="#FFC114"/>
+      <inkml:brushProperty name="color" value="#66CC00"/>
     </inkml:brush>
   </inkml:definitions>
-  <inkml:trace contextRef="#ctx0" brushRef="#br0">2 17 4844 0 0,'0'0'-268'0'0,"-2"-5"-711"0"0,2 4 978 0 0,0 1 0 0 0,0 0 0 0 0,0-1 0 0 0,0 1 0 0 0,0-1 1 0 0,0 1-1 0 0,0 0 0 0 0,0-1 0 0 0,0 1 0 0 0,1-1 0 0 0,-1 1 0 0 0,0 0 0 0 0,0-1 1 0 0,0 1-1 0 0,0-1 0 0 0,1 1 0 0 0,-1 0 0 0 0,1-1 0 0 0,26-2 112 0 0,1 2 0 0 0,0 1 0 0 0,0 1 0 0 0,-1 2 0 0 0,1 0 0 0 0,52 15-1 0 0,-72-15-111 0 0,1 1 0 0 0,-1 0-1 0 0,0 1 1 0 0,0 0 0 0 0,0 0-1 0 0,-1 1 1 0 0,1 0-1 0 0,-1 0 1 0 0,-1 1 0 0 0,11 12-1 0 0,0 5 77 0 0,-1 0 0 0 0,14 29 0 0 0,-1-2 85 0 0,-15-26-55 0 0,-1 1 0 0 0,-1 1 0 0 0,-2 0 0 0 0,0 1 0 0 0,-2-1 0 0 0,7 45 0 0 0,11 179 414 0 0,-24-226-469 0 0,7 416 624 0 0,-9-339-563 0 0,-3 17 238 0 0,-21 137-1 0 0,19-236-527 0 0,-8-43-3564 0 0,14-6 2009 0 0</inkml:trace>
+  <inkml:trace contextRef="#ctx0" brushRef="#br0">1 133 4832 0 0,'5'-13'874'0'0,"-2"22"-519"0"0,1 16-415 0 0,1-15 59 0 0,46 113 22 0 0,-38-89 2519 0 0,-14-37-2372 0 0,-7-24 174 0 0,-2-2-94 0 0,2-2 1 0 0,-5-32-1 0 0,10 39-180 0 0,-3-59 80 0 0,11 56-1703 0 0,-2 28 1504 0 0,0 1 29 0 0,-1-2-1 0 0,1 2 1 0 0,0-1 0 0 0,-1 1-1 0 0,0-1 1 0 0,1 0-1 0 0,-1 2 1 0 0,0-2 0 0 0,1 1-1 0 0,-2 0 1 0 0,1 0 0 0 0,0 0-1 0 0,0 1 1 0 0,-1-1-1 0 0,2 3 1 0 0,22 33-163 0 0,48 79 65 0 0,-55-86 159 0 0,-18-30 2 0 0,1-7 441 0 0,0-1-1 0 0,-1 1 0 0 0,0-1 1 0 0,-1 1-1 0 0,0-1 0 0 0,-1-6 1 0 0,-2-48-483 0 0,6 48-44 0 0,-1-1 0 0 0,2 1 0 0 0,0 0 0 0 0,11-25 1 0 0,-3 12-306 0 0,-11 25 278 0 0,3-3-216 0 0,4-9-10 0 0,-6 13 257 0 0,-1-1-1 0 0,0 1 1 0 0,0 0-1 0 0,1 0 1 0 0,-1 0-1 0 0,0-1 1 0 0,1 1-1 0 0,-1-1 1 0 0,0 1-1 0 0,1 0 1 0 0,-1 0-1 0 0,0-1 1 0 0,0 1-1 0 0,0 0 1 0 0,1 0 0 0 0,-1 0-1 0 0,1 0 1 0 0,-1 0-1 0 0,1 0 1 0 0,-1 0-1 0 0,0 0 1 0 0,0 0-1 0 0,1-1 1 0 0,-1 1-1 0 0,1 0 1 0 0,-1 0-1 0 0,1 0 1 0 0,-1 1-1 0 0,1-1 1 0 0,-1 0 0 0 0,0 0-1 0 0,0 0 1 0 0,1 0-1 0 0,3 3 0 0 0,0-1 1 0 0,-1 2-1 0 0,0-1 1 0 0,0 0-1 0 0,0 1 0 0 0,0-1 1 0 0,0 1-1 0 0,-1-1 0 0 0,1 2 1 0 0,-2-2-1 0 0,1 1 0 0 0,2 7 1 0 0,17 40-88 0 0,46 117-31 0 0,-64-159-34 0 0,4 10 307 0 0</inkml:trace>
 </inkml:ink>
 </file>
 
@@ -5148,15 +5150,15 @@
           <inkml:channelProperty channel="OE" name="resolution" value="1000" units="1/deg"/>
         </inkml:channelProperties>
       </inkml:inkSource>
-      <inkml:timestamp xml:id="ts0" timeString="2025-10-20T05:01:09.946"/>
+      <inkml:timestamp xml:id="ts0" timeString="2025-10-19T19:36:34.059"/>
     </inkml:context>
     <inkml:brush xml:id="br0">
       <inkml:brushProperty name="width" value="0.2" units="cm"/>
       <inkml:brushProperty name="height" value="0.2" units="cm"/>
-      <inkml:brushProperty name="color" value="#FFC114"/>
+      <inkml:brushProperty name="color" value="#66CC00"/>
     </inkml:brush>
   </inkml:definitions>
-  <inkml:trace contextRef="#ctx0" brushRef="#br0">6 18 4764 0 0,'0'0'-124'0'0,"-1"0"-1"0"0,1 0 129 0 0,0 0 0 0 0,0 0 1 0 0,-1 0-1 0 0,1 0 0 0 0,0 0 0 0 0,0 0 1 0 0,0 0-1 0 0,0 0 0 0 0,-1 0 1 0 0,1 0-1 0 0,0 0 0 0 0,0-1 0 0 0,0 1 1 0 0,-1 0-1 0 0,1 0 0 0 0,0 0 0 0 0,0 0 1 0 0,0 0-1 0 0,0 0 0 0 0,0-1 1 0 0,-1 1-1 0 0,1 0 0 0 0,0 0 0 0 0,0 0 1 0 0,0 0-1 0 0,0-1 0 0 0,0 1 0 0 0,0 0 1 0 0,0 0-1 0 0,0 0 0 0 0,0 0 1 0 0,0-1-1 0 0,0 1 0 0 0,0 0 0 0 0,0 0 1 0 0,0 0-1 0 0,0-1 0 0 0,0 1 0 0 0,0 0 1 0 0,0 0-1 0 0,0 0 0 0 0,0-1 0 0 0,0 1 1 0 0,0 0-1 0 0,0 0 0 0 0,0 0 1 0 0,0 0-1 0 0,0-1 0 0 0,0 1 0 0 0,0 0 1 0 0,0 0-1 0 0,1 0 0 0 0,-1 0 0 0 0,0-1 1 0 0,0 1-1 0 0,0 0 0 0 0,0 0 1 0 0,0 0-1 0 0,1 0 0 0 0,38-5 159 0 0,1 2 0 0 0,-1 2 0 0 0,61 6-1 0 0,128 24-58 0 0,-110-12-64 0 0,753 30 581 0 0,-591-34-423 0 0,320 56 1 0 0,-592-68-200 0 0,291 47 25 0 0,134 17 208 0 0,-290-47-121 0 0,0 7 0 0 0,240 75 1 0 0,-336-84-126 0 0,-1 3 1 0 0,-1 1 0 0 0,-1 3-1 0 0,-1 1 1 0 0,-2 2 0 0 0,0 2-1 0 0,41 38 1 0 0,-62-49 8 0 0,-1 1-1 0 0,-1 1 1 0 0,0 1 0 0 0,-2 1 0 0 0,-1 0-1 0 0,0 1 1 0 0,-1 0 0 0 0,-2 1 0 0 0,0 1-1 0 0,-2 0 1 0 0,0 0 0 0 0,-2 1 0 0 0,0 0-1 0 0,-2 1 1 0 0,-1-1 0 0 0,-1 1 0 0 0,1 47-1 0 0,-5-60 23 0 0,1 74 304 0 0,-18 136 0 0 0,12-194-198 0 0,-12 43-1 0 0,15-64-380 0 0,-4 16 721 0 0</inkml:trace>
+  <inkml:trace contextRef="#ctx0" brushRef="#br0">1 64 5617 0 0,'9'-20'974'0'0,"-9"20"-962"0"0,0 0 1 0 0,1 0 0 0 0,-1 1-1 0 0,0-1 1 0 0,1 0 0 0 0,-1 1-1 0 0,1-1 1 0 0,-1 0 0 0 0,0 1-1 0 0,0-1 1 0 0,0 0 0 0 0,0 0-1 0 0,0 0 1 0 0,1 1 0 0 0,-1-1-1 0 0,0 1 1 0 0,0-1 0 0 0,0 0-1 0 0,0 0 1 0 0,0 1 0 0 0,1-1-1 0 0,-1 1 1 0 0,0-1 0 0 0,0 0-1 0 0,0 0 1 0 0,0 1 0 0 0,0-1-1 0 0,0 0 1 0 0,-1 1 0 0 0,1 0-1 0 0,2 49-33 0 0,-2-43 19 0 0,1 28-15 0 0,3-1 0 0 0,13 49 0 0 0,1 16 2 0 0,6 6 8 0 0,-5-26 44 0 0,-14-57 18 0 0,3 26 2644 0 0,-19-63-2384 0 0,8 12-262 0 0,-4-12 18 0 0,0 0-1 0 0,1 0 1 0 0,1 0-1 0 0,1-1 1 0 0,-4-25-1 0 0,4 20-43 0 0,-7-39 41 0 0,3 0 0 0 0,1-81 0 0 0,10 55-47 0 0,-3 79-25 0 0,1 1 0 0 0,-1 0-1 0 0,2 0 1 0 0,-1 0 0 0 0,2-6 0 0 0,-3 12-2 0 0,0-4-1 0 0,1 1 1 0 0,0-1-1 0 0,1 1 1 0 0,-2-1 0 0 0,2 1-1 0 0,-1-1 1 0 0,4-4-1 0 0,-4 8-13 0 0,22-26-246 0 0,-18 24 205 0 0,0 0 1 0 0,2 1 0 0 0,-2-1 0 0 0,1 1 0 0 0,1 0 0 0 0,-1 0-1 0 0,-1 1 1 0 0,1-1 0 0 0,1 1 0 0 0,-1 0 0 0 0,0 1 0 0 0,0-1-1 0 0,0 1 1 0 0,8 2 0 0 0,-4-1-39 0 0,1 1 1 0 0,-1 0-1 0 0,0 0 0 0 0,0 1 1 0 0,0 0-1 0 0,0 1 0 0 0,12 8 0 0 0,-19-11 67 0 0,1 0-1 0 0,-1 0 1 0 0,1 0 0 0 0,-1 0-1 0 0,0 1 1 0 0,0-1-1 0 0,-1 1 1 0 0,1 0-1 0 0,0 0 1 0 0,-2 0-1 0 0,2 0 1 0 0,-1 0-1 0 0,-1 0 1 0 0,1 1-1 0 0,0-1 1 0 0,-1 0-1 0 0,1 1 1 0 0,-2-1-1 0 0,1 1 1 0 0,1 4-1 0 0,-3-6 33 0 0,1 0-1 0 0,-1-1 1 0 0,0 0-1 0 0,1 2 1 0 0,-1-2-1 0 0,0 0 1 0 0,0 2-1 0 0,1-2 1 0 0,-2 0-1 0 0,1 1 1 0 0,0-1-1 0 0,0 1 1 0 0,-1-1-1 0 0,1 0 1 0 0,-1 0-1 0 0,1 1 1 0 0,-1-2-1 0 0,1 1 1 0 0,-3 2-1 0 0,-35 15 87 0 0,36-17-74 0 0,-14 6 183 0 0,0-2 1 0 0,0 1 0 0 0,-27 4-1 0 0,42-9-359 0 0,-8-1-582 0 0</inkml:trace>
 </inkml:ink>
 </file>
 
@@ -5212,15 +5214,15 @@
           <inkml:channelProperty channel="OE" name="resolution" value="1000" units="1/deg"/>
         </inkml:channelProperties>
       </inkml:inkSource>
-      <inkml:timestamp xml:id="ts0" timeString="2025-10-20T05:01:13.385"/>
+      <inkml:timestamp xml:id="ts0" timeString="2025-10-19T19:36:34.749"/>
     </inkml:context>
     <inkml:brush xml:id="br0">
       <inkml:brushProperty name="width" value="0.2" units="cm"/>
       <inkml:brushProperty name="height" value="0.2" units="cm"/>
-      <inkml:brushProperty name="color" value="#FFC114"/>
+      <inkml:brushProperty name="color" value="#66CC00"/>
     </inkml:brush>
   </inkml:definitions>
-  <inkml:trace contextRef="#ctx0" brushRef="#br0">4512 28 5224 0 0,'-2'-27'70'0'0,"6"59"-60"0"0,-3 1-1 0 0,0 1 1 0 0,-5 33-1 0 0,1 18 65 0 0,3-58-69 0 0,2 33 74 0 0,-4 0 1 0 0,-2 0 0 0 0,-16 84-1 0 0,18-136-7 0 0,-1-1 0 0 0,1 1-1 0 0,-1 0 1 0 0,-1-1 0 0 0,1 0-1 0 0,-1 1 1 0 0,0-1 0 0 0,-1-1-1 0 0,0 1 1 0 0,0-1 0 0 0,0 0 0 0 0,-1 0-1 0 0,0 0 1 0 0,0-1 0 0 0,0 0-1 0 0,-1 0 1 0 0,0 0 0 0 0,0-1-1 0 0,0 0 1 0 0,0-1 0 0 0,-1 0 0 0 0,1 0-1 0 0,-1 0 1 0 0,0-1 0 0 0,-8 2-1 0 0,-40 8 183 0 0,-1-3-1 0 0,0-2 0 0 0,0-3 0 0 0,0-2 1 0 0,0-2-1 0 0,-77-11 0 0 0,-48-18 420 0 0,-91-7-482 0 0,105 24-146 0 0,-80-3-51 0 0,-289-6 13 0 0,266 7 9 0 0,179 10-5 0 0,-31-3-20 0 0,-213 16 0 0 0,270-2 0 0 0,-245 33-14 0 0,227-25-9 0 0,-138 44 1 0 0,171-42 23 0 0,-186 68-25 0 0,187-63 11 0 0,1 1-1 0 0,-75 49 1 0 0,38-13-14 0 0,-90 80-1 0 0,161-124 16 0 0,1 0 1 0 0,1 1-1 0 0,0 1 0 0 0,1 0 1 0 0,1 0-1 0 0,0 1 0 0 0,-11 30 1 0 0,9-14-1 0 0,3 0 1 0 0,1 2-1 0 0,1-1 1 0 0,2 1-1 0 0,2 0 1 0 0,1 0-1 0 0,2 53 1 0 0,-4 266-24 0 0,3-220 51 0 0,3-114 19 0 0,0-17 28 0 0,-1 0-1 0 0,1 0 0 0 0,-1 0 0 0 0,0 0 1 0 0,-1 0-1 0 0,1 0 0 0 0,-2 7 1 0 0,1-10-38 0 0,13-31-4979 0 0,1 8 1670 0 0</inkml:trace>
+  <inkml:trace contextRef="#ctx0" brushRef="#br0">0 86 5569 0 0,'1'-14'415'0'0,"0"0"1"0"0,2 0-1 0 0,-1 0 1 0 0,6-14-1 0 0,-8 27-102 0 0,40 172-431 0 0,13 27 80 0 0,-50-187 39 0 0,7 25 29 0 0,-3 0 0 0 0,-1 0 0 0 0,1 52 0 0 0,-3-75 94 0 0</inkml:trace>
 </inkml:ink>
 </file>
 
@@ -5244,15 +5246,15 @@
           <inkml:channelProperty channel="OE" name="resolution" value="1000" units="1/deg"/>
         </inkml:channelProperties>
       </inkml:inkSource>
-      <inkml:timestamp xml:id="ts0" timeString="2025-10-20T05:01:15.147"/>
+      <inkml:timestamp xml:id="ts0" timeString="2025-10-19T19:36:35.503"/>
     </inkml:context>
     <inkml:brush xml:id="br0">
       <inkml:brushProperty name="width" value="0.2" units="cm"/>
       <inkml:brushProperty name="height" value="0.2" units="cm"/>
-      <inkml:brushProperty name="color" value="#FFC114"/>
+      <inkml:brushProperty name="color" value="#66CC00"/>
     </inkml:brush>
   </inkml:definitions>
-  <inkml:trace contextRef="#ctx0" brushRef="#br0">216 14 6841 0 0,'0'0'-336'0'0,"-1"0"274"0"0,1-1 1 0 0,0 0-1 0 0,0 1 0 0 0,0-1 0 0 0,0 0 0 0 0,-1 1 1 0 0,1-1-1 0 0,0 0 0 0 0,-1 1 0 0 0,1-1 0 0 0,0 1 1 0 0,-1-1-1 0 0,1 1 0 0 0,-1-1 0 0 0,1 1 0 0 0,-1-1 1 0 0,1 1-1 0 0,-1-1 0 0 0,1 1 0 0 0,-1-1 0 0 0,0 1 1 0 0,1 0-1 0 0,-1 0 0 0 0,1-1 0 0 0,-1 1 0 0 0,0 0 1 0 0,1 0-1 0 0,-1 0 0 0 0,-1-1 0 0 0,-7 12 75 0 0,0 0 1 0 0,1 0-1 0 0,0 1 0 0 0,1 0 0 0 0,0 0 1 0 0,1 1-1 0 0,1 0 0 0 0,0 0 0 0 0,-6 21 1 0 0,-20 48 173 0 0,25-67-136 0 0,0 0-1 0 0,1 1 0 0 0,-3 23 1 0 0,-2 5 48 0 0,2-7 3 0 0,1 2 0 0 0,2-1-1 0 0,2 1 1 0 0,2 0-1 0 0,5 62 1 0 0,5 37 296 0 0,-6 0 1 0 0,-23 213-1 0 0,12-292-197 0 0,1-9 294 0 0,0 55 1 0 0,5-94-514 0 0,-6-38-3746 0 0,10 2 1133 0 0</inkml:trace>
+  <inkml:trace contextRef="#ctx0" brushRef="#br0">1 204 5240 0 0,'30'-1'-1182'0'0,"-29"1"1153"0"0,13-1 36 0 0,0-1-1 0 0,0 0 1 0 0,18-6-1 0 0,-26 6 91 0 0,-2 0 1 0 0,1 0-1 0 0,0-1 0 0 0,-1 1 0 0 0,0 0 0 0 0,1-1 0 0 0,-1 0 0 0 0,0-1 0 0 0,-1 1 0 0 0,1 0 1 0 0,0-1-1 0 0,4-7 0 0 0,-1 1 181 0 0,0 0 0 0 0,-1-2-1 0 0,8-14 1 0 0,-13 22-111 0 0,1-1 0 0 0,0 1-1 0 0,-1 0 1 0 0,0-1-1 0 0,-1 0 1 0 0,1 1 0 0 0,0-1-1 0 0,-1 1 1 0 0,0-1 0 0 0,-1 0-1 0 0,1 0 1 0 0,-2-4-1 0 0,2 8-147 0 0,0-1-1 0 0,-1 2 0 0 0,0-2 0 0 0,1 1 0 0 0,-1 0 0 0 0,1 0 0 0 0,-1 0 0 0 0,0 0 0 0 0,0 0 0 0 0,1 0 0 0 0,-1 0 0 0 0,-1 0 0 0 0,1 0 1 0 0,1 0-1 0 0,-2 0 0 0 0,1 1 0 0 0,1-1 0 0 0,-2 0 0 0 0,0 1 0 0 0,2-1 0 0 0,-2 1 0 0 0,-1-2 0 0 0,0 2-14 0 0,1 0-1 0 0,-2-1 1 0 0,1 1 0 0 0,0 0-1 0 0,0 0 1 0 0,1 0-1 0 0,-1 0 1 0 0,0 1 0 0 0,-1-1-1 0 0,-2 2 1 0 0,0-1-26 0 0,0 1 1 0 0,-1 0 0 0 0,1 1-1 0 0,0-1 1 0 0,1 1-1 0 0,-1 1 1 0 0,0-1 0 0 0,1 1-1 0 0,-6 4 1 0 0,5-2-8 0 0,1 0 0 0 0,-1 0 0 0 0,1 1 1 0 0,0 0-1 0 0,0 0 0 0 0,1 0 0 0 0,1 0 0 0 0,-1 1 1 0 0,1 0-1 0 0,-2 7 0 0 0,4-11 23 0 0,0-1 1 0 0,1 0-1 0 0,0 1 0 0 0,0-2 1 0 0,0 2-1 0 0,0-1 0 0 0,0 0 1 0 0,0 1-1 0 0,1-1 0 0 0,0 0 1 0 0,0 1-1 0 0,-1-2 0 0 0,2 1 1 0 0,0 1-1 0 0,-1-1 0 0 0,1-1 1 0 0,-1 1-1 0 0,2 0 0 0 0,-2 0 1 0 0,1 0-1 0 0,1-1 0 0 0,-1 1 1 0 0,1-1-1 0 0,0 0 0 0 0,-1 0 1 0 0,1 0-1 0 0,6 3 0 0 0,5 2 3 0 0,2 0-1 0 0,0-1 1 0 0,0 0-1 0 0,1-1 1 0 0,-1 0-1 0 0,2-2 1 0 0,29 5-1 0 0,6-4-308 0 0,65-2 0 0 0,31-11-2921 0 0,-77 2 613 0 0</inkml:trace>
 </inkml:ink>
 </file>
 
@@ -5276,15 +5278,15 @@
           <inkml:channelProperty channel="OE" name="resolution" value="1000" units="1/deg"/>
         </inkml:channelProperties>
       </inkml:inkSource>
-      <inkml:timestamp xml:id="ts0" timeString="2025-10-20T05:01:16.669"/>
+      <inkml:timestamp xml:id="ts0" timeString="2025-10-19T19:36:49.696"/>
     </inkml:context>
     <inkml:brush xml:id="br0">
       <inkml:brushProperty name="width" value="0.2" units="cm"/>
       <inkml:brushProperty name="height" value="0.2" units="cm"/>
-      <inkml:brushProperty name="color" value="#FFC114"/>
+      <inkml:brushProperty name="color" value="#66CC00"/>
     </inkml:brush>
   </inkml:definitions>
-  <inkml:trace contextRef="#ctx0" brushRef="#br0">29 3 5993 0 0,'0'0'-209'0'0,"-19"-1"-191"0"0,10 0 417 0 0,12 0 495 0 0,439 4-294 0 0,-286 5-187 0 0,595 36 540 0 0,-558-27-435 0 0,368 28 200 0 0,-459-39-272 0 0,0 4 1 0 0,-1 5-1 0 0,-1 4 0 0 0,167 56 0 0 0,-250-68-71 0 0,-1 1-1 0 0,0 0 0 0 0,-1 1 1 0 0,0 1-1 0 0,0 0 1 0 0,16 16-1 0 0,73 80-40 0 0,-75-75 38 0 0,-11-11-2 0 0,0 1 0 0 0,-2 0 0 0 0,-1 1 1 0 0,0 1-1 0 0,-2 0 0 0 0,0 1 0 0 0,-2 0 1 0 0,-1 1-1 0 0,-1 0 0 0 0,10 41 0 0 0,22 124 93 0 0,10 205 515 0 0,-47-367-532 0 0,-3-18 15 0 0,1 0 0 0 0,-1 0 1 0 0,-1 0-1 0 0,-1 19 0 0 0,0-27-160 0 0</inkml:trace>
+  <inkml:trace contextRef="#ctx0" brushRef="#br0">3683 499 6001 0 0,'0'0'-204'0'0,"9"0"-119"0"0,-6 0 266 0 0,-5-1-273 0 0,-35-9 393 0 0,-1 2 0 0 0,-1 2 0 0 0,1 1-1 0 0,-1 1 1 0 0,0 2 0 0 0,0 1 0 0 0,0 3 0 0 0,-55 7 0 0 0,-3 2 60 0 0,-123 20 177 0 0,146-19-289 0 0,-34 9 31 0 0,-65 31-2 0 0,141-42-52 0 0,0 2 0 0 0,-47 24 1 0 0,26-10 20 0 0,14-5-14 0 0,-1 2 0 0 0,2 2 0 0 0,1 0 0 0 0,-42 40 0 0 0,55-45 14 0 0,-7 4-10 0 0,2 3 0 0 0,1-1-1 0 0,2 3 1 0 0,-36 47 0 0 0,27-23-44 0 0,-52 71 98 0 0,-7 11-32 0 0,29-41 14 0 0,38-51-72 0 0,-25 53-1 0 0,31-55 48 0 0,-47 68 1 0 0,16-39 20 0 0,-4 7-7 0 0,-80 82-1 0 0,105-127-13 0 0,-1-2 0 0 0,0-2 0 0 0,-3-1 0 0 0,-1-1 0 0 0,-71 39 0 0 0,70-46-45 0 0,1 2 0 0 0,1 1 1 0 0,1 1-1 0 0,1 2 0 0 0,2 1 1 0 0,-56 59-1 0 0,57-51 50 0 0,0-3-31 0 0,2 2 1 0 0,-28 44-1 0 0,24-27 2 0 0,13-22 18 0 0,2 0 0 0 0,-26 57 0 0 0,18-11-29 0 0,12-32 44 0 0,-39 78-1 0 0,6-12-7 0 0,4-11-28 0 0,-44 115-30 0 0,63-148 55 0 0,0 4 15 0 0,-28 67-48 0 0,29-83 12 0 0,-16 66 0 0 0,28-83-2 0 0,0 2-6 0 0,2 1 0 0 0,-1 53 0 0 0,-1 1 28 0 0,5-43 58 0 0,3 0 0 0 0,4 52 0 0 0,1-13-5 0 0,-1-47 612 0 0,-2-40-538 0 0,2 21 736 0 0,8 34-780 0 0,-3 0 1 0 0,0 108-1 0 0,-5-36-88 0 0,2-32-32 0 0,9 108-14 0 0,-6-152 49 0 0,3 1-1 0 0,23 71 0 0 0,-17-80-19 0 0,50 124-23 0 0,-51-139 58 0 0,-1 1-63 0 0,2 0 1 0 0,30 42-1 0 0,-38-63 25 0 0,-1 0-1 0 0,1 0 1 0 0,1-1 0 0 0,0 0 0 0 0,0 0-1 0 0,2-1 1 0 0,-2 0 0 0 0,2-1-1 0 0,0 0 1 0 0,0 0 0 0 0,14 5 0 0 0,32 6 11 0 0,2-1-1 0 0,1-3 1 0 0,96 10 0 0 0,-37-6 12 0 0,-40-6 20 0 0,0-3 1 0 0,1-4-1 0 0,0-3 0 0 0,104-10 0 0 0,-27-3-16 0 0,169 8 0 0 0,-282 8-52 0 0,-2 0 0 0 0,1 2 0 0 0,-1 3 0 0 0,0 0 0 0 0,0 3 0 0 0,-1 0 0 0 0,-1 3 0 0 0,73 37 0 0 0,-76-33 22 0 0,66 38-102 0 0,-92-49 102 0 0,1-1 0 0 0,-1 2 0 0 0,-1 0-1 0 0,0 1 1 0 0,0-1 0 0 0,10 15 0 0 0,-12-12 2 0 0,0 0 0 0 0,-1 0 0 0 0,0 1 1 0 0,-1 0-1 0 0,0 0 0 0 0,-1 0 0 0 0,-2 1 0 0 0,1 0 0 0 0,2 26 0 0 0,2 27-3 0 0,4 1-1 0 0,3-2 1 0 0,3 1-1 0 0,3-2 1 0 0,4-1-1 0 0,57 107 1 0 0,-76-160 38 0 0,2 3-5 0 0,1 0-1 0 0,-1 0 0 0 0,2 0 0 0 0,1-1 0 0 0,12 12 0 0 0,-5-10 16 0 0,1-2-1 0 0,1 0 0 0 0,0-1 1 0 0,0-1-1 0 0,40 16 1 0 0,-54-24-24 0 0,31 11 28 0 0,2 0 1 0 0,0-2-1 0 0,1-2 0 0 0,-1-1 0 0 0,79 7 1 0 0,208-5 134 0 0,165-27-105 0 0,-175 3-30 0 0,-192 8-24 0 0,442-1 51 0 0,-170 6-35 0 0,223-3 23 0 0,-285-5-22 0 0,30-1-58 0 0,-225 7 25 0 0,144 14-1 0 0,-84 9 72 0 0,-152-16 923 0 0,-45-5-774 0 0,11 2 91 0 0,-7-2-175 0 0,-6-1-74 0 0,1 1-1 0 0,0 0 1 0 0,0-1-1 0 0,0 1 1 0 0,0 0-1 0 0,0 0 1 0 0,0 0-1 0 0,-1 0 1 0 0,1 0-1 0 0,1 0 1 0 0,-2 0-1 0 0,1 0 1 0 0,0 1-1 0 0,0-1 0 0 0,0 0 1 0 0,-1 1-1 0 0,1-1 1 0 0,1 0-1 0 0,-2 0 1 0 0,1 1-1 0 0,0 0 1 0 0,-1-1-1 0 0,1 1 1 0 0,0-1-1 0 0,-1 1 1 0 0,2 0-1 0 0,-1 1-72 0 0,82 5-65 0 0,-38-2 71 0 0,673 110-686 0 0,-593-91 639 0 0,29 12-132 0 0,5 2 121 0 0,56 14 64 0 0,-106-23 7 0 0,-11-1-15 0 0,57 12-17 0 0,-68-22 33 0 0,-84-16-2 0 0,16 4 1 0 0,2 0 0 0 0,34 6 0 0 0,-18-5-1 0 0,142 42-142 0 0,-69-18 31 0 0,103 23-20 0 0,-31-11 135 0 0,-88-23-1 0 0,24 14-40 0 0,-97-28 34 0 0,-1 0-30 0 0,27 12 18 0 0,-21-10 20 0 0,1 0 0 0 0,33 5 0 0 0,6 1 8 0 0,-41-9 5 0 0,54 4-1 0 0,-8-2 5 0 0,64-1-28 0 0,71-1 79 0 0,-131-6-54 0 0,180-11-6 0 0,-145 3-10 0 0,-48 6-17 0 0,39-1 11 0 0,61-4 11 0 0,224-18 1 0 0,-87-2-43 0 0,-238 20 52 0 0,112-26 1 0 0,-112 20-12 0 0,3-2-8 0 0,81-13-9 0 0,-76 18-7 0 0,29-3-16 0 0,-26 10 14 0 0,194-8-17 0 0,-240 12 36 0 0,453-6-43 0 0,-188 8 8 0 0,-99 2 18 0 0,40 1-30 0 0,119-2 14 0 0,-246-9 64 0 0,0-5 0 0 0,0-3-1 0 0,-1-4 1 0 0,112-34 0 0 0,-195 45 94 0 0,1-1 0 0 0,-1-1 0 0 0,-1-1-1 0 0,1-1 1 0 0,21-14 0 0 0,89-73 405 0 0,-57 42-422 0 0,58-40 8 0 0,65-47-54 0 0,-149 103 79 0 0,81-83 1 0 0,-37 5 403 0 0,-15 14-42 0 0,-58 83-432 0 0,1 1 0 0 0,1 1 0 0 0,31-23-1 0 0,75-42 14 0 0,-100 67-55 0 0,-7 2 78 0 0,0 0 0 0 0,-1-1 1 0 0,-1-1-1 0 0,0-1 0 0 0,-2 0 1 0 0,0 0-1 0 0,20-34 0 0 0,74-152 875 0 0,-80 135-680 0 0,-4 0 1 0 0,-3-1-1 0 0,20-118 0 0 0,-20 32-28 0 0,5-29-71 0 0,-9 20 90 0 0,-9 77-22 0 0,30-130 0 0 0,34-21-75 0 0,-39 136-2 0 0,-4-21 161 0 0,-10 37-245 0 0,46-157 199 0 0,-7-43 89 0 0,-21 87-212 0 0,-18 75 315 0 0,9-203 1 0 0,-26 223-352 0 0,15-559 49 0 0,-12 523-319 0 0,-4-23 83 0 0,4-36 131 0 0,-2 118 193 0 0,-10-121 0 0 0,-1 137-371 0 0,-2 0 0 0 0,-5 2 0 0 0,-2-1 0 0 0,-28-70 0 0 0,17 73-157 0 0,-3 1-1 0 0,-57-89 1 0 0,-34-20-131 0 0,97 142 247 0 0,-2-1 0 0 0,-2 3 0 0 0,0-1 0 0 0,-52-35 0 0 0,-137-77-515 0 0,103 70 253 0 0,63 39 211 0 0,-2 2 1 0 0,-1 1-1 0 0,-1 3 1 0 0,-105-31-1 0 0,131 47 82 0 0,1 3 0 0 0,-1 0 0 0 0,0 1 0 0 0,0 2 0 0 0,-47 0 0 0 0,-143 20-330 0 0,68-2 340 0 0,-34 0 44 0 0,66-4 62 0 0,-197-2-1 0 0,206-19 22 0 0,0-4 0 0 0,-113-28 0 0 0,203 37 4 0 0,0-1-1 0 0,1 0 1 0 0,-1-2 0 0 0,-33-15 0 0 0,39 14-16 0 0,1 0 0 0 0,0 0-1 0 0,1 0 1 0 0,-13-13 0 0 0,13 13-44 0 0,0-1 1 0 0,0 1 0 0 0,-1 0 0 0 0,0 1-1 0 0,-1 0 1 0 0,-14-5 0 0 0,-87-28-72 0 0,62 23 51 0 0,-345-98-225 0 0,209 76 166 0 0,-240-24 1 0 0,367 58 31 0 0,-2 3 1 0 0,-105 9 0 0 0,-120 30-78 0 0,195-24 145 0 0,-286 20-12 0 0,198-21 10 0 0,88-5-4 0 0,-565 49 43 0 0,33-29-21 0 0,466-25-3 0 0,-582 12 2 0 0,-118-7-5 0 0,822-7-15 0 0,-265-9 6 0 0,0-1-1 0 0,-102-6 29 0 0,107 0-24 0 0,-84 15-57 0 0,210 2 30 0 0,-432 23-37 0 0,446-16 60 0 0,-401 36-72 0 0,373-30 56 0 0,-44 5 27 0 0,-166 32-55 0 0,86-10-7 0 0,-46 23-7 0 0,178-27 67 0 0,-51 4-57 0 0,62-13 21 0 0,25-5 45 0 0,131-21-10 0 0,-4 0-2 0 0,-5-1 26 0 0,-19 3-5 0 0,35-4-24 0 0,0 3-4 0 0,-29-6 72 0 0,12 1-43 0 0,1 0-33 0 0,0-2 1 0 0,-34-9-1 0 0,33 10-27 0 0,0 0 0 0 0,-42 0 0 0 0,43 1 20 0 0,-39-1 37 0 0,52 3-29 0 0,-15-3 29 0 0,-25-4 8 0 0,44 7-45 0 0,-45-7 85 0 0,45 7-75 0 0,-6-2 158 0 0</inkml:trace>
 </inkml:ink>
 </file>
 
@@ -5308,15 +5310,15 @@
           <inkml:channelProperty channel="OE" name="resolution" value="1000" units="1/deg"/>
         </inkml:channelProperties>
       </inkml:inkSource>
-      <inkml:timestamp xml:id="ts0" timeString="2025-10-20T05:01:18.630"/>
+      <inkml:timestamp xml:id="ts0" timeString="2025-10-19T19:36:51.517"/>
     </inkml:context>
     <inkml:brush xml:id="br0">
       <inkml:brushProperty name="width" value="0.2" units="cm"/>
       <inkml:brushProperty name="height" value="0.2" units="cm"/>
-      <inkml:brushProperty name="color" value="#FFC114"/>
+      <inkml:brushProperty name="color" value="#66CC00"/>
     </inkml:brush>
   </inkml:definitions>
-  <inkml:trace contextRef="#ctx0" brushRef="#br0">12 3 6121 0 0,'0'0'-216'0'0,"-9"-2"-189"0"0,7 2 423 0 0,8-1 108 0 0,45 4-44 0 0,60 9 0 0 0,511 91 224 0 0,-431-82 227 0 0,235-4-1 0 0,328-52 630 0 0,240 13-1059 0 0,-785 22-104 0 0,313 37-104 0 0,-468-28 72 0 0,0 3 0 0 0,-1 2-1 0 0,0 2 1 0 0,-1 3 0 0 0,-1 2 0 0 0,90 51-1 0 0,-108-54-9 0 0,-1 1-1 0 0,-2 1 0 0 0,37 32 1 0 0,-57-41 28 0 0,-1 0 0 0 0,-1 1 0 0 0,0 0-1 0 0,-1 0 1 0 0,0 1 0 0 0,-1 0 0 0 0,0 0 0 0 0,5 17 0 0 0,10 22 21 0 0,-10-26-13 0 0,-2 0 0 0 0,0 0 1 0 0,-2 1-1 0 0,-1 0 0 0 0,-2 0 1 0 0,0 0-1 0 0,-2 1 0 0 0,-1 38 1 0 0,1 15-2 0 0,21 130 0 0 0,-15-152 53 0 0,-8-57-30 0 0,0 31 91 0 0,1-30 206 0 0</inkml:trace>
+  <inkml:trace contextRef="#ctx0" brushRef="#br0">3 32 6921 0 0,'-2'-31'407'0'0,"2"30"-265"0"0,7 16-422 0 0,63 272 62 0 0,-21-68 212 0 0,-30-139 67 0 0,-12-45 1048 0 0,-23-60-7389 0 0</inkml:trace>
 </inkml:ink>
 </file>
 
@@ -5340,15 +5342,15 @@
           <inkml:channelProperty channel="OE" name="resolution" value="1000" units="1/deg"/>
         </inkml:channelProperties>
       </inkml:inkSource>
-      <inkml:timestamp xml:id="ts0" timeString="2025-10-20T05:01:44.221"/>
+      <inkml:timestamp xml:id="ts0" timeString="2025-10-19T19:36:52.491"/>
     </inkml:context>
     <inkml:brush xml:id="br0">
       <inkml:brushProperty name="width" value="0.2" units="cm"/>
       <inkml:brushProperty name="height" value="0.2" units="cm"/>
-      <inkml:brushProperty name="color" value="#FFC114"/>
+      <inkml:brushProperty name="color" value="#66CC00"/>
     </inkml:brush>
   </inkml:definitions>
-  <inkml:trace contextRef="#ctx0" brushRef="#br0">2401 68 1916 0 0,'-8'-32'2513'0'0,"5"14"-1502"0"0,3 18-907 0 0,0-1 0 0 0,0 0 0 0 0,0 0 0 0 0,0 0 0 0 0,0 1 0 0 0,0-1 0 0 0,-1 0 0 0 0,1 0 0 0 0,0 0 0 0 0,-1 1 0 0 0,1-1 0 0 0,0 0 0 0 0,-1 1 0 0 0,1-1 0 0 0,-1 0 0 0 0,1 1 0 0 0,-1-1 0 0 0,1 1 0 0 0,-1-1 0 0 0,0 0 0 0 0,1 1 0 0 0,-1 0 0 0 0,0-1 0 0 0,1 1 0 0 0,-2-1 0 0 0,-1 3-97 0 0,0 0 1 0 0,0 1-1 0 0,1-1 0 0 0,-1 1 0 0 0,0 0 1 0 0,1 0-1 0 0,0-1 0 0 0,0 1 0 0 0,0 1 1 0 0,0-1-1 0 0,0 0 0 0 0,1 1 0 0 0,-3 4 1 0 0,1 0 15 0 0,-10 19 31 0 0,1 1 1 0 0,2 1-1 0 0,0 0 1 0 0,-4 30-1 0 0,11-49-50 0 0,-4 34 26 0 0,1-1-1 0 0,2 2 1 0 0,2 65 0 0 0,2-98-25 0 0,6 48 7 0 0,-5-47-7 0 0,1 0 1 0 0,0 0 0 0 0,2-1-1 0 0,6 21 1 0 0,20 43 0 0 0,-30-74-1 0 0,14 24 12 0 0,-12-19-19 0 0,-1-4 6 0 0,28 71 7 0 0,-6-20 26 0 0,-11-17-34 0 0,-8-18-1 0 0,-4-15 8 0 0,2 5-7 0 0,2 19 4 0 0,1 51 0 0 0,-13 12 17 0 0,5-25-10 0 0,3-64-10 0 0,0 0 0 0 0,-2 18 7 0 0,1-17-8 0 0,1-2-2 0 0,-2 6 2 0 0,2-6 9 0 0,-1 1-7 0 0,0-1-1 0 0,0 0 0 0 0,0 1 1 0 0,0-1-1 0 0,0 0 0 0 0,0 0 1 0 0,0 0-1 0 0,0 0 0 0 0,-1 0 0 0 0,1 0 1 0 0,0 0-1 0 0,0 0 0 0 0,-1 0 1 0 0,1-1-1 0 0,-1 1 0 0 0,1 0 1 0 0,-1-1-1 0 0,1 1 0 0 0,-1-1 0 0 0,-1 1 1 0 0,-41 7 70 0 0,-70-15 131 0 0,101 5-164 0 0,0 0 0 0 0,0-1 0 0 0,0 0 0 0 0,0-1 0 0 0,1 0 0 0 0,-20-10 0 0 0,14 7-25 0 0,1 1 0 0 0,-1 1 0 0 0,-30-5 0 0 0,39 8-10 0 0,-96-28 37 0 0,58 19-42 0 0,-2 1 1 0 0,-66-4 0 0 0,52 9-1 0 0,48 3 1 0 0,-102-1-8 0 0,57 1-10 0 0,37 2 14 0 0,-74 2 23 0 0,64-2-29 0 0,-49 6-1 0 0,-45 8 9 0 0,28 1-7 0 0,91-14 7 0 0,-279 42 17 0 0,154-24-2 0 0,67-11-8 0 0,-12 0-7 0 0,-42 7 22 0 0,17-5-11 0 0,85-6-12 0 0,5-2 0 0 0,1 0 0 0 0,-1-1 0 0 0,1 0 0 0 0,-17-1 0 0 0,-20 2 0 0 0,46-2-5 0 0,-7 0-110 0 0,6 0-301 0 0,40-11-4289 0 0,-17 7 2049 0 0</inkml:trace>
+  <inkml:trace contextRef="#ctx0" brushRef="#br0">9 102 5493 0 0,'0'0'-259'0'0,"-8"-12"2081"0"0,10 9-1788 0 0,0 0 1 0 0,0 0-1 0 0,1 1 0 0 0,0-1 1 0 0,-1 1-1 0 0,1 0 0 0 0,0 0 1 0 0,0 0-1 0 0,0 1 0 0 0,1-2 1 0 0,-1 2-1 0 0,0 0 0 0 0,4-2 1 0 0,54-18-101 0 0,-50 19 86 0 0,16-7-21 0 0,50-13-20 0 0,-69 21-1 0 0,-1-1 0 0 0,1 2-1 0 0,0-1 1 0 0,0 1-1 0 0,0 0 1 0 0,-1 0 0 0 0,1 1-1 0 0,12 2 1 0 0,-9 0-3 0 0,0 1 0 0 0,0 0 1 0 0,-1 0-1 0 0,1 1 0 0 0,-1 1 0 0 0,0-1 1 0 0,0 2-1 0 0,-1-1 0 0 0,0 0 0 0 0,-1 2 1 0 0,1-1-1 0 0,-2 1 0 0 0,13 14 0 0 0,-19-20 25 0 0,0-1-1 0 0,0 0 1 0 0,0 0-1 0 0,0 1 0 0 0,-1-1 1 0 0,1 1-1 0 0,0-1 1 0 0,0 0-1 0 0,-1 1 1 0 0,0-1-1 0 0,1 1 1 0 0,-1-1-1 0 0,0 0 0 0 0,1 1 1 0 0,-1-1-1 0 0,0 1 1 0 0,0-1-1 0 0,0 0 1 0 0,0 1-1 0 0,-1-1 1 0 0,1 1-1 0 0,-1 0 0 0 0,1-1 1 0 0,-1 2-1 0 0,-1-1 7 0 0,1 1-1 0 0,-1-1 1 0 0,0 0 0 0 0,0 0-1 0 0,0 0 1 0 0,0 1-1 0 0,-1-1 1 0 0,1-1-1 0 0,-1 1 1 0 0,1 0-1 0 0,-6 1 1 0 0,-6 3 26 0 0,0 0 0 0 0,-1-1-1 0 0,-26 6 1 0 0,-153 23 282 0 0,141-25 93 0 0,31-7-4341 0 0</inkml:trace>
 </inkml:ink>
 </file>
 
@@ -5372,15 +5374,15 @@
           <inkml:channelProperty channel="OE" name="resolution" value="1000" units="1/deg"/>
         </inkml:channelProperties>
       </inkml:inkSource>
-      <inkml:timestamp xml:id="ts0" timeString="2025-10-20T05:01:48.224"/>
+      <inkml:timestamp xml:id="ts0" timeString="2025-10-19T19:36:53.401"/>
     </inkml:context>
     <inkml:brush xml:id="br0">
       <inkml:brushProperty name="width" value="0.2" units="cm"/>
       <inkml:brushProperty name="height" value="0.2" units="cm"/>
-      <inkml:brushProperty name="color" value="#FFC114"/>
+      <inkml:brushProperty name="color" value="#66CC00"/>
     </inkml:brush>
   </inkml:definitions>
-  <inkml:trace contextRef="#ctx0" brushRef="#br0">4372 72 6017 0 0,'0'0'-275'0'0,"-3"-1"-385"0"0,165 4 472 0 0,75 2 469 0 0,6 20-74 0 0,88 4-22 0 0,-203-29 41 0 0,186-24 0 0 0,-83 7-84 0 0,-30-13 46 0 0,-199 30-141 0 0,5 0 6 0 0,-1 0-1 0 0,1-1 1 0 0,-1 0 0 0 0,0 0-1 0 0,11-3 1 0 0,-15 3-36 0 0,9-3 303 0 0,-13 0-129 0 0,-27-3-71 0 0,-49-3-65 0 0,-49 3 17 0 0,-160-5-6 0 0,-327 2 30 0 0,262 31-67 0 0,243-12-18 0 0,-131 16 3 0 0,-265-3 212 0 0,42-20 510 0 0,451 1-710 0 0,-19-4 32 0 0,-83 2 59 0 0,111-1-103 0 0,-38-3 56 0 0,-168-7 234 0 0,206 10-297 0 0,0 0 2 0 0,-16 0 3 0 0,-84-2 80 0 0,-18 0 149 0 0,118 1-213 0 0,-25 1 45 0 0,-203-2 88 0 0,181 2-149 0 0,-99 5 1 0 0,-240 2-7 0 0,350-5 0 0 0,-2-1 7 0 0,-313-4 36 0 0,236-1-61 0 0,51 3 28 0 0,-98-4 10 0 0,73 1-44 0 0,89 4 24 0 0,-19 0 4 0 0,-20-3-22 0 0,33 2 9 0 0,-59 2-3 0 0,9-3 3 0 0,-108 7 0 0 0,126-3 5 0 0,-78 0 1 0 0,66 1 8 0 0,31-3-11 0 0,-83 7-13 0 0,102-7 10 0 0,-22 3-16 0 0,10-1 13 0 0,0 1 0 0 0,-61 9-17 0 0,73-12 13 0 0,-11 3-21 0 0,-3 3 24 0 0,11-2-2 0 0,-14 9-14 0 0,-36 17 46 0 0,46-24-18 0 0,-5 0-8 0 0,10-3-4 0 0,-2 4-4 0 0,6-6 15 0 0,-1 0 0 0 0,-5 2-8 0 0,4-2 0 0 0,1 0 0 0 0,-1 0 0 0 0,1 1 0 0 0,-1-1 0 0 0,1 0 0 0 0,-1 1 0 0 0,1-1 0 0 0,0 1 0 0 0,0 0 0 0 0,0 0 0 0 0,0 0 0 0 0,0 0 0 0 0,0 0 0 0 0,1 1 0 0 0,-1-1 0 0 0,1 0 0 0 0,-2 4 0 0 0,0 0-7 0 0,2-4 12 0 0,-16 32-67 0 0,10-14 49 0 0,6-13 18 0 0,-1 4-6 0 0,2-8 2 0 0,-1 1-1 0 0,1-1 1 0 0,0 1-1 0 0,0-1 0 0 0,0 0 1 0 0,0 1-1 0 0,0-1 1 0 0,1 1-1 0 0,0-1 0 0 0,0 0 1 0 0,2 7-1 0 0,40 143 12 0 0,-42-149-7 0 0,1 6-6 0 0,3 7 6 0 0,4 29 4 0 0,-8-43 1 0 0,14 92-6 0 0,-14-91 3 0 0,-1 22 9 0 0,-1-1 0 0 0,-1 1-1 0 0,-1-1 1 0 0,-1 0 0 0 0,-1 0 0 0 0,-12 35 0 0 0,-16 51 7 0 0,21-63 6 0 0,10-28-21 0 0,2-15-3 0 0,0 0 0 0 0,0 0 1 0 0,-1 1-1 0 0,0-1 0 0 0,0 0 1 0 0,0 0-1 0 0,-1 0 0 0 0,0 0 1 0 0,0 0-1 0 0,-2 4 0 0 0,3-7 18 0 0,3-2-74 0 0,-1-1 1 0 0,0 1-1 0 0,1 0 1 0 0,-1-1-1 0 0,0 1 1 0 0,0-1-1 0 0,1 1 1 0 0,-1-1-1 0 0,0 1 1 0 0,0-1-1 0 0,0 0 1 0 0,0 0-1 0 0,0 1 1 0 0,0-1-1 0 0,0 0 1 0 0,0 0-1 0 0,0 0 0 0 0,0 0 1 0 0,1-2-1 0 0,38-34-1065 0 0,-37 34 947 0 0,47-44-2288 0 0,12-7-663 0 0</inkml:trace>
+  <inkml:trace contextRef="#ctx0" brushRef="#br0">111 3 5144 0 0,'0'0'-129'0'0,"4"-2"102"0"0,-8 1 662 0 0,-20 5-633 0 0,21-4-2 0 0,-1 2 1 0 0,1-1-1 0 0,0 0 0 0 0,0 0 1 0 0,0 1-1 0 0,1 0 1 0 0,-1-1-1 0 0,-4 4 1 0 0,5-4-6 0 0,-2 2-6 0 0,-1 0 1 0 0,1 0 0 0 0,1 0-1 0 0,-1 1 1 0 0,1-1-1 0 0,-1 1 1 0 0,1 0-1 0 0,-1 0 1 0 0,2 0 0 0 0,-1 0-1 0 0,1 0 1 0 0,-1 1-1 0 0,2 0 1 0 0,-2-1-1 0 0,2 1 1 0 0,0-1 0 0 0,0 1-1 0 0,0 0 1 0 0,0-1-1 0 0,1 1 1 0 0,0 9 0 0 0,1-10 14 0 0,0 1 0 0 0,0 0 0 0 0,0-1 0 0 0,1 1 0 0 0,0-1 0 0 0,-1 0 0 0 0,2 0 0 0 0,-1 1 0 0 0,1-2 0 0 0,-1 1 0 0 0,2 0 0 0 0,-1 0 0 0 0,1 0 0 0 0,-1-2 0 0 0,1 2 1 0 0,-1-1-1 0 0,1 0 0 0 0,0-1 0 0 0,1 1 0 0 0,7 4 0 0 0,-2-2 57 0 0,1-1 0 0 0,0 0 1 0 0,-1 0-1 0 0,1-1 0 0 0,0 0 0 0 0,1-1 1 0 0,0 0-1 0 0,-1 0 0 0 0,20-1 0 0 0,-26-1 1 0 0,-1-1 1 0 0,1 1-1 0 0,-1 0 0 0 0,1-1 0 0 0,0-1 0 0 0,-1 2 1 0 0,0-2-1 0 0,0 1 0 0 0,1-1 0 0 0,-1 0 0 0 0,0 0 1 0 0,-1 0-1 0 0,1 0 0 0 0,0-1 0 0 0,0 0 0 0 0,-1 1 0 0 0,0-1 1 0 0,1 0-1 0 0,-1 0 0 0 0,0 0 0 0 0,0 0 0 0 0,-1-1 1 0 0,1 1-1 0 0,-1-2 0 0 0,-1 2 0 0 0,4-8 0 0 0,-2 6 41 0 0,0-1 1 0 0,-2 0-1 0 0,1 0 0 0 0,-1 0 0 0 0,0 0 0 0 0,0 0 0 0 0,0 0 0 0 0,-1 0 0 0 0,-1-11 0 0 0,0 13-62 0 0,0 0 0 0 0,0 1 0 0 0,-1-1 0 0 0,1 1 0 0 0,-1-1 0 0 0,0 0 0 0 0,0 1 0 0 0,0 0 0 0 0,-1 0 0 0 0,1 0 0 0 0,-1 0 0 0 0,1 0-1 0 0,-1 0 1 0 0,-1 1 0 0 0,1-1 0 0 0,-7-4 0 0 0,0 2-22 0 0,0 0-1 0 0,0 1 0 0 0,-1 1 1 0 0,0-1-1 0 0,0 1 1 0 0,0 1-1 0 0,0-1 1 0 0,0 2-1 0 0,0 0 1 0 0,-14 0-1 0 0,-11-3-14 0 0,-8 4 53 0 0,15 2-6192 0 0</inkml:trace>
 </inkml:ink>
 </file>
 
@@ -5404,15 +5406,15 @@
           <inkml:channelProperty channel="OE" name="resolution" value="1000" units="1/deg"/>
         </inkml:channelProperties>
       </inkml:inkSource>
-      <inkml:timestamp xml:id="ts0" timeString="2025-10-20T05:01:53.299"/>
+      <inkml:timestamp xml:id="ts0" timeString="2025-10-19T19:36:54.650"/>
     </inkml:context>
     <inkml:brush xml:id="br0">
       <inkml:brushProperty name="width" value="0.2" units="cm"/>
       <inkml:brushProperty name="height" value="0.2" units="cm"/>
-      <inkml:brushProperty name="color" value="#FFC114"/>
+      <inkml:brushProperty name="color" value="#66CC00"/>
     </inkml:brush>
   </inkml:definitions>
-  <inkml:trace contextRef="#ctx0" brushRef="#br0">3 22 6569 0 0,'0'-1'-17'0'0,"-1"0"-1"0"0,1 1 1 0 0,0-1 0 0 0,-1 0 0 0 0,1 0 0 0 0,0 0 0 0 0,0 0 0 0 0,0 0 0 0 0,0 0 0 0 0,0 0 0 0 0,0 0 0 0 0,0 0 0 0 0,0 0 0 0 0,0 0 0 0 0,1 0 0 0 0,-1 0-1 0 0,0 0 1 0 0,0 0 0 0 0,1-1 0 0 0,32 1 160 0 0,1 1-1 0 0,-1 2 1 0 0,64 11 0 0 0,16 1-76 0 0,17-7 308 0 0,-126-7-357 0 0,45 5 70 0 0,31 9 41 0 0,1-4-1 0 0,107 1 1 0 0,-59-3 172 0 0,-77-4-272 0 0,108 3 22 0 0,-116-5 15 0 0,67-7 0 0 0,-22 1-18 0 0,137-9 42 0 0,-131 6-40 0 0,-63 5-26 0 0,12 2-12 0 0,167 5 28 0 0,-154-5-33 0 0,99 0-4 0 0,-76 2-6 0 0,4 1 1 0 0,26 6 56 0 0,150-7-1 0 0,-127-4-29 0 0,101 5 24 0 0,328 4 220 0 0,-192 9-237 0 0,-236-7 14 0 0,330 5-63 0 0,-170-6 69 0 0,-227-8-45 0 0,147 3-9 0 0,-90-6 7 0 0,63 4-12 0 0,-22 0 43 0 0,-54-3-21 0 0,-103 2-12 0 0,32-3-12 0 0,56 2 0 0 0,110-5 26 0 0,-183 4-16 0 0,24-1-2 0 0,1 2-1 0 0,80 9 0 0 0,-42-7 1 0 0,-84-1 8 0 0,2 0-3 0 0,78-3 14 0 0,-23 3-25 0 0,8 3 5 0 0,-17-3 5 0 0,-43 0-8 0 0,11 1-10 0 0,26 3-3 0 0,-32-1 2 0 0,0 1-1 0 0,0 0 0 0 0,-1 0 1 0 0,1 1-1 0 0,-1 1 0 0 0,0 0 1 0 0,13 10-1 0 0,2-1 4 0 0,-23-13 4 0 0,28 25-62 0 0,-28-25 68 0 0,0 0 1 0 0,-1 1 0 0 0,1-1-1 0 0,-1 1 1 0 0,1-1-1 0 0,-1 1 1 0 0,0 0-1 0 0,0 0 1 0 0,0 0 0 0 0,0 0-1 0 0,-1 0 1 0 0,1 0-1 0 0,-1 0 1 0 0,2 7 0 0 0,3 5-3 0 0,1 2 5 0 0,14 18 53 0 0,-9-19-42 0 0,-10-13-14 0 0,11 25 10 0 0,-3 27-5 0 0,-9-53-3 0 0,-10 42 47 0 0,-26 56 53 0 0,21-45-49 0 0,-38 94 1 0 0,40-118-44 0 0,1 0 0 0 0,2 1 0 0 0,1 1 0 0 0,1-1 1 0 0,-4 67-1 0 0,21-24 49 0 0,-1-20-39 0 0,-7-40 3 0 0,0 1 1 0 0,1-1-1 0 0,1 0 1 0 0,1 0 0 0 0,0 0-1 0 0,9 18 1 0 0,-13-31-11 0 0,2 8 1873 0 0,5-26-1423 0 0,6-31-96 0 0,-1-9-75 0 0,-2 0-1 0 0,-2-1 1 0 0,2-84-1 0 0,-27-63 76 0 0,7 131-143 0 0,7 10-166 0 0,3 0 1 0 0,14-102 0 0 0,-9 136-61 0 0,-4 19 3 0 0,0 0 0 0 0,0-1 0 0 0,-1 1 1 0 0,-1-17-1 0 0,9-89 65 0 0,-9 114-22 0 0,17-21-102 0 0,-12 16 264 0 0</inkml:trace>
+  <inkml:trace contextRef="#ctx0" brushRef="#br0">26 93 4792 0 0,'-13'-28'551'0'0,"12"26"-341"0"0,-5-7 951 0 0,2 4-542 0 0,2 6-668 0 0,8 30 11 0 0,2 0 1 0 0,1-1-1 0 0,26 59 1 0 0,-12-36 36 0 0,-14-29 3 0 0,17 39 41 0 0,22 93 0 0 0,-47-153 19 0 0,1 6 219 0 0,0 0-1 0 0,0 0 1 0 0,1 0 0 0 0,7 11 2542 0 0,-13-24-2562 0 0,-11-11-136 0 0,3-1 0 0 0,0-1-1 0 0,1 0 1 0 0,0 0 0 0 0,-11-33 0 0 0,-27-99-218 0 0,38 114 40 0 0,1 0 1 0 0,3-1-1 0 0,1 0 1 0 0,0-44-1 0 0,5 77 33 0 0,0 0 0 0 0,0 0 0 0 0,0 1 1 0 0,0-1-1 0 0,1-1 0 0 0,-1 2 0 0 0,1-1 0 0 0,-1 0 0 0 0,1 0 0 0 0,1 0 0 0 0,-2 1 0 0 0,2-1 0 0 0,0 0 1 0 0,-1 1-1 0 0,1 0 0 0 0,2-4 0 0 0,1 3-53 0 0,-1 0 1 0 0,1 0-1 0 0,-1 1 0 0 0,1 0 1 0 0,0-1-1 0 0,0 1 1 0 0,1 1-1 0 0,-2-1 1 0 0,8 0-1 0 0,-3 0-26 0 0,1 0-1 0 0,-1 1 1 0 0,1 1 0 0 0,-1-1-1 0 0,1 2 1 0 0,0-1 0 0 0,-1 0-1 0 0,1 2 1 0 0,-1-1 0 0 0,0 1 0 0 0,1 0-1 0 0,8 5 1 0 0,9 2-105 0 0,-1 2 1 0 0,44 23-1 0 0,-25-5-49 0 0,-42-28 236 0 0,-1 1 0 0 0,0 0 0 0 0,0-1 0 0 0,0 1 1 0 0,0 1-1 0 0,-1-1 0 0 0,1 0 0 0 0,0 0 0 0 0,-1 0 0 0 0,1 0 0 0 0,-2 1 0 0 0,1-1 0 0 0,1 1 0 0 0,-1-1 1 0 0,-1 1-1 0 0,1 2 0 0 0,-1-2 17 0 0,0-2 0 0 0,-1 0 0 0 0,1 1 0 0 0,-1 0 0 0 0,1-1 0 0 0,-1 1 0 0 0,0-1 0 0 0,0 1 0 0 0,0-1 0 0 0,0 0 0 0 0,0 1 0 0 0,0-1 0 0 0,-1 1 0 0 0,1-2 0 0 0,0 2 0 0 0,-1-2 0 0 0,1 2 0 0 0,0-1 0 0 0,-1-1 0 0 0,-2 3 0 0 0,-36 13 48 0 0,35-14-40 0 0,-14 4 91 0 0,-1-1-1 0 0,0 0 1 0 0,0-2 0 0 0,-29 2 0 0 0,-77 0 1495 0 0,123-5-1470 0 0,-4-1 35 0 0,-18-2-668 0 0,56-6-7930 0 0</inkml:trace>
 </inkml:ink>
 </file>
 
@@ -5436,7 +5438,7 @@
           <inkml:channelProperty channel="OE" name="resolution" value="1000" units="1/deg"/>
         </inkml:channelProperties>
       </inkml:inkSource>
-      <inkml:timestamp xml:id="ts0" timeString="2025-10-20T05:28:40.909"/>
+      <inkml:timestamp xml:id="ts0" timeString="2025-10-19T19:36:55.514"/>
     </inkml:context>
     <inkml:brush xml:id="br0">
       <inkml:brushProperty name="width" value="0.2" units="cm"/>
@@ -5444,7 +5446,7 @@
       <inkml:brushProperty name="color" value="#66CC00"/>
     </inkml:brush>
   </inkml:definitions>
-  <inkml:trace contextRef="#ctx0" brushRef="#br0">3379 152 3916 0 0,'0'0'-74'0'0,"8"0"48"0"0,33-2 1226 0 0,-75-25-914 0 0,3 10-214 0 0,0 2 0 0 0,-1 0-1 0 0,-1 3 1 0 0,0 0-1 0 0,-1 3 1 0 0,0 0 0 0 0,-41-4-1 0 0,-31 2-48 0 0,-130 2-1 0 0,-107 20 42 0 0,249-6-58 0 0,-174 24 31 0 0,17-1 8 0 0,198-23-47 0 0,1 2 1 0 0,-1 3 0 0 0,-72 23-1 0 0,-150 65-10 0 0,244-86 12 0 0,-101 43 45 0 0,-133 75 1 0 0,-92 65-65 0 0,314-167 17 0 0,1 1 1 0 0,2 3-1 0 0,1 0 0 0 0,1 3 1 0 0,-32 39-1 0 0,48-49-2 0 0,1 2 0 0 0,1-1-1 0 0,1 2 1 0 0,2 1 0 0 0,1 0 0 0 0,1 1 0 0 0,-13 38 0 0 0,23-51 9 0 0,1 1 1 0 0,0-1 0 0 0,1 1 0 0 0,1 0 0 0 0,1 0 0 0 0,0 0 0 0 0,3 22 0 0 0,23 128 29 0 0,-1-12-2 0 0,-19-73-10 0 0,-3-37-18 0 0,1 0 1 0 0,2 0-1 0 0,3 0 1 0 0,13 48-1 0 0,-7-47 13 0 0,3 0 0 0 0,1-1 0 0 0,2-1 1 0 0,2-1-1 0 0,2-1 0 0 0,42 57 0 0 0,153 136 83 0 0,-102-116-36 0 0,-64-67-59 0 0,115 91 0 0 0,-121-105 14 0 0,64 68 1 0 0,-10-8 3 0 0,-90-88-18 0 0,51 43 16 0 0,-2 3 1 0 0,83 104-1 0 0,-97-100 18 0 0,102 104 1 0 0,-119-138-29 0 0,1-1 0 0 0,2-1-1 0 0,0-2 1 0 0,2-1 0 0 0,53 25 0 0 0,-24-19-3 0 0,2-4-1 0 0,1-2 0 0 0,1-3 1 0 0,0-3-1 0 0,74 7 0 0 0,-8-10 15 0 0,226-7 0 0 0,472-74-45 0 0,-319-23 12 0 0,-442 77 8 0 0,3-1 25 0 0,214-49-56 0 0,-214 44 116 0 0,130-54 0 0 0,-178 61-35 0 0,0-1 0 0 0,0 0-1 0 0,-1-2 1 0 0,-1-1-1 0 0,-1-1 1 0 0,-1-1 0 0 0,0-1-1 0 0,-1-1 1 0 0,27-37-1 0 0,4-16 349 0 0,70-139-1 0 0,14-21-84 0 0,-75 153-315 0 0,70-72-1 0 0,0 2 0 0 0,-112 129-4 0 0,1 2-1 0 0,1 0 1 0 0,1 1-1 0 0,1 1 0 0 0,0 1 1 0 0,44-25-1 0 0,-3 9-29 0 0,97-35 0 0 0,-128 55 43 0 0,260-112-33 0 0,-256 106 82 0 0,0-1 0 0 0,-1-2 0 0 0,-1-1 0 0 0,-1-2 0 0 0,48-48 0 0 0,-55 46 103 0 0,-2-2 0 0 0,-1 0 0 0 0,-2-1 0 0 0,0-2 0 0 0,-2 0-1 0 0,-2-1 1 0 0,-1 0 0 0 0,13-40 0 0 0,-21 48-36 0 0,-2 0 0 0 0,0 0 0 0 0,-1-1-1 0 0,-2 0 1 0 0,0 0 0 0 0,-2 0 0 0 0,-1 0-1 0 0,-1 0 1 0 0,-1 0 0 0 0,-1 0 0 0 0,-2 0 0 0 0,0 1-1 0 0,-11-31 1 0 0,3 22-85 0 0,-1 1 0 0 0,-1 1 0 0 0,-2 0 0 0 0,-1 2 0 0 0,-2 0 0 0 0,-23-28 0 0 0,-153-154-116 0 0,168 188 27 0 0,-1 2 1 0 0,-1 1-1 0 0,-2 1 0 0 0,1 1 1 0 0,-2 2-1 0 0,-44-16 0 0 0,-93-31-126 0 0,-2 6 0 0 0,-355-67-1 0 0,393 107 133 0 0,-142 0 0 0 0,22 2 38 0 0,42-12 6 0 0,-79-6 2 0 0,87 13-29 0 0,33 3 39 0 0,-106-24 27 0 0,79-5 312 0 0,146 33-167 0 0,50 13-199 0 0,-5 0 431 0 0</inkml:trace>
+  <inkml:trace contextRef="#ctx0" brushRef="#br0">2 88 5609 0 0,'1'-9'459'0'0,"1"0"0"0"0,-2 0 1 0 0,0 0-1 0 0,-2-15 1 0 0,1-2 1380 0 0,1 25-1746 0 0,0 5-1089 0 0,-1 3 973 0 0,1 0 0 0 0,0 1 1 0 0,1 0-1 0 0,0 0 1 0 0,-1-1-1 0 0,2 0 0 0 0,0 0 1 0 0,0 1-1 0 0,1-1 0 0 0,0 0 1 0 0,0 0-1 0 0,1 0 0 0 0,0 0 1 0 0,0-1-1 0 0,0 0 0 0 0,1 1 1 0 0,1-1-1 0 0,-1 0 0 0 0,1-1 1 0 0,0 0-1 0 0,0 0 0 0 0,0 0 1 0 0,1 0-1 0 0,0-1 0 0 0,0 0 1 0 0,9 4-1 0 0,-11-6 42 0 0,1 0 1 0 0,1-1-1 0 0,-2 1 1 0 0,1-1-1 0 0,1 1 1 0 0,-1-2-1 0 0,0 1 0 0 0,0-1 1 0 0,11 0-1 0 0,-14-1 6 0 0,0 1 0 0 0,-1 0 0 0 0,1-1-1 0 0,0 0 1 0 0,0 0 0 0 0,-1 0 0 0 0,1 0 0 0 0,0 0-1 0 0,-1-1 1 0 0,0 1 0 0 0,1 0 0 0 0,-1-1 0 0 0,0 0-1 0 0,1 1 1 0 0,-2-1 0 0 0,1 0 0 0 0,0 0 0 0 0,0 0-1 0 0,-1 0 1 0 0,1 0 0 0 0,-1 0 0 0 0,1-1 0 0 0,1-4-1 0 0,2-7 438 0 0,0 0-1 0 0,4-26 0 0 0,2-4 1235 0 0,-11 44-1573 0 0,0-8-362 0 0,2 4-254 0 0,3 13-766 0 0,-2-1 1168 0 0,1 0 0 0 0,0 0 0 0 0,1-1 0 0 0,0 1-1 0 0,0-1 1 0 0,0 0 0 0 0,1-1 0 0 0,0 0-1 0 0,1 1 1 0 0,0-2 0 0 0,0 1 0 0 0,0 0 0 0 0,1-1-1 0 0,0 0 1 0 0,0-1 0 0 0,0 0 0 0 0,1 0-1 0 0,-1-1 1 0 0,1 1 0 0 0,0-2 0 0 0,0 0 0 0 0,0 1-1 0 0,14-1 1 0 0,54 1-3487 0 0,-45-6 872 0 0</inkml:trace>
 </inkml:ink>
 </file>
 
@@ -5468,7 +5470,7 @@
           <inkml:channelProperty channel="OE" name="resolution" value="1000" units="1/deg"/>
         </inkml:channelProperties>
       </inkml:inkSource>
-      <inkml:timestamp xml:id="ts0" timeString="2025-10-20T05:28:40.910"/>
+      <inkml:timestamp xml:id="ts0" timeString="2025-10-19T19:36:56.169"/>
     </inkml:context>
     <inkml:brush xml:id="br0">
       <inkml:brushProperty name="width" value="0.2" units="cm"/>
@@ -5476,7 +5478,7 @@
       <inkml:brushProperty name="color" value="#66CC00"/>
     </inkml:brush>
   </inkml:definitions>
-  <inkml:trace contextRef="#ctx0" brushRef="#br0">39 144 3168 0 0,'-3'-33'4814'0'0,"3"33"-4795"0"0,-5 21-540 0 0,2-9 497 0 0,-7 36-1 0 0,3 0 0 0 0,1 1 0 0 0,2 0 0 0 0,4 56 0 0 0,11 83 89 0 0,-10-172 510 0 0,0-24 760 0 0,0-31-541 0 0,-4-128-289 0 0,3 123-417 0 0,4-198 289 0 0,-2 175 215 0 0,-3 64-522 0 0,1 1-99 0 0,0 1 6 0 0,0 1 0 0 0,0 0 0 0 0,0 0 0 0 0,0-1 0 0 0,-1 1 0 0 0,1 0 0 0 0,0 0 0 0 0,0-1 0 0 0,0 1 0 0 0,0 0 0 0 0,0 0 0 0 0,0-1 0 0 0,0 1 0 0 0,0 0 0 0 0,0 0 0 0 0,0-1 0 0 0,0 1 0 0 0,0 0 0 0 0,0-1 0 0 0,0 1 0 0 0,0 0 0 0 0,0 0 0 0 0,0-1 0 0 0,0 1 0 0 0,0 0 0 0 0,0-1 0 0 0,0 1 0 0 0,0 0 0 0 0,1 0 0 0 0,-1-1 0 0 0,0 1 0 0 0,0 0 0 0 0,0 0 0 0 0,0 0 0 0 0,1-1 0 0 0,-1 1 0 0 0,0 0 0 0 0,0 0 0 0 0,0 0 1 0 0,1 0-1 0 0,-1-1 0 0 0,0 1 0 0 0,0 0 0 0 0,1 0 0 0 0,48 58-172 0 0,89 83 0 0 0,-114-118 191 0 0,34 29 0 0 0,99 66 1 0 0,-65-52 66 0 0,-50-36 1969 0 0,-41-31-1981 0 0,0-1 0 0 0,0 1 0 0 0,0 0-1 0 0,0 0 1 0 0,0 0 0 0 0,0 0 0 0 0,0-1 0 0 0,0 1-1 0 0,-1 0 1 0 0,1-1 0 0 0,0 1 0 0 0,-1-1 0 0 0,1 1-1 0 0,-1-1 1 0 0,1 1 0 0 0,-1-1 0 0 0,0 1 0 0 0,0-1-1 0 0,0 1 1 0 0,0-1 0 0 0,0 1 0 0 0,0-1 0 0 0,0-1-1 0 0,-7-45 160 0 0,4 34-79 0 0,-25-220 210 0 0,12 91-78 0 0,7 78-667 0 0,9 63 351 0 0,-2-9-517 0 0</inkml:trace>
+  <inkml:trace contextRef="#ctx0" brushRef="#br0">9 61 6469 0 0,'-2'-26'278'0'0,"-2"-8"1569"0"0,4 34-1835 0 0,0 0 1 0 0,0 0-1 0 0,0 0 1 0 0,0 0 0 0 0,0 0-1 0 0,-1 0 1 0 0,1 0-1 0 0,0 0 1 0 0,0 0-1 0 0,0 0 1 0 0,0 0-1 0 0,0 0 1 0 0,0 0-1 0 0,0 0 1 0 0,0 0-1 0 0,0 0 1 0 0,0 0 0 0 0,-1 0-1 0 0,1 0 1 0 0,0 0-1 0 0,0 0 1 0 0,0 0-1 0 0,0 0 1 0 0,0 0-1 0 0,0 0 1 0 0,0 0-1 0 0,0 0 1 0 0,0 0 0 0 0,0 0-1 0 0,0-1 1 0 0,2 22-142 0 0,3 33 49 0 0,-1-11 57 0 0,2-1-1 0 0,17 57 0 0 0,-18-82 36 0 0,1 0-1 0 0,1-1 0 0 0,0 0 1 0 0,1-1-1 0 0,2 1 0 0 0,10 14 1 0 0,-16-24-22 0 0,1 0 1 0 0,1-1 0 0 0,-1 0-1 0 0,1 0 1 0 0,0 0-1 0 0,1-1 1 0 0,-1 0 0 0 0,1 1-1 0 0,0-2 1 0 0,0 1 0 0 0,0-1-1 0 0,0 0 1 0 0,1-1 0 0 0,0 1-1 0 0,-1-2 1 0 0,1 2-1 0 0,8-1 1 0 0,-3-1-682 0 0,-1-1 0 0 0,1 1 0 0 0,-1-2 0 0 0,1 0 0 0 0,24-5 0 0 0,-11 1-1921 0 0</inkml:trace>
 </inkml:ink>
 </file>
 
@@ -5500,7 +5502,7 @@
           <inkml:channelProperty channel="OE" name="resolution" value="1000" units="1/deg"/>
         </inkml:channelProperties>
       </inkml:inkSource>
-      <inkml:timestamp xml:id="ts0" timeString="2025-10-20T05:28:40.911"/>
+      <inkml:timestamp xml:id="ts0" timeString="2025-10-19T19:36:57.036"/>
     </inkml:context>
     <inkml:brush xml:id="br0">
       <inkml:brushProperty name="width" value="0.2" units="cm"/>
@@ -5508,7 +5510,7 @@
       <inkml:brushProperty name="color" value="#66CC00"/>
     </inkml:brush>
   </inkml:definitions>
-  <inkml:trace contextRef="#ctx0" brushRef="#br0">678 93 5597 0 0,'0'0'-212'0'0,"17"0"1497"0"0,-17-1-1266 0 0,0 0 1 0 0,0-1-1 0 0,0 1 0 0 0,0 0 1 0 0,0 0-1 0 0,0-1 0 0 0,0 1 1 0 0,-1 0-1 0 0,1-1 0 0 0,-1 1 1 0 0,1 0-1 0 0,-1 0 0 0 0,1-1 1 0 0,-1 1-1 0 0,0 0 0 0 0,1 0 1 0 0,-1 0-1 0 0,0 0 0 0 0,0 0 1 0 0,0 0-1 0 0,0 0 0 0 0,-1-1 1 0 0,-35-22 194 0 0,-44-5-68 0 0,61 25-151 0 0,0 1 0 0 0,-1 0 1 0 0,1 2-1 0 0,0 0 0 0 0,-1 2 0 0 0,1 0 1 0 0,0 1-1 0 0,-1 1 0 0 0,1 1 1 0 0,1 0-1 0 0,-1 2 0 0 0,1 0 0 0 0,-26 13 1 0 0,31-12-40 0 0,2 0 0 0 0,-1 1 0 0 0,1 1 0 0 0,-21 18 0 0 0,32-26 40 0 0,1 0-1 0 0,-1-1 1 0 0,1 1 0 0 0,0 0 0 0 0,-1 0 0 0 0,1 0 0 0 0,0 0 0 0 0,-1-1 0 0 0,1 1 0 0 0,0 0 0 0 0,0 0-1 0 0,0 0 1 0 0,0 0 0 0 0,0 0 0 0 0,0 0 0 0 0,0 0 0 0 0,0 0 0 0 0,0-1 0 0 0,0 1 0 0 0,0 0 0 0 0,1 0-1 0 0,-1 0 1 0 0,0 0 0 0 0,1 0 0 0 0,-1-1 0 0 0,0 1 0 0 0,1 0 0 0 0,-1 0 0 0 0,1-1 0 0 0,0 1 0 0 0,-1 0-1 0 0,1 0 1 0 0,-1-1 0 0 0,1 1 0 0 0,0-1 0 0 0,0 1 0 0 0,-1-1 0 0 0,2 1 0 0 0,28 21-33 0 0,177 69-10 0 0,-125-57 23 0 0,-1 2-1 0 0,81 52 1 0 0,-148-80 6 0 0,-11-7 15 0 0,-1 0 1 0 0,0 0 0 0 0,0 0-1 0 0,0 0 1 0 0,0 1-1 0 0,0-1 1 0 0,0 0 0 0 0,0 1-1 0 0,0 0 1 0 0,0-1-1 0 0,-1 1 1 0 0,1 0 0 0 0,-1 0-1 0 0,1 0 1 0 0,1 4-1 0 0,-2-4 25 0 0,-5 0 8 0 0,-8 6 14 0 0,0-2 1 0 0,0 1 0 0 0,-1-2 0 0 0,0 1-1 0 0,-1-2 1 0 0,1 0 0 0 0,-1 0-1 0 0,1-1 1 0 0,-21 1 0 0 0,-133 4 341 0 0,157-8-380 0 0,-203-8 616 0 0,189 6-663 0 0,1-2-1 0 0,0 0 0 0 0,0-2 0 0 0,0 0 1 0 0,0-1-1 0 0,-40-21 0 0 0,59 26-381 0 0,0-1-1 0 0,0 0 1 0 0,0 0 0 0 0,0-1 0 0 0,1 1-1 0 0,-1-1 1 0 0,1 1 0 0 0,-3-6-1 0 0,-2-3-1946 0 0</inkml:trace>
+  <inkml:trace contextRef="#ctx0" brushRef="#br0">233 81 5949 0 0,'4'-8'-577'0'0,"0"-9"649"0"0,-4 16 9 0 0,-14-24 579 0 0,12 22-642 0 0,0 1 0 0 0,-1 1 1 0 0,1-1-1 0 0,0 0 0 0 0,-1 1 0 0 0,0 0 0 0 0,1-1 0 0 0,0 1 0 0 0,-2 0 0 0 0,1 0 0 0 0,1 0 0 0 0,-1 0 0 0 0,0 1 1 0 0,0-1-1 0 0,0 1 0 0 0,0-1 0 0 0,0 1 0 0 0,0 0 0 0 0,0 0 0 0 0,0 0 0 0 0,0 0 0 0 0,0 1 0 0 0,-1 0 0 0 0,-4 1 1 0 0,-1 0-32 0 0,1 0 1 0 0,0 1-1 0 0,-1 0 1 0 0,2 0-1 0 0,-1 1 1 0 0,0 0-1 0 0,-10 6 1 0 0,7-2-13 0 0,2 0-1 0 0,-1 0 1 0 0,-13 15 0 0 0,21-20 19 0 0,-1 0 0 0 0,1 0 0 0 0,0 1 0 0 0,-1-2 0 0 0,1 2 1 0 0,1-1-1 0 0,-1 1 0 0 0,0 0 0 0 0,1-1 0 0 0,0 1 0 0 0,0-1 1 0 0,1 1-1 0 0,-1 0 0 0 0,1-1 0 0 0,-1 7 0 0 0,3-7 15 0 0,-2 0 0 0 0,1 0-1 0 0,1 0 1 0 0,-1-1 0 0 0,1 1 0 0 0,-1-1-1 0 0,2 1 1 0 0,-2 0 0 0 0,2-1 0 0 0,-2 0-1 0 0,1 0 1 0 0,2 1 0 0 0,-2-1 0 0 0,0 0-1 0 0,1 0 1 0 0,0-1 0 0 0,0 1-1 0 0,0 0 1 0 0,-1-1 0 0 0,1 0 0 0 0,0 0-1 0 0,7 2 1 0 0,1 0 30 0 0,-1 0 1 0 0,1-1-1 0 0,-1 0 0 0 0,1 0 1 0 0,18-1-1 0 0,-24-1-5 0 0,0 0 0 0 0,0 0-1 0 0,1-1 1 0 0,-2 0 0 0 0,2 0 0 0 0,-2 0 0 0 0,2-1 0 0 0,-1 1 0 0 0,-1-1-1 0 0,1 0 1 0 0,0-1 0 0 0,-1 1 0 0 0,0-1 0 0 0,1 1 0 0 0,-1-1 0 0 0,0 0-1 0 0,-1-1 1 0 0,1 2 0 0 0,-1-2 0 0 0,1 0 0 0 0,-1 0 0 0 0,0 1-1 0 0,4-9 1 0 0,2-6 288 0 0,0 0 0 0 0,-2 0 0 0 0,0-2 0 0 0,4-25 0 0 0,0 8 1024 0 0,-8 41-1740 0 0,1 17 171 0 0,-1-7 170 0 0,0 0-1 0 0,1 0 1 0 0,9 21 0 0 0,-9-30 26 0 0,-1 1 0 0 0,1-1 1 0 0,0 0-1 0 0,1 0 1 0 0,0-1-1 0 0,-1 1 1 0 0,2-1-1 0 0,-1 0 1 0 0,0 0-1 0 0,1-1 1 0 0,0 1-1 0 0,11 4 1 0 0,-10-6-635 0 0,1 1 0 0 0,-1-1 1 0 0,0 0-1 0 0,1 0 0 0 0,0-1 0 0 0,13 1 1 0 0,-3-2-2232 0 0</inkml:trace>
 </inkml:ink>
 </file>
 
@@ -5564,7 +5566,7 @@
           <inkml:channelProperty channel="OE" name="resolution" value="1000" units="1/deg"/>
         </inkml:channelProperties>
       </inkml:inkSource>
-      <inkml:timestamp xml:id="ts0" timeString="2025-10-20T05:28:40.912"/>
+      <inkml:timestamp xml:id="ts0" timeString="2025-10-19T19:36:57.745"/>
     </inkml:context>
     <inkml:brush xml:id="br0">
       <inkml:brushProperty name="width" value="0.2" units="cm"/>
@@ -5572,7 +5574,7 @@
       <inkml:brushProperty name="color" value="#66CC00"/>
     </inkml:brush>
   </inkml:definitions>
-  <inkml:trace contextRef="#ctx0" brushRef="#br0">28 46 5529 0 0,'-1'-1'99'0'0,"0"1"1"0"0,0-1-1 0 0,0 1 1 0 0,0 0 0 0 0,0-1-1 0 0,0 1 1 0 0,-1 0 0 0 0,1 0-1 0 0,0 0 1 0 0,0-1 0 0 0,0 1-1 0 0,0 0 1 0 0,0 1 0 0 0,0-1-1 0 0,-1 0 1 0 0,1 0-1 0 0,0 0 1 0 0,0 1 0 0 0,0-1-1 0 0,0 0 1 0 0,0 1 0 0 0,0-1-1 0 0,-1 2 1 0 0,6 24 1577 0 0,2-6-2249 0 0,14 36 540 0 0,1 0 0 0 0,4-1 0 0 0,33 57 0 0 0,7 13 56 0 0,-32-69 179 0 0,-32-55 28 0 0,0-2-138 0 0,1-1 1 0 0,-1 0 0 0 0,0 0-1 0 0,1 1 1 0 0,-1-1 0 0 0,0 0-1 0 0,0 0 1 0 0,0-1-1 0 0,0 1 1 0 0,-1 0 0 0 0,1 0-1 0 0,-1 0 1 0 0,1 0-1 0 0,-1-4 1 0 0,14-61 77 0 0,-4 22-9 0 0,31-133 194 0 0,-33 124-1756 0 0,13 73 1260 0 0,44 65-207 0 0,-11-12 230 0 0,69 68 64 0 0,-99-113 128 0 0,-23-26-23 0 0,-1-1-18 0 0,1 1 0 0 0,-1-1 0 0 0,0 0 0 0 0,0 0 0 0 0,0 1 0 0 0,0-1 0 0 0,1 0 0 0 0,-1 1 0 0 0,0-1 0 0 0,0 0 0 0 0,0 0 0 0 0,1 0 0 0 0,-1 1 0 0 0,0-1 0 0 0,0 0 0 0 0,1 0 0 0 0,-1 0 0 0 0,0 1 0 0 0,1-1 0 0 0,-1 0 0 0 0,0 0 0 0 0,1 0 0 0 0,-1 0 0 0 0,0 0 0 0 0,0 0 0 0 0,1 0 0 0 0,-1 0 0 0 0,0 0 0 0 0,1 0 0 0 0,-1 0 0 0 0,0 0 0 0 0,1 0 0 0 0,-1 0 0 0 0,0 0 0 0 0,1 0 0 0 0,-1 0 0 0 0,0 0 0 0 0,1 0 0 0 0,-1-1 0 0 0,11-15 96 0 0,0 0 0 0 0,-2-2 1 0 0,0 1-1 0 0,-1-1 0 0 0,0 0 1 0 0,-2-1-1 0 0,7-27 0 0 0,6-14 1 0 0,13-25 31 0 0,26-81 42 0 0,-42 121-2041 0 0</inkml:trace>
+  <inkml:trace contextRef="#ctx0" brushRef="#br0">19 57 6957 0 0,'-5'-21'240'0'0,"-7"-13"1740"0"0,12 33-1717 0 0,-1 11-327 0 0,1 0 0 0 0,0 0 1 0 0,1 1-1 0 0,3 13 0 0 0,0 17 27 0 0,-1 48-15 0 0,-3-46 23 0 0,1-2 0 0 0,15 75 0 0 0,-15-110 36 0 0,0 0 0 0 0,1 0 0 0 0,-1 0 0 0 0,2 0 0 0 0,-1 0 0 0 0,1-1 0 0 0,0 0 0 0 0,0 1-1 0 0,0-1 1 0 0,1 0 0 0 0,0 0 0 0 0,1 0 0 0 0,-1 0 0 0 0,0-1 0 0 0,1 0 0 0 0,1 0-1 0 0,-1 0 1 0 0,0-1 0 0 0,1 1 0 0 0,-1-1 0 0 0,2 0 0 0 0,-2-1 0 0 0,1 1 0 0 0,0-1 0 0 0,1 0-1 0 0,0 0 1 0 0,6 1 0 0 0,1-1-86 0 0,0 1 0 0 0,1-2-1 0 0,-1 0 1 0 0,0-1 0 0 0,1 0 0 0 0,-1 0-1 0 0,23-5 1 0 0,-15 0-1320 0 0,-1 1 0 0 0,24-10 0 0 0,-21 6-1052 0 0</inkml:trace>
 </inkml:ink>
 </file>
 
@@ -5596,7 +5598,7 @@
           <inkml:channelProperty channel="OE" name="resolution" value="1000" units="1/deg"/>
         </inkml:channelProperties>
       </inkml:inkSource>
-      <inkml:timestamp xml:id="ts0" timeString="2025-10-20T05:28:40.913"/>
+      <inkml:timestamp xml:id="ts0" timeString="2025-10-19T19:36:58.155"/>
     </inkml:context>
     <inkml:brush xml:id="br0">
       <inkml:brushProperty name="width" value="0.2" units="cm"/>
@@ -5604,7 +5606,7 @@
       <inkml:brushProperty name="color" value="#66CC00"/>
     </inkml:brush>
   </inkml:definitions>
-  <inkml:trace contextRef="#ctx0" brushRef="#br0">1 64 7221 0 0,'1'-3'37'0'0,"0"-1"1"0"0,0 1-1 0 0,-1 0 1 0 0,1-1 0 0 0,-1 1-1 0 0,0-1 1 0 0,0 1-1 0 0,0-1 1 0 0,-1-4-1 0 0,0-12 948 0 0,3 15-635 0 0,1 10-162 0 0,9 25-142 0 0,10 42-176 0 0,82 301 266 0 0,-104-372-129 0 0,8-38-7329 0 0</inkml:trace>
+  <inkml:trace contextRef="#ctx0" brushRef="#br0">25 54 5737 0 0,'-24'-7'549'0'0,"24"7"-544"0"0,0 0 0 0 0,0 0 0 0 0,0 0 0 0 0,0 0 0 0 0,0-1 0 0 0,0 1-1 0 0,0 0 1 0 0,0 0 0 0 0,0-1 0 0 0,0 1 0 0 0,0 0 0 0 0,0 0-1 0 0,0-1 1 0 0,0 1 0 0 0,0 0 0 0 0,0 0 0 0 0,0 0 0 0 0,0 0 0 0 0,0 0-1 0 0,1-1 1 0 0,-1 1 0 0 0,0 0 0 0 0,0 0 0 0 0,0 0 0 0 0,0-1 0 0 0,1 1-1 0 0,-1 0 1 0 0,0 0 0 0 0,0 0 0 0 0,0 0 0 0 0,0 0 0 0 0,0 0 0 0 0,0 0-1 0 0,0 0 1 0 0,1 0 0 0 0,-1 0 0 0 0,0 0 0 0 0,0 0 0 0 0,1-1 0 0 0,-1 1-1 0 0,0 0 1 0 0,0 0 0 0 0,1 0 0 0 0,-1 0 0 0 0,0 0 0 0 0,0 0-1 0 0,0 0 1 0 0,0 0 0 0 0,47-9 68 0 0,-41 8-59 0 0,172-22 111 0 0,-105 15-3587 0 0</inkml:trace>
 </inkml:ink>
 </file>
 
@@ -5628,7 +5630,7 @@
           <inkml:channelProperty channel="OE" name="resolution" value="1000" units="1/deg"/>
         </inkml:channelProperties>
       </inkml:inkSource>
-      <inkml:timestamp xml:id="ts0" timeString="2025-10-20T05:28:40.914"/>
+      <inkml:timestamp xml:id="ts0" timeString="2025-10-19T19:36:58.577"/>
     </inkml:context>
     <inkml:brush xml:id="br0">
       <inkml:brushProperty name="width" value="0.2" units="cm"/>
@@ -5636,7 +5638,7 @@
       <inkml:brushProperty name="color" value="#66CC00"/>
     </inkml:brush>
   </inkml:definitions>
-  <inkml:trace contextRef="#ctx0" brushRef="#br0">14 3 5821 0 0,'0'0'-280'0'0,"-11"-1"-571"0"0,8 0 912 0 0,13 1 308 0 0,660 54-214 0 0,-537-40 1062 0 0,-131-13-1127 0 0,13-3-346 0 0</inkml:trace>
+  <inkml:trace contextRef="#ctx0" brushRef="#br0">1 3 4716 0 0,'12'-3'5356'0'0,"-10"4"-5396"0"0,-1 0 0 0 0,0 1-1 0 0,0-2 1 0 0,0 2-1 0 0,0-2 1 0 0,-1 2 0 0 0,1-1-1 0 0,0 1 1 0 0,0-1-1 0 0,0 0 1 0 0,-1 0 0 0 0,0 1-1 0 0,0-1 1 0 0,1 0 0 0 0,0 4-1 0 0,6 31-249 0 0,-5-24 222 0 0,36 145-345 0 0,-36-152 33 0 0,0 4 630 0 0</inkml:trace>
 </inkml:ink>
 </file>
 
@@ -5660,7 +5662,7 @@
           <inkml:channelProperty channel="OE" name="resolution" value="1000" units="1/deg"/>
         </inkml:channelProperties>
       </inkml:inkSource>
-      <inkml:timestamp xml:id="ts0" timeString="2025-10-20T05:28:40.915"/>
+      <inkml:timestamp xml:id="ts0" timeString="2025-10-19T19:36:59.189"/>
     </inkml:context>
     <inkml:brush xml:id="br0">
       <inkml:brushProperty name="width" value="0.2" units="cm"/>
@@ -5668,7 +5670,7 @@
       <inkml:brushProperty name="color" value="#66CC00"/>
     </inkml:brush>
   </inkml:definitions>
-  <inkml:trace contextRef="#ctx0" brushRef="#br0">38 0 4404 0 0,'-20'9'-401'0'0,"19"-8"356"0"0,-12 4-74 0 0,9 1 1398 0 0,89 2-1125 0 0,99-2 0 0 0,-123-2-90 0 0,-59-3 1 0 0,2-1-42 0 0,10 0-4 0 0,-10 0-30 0 0,11-7-3191 0 0,-8 1 2674 0 0</inkml:trace>
+  <inkml:trace contextRef="#ctx0" brushRef="#br0">0 13 5537 0 0,'7'-12'-2749'0'0</inkml:trace>
 </inkml:ink>
 </file>
 
@@ -5692,7 +5694,7 @@
           <inkml:channelProperty channel="OE" name="resolution" value="1000" units="1/deg"/>
         </inkml:channelProperties>
       </inkml:inkSource>
-      <inkml:timestamp xml:id="ts0" timeString="2025-10-20T05:28:40.916"/>
+      <inkml:timestamp xml:id="ts0" timeString="2025-10-19T19:37:00.161"/>
     </inkml:context>
     <inkml:brush xml:id="br0">
       <inkml:brushProperty name="width" value="0.2" units="cm"/>
@@ -5700,7 +5702,7 @@
       <inkml:brushProperty name="color" value="#66CC00"/>
     </inkml:brush>
   </inkml:definitions>
-  <inkml:trace contextRef="#ctx0" brushRef="#br0">1 8 3172 0 0,'0'3'522'0'0,"11"-1"-186"0"0,39 0-53 0 0,59-4-106 0 0,158 0 548 0 0,-254 3-690 0 0,-12 0-157 0 0,1-1 0 0 0,-1 1 0 0 0,0-1 0 0 0,1 0 1 0 0,-1 0-1 0 0,0 0 0 0 0,1 1 0 0 0,-1-1 0 0 0,0 0 1 0 0,1-1-1 0 0,-1 1 0 0 0,0 0 0 0 0,1 0 0 0 0,-1-1 0 0 0,0 1 1 0 0,0 0-1 0 0,3-2 0 0 0,0-8-1079 0 0</inkml:trace>
+  <inkml:trace contextRef="#ctx0" brushRef="#br0">131 56 3644 0 0,'0'0'868'0'0,"-1"0"-854"0"0,1 0 0 0 0,0 0 0 0 0,0 0 0 0 0,0 0 0 0 0,0 0 0 0 0,0 0 0 0 0,-1 0 0 0 0,1 0 0 0 0,0 0 0 0 0,0 0 0 0 0,0 0 0 0 0,0 0 0 0 0,0 0 0 0 0,-1 0 0 0 0,1 0 0 0 0,0 0 0 0 0,0 0 0 0 0,0 0 0 0 0,0-1 0 0 0,0 1 0 0 0,0 0 0 0 0,0 0 0 0 0,0 0 0 0 0,0 0 0 0 0,0 0 0 0 0,0 0 0 0 0,0 0 0 0 0,0 0 0 0 0,0 0 0 0 0,0 0 0 0 0,0 0 0 0 0,0 0 0 0 0,0 0 0 0 0,0-1 0 0 0,0 1 0 0 0,0 0 0 0 0,0 0 0 0 0,0 0 0 0 0,0 0 0 0 0,0 0 0 0 0,0-1 0 0 0,0 1 0 0 0,0 0 0 0 0,0 0 0 0 0,0 0 0 0 0,0 0 0 0 0,0 0 0 0 0,0-1 0 0 0,0 1 0 0 0,0 0 0 0 0,0 0 0 0 0,0 0 0 0 0,0 0 0 0 0,0 0 0 0 0,-8 3-9 0 0,0-1 0 0 0,0 1-1 0 0,1 0 1 0 0,0 1-1 0 0,0-1 1 0 0,0 1-1 0 0,0 1 1 0 0,0-1-1 0 0,1 1 1 0 0,0 0-1 0 0,0 0 1 0 0,0 1-1 0 0,1 0 1 0 0,0-1-1 0 0,0 2 1 0 0,1-1-1 0 0,0 0 1 0 0,0 1-1 0 0,1 0 1 0 0,-4 10-1 0 0,6-16 1 0 0,1 1-1 0 0,0-1 0 0 0,0 1 1 0 0,0 0-1 0 0,0-1 0 0 0,1 1 1 0 0,-1 0-1 0 0,1-1 0 0 0,-1 1 1 0 0,0 0-1 0 0,1-1 1 0 0,0 1-1 0 0,0-1 0 0 0,-1 1 1 0 0,1-1-1 0 0,0 0 0 0 0,0 1 1 0 0,0-1-1 0 0,0 1 0 0 0,1-1 1 0 0,-1 0-1 0 0,0 0 1 0 0,1 0-1 0 0,-1 0 0 0 0,3 1 1 0 0,1 2 15 0 0,1-1 0 0 0,-1 0 0 0 0,2 1 0 0 0,-1-2 0 0 0,9 3 0 0 0,10 3 35 0 0,-1-3 0 0 0,1 0 0 0 0,0-1-1 0 0,35 1 1 0 0,-47-5-4 0 0,-1 0 0 0 0,1 0-1 0 0,0-1 1 0 0,-1-1 0 0 0,1 1-1 0 0,-1-2 1 0 0,0 0 0 0 0,0 0-1 0 0,0-1 1 0 0,20-8 0 0 0,-28 10-28 0 0,0-1 0 0 0,-1 1 0 0 0,1 0 0 0 0,-1 0 0 0 0,1-1 0 0 0,-1 0 0 0 0,-1 1 0 0 0,1-1 0 0 0,0 0 0 0 0,0-1 0 0 0,-1 1 0 0 0,0 0 0 0 0,1 0 0 0 0,-2-1 0 0 0,2 1 0 0 0,-2-1 0 0 0,1 0 0 0 0,-1 0 0 0 0,0 1 0 0 0,0-2 0 0 0,0 2 0 0 0,-1-1 0 0 0,0 0 0 0 0,0-4 0 0 0,0 3 1 0 0,-1 0 1 0 0,-1 0-1 0 0,1 1 1 0 0,-1-1-1 0 0,1 1 1 0 0,-2-1-1 0 0,1 0 1 0 0,0 1-1 0 0,-1 0 1 0 0,0 0-1 0 0,0-1 1 0 0,0 2-1 0 0,-1-1 1 0 0,0 0-1 0 0,0 1 1 0 0,0-1-1 0 0,1 1 1 0 0,-10-4-1 0 0,2 0 15 0 0,-1 2-1 0 0,1 0 0 0 0,-1 0 0 0 0,0 0 0 0 0,-1 2 0 0 0,1-1 0 0 0,-17-1 1 0 0,-90-6 156 0 0,106 10-186 0 0,0-1 192 0 0,8 1-1096 0 0</inkml:trace>
 </inkml:ink>
 </file>
 
@@ -5724,7 +5726,7 @@
           <inkml:channelProperty channel="OE" name="resolution" value="1000" units="1/deg"/>
         </inkml:channelProperties>
       </inkml:inkSource>
-      <inkml:timestamp xml:id="ts0" timeString="2025-10-20T05:28:40.917"/>
+      <inkml:timestamp xml:id="ts0" timeString="2025-10-19T19:37:00.850"/>
     </inkml:context>
     <inkml:brush xml:id="br0">
       <inkml:brushProperty name="width" value="0.2" units="cm"/>
@@ -5732,7 +5734,7 @@
       <inkml:brushProperty name="color" value="#66CC00"/>
     </inkml:brush>
   </inkml:definitions>
-  <inkml:trace contextRef="#ctx0" brushRef="#br0">35 1 3148 0 0,'0'0'-153'0'0,"-17"14"-500"0"0,12 8 653 0 0,0 0-1 0 0,2 0 1 0 0,0 0-1 0 0,2 0 1 0 0,0 1-1 0 0,2-1 1 0 0,0 0-1 0 0,2 0 1 0 0,0 0-1 0 0,2 0 1 0 0,0 0-1 0 0,1 0 1 0 0,1-1-1 0 0,2 0 1 0 0,0-1-1 0 0,0 0 1 0 0,2 0-1 0 0,16 21 1 0 0,-16-29 25 0 0,0 1 0 0 0,1-2 0 0 0,1 1 0 0 0,0-2 0 0 0,0 0 0 0 0,1 0 0 0 0,1-1-1 0 0,23 10 1 0 0,19 6 106 0 0,60 17 0 0 0,-13-5-28 0 0,-82-29-79 0 0,0 2 1 0 0,-1 1-1 0 0,0 0 0 0 0,20 16 0 0 0,-31-19-19 0 0,0 0 0 0 0,0 1-1 0 0,-1 1 1 0 0,0-1 0 0 0,-1 1-1 0 0,0 1 1 0 0,-1 0 0 0 0,0 0 0 0 0,5 12-1 0 0,3 8 8 0 0,2-1-1 0 0,0 0 1 0 0,2-1-1 0 0,1-2 0 0 0,2 0 1 0 0,0-1-1 0 0,31 27 1 0 0,-5-12 13 0 0,1-2 1 0 0,3-3 0 0 0,0-2 0 0 0,3-2 0 0 0,111 48-1 0 0,334 116 18 0 0,-290-116-54 0 0,-101-42 17 0 0,64 26 98 0 0,-142-50-1220 0 0</inkml:trace>
+  <inkml:trace contextRef="#ctx0" brushRef="#br0">24 1 4068 0 0,'0'0'4741'0'0,"0"3"-4873"0"0,-4 7 93 0 0,2 0 0 0 0,0 1-1 0 0,-1-1 1 0 0,3 1-1 0 0,-1 0 1 0 0,1 0 0 0 0,1 14-1 0 0,2-4 24 0 0,0 0-1 0 0,2-1 1 0 0,6 21 0 0 0,-5-13 2878 0 0,-14-37-2264 0 0,4 3-516 0 0,-1-1 1 0 0,1 0-1 0 0,1 0 0 0 0,-1 0 1 0 0,2 0-1 0 0,-1-1 1 0 0,1 0-1 0 0,0 0 0 0 0,1 1 1 0 0,0 0-1 0 0,0-1 0 0 0,1 0 1 0 0,0 0-1 0 0,2-12 0 0 0,-2 16-111 0 0,0 0 0 0 0,2 1 0 0 0,-1-1 0 0 0,-1 0 0 0 0,2 1 0 0 0,0-1 0 0 0,-1 1 0 0 0,1-1 0 0 0,0 1 0 0 0,0 0 0 0 0,1 0 0 0 0,-1 0 0 0 0,0 0 0 0 0,1 0 0 0 0,1 0 0 0 0,-2 1 0 0 0,1-1 0 0 0,1 1 0 0 0,-1 0 0 0 0,0 0 0 0 0,1 0 0 0 0,-1 0 0 0 0,1 0 0 0 0,0 1 0 0 0,0-1 0 0 0,0 2 0 0 0,0-2 0 0 0,0 2 0 0 0,-1-1 0 0 0,2 0 0 0 0,4 1 0 0 0,-2 0-43 0 0,1 0 1 0 0,0 1 0 0 0,0 0-1 0 0,0 0 1 0 0,-1 0 0 0 0,0 2-1 0 0,1-1 1 0 0,-1 0 0 0 0,1 1-1 0 0,-1-1 1 0 0,0 2 0 0 0,0 0-1 0 0,-1-1 1 0 0,7 6 0 0 0,12 9-164 0 0,-3 0 0 0 0,27 27 0 0 0,-34-31 86 0 0,-13-12 46 0 0,-1 0 0 0 0,1-1 0 0 0,-1 1-1 0 0,0 0 1 0 0,1 0 0 0 0,-2-1 0 0 0,2 1 0 0 0,-1 1-1 0 0,-1-1 1 0 0,1-1 0 0 0,0 1 0 0 0,-1 0 0 0 0,1 0-1 0 0,0 4 1 0 0</inkml:trace>
 </inkml:ink>
 </file>
 
@@ -5756,7 +5758,7 @@
           <inkml:channelProperty channel="OE" name="resolution" value="1000" units="1/deg"/>
         </inkml:channelProperties>
       </inkml:inkSource>
-      <inkml:timestamp xml:id="ts0" timeString="2025-10-20T05:28:40.918"/>
+      <inkml:timestamp xml:id="ts0" timeString="2025-10-19T19:37:01.818"/>
     </inkml:context>
     <inkml:brush xml:id="br0">
       <inkml:brushProperty name="width" value="0.2" units="cm"/>
@@ -5764,7 +5766,7 @@
       <inkml:brushProperty name="color" value="#66CC00"/>
     </inkml:brush>
   </inkml:definitions>
-  <inkml:trace contextRef="#ctx0" brushRef="#br0">2457 65 3016 0 0,'2'-1'133'0'0,"-1"0"-1"0"0,0 1 1 0 0,0-1 0 0 0,0 0-1 0 0,0 0 1 0 0,0 0 0 0 0,0-1-1 0 0,0 1 1 0 0,0 0-1 0 0,0 0 1 0 0,0 0 0 0 0,-1-1-1 0 0,1 1 1 0 0,0 0-1 0 0,-1-1 1 0 0,1 1 0 0 0,-1-2-1 0 0,-14-4-72 0 0,0 1 0 0 0,-1 0 0 0 0,0 1 0 0 0,0 1 0 0 0,0 0 0 0 0,-22-2 0 0 0,21 4-65 0 0,0 1 0 0 0,-1 0 0 0 0,1 1 0 0 0,-1 0-1 0 0,-31 7 1 0 0,26-4 9 0 0,-42 4-7 0 0,1 3 0 0 0,0 2 0 0 0,0 4 1 0 0,-112 43-1 0 0,83-23 15 0 0,50-20-32 0 0,-63 32 1 0 0,-28 31-88 0 0,-51 28 139 0 0,-195 119 71 0 0,361-215-98 0 0,-8 4 19 0 0,-29 23 5 0 0,53-37-21 0 0,-34 15 65 0 0,-282 94 424 0 0,269-96-357 0 0,0-3-1 0 0,-1-2 0 0 0,-53 2 1 0 0,41-5-64 0 0,60-5-68 0 0,-6 1-66 0 0,0-1-1 0 0,0 0 0 0 0,0-1 0 0 0,0 1 0 0 0,-15-2 1 0 0,38-15-2153 0 0,0 6-431 0 0</inkml:trace>
+  <inkml:trace contextRef="#ctx0" brushRef="#br0">58 9 6653 0 0,'0'0'-269'0'0,"4"-4"-1006"0"0,-4 4 1247 0 0,0 0-1 0 0,0 0 1 0 0,-1 0 0 0 0,1 0 0 0 0,0 0 0 0 0,0 0 0 0 0,0 0 0 0 0,0-1 0 0 0,0 1 0 0 0,0 0 0 0 0,-1 0-1 0 0,1 0 1 0 0,0 0 0 0 0,0-1 0 0 0,-2 1-4 0 0,-1-1-1 0 0,1 1 1 0 0,-1 0-1 0 0,0-1 1 0 0,1 1-1 0 0,0 0 1 0 0,-1 0-1 0 0,0 0 0 0 0,1 0 1 0 0,0 1-1 0 0,-1-1 1 0 0,1 0-1 0 0,0 1 1 0 0,-1 0-1 0 0,1 0 1 0 0,-4 1-1 0 0,4-1-16 0 0,2-1-50 0 0,-1 0 66 0 0,1 0 1 0 0,0 0-1 0 0,-1 1 0 0 0,1-1 0 0 0,-1 0 0 0 0,0 0 1 0 0,1 0-1 0 0,0 0 0 0 0,0 1 0 0 0,-1-1 0 0 0,1 1 1 0 0,-1-1-1 0 0,1 1 0 0 0,-1-1 0 0 0,1 0 0 0 0,0 0 1 0 0,-1 1-1 0 0,1 0 0 0 0,0-1 0 0 0,0 0 0 0 0,0 0 1 0 0,0 1-1 0 0,0 0 0 0 0,-1-1 0 0 0,1 1 0 0 0,0-1 1 0 0,0 0-1 0 0,0 1 0 0 0,0 0 0 0 0,0-1 0 0 0,0 0 1 0 0,0 1-1 0 0,0-1 0 0 0,0 1 0 0 0,1-1 0 0 0,-1 0 1 0 0,0 1-1 0 0,0 0 0 0 0,0-1 0 0 0,0 1 0 0 0,0-1 1 0 0,0 0-1 0 0,1 1 0 0 0,0 1 24 0 0,-8 18 171 0 0,9-20-92 0 0,1 1 0 0 0,-1-1 0 0 0,0 0-1 0 0,1 0 1 0 0,-1 0 0 0 0,0 0 0 0 0,1-1-1 0 0,-2 1 1 0 0,5-2 0 0 0,-6 2-90 0 0,4-1 188 0 0,5-2-1087 0 0</inkml:trace>
 </inkml:ink>
 </file>
 
@@ -5788,15 +5790,15 @@
           <inkml:channelProperty channel="OE" name="resolution" value="1000" units="1/deg"/>
         </inkml:channelProperties>
       </inkml:inkSource>
-      <inkml:timestamp xml:id="ts0" timeString="2025-10-20T05:28:40.919"/>
+      <inkml:timestamp xml:id="ts0" timeString="2025-10-20T04:54:49.429"/>
     </inkml:context>
     <inkml:brush xml:id="br0">
       <inkml:brushProperty name="width" value="0.2" units="cm"/>
       <inkml:brushProperty name="height" value="0.2" units="cm"/>
-      <inkml:brushProperty name="color" value="#66CC00"/>
+      <inkml:brushProperty name="color" value="#FFC114"/>
     </inkml:brush>
   </inkml:definitions>
-  <inkml:trace contextRef="#ctx0" brushRef="#br0">196 45 6077 0 0,'0'0'-268'0'0,"-17"-37"1007"0"0,16 35-700 0 0,-5-2-27 0 0,5 2-16 0 0,-2 3-61 0 0,1 0 62 0 0,0 0 0 0 0,-1-1-1 0 0,1 2 1 0 0,0-1 0 0 0,-1 0 0 0 0,1 0 0 0 0,0 1-1 0 0,0-1 1 0 0,0 1 0 0 0,0 0 0 0 0,0-1 0 0 0,1 1-1 0 0,-1 0 1 0 0,-2 4 0 0 0,-27 39-64 0 0,24-34 55 0 0,-8 14-8 0 0,1 2 1 0 0,2 0 0 0 0,0 0 0 0 0,2 1-1 0 0,1 0 1 0 0,1 1 0 0 0,-6 48 0 0 0,12-33-83 0 0,2-43 103 0 0,0 1 9 0 0,0 7-3 0 0,11-32 173 0 0,-1-1 0 0 0,9-31 0 0 0,42-173-290 0 0,-61 226 66 0 0,28 150-333 0 0,-1-31 512 0 0,-27-115-120 0 0,-11-37-4483 0 0</inkml:trace>
+  <inkml:trace contextRef="#ctx0" brushRef="#br0">1 1 6129 0 0,'0'0'56'0'0,"3"5"124"0"0</inkml:trace>
 </inkml:ink>
 </file>
 
@@ -5809,22 +5811,26 @@
           <inkml:channel name="X" type="integer" min="-2.14748E9" max="2.14748E9" units="cm"/>
           <inkml:channel name="Y" type="integer" min="-2.14748E9" max="2.14748E9" units="cm"/>
           <inkml:channel name="F" type="integer" max="32767" units="dev"/>
+          <inkml:channel name="OA" type="integer" max="360" units="deg"/>
+          <inkml:channel name="OE" type="integer" max="90" units="deg"/>
         </inkml:traceFormat>
         <inkml:channelProperties>
           <inkml:channelProperty channel="X" name="resolution" value="1000" units="1/cm"/>
           <inkml:channelProperty channel="Y" name="resolution" value="1000" units="1/cm"/>
           <inkml:channelProperty channel="F" name="resolution" value="0" units="1/dev"/>
+          <inkml:channelProperty channel="OA" name="resolution" value="1000" units="1/deg"/>
+          <inkml:channelProperty channel="OE" name="resolution" value="1000" units="1/deg"/>
         </inkml:channelProperties>
       </inkml:inkSource>
-      <inkml:timestamp xml:id="ts0" timeString="2025-10-20T05:29:05.840"/>
+      <inkml:timestamp xml:id="ts0" timeString="2025-10-20T05:01:05.591"/>
     </inkml:context>
     <inkml:brush xml:id="br0">
       <inkml:brushProperty name="width" value="0.2" units="cm"/>
       <inkml:brushProperty name="height" value="0.2" units="cm"/>
-      <inkml:brushProperty name="color" value="#66CC00"/>
+      <inkml:brushProperty name="color" value="#FFC114"/>
     </inkml:brush>
   </inkml:definitions>
-  <inkml:trace contextRef="#ctx0" brushRef="#br0">19 86 24575,'-15'-11'0,"11"19"0,5-4 0,-1-1 0,1 1 0,0-1 0,0 0 0,0 1 0,1-1 0,-1 0 0,3 5 0,17 19 0,2 0 0,30 29 0,19 22 0,-30-32 0,2-1 0,2-1 0,2-3 0,71 47 0,-71-54 0,2-2 0,1-2 0,101 42 0,129 30 0,-230-83 0,-24-8 0,1-1 0,43 9 0,30 3 0,-1 4 0,107 44 0,-114-32 0,-56-21 0,0-2 0,2-1 0,59 12 0,-54-16 0,-31-7 0,-1 0 0,1 0 0,0-1 0,0-1 0,0 0 0,0-1 0,0 0 0,0-1 0,21-4 0,21-10 0,-27 9 0,0-2 0,0 0 0,-1-3 0,0 0 0,28-16 0,-43 19 0,36-20 0,0-2 0,-2-2 0,-2-2 0,50-49 0,-7 3 0,-62 59 0,-1-1 0,0-1 0,23-31 0,205-261 0,-144 184 0,-39 51 58,28-36-1481</inkml:trace>
+  <inkml:trace contextRef="#ctx0" brushRef="#br0">6652 7 6589 0 0,'1'0'-59'0'0,"0"-1"0"0"0,-1 0 0 0 0,1 1 0 0 0,0-1 0 0 0,0 0 0 0 0,0 1 0 0 0,0-1 0 0 0,1 1 0 0 0,-1 0 1 0 0,0-1-1 0 0,0 1 0 0 0,0 0 0 0 0,0 0 0 0 0,0-1 0 0 0,0 1 0 0 0,2 0 0 0 0,27 250-86 0 0,-1-62 94 0 0,5 31 153 0 0,-16-85-52 0 0,-9-51 7 0 0,-7-61 64 0 0,0 0 0 0 0,-2-1 0 0 0,-4 40 0 0 0,2-57-55 0 0,0 1 0 0 0,0-1 1 0 0,0 0-1 0 0,-1 0 0 0 0,0 0 0 0 0,0 0 1 0 0,0 0-1 0 0,0 0 0 0 0,-1-1 1 0 0,0 1-1 0 0,1-1 0 0 0,-1 0 0 0 0,0 0 1 0 0,-1-1-1 0 0,-6 5 0 0 0,-77 33 563 0 0,84-38-615 0 0,-27 9 204 0 0,-1-1-1 0 0,-1-2 0 0 0,-49 7 0 0 0,-105 2 316 0 0,144-15-466 0 0,-359 18 355 0 0,-662 5 256 0 0,222-37-262 0 0,-366 51-284 0 0,872-33-91 0 0,-109 8 24 0 0,89 4-20 0 0,-150 16 31 0 0,477-30-76 0 0,-445 81-86 0 0,438-76 60 0 0,0 3 0 0 0,0 0 0 0 0,1 2-1 0 0,1 2 1 0 0,1 1 0 0 0,0 2 0 0 0,-44 32 0 0 0,65-41 9 0 0,1 1 1 0 0,0 0 0 0 0,0 1-1 0 0,1 0 1 0 0,1 1-1 0 0,0-1 1 0 0,-11 23 0 0 0,4-3-4 0 0,0 2 1 0 0,-10 36-1 0 0,6-3-6 0 0,3 0 0 0 0,-10 83 0 0 0,19-106 6 0 0,-3 36 14 0 0,-3 58 10 0 0,12 139-51 0 0,2-275 51 0 0,0 2-492 0 0,0 13 1603 0 0</inkml:trace>
 </inkml:ink>
 </file>
 
@@ -5837,22 +5843,26 @@
           <inkml:channel name="X" type="integer" min="-2.14748E9" max="2.14748E9" units="cm"/>
           <inkml:channel name="Y" type="integer" min="-2.14748E9" max="2.14748E9" units="cm"/>
           <inkml:channel name="F" type="integer" max="32767" units="dev"/>
+          <inkml:channel name="OA" type="integer" max="360" units="deg"/>
+          <inkml:channel name="OE" type="integer" max="90" units="deg"/>
         </inkml:traceFormat>
         <inkml:channelProperties>
           <inkml:channelProperty channel="X" name="resolution" value="1000" units="1/cm"/>
           <inkml:channelProperty channel="Y" name="resolution" value="1000" units="1/cm"/>
           <inkml:channelProperty channel="F" name="resolution" value="0" units="1/dev"/>
+          <inkml:channelProperty channel="OA" name="resolution" value="1000" units="1/deg"/>
+          <inkml:channelProperty channel="OE" name="resolution" value="1000" units="1/deg"/>
         </inkml:channelProperties>
       </inkml:inkSource>
-      <inkml:timestamp xml:id="ts0" timeString="2025-10-20T05:29:06.968"/>
+      <inkml:timestamp xml:id="ts0" timeString="2025-10-20T05:01:06.839"/>
     </inkml:context>
     <inkml:brush xml:id="br0">
       <inkml:brushProperty name="width" value="0.2" units="cm"/>
       <inkml:brushProperty name="height" value="0.2" units="cm"/>
-      <inkml:brushProperty name="color" value="#66CC00"/>
+      <inkml:brushProperty name="color" value="#FFC114"/>
     </inkml:brush>
   </inkml:definitions>
-  <inkml:trace contextRef="#ctx0" brushRef="#br0">61 37 24575,'0'-4'0,"0"-6"0,0-6 0,0 9 0,0 10 0,-5 4 0,-1 5 0,1 6 0,0 3 0,-2 3 0,-1 1 0,2 1 0,-3-4 0,0-1 0</inkml:trace>
+  <inkml:trace contextRef="#ctx0" brushRef="#br0">0 12 6393 0 0,'0'0'-220'0'0,"10"-5"-184"0"0,-4 1 406 0 0,-5 4 136 0 0,-1-1-139 0 0,0 1 0 0 0,0 0 0 0 0,1 0 0 0 0,-1 0 1 0 0,0 0-1 0 0,0-1 0 0 0,0 1 0 0 0,1 0 0 0 0,-1 0 0 0 0,0 0 0 0 0,0 0 0 0 0,0 0 0 0 0,1 0 0 0 0,-1-1 0 0 0,0 1 0 0 0,0 0 0 0 0,1 0 0 0 0,-1 0 1 0 0,0 0-1 0 0,0 0 0 0 0,1 0 0 0 0,-1 0 0 0 0,0 0 0 0 0,0 0 0 0 0,1 0 0 0 0,-1 0 0 0 0,0 1 0 0 0,0-1 0 0 0,1 0 0 0 0,-1 0 0 0 0,0 0 0 0 0,0 0 1 0 0,1 0-1 0 0,-1 0 0 0 0,0 0 0 0 0,0 1 0 0 0,0-1 0 0 0,0 0 0 0 0,1 0 0 0 0,-1 0 0 0 0,0 0 0 0 0,0 1 0 0 0,0-1 0 0 0,0 0 0 0 0,1 0 0 0 0,-1 0 1 0 0,0 1-1 0 0,0-1 0 0 0,0 0 0 0 0,0 0 0 0 0,0 1 0 0 0,13 13-22 0 0,11 42-7 0 0,-2 1 1 0 0,23 100-1 0 0,-30-74 141 0 0,-5 1-1 0 0,-2 1 0 0 0,-5-1 1 0 0,-8 101-1 0 0,-14 87 311 0 0,-11-30 172 0 0,19-170-49 0 0,11-70-554 0 0,-6-39-5983 0 0</inkml:trace>
 </inkml:ink>
 </file>
 
@@ -5897,22 +5907,26 @@
           <inkml:channel name="X" type="integer" min="-2.14748E9" max="2.14748E9" units="cm"/>
           <inkml:channel name="Y" type="integer" min="-2.14748E9" max="2.14748E9" units="cm"/>
           <inkml:channel name="F" type="integer" max="32767" units="dev"/>
+          <inkml:channel name="OA" type="integer" max="360" units="deg"/>
+          <inkml:channel name="OE" type="integer" max="90" units="deg"/>
         </inkml:traceFormat>
         <inkml:channelProperties>
           <inkml:channelProperty channel="X" name="resolution" value="1000" units="1/cm"/>
           <inkml:channelProperty channel="Y" name="resolution" value="1000" units="1/cm"/>
           <inkml:channelProperty channel="F" name="resolution" value="0" units="1/dev"/>
+          <inkml:channelProperty channel="OA" name="resolution" value="1000" units="1/deg"/>
+          <inkml:channelProperty channel="OE" name="resolution" value="1000" units="1/deg"/>
         </inkml:channelProperties>
       </inkml:inkSource>
-      <inkml:timestamp xml:id="ts0" timeString="2025-10-20T05:29:08.575"/>
+      <inkml:timestamp xml:id="ts0" timeString="2025-10-20T05:01:08.375"/>
     </inkml:context>
     <inkml:brush xml:id="br0">
       <inkml:brushProperty name="width" value="0.2" units="cm"/>
       <inkml:brushProperty name="height" value="0.2" units="cm"/>
-      <inkml:brushProperty name="color" value="#66CC00"/>
+      <inkml:brushProperty name="color" value="#FFC114"/>
     </inkml:brush>
   </inkml:definitions>
-  <inkml:trace contextRef="#ctx0" brushRef="#br0">2202 58 24575,'-1'-1'0,"1"-1"0,-1 0 0,0 1 0,0-1 0,0 1 0,0-1 0,0 1 0,0-1 0,-1 1 0,1 0 0,0 0 0,-1 0 0,1 0 0,-1 0 0,1 0 0,-1 0 0,-2-1 0,-30-14 0,8 10 0,0 2 0,0 0 0,0 2 0,0 0 0,-1 2 0,-35 4 0,-18-1 0,29 1 0,-1 2 0,1 2 0,-71 21 0,119-28 0,-26 9 0,1 1 0,0 1 0,0 2 0,1 1 0,1 1 0,1 1 0,0 2 0,1 0 0,-22 24 0,-104 81 0,49-45 0,69-55 0,0-2 0,-66 33 0,41-25 0,-18 7 0,-1-3 0,-108 31 0,105-38 0,-22 8 0,-176 57 0,260-89-1365</inkml:trace>
+  <inkml:trace contextRef="#ctx0" brushRef="#br0">2 17 4844 0 0,'0'0'-268'0'0,"-2"-5"-711"0"0,2 4 978 0 0,0 1 0 0 0,0 0 0 0 0,0-1 0 0 0,0 1 0 0 0,0-1 1 0 0,0 1-1 0 0,0 0 0 0 0,0-1 0 0 0,0 1 0 0 0,1-1 0 0 0,-1 1 0 0 0,0 0 0 0 0,0-1 1 0 0,0 1-1 0 0,0-1 0 0 0,1 1 0 0 0,-1 0 0 0 0,1-1 0 0 0,26-2 112 0 0,1 2 0 0 0,0 1 0 0 0,0 1 0 0 0,-1 2 0 0 0,1 0 0 0 0,52 15-1 0 0,-72-15-111 0 0,1 1 0 0 0,-1 0-1 0 0,0 1 1 0 0,0 0 0 0 0,0 0-1 0 0,-1 1 1 0 0,1 0-1 0 0,-1 0 1 0 0,-1 1 0 0 0,11 12-1 0 0,0 5 77 0 0,-1 0 0 0 0,14 29 0 0 0,-1-2 85 0 0,-15-26-55 0 0,-1 1 0 0 0,-1 1 0 0 0,-2 0 0 0 0,0 1 0 0 0,-2-1 0 0 0,7 45 0 0 0,11 179 414 0 0,-24-226-469 0 0,7 416 624 0 0,-9-339-563 0 0,-3 17 238 0 0,-21 137-1 0 0,19-236-527 0 0,-8-43-3564 0 0,14-6 2009 0 0</inkml:trace>
 </inkml:ink>
 </file>
 
@@ -5925,14 +5939,274 @@
           <inkml:channel name="X" type="integer" min="-2.14748E9" max="2.14748E9" units="cm"/>
           <inkml:channel name="Y" type="integer" min="-2.14748E9" max="2.14748E9" units="cm"/>
           <inkml:channel name="F" type="integer" max="32767" units="dev"/>
+          <inkml:channel name="OA" type="integer" max="360" units="deg"/>
+          <inkml:channel name="OE" type="integer" max="90" units="deg"/>
         </inkml:traceFormat>
         <inkml:channelProperties>
           <inkml:channelProperty channel="X" name="resolution" value="1000" units="1/cm"/>
           <inkml:channelProperty channel="Y" name="resolution" value="1000" units="1/cm"/>
           <inkml:channelProperty channel="F" name="resolution" value="0" units="1/dev"/>
+          <inkml:channelProperty channel="OA" name="resolution" value="1000" units="1/deg"/>
+          <inkml:channelProperty channel="OE" name="resolution" value="1000" units="1/deg"/>
         </inkml:channelProperties>
       </inkml:inkSource>
-      <inkml:timestamp xml:id="ts0" timeString="2025-10-20T05:29:10.632"/>
+      <inkml:timestamp xml:id="ts0" timeString="2025-10-20T05:01:09.946"/>
+    </inkml:context>
+    <inkml:brush xml:id="br0">
+      <inkml:brushProperty name="width" value="0.2" units="cm"/>
+      <inkml:brushProperty name="height" value="0.2" units="cm"/>
+      <inkml:brushProperty name="color" value="#FFC114"/>
+    </inkml:brush>
+  </inkml:definitions>
+  <inkml:trace contextRef="#ctx0" brushRef="#br0">6 18 4764 0 0,'0'0'-124'0'0,"-1"0"-1"0"0,1 0 129 0 0,0 0 0 0 0,0 0 1 0 0,-1 0-1 0 0,1 0 0 0 0,0 0 0 0 0,0 0 1 0 0,0 0-1 0 0,0 0 0 0 0,-1 0 1 0 0,1 0-1 0 0,0 0 0 0 0,0-1 0 0 0,0 1 1 0 0,-1 0-1 0 0,1 0 0 0 0,0 0 0 0 0,0 0 1 0 0,0 0-1 0 0,0 0 0 0 0,0-1 1 0 0,-1 1-1 0 0,1 0 0 0 0,0 0 0 0 0,0 0 1 0 0,0 0-1 0 0,0-1 0 0 0,0 1 0 0 0,0 0 1 0 0,0 0-1 0 0,0 0 0 0 0,0 0 1 0 0,0-1-1 0 0,0 1 0 0 0,0 0 0 0 0,0 0 1 0 0,0 0-1 0 0,0-1 0 0 0,0 1 0 0 0,0 0 1 0 0,0 0-1 0 0,0 0 0 0 0,0-1 0 0 0,0 1 1 0 0,0 0-1 0 0,0 0 0 0 0,0 0 1 0 0,0 0-1 0 0,0-1 0 0 0,0 1 0 0 0,0 0 1 0 0,0 0-1 0 0,1 0 0 0 0,-1 0 0 0 0,0-1 1 0 0,0 1-1 0 0,0 0 0 0 0,0 0 1 0 0,0 0-1 0 0,1 0 0 0 0,38-5 159 0 0,1 2 0 0 0,-1 2 0 0 0,61 6-1 0 0,128 24-58 0 0,-110-12-64 0 0,753 30 581 0 0,-591-34-423 0 0,320 56 1 0 0,-592-68-200 0 0,291 47 25 0 0,134 17 208 0 0,-290-47-121 0 0,0 7 0 0 0,240 75 1 0 0,-336-84-126 0 0,-1 3 1 0 0,-1 1 0 0 0,-1 3-1 0 0,-1 1 1 0 0,-2 2 0 0 0,0 2-1 0 0,41 38 1 0 0,-62-49 8 0 0,-1 1-1 0 0,-1 1 1 0 0,0 1 0 0 0,-2 1 0 0 0,-1 0-1 0 0,0 1 1 0 0,-1 0 0 0 0,-2 1 0 0 0,0 1-1 0 0,-2 0 1 0 0,0 0 0 0 0,-2 1 0 0 0,0 0-1 0 0,-2 1 1 0 0,-1-1 0 0 0,-1 1 0 0 0,1 47-1 0 0,-5-60 23 0 0,1 74 304 0 0,-18 136 0 0 0,12-194-198 0 0,-12 43-1 0 0,15-64-380 0 0,-4 16 721 0 0</inkml:trace>
+</inkml:ink>
+</file>
+
+<file path=ppt/ink/ink62.xml><?xml version="1.0" encoding="utf-8"?>
+<inkml:ink xmlns:inkml="http://www.w3.org/2003/InkML">
+  <inkml:definitions>
+    <inkml:context xml:id="ctx0">
+      <inkml:inkSource xml:id="inkSrc0">
+        <inkml:traceFormat>
+          <inkml:channel name="X" type="integer" min="-2.14748E9" max="2.14748E9" units="cm"/>
+          <inkml:channel name="Y" type="integer" min="-2.14748E9" max="2.14748E9" units="cm"/>
+          <inkml:channel name="F" type="integer" max="32767" units="dev"/>
+          <inkml:channel name="OA" type="integer" max="360" units="deg"/>
+          <inkml:channel name="OE" type="integer" max="90" units="deg"/>
+        </inkml:traceFormat>
+        <inkml:channelProperties>
+          <inkml:channelProperty channel="X" name="resolution" value="1000" units="1/cm"/>
+          <inkml:channelProperty channel="Y" name="resolution" value="1000" units="1/cm"/>
+          <inkml:channelProperty channel="F" name="resolution" value="0" units="1/dev"/>
+          <inkml:channelProperty channel="OA" name="resolution" value="1000" units="1/deg"/>
+          <inkml:channelProperty channel="OE" name="resolution" value="1000" units="1/deg"/>
+        </inkml:channelProperties>
+      </inkml:inkSource>
+      <inkml:timestamp xml:id="ts0" timeString="2025-10-20T05:01:13.385"/>
+    </inkml:context>
+    <inkml:brush xml:id="br0">
+      <inkml:brushProperty name="width" value="0.2" units="cm"/>
+      <inkml:brushProperty name="height" value="0.2" units="cm"/>
+      <inkml:brushProperty name="color" value="#FFC114"/>
+    </inkml:brush>
+  </inkml:definitions>
+  <inkml:trace contextRef="#ctx0" brushRef="#br0">4512 28 5224 0 0,'-2'-27'70'0'0,"6"59"-60"0"0,-3 1-1 0 0,0 1 1 0 0,-5 33-1 0 0,1 18 65 0 0,3-58-69 0 0,2 33 74 0 0,-4 0 1 0 0,-2 0 0 0 0,-16 84-1 0 0,18-136-7 0 0,-1-1 0 0 0,1 1-1 0 0,-1 0 1 0 0,-1-1 0 0 0,1 0-1 0 0,-1 1 1 0 0,0-1 0 0 0,-1-1-1 0 0,0 1 1 0 0,0-1 0 0 0,0 0 0 0 0,-1 0-1 0 0,0 0 1 0 0,0-1 0 0 0,0 0-1 0 0,-1 0 1 0 0,0 0 0 0 0,0-1-1 0 0,0 0 1 0 0,0-1 0 0 0,-1 0 0 0 0,1 0-1 0 0,-1 0 1 0 0,0-1 0 0 0,-8 2-1 0 0,-40 8 183 0 0,-1-3-1 0 0,0-2 0 0 0,0-3 0 0 0,0-2 1 0 0,0-2-1 0 0,-77-11 0 0 0,-48-18 420 0 0,-91-7-482 0 0,105 24-146 0 0,-80-3-51 0 0,-289-6 13 0 0,266 7 9 0 0,179 10-5 0 0,-31-3-20 0 0,-213 16 0 0 0,270-2 0 0 0,-245 33-14 0 0,227-25-9 0 0,-138 44 1 0 0,171-42 23 0 0,-186 68-25 0 0,187-63 11 0 0,1 1-1 0 0,-75 49 1 0 0,38-13-14 0 0,-90 80-1 0 0,161-124 16 0 0,1 0 1 0 0,1 1-1 0 0,0 1 0 0 0,1 0 1 0 0,1 0-1 0 0,0 1 0 0 0,-11 30 1 0 0,9-14-1 0 0,3 0 1 0 0,1 2-1 0 0,1-1 1 0 0,2 1-1 0 0,2 0 1 0 0,1 0-1 0 0,2 53 1 0 0,-4 266-24 0 0,3-220 51 0 0,3-114 19 0 0,0-17 28 0 0,-1 0-1 0 0,1 0 0 0 0,-1 0 0 0 0,0 0 1 0 0,-1 0-1 0 0,1 0 0 0 0,-2 7 1 0 0,1-10-38 0 0,13-31-4979 0 0,1 8 1670 0 0</inkml:trace>
+</inkml:ink>
+</file>
+
+<file path=ppt/ink/ink63.xml><?xml version="1.0" encoding="utf-8"?>
+<inkml:ink xmlns:inkml="http://www.w3.org/2003/InkML">
+  <inkml:definitions>
+    <inkml:context xml:id="ctx0">
+      <inkml:inkSource xml:id="inkSrc0">
+        <inkml:traceFormat>
+          <inkml:channel name="X" type="integer" min="-2.14748E9" max="2.14748E9" units="cm"/>
+          <inkml:channel name="Y" type="integer" min="-2.14748E9" max="2.14748E9" units="cm"/>
+          <inkml:channel name="F" type="integer" max="32767" units="dev"/>
+          <inkml:channel name="OA" type="integer" max="360" units="deg"/>
+          <inkml:channel name="OE" type="integer" max="90" units="deg"/>
+        </inkml:traceFormat>
+        <inkml:channelProperties>
+          <inkml:channelProperty channel="X" name="resolution" value="1000" units="1/cm"/>
+          <inkml:channelProperty channel="Y" name="resolution" value="1000" units="1/cm"/>
+          <inkml:channelProperty channel="F" name="resolution" value="0" units="1/dev"/>
+          <inkml:channelProperty channel="OA" name="resolution" value="1000" units="1/deg"/>
+          <inkml:channelProperty channel="OE" name="resolution" value="1000" units="1/deg"/>
+        </inkml:channelProperties>
+      </inkml:inkSource>
+      <inkml:timestamp xml:id="ts0" timeString="2025-10-20T05:01:15.147"/>
+    </inkml:context>
+    <inkml:brush xml:id="br0">
+      <inkml:brushProperty name="width" value="0.2" units="cm"/>
+      <inkml:brushProperty name="height" value="0.2" units="cm"/>
+      <inkml:brushProperty name="color" value="#FFC114"/>
+    </inkml:brush>
+  </inkml:definitions>
+  <inkml:trace contextRef="#ctx0" brushRef="#br0">216 14 6841 0 0,'0'0'-336'0'0,"-1"0"274"0"0,1-1 1 0 0,0 0-1 0 0,0 1 0 0 0,0-1 0 0 0,0 0 0 0 0,-1 1 1 0 0,1-1-1 0 0,0 0 0 0 0,-1 1 0 0 0,1-1 0 0 0,0 1 1 0 0,-1-1-1 0 0,1 1 0 0 0,-1-1 0 0 0,1 1 0 0 0,-1-1 1 0 0,1 1-1 0 0,-1-1 0 0 0,1 1 0 0 0,-1-1 0 0 0,0 1 1 0 0,1 0-1 0 0,-1 0 0 0 0,1-1 0 0 0,-1 1 0 0 0,0 0 1 0 0,1 0-1 0 0,-1 0 0 0 0,-1-1 0 0 0,-7 12 75 0 0,0 0 1 0 0,1 0-1 0 0,0 1 0 0 0,1 0 0 0 0,0 0 1 0 0,1 1-1 0 0,1 0 0 0 0,0 0 0 0 0,-6 21 1 0 0,-20 48 173 0 0,25-67-136 0 0,0 0-1 0 0,1 1 0 0 0,-3 23 1 0 0,-2 5 48 0 0,2-7 3 0 0,1 2 0 0 0,2-1-1 0 0,2 1 1 0 0,2 0-1 0 0,5 62 1 0 0,5 37 296 0 0,-6 0 1 0 0,-23 213-1 0 0,12-292-197 0 0,1-9 294 0 0,0 55 1 0 0,5-94-514 0 0,-6-38-3746 0 0,10 2 1133 0 0</inkml:trace>
+</inkml:ink>
+</file>
+
+<file path=ppt/ink/ink64.xml><?xml version="1.0" encoding="utf-8"?>
+<inkml:ink xmlns:inkml="http://www.w3.org/2003/InkML">
+  <inkml:definitions>
+    <inkml:context xml:id="ctx0">
+      <inkml:inkSource xml:id="inkSrc0">
+        <inkml:traceFormat>
+          <inkml:channel name="X" type="integer" min="-2.14748E9" max="2.14748E9" units="cm"/>
+          <inkml:channel name="Y" type="integer" min="-2.14748E9" max="2.14748E9" units="cm"/>
+          <inkml:channel name="F" type="integer" max="32767" units="dev"/>
+          <inkml:channel name="OA" type="integer" max="360" units="deg"/>
+          <inkml:channel name="OE" type="integer" max="90" units="deg"/>
+        </inkml:traceFormat>
+        <inkml:channelProperties>
+          <inkml:channelProperty channel="X" name="resolution" value="1000" units="1/cm"/>
+          <inkml:channelProperty channel="Y" name="resolution" value="1000" units="1/cm"/>
+          <inkml:channelProperty channel="F" name="resolution" value="0" units="1/dev"/>
+          <inkml:channelProperty channel="OA" name="resolution" value="1000" units="1/deg"/>
+          <inkml:channelProperty channel="OE" name="resolution" value="1000" units="1/deg"/>
+        </inkml:channelProperties>
+      </inkml:inkSource>
+      <inkml:timestamp xml:id="ts0" timeString="2025-10-20T05:01:16.669"/>
+    </inkml:context>
+    <inkml:brush xml:id="br0">
+      <inkml:brushProperty name="width" value="0.2" units="cm"/>
+      <inkml:brushProperty name="height" value="0.2" units="cm"/>
+      <inkml:brushProperty name="color" value="#FFC114"/>
+    </inkml:brush>
+  </inkml:definitions>
+  <inkml:trace contextRef="#ctx0" brushRef="#br0">29 3 5993 0 0,'0'0'-209'0'0,"-19"-1"-191"0"0,10 0 417 0 0,12 0 495 0 0,439 4-294 0 0,-286 5-187 0 0,595 36 540 0 0,-558-27-435 0 0,368 28 200 0 0,-459-39-272 0 0,0 4 1 0 0,-1 5-1 0 0,-1 4 0 0 0,167 56 0 0 0,-250-68-71 0 0,-1 1-1 0 0,0 0 0 0 0,-1 1 1 0 0,0 1-1 0 0,0 0 1 0 0,16 16-1 0 0,73 80-40 0 0,-75-75 38 0 0,-11-11-2 0 0,0 1 0 0 0,-2 0 0 0 0,-1 1 1 0 0,0 1-1 0 0,-2 0 0 0 0,0 1 0 0 0,-2 0 1 0 0,-1 1-1 0 0,-1 0 0 0 0,10 41 0 0 0,22 124 93 0 0,10 205 515 0 0,-47-367-532 0 0,-3-18 15 0 0,1 0 0 0 0,-1 0 1 0 0,-1 0-1 0 0,-1 19 0 0 0,0-27-160 0 0</inkml:trace>
+</inkml:ink>
+</file>
+
+<file path=ppt/ink/ink65.xml><?xml version="1.0" encoding="utf-8"?>
+<inkml:ink xmlns:inkml="http://www.w3.org/2003/InkML">
+  <inkml:definitions>
+    <inkml:context xml:id="ctx0">
+      <inkml:inkSource xml:id="inkSrc0">
+        <inkml:traceFormat>
+          <inkml:channel name="X" type="integer" min="-2.14748E9" max="2.14748E9" units="cm"/>
+          <inkml:channel name="Y" type="integer" min="-2.14748E9" max="2.14748E9" units="cm"/>
+          <inkml:channel name="F" type="integer" max="32767" units="dev"/>
+          <inkml:channel name="OA" type="integer" max="360" units="deg"/>
+          <inkml:channel name="OE" type="integer" max="90" units="deg"/>
+        </inkml:traceFormat>
+        <inkml:channelProperties>
+          <inkml:channelProperty channel="X" name="resolution" value="1000" units="1/cm"/>
+          <inkml:channelProperty channel="Y" name="resolution" value="1000" units="1/cm"/>
+          <inkml:channelProperty channel="F" name="resolution" value="0" units="1/dev"/>
+          <inkml:channelProperty channel="OA" name="resolution" value="1000" units="1/deg"/>
+          <inkml:channelProperty channel="OE" name="resolution" value="1000" units="1/deg"/>
+        </inkml:channelProperties>
+      </inkml:inkSource>
+      <inkml:timestamp xml:id="ts0" timeString="2025-10-20T05:01:18.630"/>
+    </inkml:context>
+    <inkml:brush xml:id="br0">
+      <inkml:brushProperty name="width" value="0.2" units="cm"/>
+      <inkml:brushProperty name="height" value="0.2" units="cm"/>
+      <inkml:brushProperty name="color" value="#FFC114"/>
+    </inkml:brush>
+  </inkml:definitions>
+  <inkml:trace contextRef="#ctx0" brushRef="#br0">12 3 6121 0 0,'0'0'-216'0'0,"-9"-2"-189"0"0,7 2 423 0 0,8-1 108 0 0,45 4-44 0 0,60 9 0 0 0,511 91 224 0 0,-431-82 227 0 0,235-4-1 0 0,328-52 630 0 0,240 13-1059 0 0,-785 22-104 0 0,313 37-104 0 0,-468-28 72 0 0,0 3 0 0 0,-1 2-1 0 0,0 2 1 0 0,-1 3 0 0 0,-1 2 0 0 0,90 51-1 0 0,-108-54-9 0 0,-1 1-1 0 0,-2 1 0 0 0,37 32 1 0 0,-57-41 28 0 0,-1 0 0 0 0,-1 1 0 0 0,0 0-1 0 0,-1 0 1 0 0,0 1 0 0 0,-1 0 0 0 0,0 0 0 0 0,5 17 0 0 0,10 22 21 0 0,-10-26-13 0 0,-2 0 0 0 0,0 0 1 0 0,-2 1-1 0 0,-1 0 0 0 0,-2 0 1 0 0,0 0-1 0 0,-2 1 0 0 0,-1 38 1 0 0,1 15-2 0 0,21 130 0 0 0,-15-152 53 0 0,-8-57-30 0 0,0 31 91 0 0,1-30 206 0 0</inkml:trace>
+</inkml:ink>
+</file>
+
+<file path=ppt/ink/ink66.xml><?xml version="1.0" encoding="utf-8"?>
+<inkml:ink xmlns:inkml="http://www.w3.org/2003/InkML">
+  <inkml:definitions>
+    <inkml:context xml:id="ctx0">
+      <inkml:inkSource xml:id="inkSrc0">
+        <inkml:traceFormat>
+          <inkml:channel name="X" type="integer" min="-2.14748E9" max="2.14748E9" units="cm"/>
+          <inkml:channel name="Y" type="integer" min="-2.14748E9" max="2.14748E9" units="cm"/>
+          <inkml:channel name="F" type="integer" max="32767" units="dev"/>
+          <inkml:channel name="OA" type="integer" max="360" units="deg"/>
+          <inkml:channel name="OE" type="integer" max="90" units="deg"/>
+        </inkml:traceFormat>
+        <inkml:channelProperties>
+          <inkml:channelProperty channel="X" name="resolution" value="1000" units="1/cm"/>
+          <inkml:channelProperty channel="Y" name="resolution" value="1000" units="1/cm"/>
+          <inkml:channelProperty channel="F" name="resolution" value="0" units="1/dev"/>
+          <inkml:channelProperty channel="OA" name="resolution" value="1000" units="1/deg"/>
+          <inkml:channelProperty channel="OE" name="resolution" value="1000" units="1/deg"/>
+        </inkml:channelProperties>
+      </inkml:inkSource>
+      <inkml:timestamp xml:id="ts0" timeString="2025-10-20T05:01:44.221"/>
+    </inkml:context>
+    <inkml:brush xml:id="br0">
+      <inkml:brushProperty name="width" value="0.2" units="cm"/>
+      <inkml:brushProperty name="height" value="0.2" units="cm"/>
+      <inkml:brushProperty name="color" value="#FFC114"/>
+    </inkml:brush>
+  </inkml:definitions>
+  <inkml:trace contextRef="#ctx0" brushRef="#br0">2401 68 1916 0 0,'-8'-32'2513'0'0,"5"14"-1502"0"0,3 18-907 0 0,0-1 0 0 0,0 0 0 0 0,0 0 0 0 0,0 0 0 0 0,0 1 0 0 0,0-1 0 0 0,-1 0 0 0 0,1 0 0 0 0,0 0 0 0 0,-1 1 0 0 0,1-1 0 0 0,0 0 0 0 0,-1 1 0 0 0,1-1 0 0 0,-1 0 0 0 0,1 1 0 0 0,-1-1 0 0 0,1 1 0 0 0,-1-1 0 0 0,0 0 0 0 0,1 1 0 0 0,-1 0 0 0 0,0-1 0 0 0,1 1 0 0 0,-2-1 0 0 0,-1 3-97 0 0,0 0 1 0 0,0 1-1 0 0,1-1 0 0 0,-1 1 0 0 0,0 0 1 0 0,1 0-1 0 0,0-1 0 0 0,0 1 0 0 0,0 1 1 0 0,0-1-1 0 0,0 0 0 0 0,1 1 0 0 0,-3 4 1 0 0,1 0 15 0 0,-10 19 31 0 0,1 1 1 0 0,2 1-1 0 0,0 0 1 0 0,-4 30-1 0 0,11-49-50 0 0,-4 34 26 0 0,1-1-1 0 0,2 2 1 0 0,2 65 0 0 0,2-98-25 0 0,6 48 7 0 0,-5-47-7 0 0,1 0 1 0 0,0 0 0 0 0,2-1-1 0 0,6 21 1 0 0,20 43 0 0 0,-30-74-1 0 0,14 24 12 0 0,-12-19-19 0 0,-1-4 6 0 0,28 71 7 0 0,-6-20 26 0 0,-11-17-34 0 0,-8-18-1 0 0,-4-15 8 0 0,2 5-7 0 0,2 19 4 0 0,1 51 0 0 0,-13 12 17 0 0,5-25-10 0 0,3-64-10 0 0,0 0 0 0 0,-2 18 7 0 0,1-17-8 0 0,1-2-2 0 0,-2 6 2 0 0,2-6 9 0 0,-1 1-7 0 0,0-1-1 0 0,0 0 0 0 0,0 1 1 0 0,0-1-1 0 0,0 0 0 0 0,0 0 1 0 0,0 0-1 0 0,0 0 0 0 0,-1 0 0 0 0,1 0 1 0 0,0 0-1 0 0,0 0 0 0 0,-1 0 1 0 0,1-1-1 0 0,-1 1 0 0 0,1 0 1 0 0,-1-1-1 0 0,1 1 0 0 0,-1-1 0 0 0,-1 1 1 0 0,-41 7 70 0 0,-70-15 131 0 0,101 5-164 0 0,0 0 0 0 0,0-1 0 0 0,0 0 0 0 0,0-1 0 0 0,1 0 0 0 0,-20-10 0 0 0,14 7-25 0 0,1 1 0 0 0,-1 1 0 0 0,-30-5 0 0 0,39 8-10 0 0,-96-28 37 0 0,58 19-42 0 0,-2 1 1 0 0,-66-4 0 0 0,52 9-1 0 0,48 3 1 0 0,-102-1-8 0 0,57 1-10 0 0,37 2 14 0 0,-74 2 23 0 0,64-2-29 0 0,-49 6-1 0 0,-45 8 9 0 0,28 1-7 0 0,91-14 7 0 0,-279 42 17 0 0,154-24-2 0 0,67-11-8 0 0,-12 0-7 0 0,-42 7 22 0 0,17-5-11 0 0,85-6-12 0 0,5-2 0 0 0,1 0 0 0 0,-1-1 0 0 0,1 0 0 0 0,-17-1 0 0 0,-20 2 0 0 0,46-2-5 0 0,-7 0-110 0 0,6 0-301 0 0,40-11-4289 0 0,-17 7 2049 0 0</inkml:trace>
+</inkml:ink>
+</file>
+
+<file path=ppt/ink/ink67.xml><?xml version="1.0" encoding="utf-8"?>
+<inkml:ink xmlns:inkml="http://www.w3.org/2003/InkML">
+  <inkml:definitions>
+    <inkml:context xml:id="ctx0">
+      <inkml:inkSource xml:id="inkSrc0">
+        <inkml:traceFormat>
+          <inkml:channel name="X" type="integer" min="-2.14748E9" max="2.14748E9" units="cm"/>
+          <inkml:channel name="Y" type="integer" min="-2.14748E9" max="2.14748E9" units="cm"/>
+          <inkml:channel name="F" type="integer" max="32767" units="dev"/>
+          <inkml:channel name="OA" type="integer" max="360" units="deg"/>
+          <inkml:channel name="OE" type="integer" max="90" units="deg"/>
+        </inkml:traceFormat>
+        <inkml:channelProperties>
+          <inkml:channelProperty channel="X" name="resolution" value="1000" units="1/cm"/>
+          <inkml:channelProperty channel="Y" name="resolution" value="1000" units="1/cm"/>
+          <inkml:channelProperty channel="F" name="resolution" value="0" units="1/dev"/>
+          <inkml:channelProperty channel="OA" name="resolution" value="1000" units="1/deg"/>
+          <inkml:channelProperty channel="OE" name="resolution" value="1000" units="1/deg"/>
+        </inkml:channelProperties>
+      </inkml:inkSource>
+      <inkml:timestamp xml:id="ts0" timeString="2025-10-20T05:01:48.224"/>
+    </inkml:context>
+    <inkml:brush xml:id="br0">
+      <inkml:brushProperty name="width" value="0.2" units="cm"/>
+      <inkml:brushProperty name="height" value="0.2" units="cm"/>
+      <inkml:brushProperty name="color" value="#FFC114"/>
+    </inkml:brush>
+  </inkml:definitions>
+  <inkml:trace contextRef="#ctx0" brushRef="#br0">4372 72 6017 0 0,'0'0'-275'0'0,"-3"-1"-385"0"0,165 4 472 0 0,75 2 469 0 0,6 20-74 0 0,88 4-22 0 0,-203-29 41 0 0,186-24 0 0 0,-83 7-84 0 0,-30-13 46 0 0,-199 30-141 0 0,5 0 6 0 0,-1 0-1 0 0,1-1 1 0 0,-1 0 0 0 0,0 0-1 0 0,11-3 1 0 0,-15 3-36 0 0,9-3 303 0 0,-13 0-129 0 0,-27-3-71 0 0,-49-3-65 0 0,-49 3 17 0 0,-160-5-6 0 0,-327 2 30 0 0,262 31-67 0 0,243-12-18 0 0,-131 16 3 0 0,-265-3 212 0 0,42-20 510 0 0,451 1-710 0 0,-19-4 32 0 0,-83 2 59 0 0,111-1-103 0 0,-38-3 56 0 0,-168-7 234 0 0,206 10-297 0 0,0 0 2 0 0,-16 0 3 0 0,-84-2 80 0 0,-18 0 149 0 0,118 1-213 0 0,-25 1 45 0 0,-203-2 88 0 0,181 2-149 0 0,-99 5 1 0 0,-240 2-7 0 0,350-5 0 0 0,-2-1 7 0 0,-313-4 36 0 0,236-1-61 0 0,51 3 28 0 0,-98-4 10 0 0,73 1-44 0 0,89 4 24 0 0,-19 0 4 0 0,-20-3-22 0 0,33 2 9 0 0,-59 2-3 0 0,9-3 3 0 0,-108 7 0 0 0,126-3 5 0 0,-78 0 1 0 0,66 1 8 0 0,31-3-11 0 0,-83 7-13 0 0,102-7 10 0 0,-22 3-16 0 0,10-1 13 0 0,0 1 0 0 0,-61 9-17 0 0,73-12 13 0 0,-11 3-21 0 0,-3 3 24 0 0,11-2-2 0 0,-14 9-14 0 0,-36 17 46 0 0,46-24-18 0 0,-5 0-8 0 0,10-3-4 0 0,-2 4-4 0 0,6-6 15 0 0,-1 0 0 0 0,-5 2-8 0 0,4-2 0 0 0,1 0 0 0 0,-1 0 0 0 0,1 1 0 0 0,-1-1 0 0 0,1 0 0 0 0,-1 1 0 0 0,1-1 0 0 0,0 1 0 0 0,0 0 0 0 0,0 0 0 0 0,0 0 0 0 0,0 0 0 0 0,0 0 0 0 0,1 1 0 0 0,-1-1 0 0 0,1 0 0 0 0,-2 4 0 0 0,0 0-7 0 0,2-4 12 0 0,-16 32-67 0 0,10-14 49 0 0,6-13 18 0 0,-1 4-6 0 0,2-8 2 0 0,-1 1-1 0 0,1-1 1 0 0,0 1-1 0 0,0-1 0 0 0,0 0 1 0 0,0 1-1 0 0,0-1 1 0 0,1 1-1 0 0,0-1 0 0 0,0 0 1 0 0,2 7-1 0 0,40 143 12 0 0,-42-149-7 0 0,1 6-6 0 0,3 7 6 0 0,4 29 4 0 0,-8-43 1 0 0,14 92-6 0 0,-14-91 3 0 0,-1 22 9 0 0,-1-1 0 0 0,-1 1-1 0 0,-1-1 1 0 0,-1 0 0 0 0,-1 0 0 0 0,-12 35 0 0 0,-16 51 7 0 0,21-63 6 0 0,10-28-21 0 0,2-15-3 0 0,0 0 0 0 0,0 0 1 0 0,-1 1-1 0 0,0-1 0 0 0,0 0 1 0 0,0 0-1 0 0,-1 0 0 0 0,0 0 1 0 0,0 0-1 0 0,-2 4 0 0 0,3-7 18 0 0,3-2-74 0 0,-1-1 1 0 0,0 1-1 0 0,1 0 1 0 0,-1-1-1 0 0,0 1 1 0 0,0-1-1 0 0,1 1 1 0 0,-1-1-1 0 0,0 1 1 0 0,0-1-1 0 0,0 0 1 0 0,0 0-1 0 0,0 1 1 0 0,0-1-1 0 0,0 0 1 0 0,0 0-1 0 0,0 0 0 0 0,0 0 1 0 0,1-2-1 0 0,38-34-1065 0 0,-37 34 947 0 0,47-44-2288 0 0,12-7-663 0 0</inkml:trace>
+</inkml:ink>
+</file>
+
+<file path=ppt/ink/ink68.xml><?xml version="1.0" encoding="utf-8"?>
+<inkml:ink xmlns:inkml="http://www.w3.org/2003/InkML">
+  <inkml:definitions>
+    <inkml:context xml:id="ctx0">
+      <inkml:inkSource xml:id="inkSrc0">
+        <inkml:traceFormat>
+          <inkml:channel name="X" type="integer" min="-2.14748E9" max="2.14748E9" units="cm"/>
+          <inkml:channel name="Y" type="integer" min="-2.14748E9" max="2.14748E9" units="cm"/>
+          <inkml:channel name="F" type="integer" max="32767" units="dev"/>
+          <inkml:channel name="OA" type="integer" max="360" units="deg"/>
+          <inkml:channel name="OE" type="integer" max="90" units="deg"/>
+        </inkml:traceFormat>
+        <inkml:channelProperties>
+          <inkml:channelProperty channel="X" name="resolution" value="1000" units="1/cm"/>
+          <inkml:channelProperty channel="Y" name="resolution" value="1000" units="1/cm"/>
+          <inkml:channelProperty channel="F" name="resolution" value="0" units="1/dev"/>
+          <inkml:channelProperty channel="OA" name="resolution" value="1000" units="1/deg"/>
+          <inkml:channelProperty channel="OE" name="resolution" value="1000" units="1/deg"/>
+        </inkml:channelProperties>
+      </inkml:inkSource>
+      <inkml:timestamp xml:id="ts0" timeString="2025-10-20T05:01:53.299"/>
+    </inkml:context>
+    <inkml:brush xml:id="br0">
+      <inkml:brushProperty name="width" value="0.2" units="cm"/>
+      <inkml:brushProperty name="height" value="0.2" units="cm"/>
+      <inkml:brushProperty name="color" value="#FFC114"/>
+    </inkml:brush>
+  </inkml:definitions>
+  <inkml:trace contextRef="#ctx0" brushRef="#br0">3 22 6569 0 0,'0'-1'-17'0'0,"-1"0"-1"0"0,1 1 1 0 0,0-1 0 0 0,-1 0 0 0 0,1 0 0 0 0,0 0 0 0 0,0 0 0 0 0,0 0 0 0 0,0 0 0 0 0,0 0 0 0 0,0 0 0 0 0,0 0 0 0 0,0 0 0 0 0,0 0 0 0 0,1 0 0 0 0,-1 0-1 0 0,0 0 1 0 0,0 0 0 0 0,1-1 0 0 0,32 1 160 0 0,1 1-1 0 0,-1 2 1 0 0,64 11 0 0 0,16 1-76 0 0,17-7 308 0 0,-126-7-357 0 0,45 5 70 0 0,31 9 41 0 0,1-4-1 0 0,107 1 1 0 0,-59-3 172 0 0,-77-4-272 0 0,108 3 22 0 0,-116-5 15 0 0,67-7 0 0 0,-22 1-18 0 0,137-9 42 0 0,-131 6-40 0 0,-63 5-26 0 0,12 2-12 0 0,167 5 28 0 0,-154-5-33 0 0,99 0-4 0 0,-76 2-6 0 0,4 1 1 0 0,26 6 56 0 0,150-7-1 0 0,-127-4-29 0 0,101 5 24 0 0,328 4 220 0 0,-192 9-237 0 0,-236-7 14 0 0,330 5-63 0 0,-170-6 69 0 0,-227-8-45 0 0,147 3-9 0 0,-90-6 7 0 0,63 4-12 0 0,-22 0 43 0 0,-54-3-21 0 0,-103 2-12 0 0,32-3-12 0 0,56 2 0 0 0,110-5 26 0 0,-183 4-16 0 0,24-1-2 0 0,1 2-1 0 0,80 9 0 0 0,-42-7 1 0 0,-84-1 8 0 0,2 0-3 0 0,78-3 14 0 0,-23 3-25 0 0,8 3 5 0 0,-17-3 5 0 0,-43 0-8 0 0,11 1-10 0 0,26 3-3 0 0,-32-1 2 0 0,0 1-1 0 0,0 0 0 0 0,-1 0 1 0 0,1 1-1 0 0,-1 1 0 0 0,0 0 1 0 0,13 10-1 0 0,2-1 4 0 0,-23-13 4 0 0,28 25-62 0 0,-28-25 68 0 0,0 0 1 0 0,-1 1 0 0 0,1-1-1 0 0,-1 1 1 0 0,1-1-1 0 0,-1 1 1 0 0,0 0-1 0 0,0 0 1 0 0,0 0 0 0 0,0 0-1 0 0,-1 0 1 0 0,1 0-1 0 0,-1 0 1 0 0,2 7 0 0 0,3 5-3 0 0,1 2 5 0 0,14 18 53 0 0,-9-19-42 0 0,-10-13-14 0 0,11 25 10 0 0,-3 27-5 0 0,-9-53-3 0 0,-10 42 47 0 0,-26 56 53 0 0,21-45-49 0 0,-38 94 1 0 0,40-118-44 0 0,1 0 0 0 0,2 1 0 0 0,1 1 0 0 0,1-1 1 0 0,-4 67-1 0 0,21-24 49 0 0,-1-20-39 0 0,-7-40 3 0 0,0 1 1 0 0,1-1-1 0 0,1 0 1 0 0,1 0 0 0 0,0 0-1 0 0,9 18 1 0 0,-13-31-11 0 0,2 8 1873 0 0,5-26-1423 0 0,6-31-96 0 0,-1-9-75 0 0,-2 0-1 0 0,-2-1 1 0 0,2-84-1 0 0,-27-63 76 0 0,7 131-143 0 0,7 10-166 0 0,3 0 1 0 0,14-102 0 0 0,-9 136-61 0 0,-4 19 3 0 0,0 0 0 0 0,0-1 0 0 0,-1 1 1 0 0,-1-17-1 0 0,9-89 65 0 0,-9 114-22 0 0,17-21-102 0 0,-12 16 264 0 0</inkml:trace>
+</inkml:ink>
+</file>
+
+<file path=ppt/ink/ink69.xml><?xml version="1.0" encoding="utf-8"?>
+<inkml:ink xmlns:inkml="http://www.w3.org/2003/InkML">
+  <inkml:definitions>
+    <inkml:context xml:id="ctx0">
+      <inkml:inkSource xml:id="inkSrc0">
+        <inkml:traceFormat>
+          <inkml:channel name="X" type="integer" min="-2.14748E9" max="2.14748E9" units="cm"/>
+          <inkml:channel name="Y" type="integer" min="-2.14748E9" max="2.14748E9" units="cm"/>
+          <inkml:channel name="F" type="integer" max="32767" units="dev"/>
+          <inkml:channel name="OA" type="integer" max="360" units="deg"/>
+          <inkml:channel name="OE" type="integer" max="90" units="deg"/>
+        </inkml:traceFormat>
+        <inkml:channelProperties>
+          <inkml:channelProperty channel="X" name="resolution" value="1000" units="1/cm"/>
+          <inkml:channelProperty channel="Y" name="resolution" value="1000" units="1/cm"/>
+          <inkml:channelProperty channel="F" name="resolution" value="0" units="1/dev"/>
+          <inkml:channelProperty channel="OA" name="resolution" value="1000" units="1/deg"/>
+          <inkml:channelProperty channel="OE" name="resolution" value="1000" units="1/deg"/>
+        </inkml:channelProperties>
+      </inkml:inkSource>
+      <inkml:timestamp xml:id="ts0" timeString="2025-10-20T05:28:40.909"/>
     </inkml:context>
     <inkml:brush xml:id="br0">
       <inkml:brushProperty name="width" value="0.2" units="cm"/>
@@ -5940,7 +6214,7 @@
       <inkml:brushProperty name="color" value="#66CC00"/>
     </inkml:brush>
   </inkml:definitions>
-  <inkml:trace contextRef="#ctx0" brushRef="#br0">0 0 24575,'32'3'0,"-1"2"0,0 1 0,-1 1 0,1 2 0,54 23 0,-70-26 0,38 14 0,-2 3 0,74 44 0,-45-23 0,-50-28 0,-1 0 0,40 31 0,54 38 0,-89-64 0,0 1 0,-2 2 0,40 38 0,-33-21 0,7 8 0,1-2 0,3-2 0,103 72 0,183 60 0,-298-161 0,0-1 0,2-3 0,-1-1 0,2-2 0,62 7 0,1 5-1365</inkml:trace>
+  <inkml:trace contextRef="#ctx0" brushRef="#br0">3379 152 3916 0 0,'0'0'-74'0'0,"8"0"48"0"0,33-2 1226 0 0,-75-25-914 0 0,3 10-214 0 0,0 2 0 0 0,-1 0-1 0 0,-1 3 1 0 0,0 0-1 0 0,-1 3 1 0 0,0 0 0 0 0,-41-4-1 0 0,-31 2-48 0 0,-130 2-1 0 0,-107 20 42 0 0,249-6-58 0 0,-174 24 31 0 0,17-1 8 0 0,198-23-47 0 0,1 2 1 0 0,-1 3 0 0 0,-72 23-1 0 0,-150 65-10 0 0,244-86 12 0 0,-101 43 45 0 0,-133 75 1 0 0,-92 65-65 0 0,314-167 17 0 0,1 1 1 0 0,2 3-1 0 0,1 0 0 0 0,1 3 1 0 0,-32 39-1 0 0,48-49-2 0 0,1 2 0 0 0,1-1-1 0 0,1 2 1 0 0,2 1 0 0 0,1 0 0 0 0,1 1 0 0 0,-13 38 0 0 0,23-51 9 0 0,1 1 1 0 0,0-1 0 0 0,1 1 0 0 0,1 0 0 0 0,1 0 0 0 0,0 0 0 0 0,3 22 0 0 0,23 128 29 0 0,-1-12-2 0 0,-19-73-10 0 0,-3-37-18 0 0,1 0 1 0 0,2 0-1 0 0,3 0 1 0 0,13 48-1 0 0,-7-47 13 0 0,3 0 0 0 0,1-1 0 0 0,2-1 1 0 0,2-1-1 0 0,2-1 0 0 0,42 57 0 0 0,153 136 83 0 0,-102-116-36 0 0,-64-67-59 0 0,115 91 0 0 0,-121-105 14 0 0,64 68 1 0 0,-10-8 3 0 0,-90-88-18 0 0,51 43 16 0 0,-2 3 1 0 0,83 104-1 0 0,-97-100 18 0 0,102 104 1 0 0,-119-138-29 0 0,1-1 0 0 0,2-1-1 0 0,0-2 1 0 0,2-1 0 0 0,53 25 0 0 0,-24-19-3 0 0,2-4-1 0 0,1-2 0 0 0,1-3 1 0 0,0-3-1 0 0,74 7 0 0 0,-8-10 15 0 0,226-7 0 0 0,472-74-45 0 0,-319-23 12 0 0,-442 77 8 0 0,3-1 25 0 0,214-49-56 0 0,-214 44 116 0 0,130-54 0 0 0,-178 61-35 0 0,0-1 0 0 0,0 0-1 0 0,-1-2 1 0 0,-1-1-1 0 0,-1-1 1 0 0,-1-1 0 0 0,0-1-1 0 0,-1-1 1 0 0,27-37-1 0 0,4-16 349 0 0,70-139-1 0 0,14-21-84 0 0,-75 153-315 0 0,70-72-1 0 0,0 2 0 0 0,-112 129-4 0 0,1 2-1 0 0,1 0 1 0 0,1 1-1 0 0,1 1 0 0 0,0 1 1 0 0,44-25-1 0 0,-3 9-29 0 0,97-35 0 0 0,-128 55 43 0 0,260-112-33 0 0,-256 106 82 0 0,0-1 0 0 0,-1-2 0 0 0,-1-1 0 0 0,-1-2 0 0 0,48-48 0 0 0,-55 46 103 0 0,-2-2 0 0 0,-1 0 0 0 0,-2-1 0 0 0,0-2 0 0 0,-2 0-1 0 0,-2-1 1 0 0,-1 0 0 0 0,13-40 0 0 0,-21 48-36 0 0,-2 0 0 0 0,0 0 0 0 0,-1-1-1 0 0,-2 0 1 0 0,0 0 0 0 0,-2 0 0 0 0,-1 0-1 0 0,-1 0 1 0 0,-1 0 0 0 0,-1 0 0 0 0,-2 0 0 0 0,0 1-1 0 0,-11-31 1 0 0,3 22-85 0 0,-1 1 0 0 0,-1 1 0 0 0,-2 0 0 0 0,-1 2 0 0 0,-2 0 0 0 0,-23-28 0 0 0,-153-154-116 0 0,168 188 27 0 0,-1 2 1 0 0,-1 1-1 0 0,-2 1 0 0 0,1 1 1 0 0,-2 2-1 0 0,-44-16 0 0 0,-93-31-126 0 0,-2 6 0 0 0,-355-67-1 0 0,393 107 133 0 0,-142 0 0 0 0,22 2 38 0 0,42-12 6 0 0,-79-6 2 0 0,87 13-29 0 0,33 3 39 0 0,-106-24 27 0 0,79-5 312 0 0,146 33-167 0 0,50 13-199 0 0,-5 0 431 0 0</inkml:trace>
 </inkml:ink>
 </file>
 
@@ -5976,6 +6250,326 @@
 </inkml:ink>
 </file>
 
+<file path=ppt/ink/ink70.xml><?xml version="1.0" encoding="utf-8"?>
+<inkml:ink xmlns:inkml="http://www.w3.org/2003/InkML">
+  <inkml:definitions>
+    <inkml:context xml:id="ctx0">
+      <inkml:inkSource xml:id="inkSrc0">
+        <inkml:traceFormat>
+          <inkml:channel name="X" type="integer" min="-2.14748E9" max="2.14748E9" units="cm"/>
+          <inkml:channel name="Y" type="integer" min="-2.14748E9" max="2.14748E9" units="cm"/>
+          <inkml:channel name="F" type="integer" max="32767" units="dev"/>
+          <inkml:channel name="OA" type="integer" max="360" units="deg"/>
+          <inkml:channel name="OE" type="integer" max="90" units="deg"/>
+        </inkml:traceFormat>
+        <inkml:channelProperties>
+          <inkml:channelProperty channel="X" name="resolution" value="1000" units="1/cm"/>
+          <inkml:channelProperty channel="Y" name="resolution" value="1000" units="1/cm"/>
+          <inkml:channelProperty channel="F" name="resolution" value="0" units="1/dev"/>
+          <inkml:channelProperty channel="OA" name="resolution" value="1000" units="1/deg"/>
+          <inkml:channelProperty channel="OE" name="resolution" value="1000" units="1/deg"/>
+        </inkml:channelProperties>
+      </inkml:inkSource>
+      <inkml:timestamp xml:id="ts0" timeString="2025-10-20T05:28:40.910"/>
+    </inkml:context>
+    <inkml:brush xml:id="br0">
+      <inkml:brushProperty name="width" value="0.2" units="cm"/>
+      <inkml:brushProperty name="height" value="0.2" units="cm"/>
+      <inkml:brushProperty name="color" value="#66CC00"/>
+    </inkml:brush>
+  </inkml:definitions>
+  <inkml:trace contextRef="#ctx0" brushRef="#br0">39 144 3168 0 0,'-3'-33'4814'0'0,"3"33"-4795"0"0,-5 21-540 0 0,2-9 497 0 0,-7 36-1 0 0,3 0 0 0 0,1 1 0 0 0,2 0 0 0 0,4 56 0 0 0,11 83 89 0 0,-10-172 510 0 0,0-24 760 0 0,0-31-541 0 0,-4-128-289 0 0,3 123-417 0 0,4-198 289 0 0,-2 175 215 0 0,-3 64-522 0 0,1 1-99 0 0,0 1 6 0 0,0 1 0 0 0,0 0 0 0 0,0 0 0 0 0,0-1 0 0 0,-1 1 0 0 0,1 0 0 0 0,0 0 0 0 0,0-1 0 0 0,0 1 0 0 0,0 0 0 0 0,0 0 0 0 0,0-1 0 0 0,0 1 0 0 0,0 0 0 0 0,0 0 0 0 0,0-1 0 0 0,0 1 0 0 0,0 0 0 0 0,0-1 0 0 0,0 1 0 0 0,0 0 0 0 0,0 0 0 0 0,0-1 0 0 0,0 1 0 0 0,0 0 0 0 0,0-1 0 0 0,0 1 0 0 0,0 0 0 0 0,1 0 0 0 0,-1-1 0 0 0,0 1 0 0 0,0 0 0 0 0,0 0 0 0 0,0 0 0 0 0,1-1 0 0 0,-1 1 0 0 0,0 0 0 0 0,0 0 0 0 0,0 0 1 0 0,1 0-1 0 0,-1-1 0 0 0,0 1 0 0 0,0 0 0 0 0,1 0 0 0 0,48 58-172 0 0,89 83 0 0 0,-114-118 191 0 0,34 29 0 0 0,99 66 1 0 0,-65-52 66 0 0,-50-36 1969 0 0,-41-31-1981 0 0,0-1 0 0 0,0 1 0 0 0,0 0-1 0 0,0 0 1 0 0,0 0 0 0 0,0 0 0 0 0,0-1 0 0 0,0 1-1 0 0,-1 0 1 0 0,1-1 0 0 0,0 1 0 0 0,-1-1 0 0 0,1 1-1 0 0,-1-1 1 0 0,1 1 0 0 0,-1-1 0 0 0,0 1 0 0 0,0-1-1 0 0,0 1 1 0 0,0-1 0 0 0,0 1 0 0 0,0-1 0 0 0,0-1-1 0 0,-7-45 160 0 0,4 34-79 0 0,-25-220 210 0 0,12 91-78 0 0,7 78-667 0 0,9 63 351 0 0,-2-9-517 0 0</inkml:trace>
+</inkml:ink>
+</file>
+
+<file path=ppt/ink/ink71.xml><?xml version="1.0" encoding="utf-8"?>
+<inkml:ink xmlns:inkml="http://www.w3.org/2003/InkML">
+  <inkml:definitions>
+    <inkml:context xml:id="ctx0">
+      <inkml:inkSource xml:id="inkSrc0">
+        <inkml:traceFormat>
+          <inkml:channel name="X" type="integer" min="-2.14748E9" max="2.14748E9" units="cm"/>
+          <inkml:channel name="Y" type="integer" min="-2.14748E9" max="2.14748E9" units="cm"/>
+          <inkml:channel name="F" type="integer" max="32767" units="dev"/>
+          <inkml:channel name="OA" type="integer" max="360" units="deg"/>
+          <inkml:channel name="OE" type="integer" max="90" units="deg"/>
+        </inkml:traceFormat>
+        <inkml:channelProperties>
+          <inkml:channelProperty channel="X" name="resolution" value="1000" units="1/cm"/>
+          <inkml:channelProperty channel="Y" name="resolution" value="1000" units="1/cm"/>
+          <inkml:channelProperty channel="F" name="resolution" value="0" units="1/dev"/>
+          <inkml:channelProperty channel="OA" name="resolution" value="1000" units="1/deg"/>
+          <inkml:channelProperty channel="OE" name="resolution" value="1000" units="1/deg"/>
+        </inkml:channelProperties>
+      </inkml:inkSource>
+      <inkml:timestamp xml:id="ts0" timeString="2025-10-20T05:28:40.911"/>
+    </inkml:context>
+    <inkml:brush xml:id="br0">
+      <inkml:brushProperty name="width" value="0.2" units="cm"/>
+      <inkml:brushProperty name="height" value="0.2" units="cm"/>
+      <inkml:brushProperty name="color" value="#66CC00"/>
+    </inkml:brush>
+  </inkml:definitions>
+  <inkml:trace contextRef="#ctx0" brushRef="#br0">678 93 5597 0 0,'0'0'-212'0'0,"17"0"1497"0"0,-17-1-1266 0 0,0 0 1 0 0,0-1-1 0 0,0 1 0 0 0,0 0 1 0 0,0 0-1 0 0,0-1 0 0 0,0 1 1 0 0,-1 0-1 0 0,1-1 0 0 0,-1 1 1 0 0,1 0-1 0 0,-1 0 0 0 0,1-1 1 0 0,-1 1-1 0 0,0 0 0 0 0,1 0 1 0 0,-1 0-1 0 0,0 0 0 0 0,0 0 1 0 0,0 0-1 0 0,0 0 0 0 0,-1-1 1 0 0,-35-22 194 0 0,-44-5-68 0 0,61 25-151 0 0,0 1 0 0 0,-1 0 1 0 0,1 2-1 0 0,0 0 0 0 0,-1 2 0 0 0,1 0 1 0 0,0 1-1 0 0,-1 1 0 0 0,1 1 1 0 0,1 0-1 0 0,-1 2 0 0 0,1 0 0 0 0,-26 13 1 0 0,31-12-40 0 0,2 0 0 0 0,-1 1 0 0 0,1 1 0 0 0,-21 18 0 0 0,32-26 40 0 0,1 0-1 0 0,-1-1 1 0 0,1 1 0 0 0,0 0 0 0 0,-1 0 0 0 0,1 0 0 0 0,0 0 0 0 0,-1-1 0 0 0,1 1 0 0 0,0 0 0 0 0,0 0-1 0 0,0 0 1 0 0,0 0 0 0 0,0 0 0 0 0,0 0 0 0 0,0 0 0 0 0,0 0 0 0 0,0-1 0 0 0,0 1 0 0 0,0 0 0 0 0,1 0-1 0 0,-1 0 1 0 0,0 0 0 0 0,1 0 0 0 0,-1-1 0 0 0,0 1 0 0 0,1 0 0 0 0,-1 0 0 0 0,1-1 0 0 0,0 1 0 0 0,-1 0-1 0 0,1 0 1 0 0,-1-1 0 0 0,1 1 0 0 0,0-1 0 0 0,0 1 0 0 0,-1-1 0 0 0,2 1 0 0 0,28 21-33 0 0,177 69-10 0 0,-125-57 23 0 0,-1 2-1 0 0,81 52 1 0 0,-148-80 6 0 0,-11-7 15 0 0,-1 0 1 0 0,0 0 0 0 0,0 0-1 0 0,0 0 1 0 0,0 1-1 0 0,0-1 1 0 0,0 0 0 0 0,0 1-1 0 0,0 0 1 0 0,0-1-1 0 0,-1 1 1 0 0,1 0 0 0 0,-1 0-1 0 0,1 0 1 0 0,1 4-1 0 0,-2-4 25 0 0,-5 0 8 0 0,-8 6 14 0 0,0-2 1 0 0,0 1 0 0 0,-1-2 0 0 0,0 1-1 0 0,-1-2 1 0 0,1 0 0 0 0,-1 0-1 0 0,1-1 1 0 0,-21 1 0 0 0,-133 4 341 0 0,157-8-380 0 0,-203-8 616 0 0,189 6-663 0 0,1-2-1 0 0,0 0 0 0 0,0-2 0 0 0,0 0 1 0 0,0-1-1 0 0,-40-21 0 0 0,59 26-381 0 0,0-1-1 0 0,0 0 1 0 0,0 0 0 0 0,0-1 0 0 0,1 1-1 0 0,-1-1 1 0 0,1 1 0 0 0,-3-6-1 0 0,-2-3-1946 0 0</inkml:trace>
+</inkml:ink>
+</file>
+
+<file path=ppt/ink/ink72.xml><?xml version="1.0" encoding="utf-8"?>
+<inkml:ink xmlns:inkml="http://www.w3.org/2003/InkML">
+  <inkml:definitions>
+    <inkml:context xml:id="ctx0">
+      <inkml:inkSource xml:id="inkSrc0">
+        <inkml:traceFormat>
+          <inkml:channel name="X" type="integer" min="-2.14748E9" max="2.14748E9" units="cm"/>
+          <inkml:channel name="Y" type="integer" min="-2.14748E9" max="2.14748E9" units="cm"/>
+          <inkml:channel name="F" type="integer" max="32767" units="dev"/>
+          <inkml:channel name="OA" type="integer" max="360" units="deg"/>
+          <inkml:channel name="OE" type="integer" max="90" units="deg"/>
+        </inkml:traceFormat>
+        <inkml:channelProperties>
+          <inkml:channelProperty channel="X" name="resolution" value="1000" units="1/cm"/>
+          <inkml:channelProperty channel="Y" name="resolution" value="1000" units="1/cm"/>
+          <inkml:channelProperty channel="F" name="resolution" value="0" units="1/dev"/>
+          <inkml:channelProperty channel="OA" name="resolution" value="1000" units="1/deg"/>
+          <inkml:channelProperty channel="OE" name="resolution" value="1000" units="1/deg"/>
+        </inkml:channelProperties>
+      </inkml:inkSource>
+      <inkml:timestamp xml:id="ts0" timeString="2025-10-20T05:28:40.912"/>
+    </inkml:context>
+    <inkml:brush xml:id="br0">
+      <inkml:brushProperty name="width" value="0.2" units="cm"/>
+      <inkml:brushProperty name="height" value="0.2" units="cm"/>
+      <inkml:brushProperty name="color" value="#66CC00"/>
+    </inkml:brush>
+  </inkml:definitions>
+  <inkml:trace contextRef="#ctx0" brushRef="#br0">28 46 5529 0 0,'-1'-1'99'0'0,"0"1"1"0"0,0-1-1 0 0,0 1 1 0 0,0 0 0 0 0,0-1-1 0 0,0 1 1 0 0,-1 0 0 0 0,1 0-1 0 0,0 0 1 0 0,0-1 0 0 0,0 1-1 0 0,0 0 1 0 0,0 1 0 0 0,0-1-1 0 0,-1 0 1 0 0,1 0-1 0 0,0 0 1 0 0,0 1 0 0 0,0-1-1 0 0,0 0 1 0 0,0 1 0 0 0,0-1-1 0 0,-1 2 1 0 0,6 24 1577 0 0,2-6-2249 0 0,14 36 540 0 0,1 0 0 0 0,4-1 0 0 0,33 57 0 0 0,7 13 56 0 0,-32-69 179 0 0,-32-55 28 0 0,0-2-138 0 0,1-1 1 0 0,-1 0 0 0 0,0 0-1 0 0,1 1 1 0 0,-1-1 0 0 0,0 0-1 0 0,0 0 1 0 0,0-1-1 0 0,0 1 1 0 0,-1 0 0 0 0,1 0-1 0 0,-1 0 1 0 0,1 0-1 0 0,-1-4 1 0 0,14-61 77 0 0,-4 22-9 0 0,31-133 194 0 0,-33 124-1756 0 0,13 73 1260 0 0,44 65-207 0 0,-11-12 230 0 0,69 68 64 0 0,-99-113 128 0 0,-23-26-23 0 0,-1-1-18 0 0,1 1 0 0 0,-1-1 0 0 0,0 0 0 0 0,0 0 0 0 0,0 1 0 0 0,0-1 0 0 0,1 0 0 0 0,-1 1 0 0 0,0-1 0 0 0,0 0 0 0 0,0 0 0 0 0,1 0 0 0 0,-1 1 0 0 0,0-1 0 0 0,0 0 0 0 0,1 0 0 0 0,-1 0 0 0 0,0 1 0 0 0,1-1 0 0 0,-1 0 0 0 0,0 0 0 0 0,1 0 0 0 0,-1 0 0 0 0,0 0 0 0 0,0 0 0 0 0,1 0 0 0 0,-1 0 0 0 0,0 0 0 0 0,1 0 0 0 0,-1 0 0 0 0,0 0 0 0 0,1 0 0 0 0,-1 0 0 0 0,0 0 0 0 0,1 0 0 0 0,-1 0 0 0 0,0 0 0 0 0,1 0 0 0 0,-1-1 0 0 0,11-15 96 0 0,0 0 0 0 0,-2-2 1 0 0,0 1-1 0 0,-1-1 0 0 0,0 0 1 0 0,-2-1-1 0 0,7-27 0 0 0,6-14 1 0 0,13-25 31 0 0,26-81 42 0 0,-42 121-2041 0 0</inkml:trace>
+</inkml:ink>
+</file>
+
+<file path=ppt/ink/ink73.xml><?xml version="1.0" encoding="utf-8"?>
+<inkml:ink xmlns:inkml="http://www.w3.org/2003/InkML">
+  <inkml:definitions>
+    <inkml:context xml:id="ctx0">
+      <inkml:inkSource xml:id="inkSrc0">
+        <inkml:traceFormat>
+          <inkml:channel name="X" type="integer" min="-2.14748E9" max="2.14748E9" units="cm"/>
+          <inkml:channel name="Y" type="integer" min="-2.14748E9" max="2.14748E9" units="cm"/>
+          <inkml:channel name="F" type="integer" max="32767" units="dev"/>
+          <inkml:channel name="OA" type="integer" max="360" units="deg"/>
+          <inkml:channel name="OE" type="integer" max="90" units="deg"/>
+        </inkml:traceFormat>
+        <inkml:channelProperties>
+          <inkml:channelProperty channel="X" name="resolution" value="1000" units="1/cm"/>
+          <inkml:channelProperty channel="Y" name="resolution" value="1000" units="1/cm"/>
+          <inkml:channelProperty channel="F" name="resolution" value="0" units="1/dev"/>
+          <inkml:channelProperty channel="OA" name="resolution" value="1000" units="1/deg"/>
+          <inkml:channelProperty channel="OE" name="resolution" value="1000" units="1/deg"/>
+        </inkml:channelProperties>
+      </inkml:inkSource>
+      <inkml:timestamp xml:id="ts0" timeString="2025-10-20T05:28:40.913"/>
+    </inkml:context>
+    <inkml:brush xml:id="br0">
+      <inkml:brushProperty name="width" value="0.2" units="cm"/>
+      <inkml:brushProperty name="height" value="0.2" units="cm"/>
+      <inkml:brushProperty name="color" value="#66CC00"/>
+    </inkml:brush>
+  </inkml:definitions>
+  <inkml:trace contextRef="#ctx0" brushRef="#br0">1 64 7221 0 0,'1'-3'37'0'0,"0"-1"1"0"0,0 1-1 0 0,-1 0 1 0 0,1-1 0 0 0,-1 1-1 0 0,0-1 1 0 0,0 1-1 0 0,0-1 1 0 0,-1-4-1 0 0,0-12 948 0 0,3 15-635 0 0,1 10-162 0 0,9 25-142 0 0,10 42-176 0 0,82 301 266 0 0,-104-372-129 0 0,8-38-7329 0 0</inkml:trace>
+</inkml:ink>
+</file>
+
+<file path=ppt/ink/ink74.xml><?xml version="1.0" encoding="utf-8"?>
+<inkml:ink xmlns:inkml="http://www.w3.org/2003/InkML">
+  <inkml:definitions>
+    <inkml:context xml:id="ctx0">
+      <inkml:inkSource xml:id="inkSrc0">
+        <inkml:traceFormat>
+          <inkml:channel name="X" type="integer" min="-2.14748E9" max="2.14748E9" units="cm"/>
+          <inkml:channel name="Y" type="integer" min="-2.14748E9" max="2.14748E9" units="cm"/>
+          <inkml:channel name="F" type="integer" max="32767" units="dev"/>
+          <inkml:channel name="OA" type="integer" max="360" units="deg"/>
+          <inkml:channel name="OE" type="integer" max="90" units="deg"/>
+        </inkml:traceFormat>
+        <inkml:channelProperties>
+          <inkml:channelProperty channel="X" name="resolution" value="1000" units="1/cm"/>
+          <inkml:channelProperty channel="Y" name="resolution" value="1000" units="1/cm"/>
+          <inkml:channelProperty channel="F" name="resolution" value="0" units="1/dev"/>
+          <inkml:channelProperty channel="OA" name="resolution" value="1000" units="1/deg"/>
+          <inkml:channelProperty channel="OE" name="resolution" value="1000" units="1/deg"/>
+        </inkml:channelProperties>
+      </inkml:inkSource>
+      <inkml:timestamp xml:id="ts0" timeString="2025-10-20T05:28:40.914"/>
+    </inkml:context>
+    <inkml:brush xml:id="br0">
+      <inkml:brushProperty name="width" value="0.2" units="cm"/>
+      <inkml:brushProperty name="height" value="0.2" units="cm"/>
+      <inkml:brushProperty name="color" value="#66CC00"/>
+    </inkml:brush>
+  </inkml:definitions>
+  <inkml:trace contextRef="#ctx0" brushRef="#br0">14 3 5821 0 0,'0'0'-280'0'0,"-11"-1"-571"0"0,8 0 912 0 0,13 1 308 0 0,660 54-214 0 0,-537-40 1062 0 0,-131-13-1127 0 0,13-3-346 0 0</inkml:trace>
+</inkml:ink>
+</file>
+
+<file path=ppt/ink/ink75.xml><?xml version="1.0" encoding="utf-8"?>
+<inkml:ink xmlns:inkml="http://www.w3.org/2003/InkML">
+  <inkml:definitions>
+    <inkml:context xml:id="ctx0">
+      <inkml:inkSource xml:id="inkSrc0">
+        <inkml:traceFormat>
+          <inkml:channel name="X" type="integer" min="-2.14748E9" max="2.14748E9" units="cm"/>
+          <inkml:channel name="Y" type="integer" min="-2.14748E9" max="2.14748E9" units="cm"/>
+          <inkml:channel name="F" type="integer" max="32767" units="dev"/>
+          <inkml:channel name="OA" type="integer" max="360" units="deg"/>
+          <inkml:channel name="OE" type="integer" max="90" units="deg"/>
+        </inkml:traceFormat>
+        <inkml:channelProperties>
+          <inkml:channelProperty channel="X" name="resolution" value="1000" units="1/cm"/>
+          <inkml:channelProperty channel="Y" name="resolution" value="1000" units="1/cm"/>
+          <inkml:channelProperty channel="F" name="resolution" value="0" units="1/dev"/>
+          <inkml:channelProperty channel="OA" name="resolution" value="1000" units="1/deg"/>
+          <inkml:channelProperty channel="OE" name="resolution" value="1000" units="1/deg"/>
+        </inkml:channelProperties>
+      </inkml:inkSource>
+      <inkml:timestamp xml:id="ts0" timeString="2025-10-20T05:28:40.915"/>
+    </inkml:context>
+    <inkml:brush xml:id="br0">
+      <inkml:brushProperty name="width" value="0.2" units="cm"/>
+      <inkml:brushProperty name="height" value="0.2" units="cm"/>
+      <inkml:brushProperty name="color" value="#66CC00"/>
+    </inkml:brush>
+  </inkml:definitions>
+  <inkml:trace contextRef="#ctx0" brushRef="#br0">38 0 4404 0 0,'-20'9'-401'0'0,"19"-8"356"0"0,-12 4-74 0 0,9 1 1398 0 0,89 2-1125 0 0,99-2 0 0 0,-123-2-90 0 0,-59-3 1 0 0,2-1-42 0 0,10 0-4 0 0,-10 0-30 0 0,11-7-3191 0 0,-8 1 2674 0 0</inkml:trace>
+</inkml:ink>
+</file>
+
+<file path=ppt/ink/ink76.xml><?xml version="1.0" encoding="utf-8"?>
+<inkml:ink xmlns:inkml="http://www.w3.org/2003/InkML">
+  <inkml:definitions>
+    <inkml:context xml:id="ctx0">
+      <inkml:inkSource xml:id="inkSrc0">
+        <inkml:traceFormat>
+          <inkml:channel name="X" type="integer" min="-2.14748E9" max="2.14748E9" units="cm"/>
+          <inkml:channel name="Y" type="integer" min="-2.14748E9" max="2.14748E9" units="cm"/>
+          <inkml:channel name="F" type="integer" max="32767" units="dev"/>
+          <inkml:channel name="OA" type="integer" max="360" units="deg"/>
+          <inkml:channel name="OE" type="integer" max="90" units="deg"/>
+        </inkml:traceFormat>
+        <inkml:channelProperties>
+          <inkml:channelProperty channel="X" name="resolution" value="1000" units="1/cm"/>
+          <inkml:channelProperty channel="Y" name="resolution" value="1000" units="1/cm"/>
+          <inkml:channelProperty channel="F" name="resolution" value="0" units="1/dev"/>
+          <inkml:channelProperty channel="OA" name="resolution" value="1000" units="1/deg"/>
+          <inkml:channelProperty channel="OE" name="resolution" value="1000" units="1/deg"/>
+        </inkml:channelProperties>
+      </inkml:inkSource>
+      <inkml:timestamp xml:id="ts0" timeString="2025-10-20T05:28:40.916"/>
+    </inkml:context>
+    <inkml:brush xml:id="br0">
+      <inkml:brushProperty name="width" value="0.2" units="cm"/>
+      <inkml:brushProperty name="height" value="0.2" units="cm"/>
+      <inkml:brushProperty name="color" value="#66CC00"/>
+    </inkml:brush>
+  </inkml:definitions>
+  <inkml:trace contextRef="#ctx0" brushRef="#br0">1 8 3172 0 0,'0'3'522'0'0,"11"-1"-186"0"0,39 0-53 0 0,59-4-106 0 0,158 0 548 0 0,-254 3-690 0 0,-12 0-157 0 0,1-1 0 0 0,-1 1 0 0 0,0-1 0 0 0,1 0 1 0 0,-1 0-1 0 0,0 0 0 0 0,1 1 0 0 0,-1-1 0 0 0,0 0 1 0 0,1-1-1 0 0,-1 1 0 0 0,0 0 0 0 0,1 0 0 0 0,-1-1 0 0 0,0 1 1 0 0,0 0-1 0 0,3-2 0 0 0,0-8-1079 0 0</inkml:trace>
+</inkml:ink>
+</file>
+
+<file path=ppt/ink/ink77.xml><?xml version="1.0" encoding="utf-8"?>
+<inkml:ink xmlns:inkml="http://www.w3.org/2003/InkML">
+  <inkml:definitions>
+    <inkml:context xml:id="ctx0">
+      <inkml:inkSource xml:id="inkSrc0">
+        <inkml:traceFormat>
+          <inkml:channel name="X" type="integer" min="-2.14748E9" max="2.14748E9" units="cm"/>
+          <inkml:channel name="Y" type="integer" min="-2.14748E9" max="2.14748E9" units="cm"/>
+          <inkml:channel name="F" type="integer" max="32767" units="dev"/>
+          <inkml:channel name="OA" type="integer" max="360" units="deg"/>
+          <inkml:channel name="OE" type="integer" max="90" units="deg"/>
+        </inkml:traceFormat>
+        <inkml:channelProperties>
+          <inkml:channelProperty channel="X" name="resolution" value="1000" units="1/cm"/>
+          <inkml:channelProperty channel="Y" name="resolution" value="1000" units="1/cm"/>
+          <inkml:channelProperty channel="F" name="resolution" value="0" units="1/dev"/>
+          <inkml:channelProperty channel="OA" name="resolution" value="1000" units="1/deg"/>
+          <inkml:channelProperty channel="OE" name="resolution" value="1000" units="1/deg"/>
+        </inkml:channelProperties>
+      </inkml:inkSource>
+      <inkml:timestamp xml:id="ts0" timeString="2025-10-20T05:28:40.917"/>
+    </inkml:context>
+    <inkml:brush xml:id="br0">
+      <inkml:brushProperty name="width" value="0.2" units="cm"/>
+      <inkml:brushProperty name="height" value="0.2" units="cm"/>
+      <inkml:brushProperty name="color" value="#66CC00"/>
+    </inkml:brush>
+  </inkml:definitions>
+  <inkml:trace contextRef="#ctx0" brushRef="#br0">35 1 3148 0 0,'0'0'-153'0'0,"-17"14"-500"0"0,12 8 653 0 0,0 0-1 0 0,2 0 1 0 0,0 0-1 0 0,2 0 1 0 0,0 1-1 0 0,2-1 1 0 0,0 0-1 0 0,2 0 1 0 0,0 0-1 0 0,2 0 1 0 0,0 0-1 0 0,1 0 1 0 0,1-1-1 0 0,2 0 1 0 0,0-1-1 0 0,0 0 1 0 0,2 0-1 0 0,16 21 1 0 0,-16-29 25 0 0,0 1 0 0 0,1-2 0 0 0,1 1 0 0 0,0-2 0 0 0,0 0 0 0 0,1 0 0 0 0,1-1-1 0 0,23 10 1 0 0,19 6 106 0 0,60 17 0 0 0,-13-5-28 0 0,-82-29-79 0 0,0 2 1 0 0,-1 1-1 0 0,0 0 0 0 0,20 16 0 0 0,-31-19-19 0 0,0 0 0 0 0,0 1-1 0 0,-1 1 1 0 0,0-1 0 0 0,-1 1-1 0 0,0 1 1 0 0,-1 0 0 0 0,0 0 0 0 0,5 12-1 0 0,3 8 8 0 0,2-1-1 0 0,0 0 1 0 0,2-1-1 0 0,1-2 0 0 0,2 0 1 0 0,0-1-1 0 0,31 27 1 0 0,-5-12 13 0 0,1-2 1 0 0,3-3 0 0 0,0-2 0 0 0,3-2 0 0 0,111 48-1 0 0,334 116 18 0 0,-290-116-54 0 0,-101-42 17 0 0,64 26 98 0 0,-142-50-1220 0 0</inkml:trace>
+</inkml:ink>
+</file>
+
+<file path=ppt/ink/ink78.xml><?xml version="1.0" encoding="utf-8"?>
+<inkml:ink xmlns:inkml="http://www.w3.org/2003/InkML">
+  <inkml:definitions>
+    <inkml:context xml:id="ctx0">
+      <inkml:inkSource xml:id="inkSrc0">
+        <inkml:traceFormat>
+          <inkml:channel name="X" type="integer" min="-2.14748E9" max="2.14748E9" units="cm"/>
+          <inkml:channel name="Y" type="integer" min="-2.14748E9" max="2.14748E9" units="cm"/>
+          <inkml:channel name="F" type="integer" max="32767" units="dev"/>
+          <inkml:channel name="OA" type="integer" max="360" units="deg"/>
+          <inkml:channel name="OE" type="integer" max="90" units="deg"/>
+        </inkml:traceFormat>
+        <inkml:channelProperties>
+          <inkml:channelProperty channel="X" name="resolution" value="1000" units="1/cm"/>
+          <inkml:channelProperty channel="Y" name="resolution" value="1000" units="1/cm"/>
+          <inkml:channelProperty channel="F" name="resolution" value="0" units="1/dev"/>
+          <inkml:channelProperty channel="OA" name="resolution" value="1000" units="1/deg"/>
+          <inkml:channelProperty channel="OE" name="resolution" value="1000" units="1/deg"/>
+        </inkml:channelProperties>
+      </inkml:inkSource>
+      <inkml:timestamp xml:id="ts0" timeString="2025-10-20T05:28:40.918"/>
+    </inkml:context>
+    <inkml:brush xml:id="br0">
+      <inkml:brushProperty name="width" value="0.2" units="cm"/>
+      <inkml:brushProperty name="height" value="0.2" units="cm"/>
+      <inkml:brushProperty name="color" value="#66CC00"/>
+    </inkml:brush>
+  </inkml:definitions>
+  <inkml:trace contextRef="#ctx0" brushRef="#br0">2457 65 3016 0 0,'2'-1'133'0'0,"-1"0"-1"0"0,0 1 1 0 0,0-1 0 0 0,0 0-1 0 0,0 0 1 0 0,0 0 0 0 0,0-1-1 0 0,0 1 1 0 0,0 0-1 0 0,0 0 1 0 0,0 0 0 0 0,-1-1-1 0 0,1 1 1 0 0,0 0-1 0 0,-1-1 1 0 0,1 1 0 0 0,-1-2-1 0 0,-14-4-72 0 0,0 1 0 0 0,-1 0 0 0 0,0 1 0 0 0,0 1 0 0 0,0 0 0 0 0,-22-2 0 0 0,21 4-65 0 0,0 1 0 0 0,-1 0 0 0 0,1 1 0 0 0,-1 0-1 0 0,-31 7 1 0 0,26-4 9 0 0,-42 4-7 0 0,1 3 0 0 0,0 2 0 0 0,0 4 1 0 0,-112 43-1 0 0,83-23 15 0 0,50-20-32 0 0,-63 32 1 0 0,-28 31-88 0 0,-51 28 139 0 0,-195 119 71 0 0,361-215-98 0 0,-8 4 19 0 0,-29 23 5 0 0,53-37-21 0 0,-34 15 65 0 0,-282 94 424 0 0,269-96-357 0 0,0-3-1 0 0,-1-2 0 0 0,-53 2 1 0 0,41-5-64 0 0,60-5-68 0 0,-6 1-66 0 0,0-1-1 0 0,0 0 0 0 0,0-1 0 0 0,0 1 0 0 0,-15-2 1 0 0,38-15-2153 0 0,0 6-431 0 0</inkml:trace>
+</inkml:ink>
+</file>
+
+<file path=ppt/ink/ink79.xml><?xml version="1.0" encoding="utf-8"?>
+<inkml:ink xmlns:inkml="http://www.w3.org/2003/InkML">
+  <inkml:definitions>
+    <inkml:context xml:id="ctx0">
+      <inkml:inkSource xml:id="inkSrc0">
+        <inkml:traceFormat>
+          <inkml:channel name="X" type="integer" min="-2.14748E9" max="2.14748E9" units="cm"/>
+          <inkml:channel name="Y" type="integer" min="-2.14748E9" max="2.14748E9" units="cm"/>
+          <inkml:channel name="F" type="integer" max="32767" units="dev"/>
+          <inkml:channel name="OA" type="integer" max="360" units="deg"/>
+          <inkml:channel name="OE" type="integer" max="90" units="deg"/>
+        </inkml:traceFormat>
+        <inkml:channelProperties>
+          <inkml:channelProperty channel="X" name="resolution" value="1000" units="1/cm"/>
+          <inkml:channelProperty channel="Y" name="resolution" value="1000" units="1/cm"/>
+          <inkml:channelProperty channel="F" name="resolution" value="0" units="1/dev"/>
+          <inkml:channelProperty channel="OA" name="resolution" value="1000" units="1/deg"/>
+          <inkml:channelProperty channel="OE" name="resolution" value="1000" units="1/deg"/>
+        </inkml:channelProperties>
+      </inkml:inkSource>
+      <inkml:timestamp xml:id="ts0" timeString="2025-10-20T05:28:40.919"/>
+    </inkml:context>
+    <inkml:brush xml:id="br0">
+      <inkml:brushProperty name="width" value="0.2" units="cm"/>
+      <inkml:brushProperty name="height" value="0.2" units="cm"/>
+      <inkml:brushProperty name="color" value="#66CC00"/>
+    </inkml:brush>
+  </inkml:definitions>
+  <inkml:trace contextRef="#ctx0" brushRef="#br0">196 45 6077 0 0,'0'0'-268'0'0,"-17"-37"1007"0"0,16 35-700 0 0,-5-2-27 0 0,5 2-16 0 0,-2 3-61 0 0,1 0 62 0 0,0 0 0 0 0,-1-1-1 0 0,1 2 1 0 0,0-1 0 0 0,-1 0 0 0 0,1 0 0 0 0,0 1-1 0 0,0-1 1 0 0,0 1 0 0 0,0 0 0 0 0,0-1 0 0 0,1 1-1 0 0,-1 0 1 0 0,-2 4 0 0 0,-27 39-64 0 0,24-34 55 0 0,-8 14-8 0 0,1 2 1 0 0,2 0 0 0 0,0 0 0 0 0,2 1-1 0 0,1 0 1 0 0,1 1 0 0 0,-6 48 0 0 0,12-33-83 0 0,2-43 103 0 0,0 1 9 0 0,0 7-3 0 0,11-32 173 0 0,-1-1 0 0 0,9-31 0 0 0,42-173-290 0 0,-61 226 66 0 0,28 150-333 0 0,-1-31 512 0 0,-27-115-120 0 0,-11-37-4483 0 0</inkml:trace>
+</inkml:ink>
+</file>
+
 <file path=ppt/ink/ink8.xml><?xml version="1.0" encoding="utf-8"?>
 <inkml:ink xmlns:inkml="http://www.w3.org/2003/InkML">
   <inkml:definitions>
@@ -6008,6 +6602,310 @@
 </inkml:ink>
 </file>
 
+<file path=ppt/ink/ink80.xml><?xml version="1.0" encoding="utf-8"?>
+<inkml:ink xmlns:inkml="http://www.w3.org/2003/InkML">
+  <inkml:definitions>
+    <inkml:context xml:id="ctx0">
+      <inkml:inkSource xml:id="inkSrc0">
+        <inkml:traceFormat>
+          <inkml:channel name="X" type="integer" min="-2.14748E9" max="2.14748E9" units="cm"/>
+          <inkml:channel name="Y" type="integer" min="-2.14748E9" max="2.14748E9" units="cm"/>
+          <inkml:channel name="F" type="integer" max="32767" units="dev"/>
+        </inkml:traceFormat>
+        <inkml:channelProperties>
+          <inkml:channelProperty channel="X" name="resolution" value="1000" units="1/cm"/>
+          <inkml:channelProperty channel="Y" name="resolution" value="1000" units="1/cm"/>
+          <inkml:channelProperty channel="F" name="resolution" value="0" units="1/dev"/>
+        </inkml:channelProperties>
+      </inkml:inkSource>
+      <inkml:timestamp xml:id="ts0" timeString="2025-10-20T05:29:05.840"/>
+    </inkml:context>
+    <inkml:brush xml:id="br0">
+      <inkml:brushProperty name="width" value="0.2" units="cm"/>
+      <inkml:brushProperty name="height" value="0.2" units="cm"/>
+      <inkml:brushProperty name="color" value="#66CC00"/>
+    </inkml:brush>
+  </inkml:definitions>
+  <inkml:trace contextRef="#ctx0" brushRef="#br0">19 86 24575,'-15'-11'0,"11"19"0,5-4 0,-1-1 0,1 1 0,0-1 0,0 0 0,0 1 0,1-1 0,-1 0 0,3 5 0,17 19 0,2 0 0,30 29 0,19 22 0,-30-32 0,2-1 0,2-1 0,2-3 0,71 47 0,-71-54 0,2-2 0,1-2 0,101 42 0,129 30 0,-230-83 0,-24-8 0,1-1 0,43 9 0,30 3 0,-1 4 0,107 44 0,-114-32 0,-56-21 0,0-2 0,2-1 0,59 12 0,-54-16 0,-31-7 0,-1 0 0,1 0 0,0-1 0,0-1 0,0 0 0,0-1 0,0 0 0,0-1 0,21-4 0,21-10 0,-27 9 0,0-2 0,0 0 0,-1-3 0,0 0 0,28-16 0,-43 19 0,36-20 0,0-2 0,-2-2 0,-2-2 0,50-49 0,-7 3 0,-62 59 0,-1-1 0,0-1 0,23-31 0,205-261 0,-144 184 0,-39 51 58,28-36-1481</inkml:trace>
+</inkml:ink>
+</file>
+
+<file path=ppt/ink/ink81.xml><?xml version="1.0" encoding="utf-8"?>
+<inkml:ink xmlns:inkml="http://www.w3.org/2003/InkML">
+  <inkml:definitions>
+    <inkml:context xml:id="ctx0">
+      <inkml:inkSource xml:id="inkSrc0">
+        <inkml:traceFormat>
+          <inkml:channel name="X" type="integer" min="-2.14748E9" max="2.14748E9" units="cm"/>
+          <inkml:channel name="Y" type="integer" min="-2.14748E9" max="2.14748E9" units="cm"/>
+          <inkml:channel name="F" type="integer" max="32767" units="dev"/>
+        </inkml:traceFormat>
+        <inkml:channelProperties>
+          <inkml:channelProperty channel="X" name="resolution" value="1000" units="1/cm"/>
+          <inkml:channelProperty channel="Y" name="resolution" value="1000" units="1/cm"/>
+          <inkml:channelProperty channel="F" name="resolution" value="0" units="1/dev"/>
+        </inkml:channelProperties>
+      </inkml:inkSource>
+      <inkml:timestamp xml:id="ts0" timeString="2025-10-20T05:29:06.968"/>
+    </inkml:context>
+    <inkml:brush xml:id="br0">
+      <inkml:brushProperty name="width" value="0.2" units="cm"/>
+      <inkml:brushProperty name="height" value="0.2" units="cm"/>
+      <inkml:brushProperty name="color" value="#66CC00"/>
+    </inkml:brush>
+  </inkml:definitions>
+  <inkml:trace contextRef="#ctx0" brushRef="#br0">61 37 24575,'0'-4'0,"0"-6"0,0-6 0,0 9 0,0 10 0,-5 4 0,-1 5 0,1 6 0,0 3 0,-2 3 0,-1 1 0,2 1 0,-3-4 0,0-1 0</inkml:trace>
+</inkml:ink>
+</file>
+
+<file path=ppt/ink/ink82.xml><?xml version="1.0" encoding="utf-8"?>
+<inkml:ink xmlns:inkml="http://www.w3.org/2003/InkML">
+  <inkml:definitions>
+    <inkml:context xml:id="ctx0">
+      <inkml:inkSource xml:id="inkSrc0">
+        <inkml:traceFormat>
+          <inkml:channel name="X" type="integer" min="-2.14748E9" max="2.14748E9" units="cm"/>
+          <inkml:channel name="Y" type="integer" min="-2.14748E9" max="2.14748E9" units="cm"/>
+          <inkml:channel name="F" type="integer" max="32767" units="dev"/>
+        </inkml:traceFormat>
+        <inkml:channelProperties>
+          <inkml:channelProperty channel="X" name="resolution" value="1000" units="1/cm"/>
+          <inkml:channelProperty channel="Y" name="resolution" value="1000" units="1/cm"/>
+          <inkml:channelProperty channel="F" name="resolution" value="0" units="1/dev"/>
+        </inkml:channelProperties>
+      </inkml:inkSource>
+      <inkml:timestamp xml:id="ts0" timeString="2025-10-20T05:29:08.575"/>
+    </inkml:context>
+    <inkml:brush xml:id="br0">
+      <inkml:brushProperty name="width" value="0.2" units="cm"/>
+      <inkml:brushProperty name="height" value="0.2" units="cm"/>
+      <inkml:brushProperty name="color" value="#66CC00"/>
+    </inkml:brush>
+  </inkml:definitions>
+  <inkml:trace contextRef="#ctx0" brushRef="#br0">2202 58 24575,'-1'-1'0,"1"-1"0,-1 0 0,0 1 0,0-1 0,0 1 0,0-1 0,0 1 0,0-1 0,-1 1 0,1 0 0,0 0 0,-1 0 0,1 0 0,-1 0 0,1 0 0,-1 0 0,-2-1 0,-30-14 0,8 10 0,0 2 0,0 0 0,0 2 0,0 0 0,-1 2 0,-35 4 0,-18-1 0,29 1 0,-1 2 0,1 2 0,-71 21 0,119-28 0,-26 9 0,1 1 0,0 1 0,0 2 0,1 1 0,1 1 0,1 1 0,0 2 0,1 0 0,-22 24 0,-104 81 0,49-45 0,69-55 0,0-2 0,-66 33 0,41-25 0,-18 7 0,-1-3 0,-108 31 0,105-38 0,-22 8 0,-176 57 0,260-89-1365</inkml:trace>
+</inkml:ink>
+</file>
+
+<file path=ppt/ink/ink83.xml><?xml version="1.0" encoding="utf-8"?>
+<inkml:ink xmlns:inkml="http://www.w3.org/2003/InkML">
+  <inkml:definitions>
+    <inkml:context xml:id="ctx0">
+      <inkml:inkSource xml:id="inkSrc0">
+        <inkml:traceFormat>
+          <inkml:channel name="X" type="integer" min="-2.14748E9" max="2.14748E9" units="cm"/>
+          <inkml:channel name="Y" type="integer" min="-2.14748E9" max="2.14748E9" units="cm"/>
+          <inkml:channel name="F" type="integer" max="32767" units="dev"/>
+        </inkml:traceFormat>
+        <inkml:channelProperties>
+          <inkml:channelProperty channel="X" name="resolution" value="1000" units="1/cm"/>
+          <inkml:channelProperty channel="Y" name="resolution" value="1000" units="1/cm"/>
+          <inkml:channelProperty channel="F" name="resolution" value="0" units="1/dev"/>
+        </inkml:channelProperties>
+      </inkml:inkSource>
+      <inkml:timestamp xml:id="ts0" timeString="2025-10-20T05:29:10.632"/>
+    </inkml:context>
+    <inkml:brush xml:id="br0">
+      <inkml:brushProperty name="width" value="0.2" units="cm"/>
+      <inkml:brushProperty name="height" value="0.2" units="cm"/>
+      <inkml:brushProperty name="color" value="#66CC00"/>
+    </inkml:brush>
+  </inkml:definitions>
+  <inkml:trace contextRef="#ctx0" brushRef="#br0">0 0 24575,'32'3'0,"-1"2"0,0 1 0,-1 1 0,1 2 0,54 23 0,-70-26 0,38 14 0,-2 3 0,74 44 0,-45-23 0,-50-28 0,-1 0 0,40 31 0,54 38 0,-89-64 0,0 1 0,-2 2 0,40 38 0,-33-21 0,7 8 0,1-2 0,3-2 0,103 72 0,183 60 0,-298-161 0,0-1 0,2-3 0,-1-1 0,2-2 0,62 7 0,1 5-1365</inkml:trace>
+</inkml:ink>
+</file>
+
+<file path=ppt/ink/ink84.xml><?xml version="1.0" encoding="utf-8"?>
+<inkml:ink xmlns:inkml="http://www.w3.org/2003/InkML">
+  <inkml:definitions>
+    <inkml:context xml:id="ctx0">
+      <inkml:inkSource xml:id="inkSrc0">
+        <inkml:traceFormat>
+          <inkml:channel name="X" type="integer" min="-2.14748E9" max="2.14748E9" units="cm"/>
+          <inkml:channel name="Y" type="integer" min="-2.14748E9" max="2.14748E9" units="cm"/>
+          <inkml:channel name="F" type="integer" max="32767" units="dev"/>
+          <inkml:channel name="OA" type="integer" max="360" units="deg"/>
+          <inkml:channel name="OE" type="integer" max="90" units="deg"/>
+        </inkml:traceFormat>
+        <inkml:channelProperties>
+          <inkml:channelProperty channel="X" name="resolution" value="1000" units="1/cm"/>
+          <inkml:channelProperty channel="Y" name="resolution" value="1000" units="1/cm"/>
+          <inkml:channelProperty channel="F" name="resolution" value="0" units="1/dev"/>
+          <inkml:channelProperty channel="OA" name="resolution" value="1000" units="1/deg"/>
+          <inkml:channelProperty channel="OE" name="resolution" value="1000" units="1/deg"/>
+        </inkml:channelProperties>
+      </inkml:inkSource>
+      <inkml:timestamp xml:id="ts0" timeString="2026-04-07T16:55:00.864"/>
+    </inkml:context>
+    <inkml:brush xml:id="br0">
+      <inkml:brushProperty name="width" value="0.2" units="cm"/>
+      <inkml:brushProperty name="height" value="0.2" units="cm"/>
+      <inkml:brushProperty name="color" value="#66CC00"/>
+    </inkml:brush>
+  </inkml:definitions>
+  <inkml:trace contextRef="#ctx0" brushRef="#br0">3379 152 3916 0 0,'0'0'-74'0'0,"8"0"48"0"0,33-2 1226 0 0,-75-25-914 0 0,3 10-214 0 0,0 2 0 0 0,-1 0-1 0 0,-1 3 1 0 0,0 0-1 0 0,-1 3 1 0 0,0 0 0 0 0,-41-4-1 0 0,-31 2-48 0 0,-130 2-1 0 0,-107 20 42 0 0,249-6-58 0 0,-174 24 31 0 0,17-1 8 0 0,198-23-47 0 0,1 2 1 0 0,-1 3 0 0 0,-72 23-1 0 0,-150 65-10 0 0,244-86 12 0 0,-101 43 45 0 0,-133 75 1 0 0,-92 65-65 0 0,314-167 17 0 0,1 1 1 0 0,2 3-1 0 0,1 0 0 0 0,1 3 1 0 0,-32 39-1 0 0,48-49-2 0 0,1 2 0 0 0,1-1-1 0 0,1 2 1 0 0,2 1 0 0 0,1 0 0 0 0,1 1 0 0 0,-13 38 0 0 0,23-51 9 0 0,1 1 1 0 0,0-1 0 0 0,1 1 0 0 0,1 0 0 0 0,1 0 0 0 0,0 0 0 0 0,3 22 0 0 0,23 128 29 0 0,-1-12-2 0 0,-19-73-10 0 0,-3-37-18 0 0,1 0 1 0 0,2 0-1 0 0,3 0 1 0 0,13 48-1 0 0,-7-47 13 0 0,3 0 0 0 0,1-1 0 0 0,2-1 1 0 0,2-1-1 0 0,2-1 0 0 0,42 57 0 0 0,153 136 83 0 0,-102-116-36 0 0,-64-67-59 0 0,115 91 0 0 0,-121-105 14 0 0,64 68 1 0 0,-10-8 3 0 0,-90-88-18 0 0,51 43 16 0 0,-2 3 1 0 0,83 104-1 0 0,-97-100 18 0 0,102 104 1 0 0,-119-138-29 0 0,1-1 0 0 0,2-1-1 0 0,0-2 1 0 0,2-1 0 0 0,53 25 0 0 0,-24-19-3 0 0,2-4-1 0 0,1-2 0 0 0,1-3 1 0 0,0-3-1 0 0,74 7 0 0 0,-8-10 15 0 0,226-7 0 0 0,472-74-45 0 0,-319-23 12 0 0,-442 77 8 0 0,3-1 25 0 0,214-49-56 0 0,-214 44 116 0 0,130-54 0 0 0,-178 61-35 0 0,0-1 0 0 0,0 0-1 0 0,-1-2 1 0 0,-1-1-1 0 0,-1-1 1 0 0,-1-1 0 0 0,0-1-1 0 0,-1-1 1 0 0,27-37-1 0 0,4-16 349 0 0,70-139-1 0 0,14-21-84 0 0,-75 153-315 0 0,70-72-1 0 0,0 2 0 0 0,-112 129-4 0 0,1 2-1 0 0,1 0 1 0 0,1 1-1 0 0,1 1 0 0 0,0 1 1 0 0,44-25-1 0 0,-3 9-29 0 0,97-35 0 0 0,-128 55 43 0 0,260-112-33 0 0,-256 106 82 0 0,0-1 0 0 0,-1-2 0 0 0,-1-1 0 0 0,-1-2 0 0 0,48-48 0 0 0,-55 46 103 0 0,-2-2 0 0 0,-1 0 0 0 0,-2-1 0 0 0,0-2 0 0 0,-2 0-1 0 0,-2-1 1 0 0,-1 0 0 0 0,13-40 0 0 0,-21 48-36 0 0,-2 0 0 0 0,0 0 0 0 0,-1-1-1 0 0,-2 0 1 0 0,0 0 0 0 0,-2 0 0 0 0,-1 0-1 0 0,-1 0 1 0 0,-1 0 0 0 0,-1 0 0 0 0,-2 0 0 0 0,0 1-1 0 0,-11-31 1 0 0,3 22-85 0 0,-1 1 0 0 0,-1 1 0 0 0,-2 0 0 0 0,-1 2 0 0 0,-2 0 0 0 0,-23-28 0 0 0,-153-154-116 0 0,168 188 27 0 0,-1 2 1 0 0,-1 1-1 0 0,-2 1 0 0 0,1 1 1 0 0,-2 2-1 0 0,-44-16 0 0 0,-93-31-126 0 0,-2 6 0 0 0,-355-67-1 0 0,393 107 133 0 0,-142 0 0 0 0,22 2 38 0 0,42-12 6 0 0,-79-6 2 0 0,87 13-29 0 0,33 3 39 0 0,-106-24 27 0 0,79-5 312 0 0,146 33-167 0 0,50 13-199 0 0,-5 0 431 0 0</inkml:trace>
+</inkml:ink>
+</file>
+
+<file path=ppt/ink/ink85.xml><?xml version="1.0" encoding="utf-8"?>
+<inkml:ink xmlns:inkml="http://www.w3.org/2003/InkML">
+  <inkml:definitions>
+    <inkml:context xml:id="ctx0">
+      <inkml:inkSource xml:id="inkSrc0">
+        <inkml:traceFormat>
+          <inkml:channel name="X" type="integer" min="-2.14748E9" max="2.14748E9" units="cm"/>
+          <inkml:channel name="Y" type="integer" min="-2.14748E9" max="2.14748E9" units="cm"/>
+          <inkml:channel name="F" type="integer" max="32767" units="dev"/>
+          <inkml:channel name="OA" type="integer" max="360" units="deg"/>
+          <inkml:channel name="OE" type="integer" max="90" units="deg"/>
+        </inkml:traceFormat>
+        <inkml:channelProperties>
+          <inkml:channelProperty channel="X" name="resolution" value="1000" units="1/cm"/>
+          <inkml:channelProperty channel="Y" name="resolution" value="1000" units="1/cm"/>
+          <inkml:channelProperty channel="F" name="resolution" value="0" units="1/dev"/>
+          <inkml:channelProperty channel="OA" name="resolution" value="1000" units="1/deg"/>
+          <inkml:channelProperty channel="OE" name="resolution" value="1000" units="1/deg"/>
+        </inkml:channelProperties>
+      </inkml:inkSource>
+      <inkml:timestamp xml:id="ts0" timeString="2026-04-07T16:55:00.865"/>
+    </inkml:context>
+    <inkml:brush xml:id="br0">
+      <inkml:brushProperty name="width" value="0.2" units="cm"/>
+      <inkml:brushProperty name="height" value="0.2" units="cm"/>
+      <inkml:brushProperty name="color" value="#66CC00"/>
+    </inkml:brush>
+  </inkml:definitions>
+  <inkml:trace contextRef="#ctx0" brushRef="#br0">39 144 3168 0 0,'-3'-33'4814'0'0,"3"33"-4795"0"0,-5 21-540 0 0,2-9 497 0 0,-7 36-1 0 0,3 0 0 0 0,1 1 0 0 0,2 0 0 0 0,4 56 0 0 0,11 83 89 0 0,-10-172 510 0 0,0-24 760 0 0,0-31-541 0 0,-4-128-289 0 0,3 123-417 0 0,4-198 289 0 0,-2 175 215 0 0,-3 64-522 0 0,1 1-99 0 0,0 1 6 0 0,0 1 0 0 0,0 0 0 0 0,0 0 0 0 0,0-1 0 0 0,-1 1 0 0 0,1 0 0 0 0,0 0 0 0 0,0-1 0 0 0,0 1 0 0 0,0 0 0 0 0,0 0 0 0 0,0-1 0 0 0,0 1 0 0 0,0 0 0 0 0,0 0 0 0 0,0-1 0 0 0,0 1 0 0 0,0 0 0 0 0,0-1 0 0 0,0 1 0 0 0,0 0 0 0 0,0 0 0 0 0,0-1 0 0 0,0 1 0 0 0,0 0 0 0 0,0-1 0 0 0,0 1 0 0 0,0 0 0 0 0,1 0 0 0 0,-1-1 0 0 0,0 1 0 0 0,0 0 0 0 0,0 0 0 0 0,0 0 0 0 0,1-1 0 0 0,-1 1 0 0 0,0 0 0 0 0,0 0 0 0 0,0 0 1 0 0,1 0-1 0 0,-1-1 0 0 0,0 1 0 0 0,0 0 0 0 0,1 0 0 0 0,48 58-172 0 0,89 83 0 0 0,-114-118 191 0 0,34 29 0 0 0,99 66 1 0 0,-65-52 66 0 0,-50-36 1969 0 0,-41-31-1981 0 0,0-1 0 0 0,0 1 0 0 0,0 0-1 0 0,0 0 1 0 0,0 0 0 0 0,0 0 0 0 0,0-1 0 0 0,0 1-1 0 0,-1 0 1 0 0,1-1 0 0 0,0 1 0 0 0,-1-1 0 0 0,1 1-1 0 0,-1-1 1 0 0,1 1 0 0 0,-1-1 0 0 0,0 1 0 0 0,0-1-1 0 0,0 1 1 0 0,0-1 0 0 0,0 1 0 0 0,0-1 0 0 0,0-1-1 0 0,-7-45 160 0 0,4 34-79 0 0,-25-220 210 0 0,12 91-78 0 0,7 78-667 0 0,9 63 351 0 0,-2-9-517 0 0</inkml:trace>
+</inkml:ink>
+</file>
+
+<file path=ppt/ink/ink86.xml><?xml version="1.0" encoding="utf-8"?>
+<inkml:ink xmlns:inkml="http://www.w3.org/2003/InkML">
+  <inkml:definitions>
+    <inkml:context xml:id="ctx0">
+      <inkml:inkSource xml:id="inkSrc0">
+        <inkml:traceFormat>
+          <inkml:channel name="X" type="integer" min="-2.14748E9" max="2.14748E9" units="cm"/>
+          <inkml:channel name="Y" type="integer" min="-2.14748E9" max="2.14748E9" units="cm"/>
+          <inkml:channel name="F" type="integer" max="32767" units="dev"/>
+          <inkml:channel name="OA" type="integer" max="360" units="deg"/>
+          <inkml:channel name="OE" type="integer" max="90" units="deg"/>
+        </inkml:traceFormat>
+        <inkml:channelProperties>
+          <inkml:channelProperty channel="X" name="resolution" value="1000" units="1/cm"/>
+          <inkml:channelProperty channel="Y" name="resolution" value="1000" units="1/cm"/>
+          <inkml:channelProperty channel="F" name="resolution" value="0" units="1/dev"/>
+          <inkml:channelProperty channel="OA" name="resolution" value="1000" units="1/deg"/>
+          <inkml:channelProperty channel="OE" name="resolution" value="1000" units="1/deg"/>
+        </inkml:channelProperties>
+      </inkml:inkSource>
+      <inkml:timestamp xml:id="ts0" timeString="2026-04-07T16:55:00.866"/>
+    </inkml:context>
+    <inkml:brush xml:id="br0">
+      <inkml:brushProperty name="width" value="0.2" units="cm"/>
+      <inkml:brushProperty name="height" value="0.2" units="cm"/>
+      <inkml:brushProperty name="color" value="#66CC00"/>
+    </inkml:brush>
+  </inkml:definitions>
+  <inkml:trace contextRef="#ctx0" brushRef="#br0">678 93 5597 0 0,'0'0'-212'0'0,"17"0"1497"0"0,-17-1-1266 0 0,0 0 1 0 0,0-1-1 0 0,0 1 0 0 0,0 0 1 0 0,0 0-1 0 0,0-1 0 0 0,0 1 1 0 0,-1 0-1 0 0,1-1 0 0 0,-1 1 1 0 0,1 0-1 0 0,-1 0 0 0 0,1-1 1 0 0,-1 1-1 0 0,0 0 0 0 0,1 0 1 0 0,-1 0-1 0 0,0 0 0 0 0,0 0 1 0 0,0 0-1 0 0,0 0 0 0 0,-1-1 1 0 0,-35-22 194 0 0,-44-5-68 0 0,61 25-151 0 0,0 1 0 0 0,-1 0 1 0 0,1 2-1 0 0,0 0 0 0 0,-1 2 0 0 0,1 0 1 0 0,0 1-1 0 0,-1 1 0 0 0,1 1 1 0 0,1 0-1 0 0,-1 2 0 0 0,1 0 0 0 0,-26 13 1 0 0,31-12-40 0 0,2 0 0 0 0,-1 1 0 0 0,1 1 0 0 0,-21 18 0 0 0,32-26 40 0 0,1 0-1 0 0,-1-1 1 0 0,1 1 0 0 0,0 0 0 0 0,-1 0 0 0 0,1 0 0 0 0,0 0 0 0 0,-1-1 0 0 0,1 1 0 0 0,0 0 0 0 0,0 0-1 0 0,0 0 1 0 0,0 0 0 0 0,0 0 0 0 0,0 0 0 0 0,0 0 0 0 0,0 0 0 0 0,0-1 0 0 0,0 1 0 0 0,0 0 0 0 0,1 0-1 0 0,-1 0 1 0 0,0 0 0 0 0,1 0 0 0 0,-1-1 0 0 0,0 1 0 0 0,1 0 0 0 0,-1 0 0 0 0,1-1 0 0 0,0 1 0 0 0,-1 0-1 0 0,1 0 1 0 0,-1-1 0 0 0,1 1 0 0 0,0-1 0 0 0,0 1 0 0 0,-1-1 0 0 0,2 1 0 0 0,28 21-33 0 0,177 69-10 0 0,-125-57 23 0 0,-1 2-1 0 0,81 52 1 0 0,-148-80 6 0 0,-11-7 15 0 0,-1 0 1 0 0,0 0 0 0 0,0 0-1 0 0,0 0 1 0 0,0 1-1 0 0,0-1 1 0 0,0 0 0 0 0,0 1-1 0 0,0 0 1 0 0,0-1-1 0 0,-1 1 1 0 0,1 0 0 0 0,-1 0-1 0 0,1 0 1 0 0,1 4-1 0 0,-2-4 25 0 0,-5 0 8 0 0,-8 6 14 0 0,0-2 1 0 0,0 1 0 0 0,-1-2 0 0 0,0 1-1 0 0,-1-2 1 0 0,1 0 0 0 0,-1 0-1 0 0,1-1 1 0 0,-21 1 0 0 0,-133 4 341 0 0,157-8-380 0 0,-203-8 616 0 0,189 6-663 0 0,1-2-1 0 0,0 0 0 0 0,0-2 0 0 0,0 0 1 0 0,0-1-1 0 0,-40-21 0 0 0,59 26-381 0 0,0-1-1 0 0,0 0 1 0 0,0 0 0 0 0,0-1 0 0 0,1 1-1 0 0,-1-1 1 0 0,1 1 0 0 0,-3-6-1 0 0,-2-3-1946 0 0</inkml:trace>
+</inkml:ink>
+</file>
+
+<file path=ppt/ink/ink87.xml><?xml version="1.0" encoding="utf-8"?>
+<inkml:ink xmlns:inkml="http://www.w3.org/2003/InkML">
+  <inkml:definitions>
+    <inkml:context xml:id="ctx0">
+      <inkml:inkSource xml:id="inkSrc0">
+        <inkml:traceFormat>
+          <inkml:channel name="X" type="integer" min="-2.14748E9" max="2.14748E9" units="cm"/>
+          <inkml:channel name="Y" type="integer" min="-2.14748E9" max="2.14748E9" units="cm"/>
+          <inkml:channel name="F" type="integer" max="32767" units="dev"/>
+          <inkml:channel name="OA" type="integer" max="360" units="deg"/>
+          <inkml:channel name="OE" type="integer" max="90" units="deg"/>
+        </inkml:traceFormat>
+        <inkml:channelProperties>
+          <inkml:channelProperty channel="X" name="resolution" value="1000" units="1/cm"/>
+          <inkml:channelProperty channel="Y" name="resolution" value="1000" units="1/cm"/>
+          <inkml:channelProperty channel="F" name="resolution" value="0" units="1/dev"/>
+          <inkml:channelProperty channel="OA" name="resolution" value="1000" units="1/deg"/>
+          <inkml:channelProperty channel="OE" name="resolution" value="1000" units="1/deg"/>
+        </inkml:channelProperties>
+      </inkml:inkSource>
+      <inkml:timestamp xml:id="ts0" timeString="2026-04-07T16:55:00.867"/>
+    </inkml:context>
+    <inkml:brush xml:id="br0">
+      <inkml:brushProperty name="width" value="0.2" units="cm"/>
+      <inkml:brushProperty name="height" value="0.2" units="cm"/>
+      <inkml:brushProperty name="color" value="#66CC00"/>
+    </inkml:brush>
+  </inkml:definitions>
+  <inkml:trace contextRef="#ctx0" brushRef="#br0">28 46 5529 0 0,'-1'-1'99'0'0,"0"1"1"0"0,0-1-1 0 0,0 1 1 0 0,0 0 0 0 0,0-1-1 0 0,0 1 1 0 0,-1 0 0 0 0,1 0-1 0 0,0 0 1 0 0,0-1 0 0 0,0 1-1 0 0,0 0 1 0 0,0 1 0 0 0,0-1-1 0 0,-1 0 1 0 0,1 0-1 0 0,0 0 1 0 0,0 1 0 0 0,0-1-1 0 0,0 0 1 0 0,0 1 0 0 0,0-1-1 0 0,-1 2 1 0 0,6 24 1577 0 0,2-6-2249 0 0,14 36 540 0 0,1 0 0 0 0,4-1 0 0 0,33 57 0 0 0,7 13 56 0 0,-32-69 179 0 0,-32-55 28 0 0,0-2-138 0 0,1-1 1 0 0,-1 0 0 0 0,0 0-1 0 0,1 1 1 0 0,-1-1 0 0 0,0 0-1 0 0,0 0 1 0 0,0-1-1 0 0,0 1 1 0 0,-1 0 0 0 0,1 0-1 0 0,-1 0 1 0 0,1 0-1 0 0,-1-4 1 0 0,14-61 77 0 0,-4 22-9 0 0,31-133 194 0 0,-33 124-1756 0 0,13 73 1260 0 0,44 65-207 0 0,-11-12 230 0 0,69 68 64 0 0,-99-113 128 0 0,-23-26-23 0 0,-1-1-18 0 0,1 1 0 0 0,-1-1 0 0 0,0 0 0 0 0,0 0 0 0 0,0 1 0 0 0,0-1 0 0 0,1 0 0 0 0,-1 1 0 0 0,0-1 0 0 0,0 0 0 0 0,0 0 0 0 0,1 0 0 0 0,-1 1 0 0 0,0-1 0 0 0,0 0 0 0 0,1 0 0 0 0,-1 0 0 0 0,0 1 0 0 0,1-1 0 0 0,-1 0 0 0 0,0 0 0 0 0,1 0 0 0 0,-1 0 0 0 0,0 0 0 0 0,0 0 0 0 0,1 0 0 0 0,-1 0 0 0 0,0 0 0 0 0,1 0 0 0 0,-1 0 0 0 0,0 0 0 0 0,1 0 0 0 0,-1 0 0 0 0,0 0 0 0 0,1 0 0 0 0,-1 0 0 0 0,0 0 0 0 0,1 0 0 0 0,-1-1 0 0 0,11-15 96 0 0,0 0 0 0 0,-2-2 1 0 0,0 1-1 0 0,-1-1 0 0 0,0 0 1 0 0,-2-1-1 0 0,7-27 0 0 0,6-14 1 0 0,13-25 31 0 0,26-81 42 0 0,-42 121-2041 0 0</inkml:trace>
+</inkml:ink>
+</file>
+
+<file path=ppt/ink/ink88.xml><?xml version="1.0" encoding="utf-8"?>
+<inkml:ink xmlns:inkml="http://www.w3.org/2003/InkML">
+  <inkml:definitions>
+    <inkml:context xml:id="ctx0">
+      <inkml:inkSource xml:id="inkSrc0">
+        <inkml:traceFormat>
+          <inkml:channel name="X" type="integer" min="-2.14748E9" max="2.14748E9" units="cm"/>
+          <inkml:channel name="Y" type="integer" min="-2.14748E9" max="2.14748E9" units="cm"/>
+          <inkml:channel name="F" type="integer" max="32767" units="dev"/>
+          <inkml:channel name="OA" type="integer" max="360" units="deg"/>
+          <inkml:channel name="OE" type="integer" max="90" units="deg"/>
+        </inkml:traceFormat>
+        <inkml:channelProperties>
+          <inkml:channelProperty channel="X" name="resolution" value="1000" units="1/cm"/>
+          <inkml:channelProperty channel="Y" name="resolution" value="1000" units="1/cm"/>
+          <inkml:channelProperty channel="F" name="resolution" value="0" units="1/dev"/>
+          <inkml:channelProperty channel="OA" name="resolution" value="1000" units="1/deg"/>
+          <inkml:channelProperty channel="OE" name="resolution" value="1000" units="1/deg"/>
+        </inkml:channelProperties>
+      </inkml:inkSource>
+      <inkml:timestamp xml:id="ts0" timeString="2026-04-07T16:55:00.868"/>
+    </inkml:context>
+    <inkml:brush xml:id="br0">
+      <inkml:brushProperty name="width" value="0.2" units="cm"/>
+      <inkml:brushProperty name="height" value="0.2" units="cm"/>
+      <inkml:brushProperty name="color" value="#66CC00"/>
+    </inkml:brush>
+  </inkml:definitions>
+  <inkml:trace contextRef="#ctx0" brushRef="#br0">1 64 7221 0 0,'1'-3'37'0'0,"0"-1"1"0"0,0 1-1 0 0,-1 0 1 0 0,1-1 0 0 0,-1 1-1 0 0,0-1 1 0 0,0 1-1 0 0,0-1 1 0 0,-1-4-1 0 0,0-12 948 0 0,3 15-635 0 0,1 10-162 0 0,9 25-142 0 0,10 42-176 0 0,82 301 266 0 0,-104-372-129 0 0,8-38-7329 0 0</inkml:trace>
+</inkml:ink>
+</file>
+
+<file path=ppt/ink/ink89.xml><?xml version="1.0" encoding="utf-8"?>
+<inkml:ink xmlns:inkml="http://www.w3.org/2003/InkML">
+  <inkml:definitions>
+    <inkml:context xml:id="ctx0">
+      <inkml:inkSource xml:id="inkSrc0">
+        <inkml:traceFormat>
+          <inkml:channel name="X" type="integer" min="-2.14748E9" max="2.14748E9" units="cm"/>
+          <inkml:channel name="Y" type="integer" min="-2.14748E9" max="2.14748E9" units="cm"/>
+          <inkml:channel name="F" type="integer" max="32767" units="dev"/>
+          <inkml:channel name="OA" type="integer" max="360" units="deg"/>
+          <inkml:channel name="OE" type="integer" max="90" units="deg"/>
+        </inkml:traceFormat>
+        <inkml:channelProperties>
+          <inkml:channelProperty channel="X" name="resolution" value="1000" units="1/cm"/>
+          <inkml:channelProperty channel="Y" name="resolution" value="1000" units="1/cm"/>
+          <inkml:channelProperty channel="F" name="resolution" value="0" units="1/dev"/>
+          <inkml:channelProperty channel="OA" name="resolution" value="1000" units="1/deg"/>
+          <inkml:channelProperty channel="OE" name="resolution" value="1000" units="1/deg"/>
+        </inkml:channelProperties>
+      </inkml:inkSource>
+      <inkml:timestamp xml:id="ts0" timeString="2026-04-07T16:55:00.869"/>
+    </inkml:context>
+    <inkml:brush xml:id="br0">
+      <inkml:brushProperty name="width" value="0.2" units="cm"/>
+      <inkml:brushProperty name="height" value="0.2" units="cm"/>
+      <inkml:brushProperty name="color" value="#66CC00"/>
+    </inkml:brush>
+  </inkml:definitions>
+  <inkml:trace contextRef="#ctx0" brushRef="#br0">14 3 5821 0 0,'0'0'-280'0'0,"-11"-1"-571"0"0,8 0 912 0 0,13 1 308 0 0,660 54-214 0 0,-537-40 1062 0 0,-131-13-1127 0 0,13-3-346 0 0</inkml:trace>
+</inkml:ink>
+</file>
+
 <file path=ppt/ink/ink9.xml><?xml version="1.0" encoding="utf-8"?>
 <inkml:ink xmlns:inkml="http://www.w3.org/2003/InkML">
   <inkml:definitions>
@@ -6037,6 +6935,278 @@
     </inkml:brush>
   </inkml:definitions>
   <inkml:trace contextRef="#ctx0" brushRef="#br0">1 8 3172 0 0,'0'3'522'0'0,"11"-1"-186"0"0,39 0-53 0 0,59-4-106 0 0,158 0 548 0 0,-254 3-690 0 0,-12 0-157 0 0,1-1 0 0 0,-1 1 0 0 0,0-1 0 0 0,1 0 1 0 0,-1 0-1 0 0,0 0 0 0 0,1 1 0 0 0,-1-1 0 0 0,0 0 1 0 0,1-1-1 0 0,-1 1 0 0 0,0 0 0 0 0,1 0 0 0 0,-1-1 0 0 0,0 1 1 0 0,0 0-1 0 0,3-2 0 0 0,0-8-1079 0 0</inkml:trace>
+</inkml:ink>
+</file>
+
+<file path=ppt/ink/ink90.xml><?xml version="1.0" encoding="utf-8"?>
+<inkml:ink xmlns:inkml="http://www.w3.org/2003/InkML">
+  <inkml:definitions>
+    <inkml:context xml:id="ctx0">
+      <inkml:inkSource xml:id="inkSrc0">
+        <inkml:traceFormat>
+          <inkml:channel name="X" type="integer" min="-2.14748E9" max="2.14748E9" units="cm"/>
+          <inkml:channel name="Y" type="integer" min="-2.14748E9" max="2.14748E9" units="cm"/>
+          <inkml:channel name="F" type="integer" max="32767" units="dev"/>
+          <inkml:channel name="OA" type="integer" max="360" units="deg"/>
+          <inkml:channel name="OE" type="integer" max="90" units="deg"/>
+        </inkml:traceFormat>
+        <inkml:channelProperties>
+          <inkml:channelProperty channel="X" name="resolution" value="1000" units="1/cm"/>
+          <inkml:channelProperty channel="Y" name="resolution" value="1000" units="1/cm"/>
+          <inkml:channelProperty channel="F" name="resolution" value="0" units="1/dev"/>
+          <inkml:channelProperty channel="OA" name="resolution" value="1000" units="1/deg"/>
+          <inkml:channelProperty channel="OE" name="resolution" value="1000" units="1/deg"/>
+        </inkml:channelProperties>
+      </inkml:inkSource>
+      <inkml:timestamp xml:id="ts0" timeString="2026-04-07T16:55:00.870"/>
+    </inkml:context>
+    <inkml:brush xml:id="br0">
+      <inkml:brushProperty name="width" value="0.2" units="cm"/>
+      <inkml:brushProperty name="height" value="0.2" units="cm"/>
+      <inkml:brushProperty name="color" value="#66CC00"/>
+    </inkml:brush>
+  </inkml:definitions>
+  <inkml:trace contextRef="#ctx0" brushRef="#br0">38 0 4404 0 0,'-20'9'-401'0'0,"19"-8"356"0"0,-12 4-74 0 0,9 1 1398 0 0,89 2-1125 0 0,99-2 0 0 0,-123-2-90 0 0,-59-3 1 0 0,2-1-42 0 0,10 0-4 0 0,-10 0-30 0 0,11-7-3191 0 0,-8 1 2674 0 0</inkml:trace>
+</inkml:ink>
+</file>
+
+<file path=ppt/ink/ink91.xml><?xml version="1.0" encoding="utf-8"?>
+<inkml:ink xmlns:inkml="http://www.w3.org/2003/InkML">
+  <inkml:definitions>
+    <inkml:context xml:id="ctx0">
+      <inkml:inkSource xml:id="inkSrc0">
+        <inkml:traceFormat>
+          <inkml:channel name="X" type="integer" min="-2.14748E9" max="2.14748E9" units="cm"/>
+          <inkml:channel name="Y" type="integer" min="-2.14748E9" max="2.14748E9" units="cm"/>
+          <inkml:channel name="F" type="integer" max="32767" units="dev"/>
+          <inkml:channel name="OA" type="integer" max="360" units="deg"/>
+          <inkml:channel name="OE" type="integer" max="90" units="deg"/>
+        </inkml:traceFormat>
+        <inkml:channelProperties>
+          <inkml:channelProperty channel="X" name="resolution" value="1000" units="1/cm"/>
+          <inkml:channelProperty channel="Y" name="resolution" value="1000" units="1/cm"/>
+          <inkml:channelProperty channel="F" name="resolution" value="0" units="1/dev"/>
+          <inkml:channelProperty channel="OA" name="resolution" value="1000" units="1/deg"/>
+          <inkml:channelProperty channel="OE" name="resolution" value="1000" units="1/deg"/>
+        </inkml:channelProperties>
+      </inkml:inkSource>
+      <inkml:timestamp xml:id="ts0" timeString="2026-04-07T16:55:00.871"/>
+    </inkml:context>
+    <inkml:brush xml:id="br0">
+      <inkml:brushProperty name="width" value="0.2" units="cm"/>
+      <inkml:brushProperty name="height" value="0.2" units="cm"/>
+      <inkml:brushProperty name="color" value="#66CC00"/>
+    </inkml:brush>
+  </inkml:definitions>
+  <inkml:trace contextRef="#ctx0" brushRef="#br0">1 8 3172 0 0,'0'3'522'0'0,"11"-1"-186"0"0,39 0-53 0 0,59-4-106 0 0,158 0 548 0 0,-254 3-690 0 0,-12 0-157 0 0,1-1 0 0 0,-1 1 0 0 0,0-1 0 0 0,1 0 1 0 0,-1 0-1 0 0,0 0 0 0 0,1 1 0 0 0,-1-1 0 0 0,0 0 1 0 0,1-1-1 0 0,-1 1 0 0 0,0 0 0 0 0,1 0 0 0 0,-1-1 0 0 0,0 1 1 0 0,0 0-1 0 0,3-2 0 0 0,0-8-1079 0 0</inkml:trace>
+</inkml:ink>
+</file>
+
+<file path=ppt/ink/ink92.xml><?xml version="1.0" encoding="utf-8"?>
+<inkml:ink xmlns:inkml="http://www.w3.org/2003/InkML">
+  <inkml:definitions>
+    <inkml:context xml:id="ctx0">
+      <inkml:inkSource xml:id="inkSrc0">
+        <inkml:traceFormat>
+          <inkml:channel name="X" type="integer" min="-2.14748E9" max="2.14748E9" units="cm"/>
+          <inkml:channel name="Y" type="integer" min="-2.14748E9" max="2.14748E9" units="cm"/>
+          <inkml:channel name="F" type="integer" max="32767" units="dev"/>
+          <inkml:channel name="OA" type="integer" max="360" units="deg"/>
+          <inkml:channel name="OE" type="integer" max="90" units="deg"/>
+        </inkml:traceFormat>
+        <inkml:channelProperties>
+          <inkml:channelProperty channel="X" name="resolution" value="1000" units="1/cm"/>
+          <inkml:channelProperty channel="Y" name="resolution" value="1000" units="1/cm"/>
+          <inkml:channelProperty channel="F" name="resolution" value="0" units="1/dev"/>
+          <inkml:channelProperty channel="OA" name="resolution" value="1000" units="1/deg"/>
+          <inkml:channelProperty channel="OE" name="resolution" value="1000" units="1/deg"/>
+        </inkml:channelProperties>
+      </inkml:inkSource>
+      <inkml:timestamp xml:id="ts0" timeString="2026-04-07T16:55:00.872"/>
+    </inkml:context>
+    <inkml:brush xml:id="br0">
+      <inkml:brushProperty name="width" value="0.2" units="cm"/>
+      <inkml:brushProperty name="height" value="0.2" units="cm"/>
+      <inkml:brushProperty name="color" value="#66CC00"/>
+    </inkml:brush>
+  </inkml:definitions>
+  <inkml:trace contextRef="#ctx0" brushRef="#br0">35 1 3148 0 0,'0'0'-153'0'0,"-17"14"-500"0"0,12 8 653 0 0,0 0-1 0 0,2 0 1 0 0,0 0-1 0 0,2 0 1 0 0,0 1-1 0 0,2-1 1 0 0,0 0-1 0 0,2 0 1 0 0,0 0-1 0 0,2 0 1 0 0,0 0-1 0 0,1 0 1 0 0,1-1-1 0 0,2 0 1 0 0,0-1-1 0 0,0 0 1 0 0,2 0-1 0 0,16 21 1 0 0,-16-29 25 0 0,0 1 0 0 0,1-2 0 0 0,1 1 0 0 0,0-2 0 0 0,0 0 0 0 0,1 0 0 0 0,1-1-1 0 0,23 10 1 0 0,19 6 106 0 0,60 17 0 0 0,-13-5-28 0 0,-82-29-79 0 0,0 2 1 0 0,-1 1-1 0 0,0 0 0 0 0,20 16 0 0 0,-31-19-19 0 0,0 0 0 0 0,0 1-1 0 0,-1 1 1 0 0,0-1 0 0 0,-1 1-1 0 0,0 1 1 0 0,-1 0 0 0 0,0 0 0 0 0,5 12-1 0 0,3 8 8 0 0,2-1-1 0 0,0 0 1 0 0,2-1-1 0 0,1-2 0 0 0,2 0 1 0 0,0-1-1 0 0,31 27 1 0 0,-5-12 13 0 0,1-2 1 0 0,3-3 0 0 0,0-2 0 0 0,3-2 0 0 0,111 48-1 0 0,334 116 18 0 0,-290-116-54 0 0,-101-42 17 0 0,64 26 98 0 0,-142-50-1220 0 0</inkml:trace>
+</inkml:ink>
+</file>
+
+<file path=ppt/ink/ink93.xml><?xml version="1.0" encoding="utf-8"?>
+<inkml:ink xmlns:inkml="http://www.w3.org/2003/InkML">
+  <inkml:definitions>
+    <inkml:context xml:id="ctx0">
+      <inkml:inkSource xml:id="inkSrc0">
+        <inkml:traceFormat>
+          <inkml:channel name="X" type="integer" min="-2.14748E9" max="2.14748E9" units="cm"/>
+          <inkml:channel name="Y" type="integer" min="-2.14748E9" max="2.14748E9" units="cm"/>
+          <inkml:channel name="F" type="integer" max="32767" units="dev"/>
+          <inkml:channel name="OA" type="integer" max="360" units="deg"/>
+          <inkml:channel name="OE" type="integer" max="90" units="deg"/>
+        </inkml:traceFormat>
+        <inkml:channelProperties>
+          <inkml:channelProperty channel="X" name="resolution" value="1000" units="1/cm"/>
+          <inkml:channelProperty channel="Y" name="resolution" value="1000" units="1/cm"/>
+          <inkml:channelProperty channel="F" name="resolution" value="0" units="1/dev"/>
+          <inkml:channelProperty channel="OA" name="resolution" value="1000" units="1/deg"/>
+          <inkml:channelProperty channel="OE" name="resolution" value="1000" units="1/deg"/>
+        </inkml:channelProperties>
+      </inkml:inkSource>
+      <inkml:timestamp xml:id="ts0" timeString="2026-04-07T16:55:00.873"/>
+    </inkml:context>
+    <inkml:brush xml:id="br0">
+      <inkml:brushProperty name="width" value="0.2" units="cm"/>
+      <inkml:brushProperty name="height" value="0.2" units="cm"/>
+      <inkml:brushProperty name="color" value="#66CC00"/>
+    </inkml:brush>
+  </inkml:definitions>
+  <inkml:trace contextRef="#ctx0" brushRef="#br0">2457 65 3016 0 0,'2'-1'133'0'0,"-1"0"-1"0"0,0 1 1 0 0,0-1 0 0 0,0 0-1 0 0,0 0 1 0 0,0 0 0 0 0,0-1-1 0 0,0 1 1 0 0,0 0-1 0 0,0 0 1 0 0,0 0 0 0 0,-1-1-1 0 0,1 1 1 0 0,0 0-1 0 0,-1-1 1 0 0,1 1 0 0 0,-1-2-1 0 0,-14-4-72 0 0,0 1 0 0 0,-1 0 0 0 0,0 1 0 0 0,0 1 0 0 0,0 0 0 0 0,-22-2 0 0 0,21 4-65 0 0,0 1 0 0 0,-1 0 0 0 0,1 1 0 0 0,-1 0-1 0 0,-31 7 1 0 0,26-4 9 0 0,-42 4-7 0 0,1 3 0 0 0,0 2 0 0 0,0 4 1 0 0,-112 43-1 0 0,83-23 15 0 0,50-20-32 0 0,-63 32 1 0 0,-28 31-88 0 0,-51 28 139 0 0,-195 119 71 0 0,361-215-98 0 0,-8 4 19 0 0,-29 23 5 0 0,53-37-21 0 0,-34 15 65 0 0,-282 94 424 0 0,269-96-357 0 0,0-3-1 0 0,-1-2 0 0 0,-53 2 1 0 0,41-5-64 0 0,60-5-68 0 0,-6 1-66 0 0,0-1-1 0 0,0 0 0 0 0,0-1 0 0 0,0 1 0 0 0,-15-2 1 0 0,38-15-2153 0 0,0 6-431 0 0</inkml:trace>
+</inkml:ink>
+</file>
+
+<file path=ppt/ink/ink94.xml><?xml version="1.0" encoding="utf-8"?>
+<inkml:ink xmlns:inkml="http://www.w3.org/2003/InkML">
+  <inkml:definitions>
+    <inkml:context xml:id="ctx0">
+      <inkml:inkSource xml:id="inkSrc0">
+        <inkml:traceFormat>
+          <inkml:channel name="X" type="integer" min="-2.14748E9" max="2.14748E9" units="cm"/>
+          <inkml:channel name="Y" type="integer" min="-2.14748E9" max="2.14748E9" units="cm"/>
+          <inkml:channel name="F" type="integer" max="32767" units="dev"/>
+          <inkml:channel name="OA" type="integer" max="360" units="deg"/>
+          <inkml:channel name="OE" type="integer" max="90" units="deg"/>
+        </inkml:traceFormat>
+        <inkml:channelProperties>
+          <inkml:channelProperty channel="X" name="resolution" value="1000" units="1/cm"/>
+          <inkml:channelProperty channel="Y" name="resolution" value="1000" units="1/cm"/>
+          <inkml:channelProperty channel="F" name="resolution" value="0" units="1/dev"/>
+          <inkml:channelProperty channel="OA" name="resolution" value="1000" units="1/deg"/>
+          <inkml:channelProperty channel="OE" name="resolution" value="1000" units="1/deg"/>
+        </inkml:channelProperties>
+      </inkml:inkSource>
+      <inkml:timestamp xml:id="ts0" timeString="2026-04-07T16:55:00.874"/>
+    </inkml:context>
+    <inkml:brush xml:id="br0">
+      <inkml:brushProperty name="width" value="0.2" units="cm"/>
+      <inkml:brushProperty name="height" value="0.2" units="cm"/>
+      <inkml:brushProperty name="color" value="#66CC00"/>
+    </inkml:brush>
+  </inkml:definitions>
+  <inkml:trace contextRef="#ctx0" brushRef="#br0">196 45 6077 0 0,'0'0'-268'0'0,"-17"-37"1007"0"0,16 35-700 0 0,-5-2-27 0 0,5 2-16 0 0,-2 3-61 0 0,1 0 62 0 0,0 0 0 0 0,-1-1-1 0 0,1 2 1 0 0,0-1 0 0 0,-1 0 0 0 0,1 0 0 0 0,0 1-1 0 0,0-1 1 0 0,0 1 0 0 0,0 0 0 0 0,0-1 0 0 0,1 1-1 0 0,-1 0 1 0 0,-2 4 0 0 0,-27 39-64 0 0,24-34 55 0 0,-8 14-8 0 0,1 2 1 0 0,2 0 0 0 0,0 0 0 0 0,2 1-1 0 0,1 0 1 0 0,1 1 0 0 0,-6 48 0 0 0,12-33-83 0 0,2-43 103 0 0,0 1 9 0 0,0 7-3 0 0,11-32 173 0 0,-1-1 0 0 0,9-31 0 0 0,42-173-290 0 0,-61 226 66 0 0,28 150-333 0 0,-1-31 512 0 0,-27-115-120 0 0,-11-37-4483 0 0</inkml:trace>
+</inkml:ink>
+</file>
+
+<file path=ppt/ink/ink95.xml><?xml version="1.0" encoding="utf-8"?>
+<inkml:ink xmlns:inkml="http://www.w3.org/2003/InkML">
+  <inkml:definitions>
+    <inkml:context xml:id="ctx0">
+      <inkml:inkSource xml:id="inkSrc0">
+        <inkml:traceFormat>
+          <inkml:channel name="X" type="integer" min="-2.14748E9" max="2.14748E9" units="cm"/>
+          <inkml:channel name="Y" type="integer" min="-2.14748E9" max="2.14748E9" units="cm"/>
+          <inkml:channel name="F" type="integer" max="32767" units="dev"/>
+        </inkml:traceFormat>
+        <inkml:channelProperties>
+          <inkml:channelProperty channel="X" name="resolution" value="1000" units="1/cm"/>
+          <inkml:channelProperty channel="Y" name="resolution" value="1000" units="1/cm"/>
+          <inkml:channelProperty channel="F" name="resolution" value="0" units="1/dev"/>
+        </inkml:channelProperties>
+      </inkml:inkSource>
+      <inkml:timestamp xml:id="ts0" timeString="2026-04-07T16:55:00.875"/>
+    </inkml:context>
+    <inkml:brush xml:id="br0">
+      <inkml:brushProperty name="width" value="0.2" units="cm"/>
+      <inkml:brushProperty name="height" value="0.2" units="cm"/>
+      <inkml:brushProperty name="color" value="#66CC00"/>
+    </inkml:brush>
+  </inkml:definitions>
+  <inkml:trace contextRef="#ctx0" brushRef="#br0">19 86 24575,'-15'-11'0,"11"19"0,5-4 0,-1-1 0,1 1 0,0-1 0,0 0 0,0 1 0,1-1 0,-1 0 0,3 5 0,17 19 0,2 0 0,30 29 0,19 22 0,-30-32 0,2-1 0,2-1 0,2-3 0,71 47 0,-71-54 0,2-2 0,1-2 0,101 42 0,129 30 0,-230-83 0,-24-8 0,1-1 0,43 9 0,30 3 0,-1 4 0,107 44 0,-114-32 0,-56-21 0,0-2 0,2-1 0,59 12 0,-54-16 0,-31-7 0,-1 0 0,1 0 0,0-1 0,0-1 0,0 0 0,0-1 0,0 0 0,0-1 0,21-4 0,21-10 0,-27 9 0,0-2 0,0 0 0,-1-3 0,0 0 0,28-16 0,-43 19 0,36-20 0,0-2 0,-2-2 0,-2-2 0,50-49 0,-7 3 0,-62 59 0,-1-1 0,0-1 0,23-31 0,205-261 0,-144 184 0,-39 51 58,28-36-1481</inkml:trace>
+</inkml:ink>
+</file>
+
+<file path=ppt/ink/ink96.xml><?xml version="1.0" encoding="utf-8"?>
+<inkml:ink xmlns:inkml="http://www.w3.org/2003/InkML">
+  <inkml:definitions>
+    <inkml:context xml:id="ctx0">
+      <inkml:inkSource xml:id="inkSrc0">
+        <inkml:traceFormat>
+          <inkml:channel name="X" type="integer" min="-2.14748E9" max="2.14748E9" units="cm"/>
+          <inkml:channel name="Y" type="integer" min="-2.14748E9" max="2.14748E9" units="cm"/>
+          <inkml:channel name="F" type="integer" max="32767" units="dev"/>
+        </inkml:traceFormat>
+        <inkml:channelProperties>
+          <inkml:channelProperty channel="X" name="resolution" value="1000" units="1/cm"/>
+          <inkml:channelProperty channel="Y" name="resolution" value="1000" units="1/cm"/>
+          <inkml:channelProperty channel="F" name="resolution" value="0" units="1/dev"/>
+        </inkml:channelProperties>
+      </inkml:inkSource>
+      <inkml:timestamp xml:id="ts0" timeString="2026-04-07T16:55:00.876"/>
+    </inkml:context>
+    <inkml:brush xml:id="br0">
+      <inkml:brushProperty name="width" value="0.2" units="cm"/>
+      <inkml:brushProperty name="height" value="0.2" units="cm"/>
+      <inkml:brushProperty name="color" value="#66CC00"/>
+    </inkml:brush>
+  </inkml:definitions>
+  <inkml:trace contextRef="#ctx0" brushRef="#br0">61 37 24575,'0'-4'0,"0"-6"0,0-6 0,0 9 0,0 10 0,-5 4 0,-1 5 0,1 6 0,0 3 0,-2 3 0,-1 1 0,2 1 0,-3-4 0,0-1 0</inkml:trace>
+</inkml:ink>
+</file>
+
+<file path=ppt/ink/ink97.xml><?xml version="1.0" encoding="utf-8"?>
+<inkml:ink xmlns:inkml="http://www.w3.org/2003/InkML">
+  <inkml:definitions>
+    <inkml:context xml:id="ctx0">
+      <inkml:inkSource xml:id="inkSrc0">
+        <inkml:traceFormat>
+          <inkml:channel name="X" type="integer" min="-2.14748E9" max="2.14748E9" units="cm"/>
+          <inkml:channel name="Y" type="integer" min="-2.14748E9" max="2.14748E9" units="cm"/>
+          <inkml:channel name="F" type="integer" max="32767" units="dev"/>
+        </inkml:traceFormat>
+        <inkml:channelProperties>
+          <inkml:channelProperty channel="X" name="resolution" value="1000" units="1/cm"/>
+          <inkml:channelProperty channel="Y" name="resolution" value="1000" units="1/cm"/>
+          <inkml:channelProperty channel="F" name="resolution" value="0" units="1/dev"/>
+        </inkml:channelProperties>
+      </inkml:inkSource>
+      <inkml:timestamp xml:id="ts0" timeString="2026-04-07T16:55:00.877"/>
+    </inkml:context>
+    <inkml:brush xml:id="br0">
+      <inkml:brushProperty name="width" value="0.2" units="cm"/>
+      <inkml:brushProperty name="height" value="0.2" units="cm"/>
+      <inkml:brushProperty name="color" value="#66CC00"/>
+    </inkml:brush>
+  </inkml:definitions>
+  <inkml:trace contextRef="#ctx0" brushRef="#br0">2202 58 24575,'-1'-1'0,"1"-1"0,-1 0 0,0 1 0,0-1 0,0 1 0,0-1 0,0 1 0,0-1 0,-1 1 0,1 0 0,0 0 0,-1 0 0,1 0 0,-1 0 0,1 0 0,-1 0 0,-2-1 0,-30-14 0,8 10 0,0 2 0,0 0 0,0 2 0,0 0 0,-1 2 0,-35 4 0,-18-1 0,29 1 0,-1 2 0,1 2 0,-71 21 0,119-28 0,-26 9 0,1 1 0,0 1 0,0 2 0,1 1 0,1 1 0,1 1 0,0 2 0,1 0 0,-22 24 0,-104 81 0,49-45 0,69-55 0,0-2 0,-66 33 0,41-25 0,-18 7 0,-1-3 0,-108 31 0,105-38 0,-22 8 0,-176 57 0,260-89-1365</inkml:trace>
+</inkml:ink>
+</file>
+
+<file path=ppt/ink/ink98.xml><?xml version="1.0" encoding="utf-8"?>
+<inkml:ink xmlns:inkml="http://www.w3.org/2003/InkML">
+  <inkml:definitions>
+    <inkml:context xml:id="ctx0">
+      <inkml:inkSource xml:id="inkSrc0">
+        <inkml:traceFormat>
+          <inkml:channel name="X" type="integer" min="-2.14748E9" max="2.14748E9" units="cm"/>
+          <inkml:channel name="Y" type="integer" min="-2.14748E9" max="2.14748E9" units="cm"/>
+          <inkml:channel name="F" type="integer" max="32767" units="dev"/>
+        </inkml:traceFormat>
+        <inkml:channelProperties>
+          <inkml:channelProperty channel="X" name="resolution" value="1000" units="1/cm"/>
+          <inkml:channelProperty channel="Y" name="resolution" value="1000" units="1/cm"/>
+          <inkml:channelProperty channel="F" name="resolution" value="0" units="1/dev"/>
+        </inkml:channelProperties>
+      </inkml:inkSource>
+      <inkml:timestamp xml:id="ts0" timeString="2026-04-07T16:55:00.878"/>
+    </inkml:context>
+    <inkml:brush xml:id="br0">
+      <inkml:brushProperty name="width" value="0.2" units="cm"/>
+      <inkml:brushProperty name="height" value="0.2" units="cm"/>
+      <inkml:brushProperty name="color" value="#66CC00"/>
+    </inkml:brush>
+  </inkml:definitions>
+  <inkml:trace contextRef="#ctx0" brushRef="#br0">0 0 24575,'32'3'0,"-1"2"0,0 1 0,-1 1 0,1 2 0,54 23 0,-70-26 0,38 14 0,-2 3 0,74 44 0,-45-23 0,-50-28 0,-1 0 0,40 31 0,54 38 0,-89-64 0,0 1 0,-2 2 0,40 38 0,-33-21 0,7 8 0,1-2 0,3-2 0,103 72 0,183 60 0,-298-161 0,0-1 0,2-3 0,-1-1 0,2-2 0,62 7 0,1 5-1365</inkml:trace>
 </inkml:ink>
 </file>
 
@@ -6187,7 +7357,7 @@
           <a:p>
             <a:fld id="{6383FAE1-13DE-4511-8C1B-C8AFB720664C}" type="datetimeFigureOut">
               <a:rPr lang="en-US" smtClean="0"/>
-              <a:t>10/20/2025</a:t>
+              <a:t>4/7/2026</a:t>
             </a:fld>
             <a:endParaRPr lang="en-US"/>
           </a:p>
@@ -6385,7 +7555,7 @@
           <a:p>
             <a:fld id="{6383FAE1-13DE-4511-8C1B-C8AFB720664C}" type="datetimeFigureOut">
               <a:rPr lang="en-US" smtClean="0"/>
-              <a:t>10/20/2025</a:t>
+              <a:t>4/7/2026</a:t>
             </a:fld>
             <a:endParaRPr lang="en-US"/>
           </a:p>
@@ -6593,7 +7763,7 @@
           <a:p>
             <a:fld id="{6383FAE1-13DE-4511-8C1B-C8AFB720664C}" type="datetimeFigureOut">
               <a:rPr lang="en-US" smtClean="0"/>
-              <a:t>10/20/2025</a:t>
+              <a:t>4/7/2026</a:t>
             </a:fld>
             <a:endParaRPr lang="en-US"/>
           </a:p>
@@ -6791,7 +7961,7 @@
           <a:p>
             <a:fld id="{6383FAE1-13DE-4511-8C1B-C8AFB720664C}" type="datetimeFigureOut">
               <a:rPr lang="en-US" smtClean="0"/>
-              <a:t>10/20/2025</a:t>
+              <a:t>4/7/2026</a:t>
             </a:fld>
             <a:endParaRPr lang="en-US"/>
           </a:p>
@@ -7066,7 +8236,7 @@
           <a:p>
             <a:fld id="{6383FAE1-13DE-4511-8C1B-C8AFB720664C}" type="datetimeFigureOut">
               <a:rPr lang="en-US" smtClean="0"/>
-              <a:t>10/20/2025</a:t>
+              <a:t>4/7/2026</a:t>
             </a:fld>
             <a:endParaRPr lang="en-US"/>
           </a:p>
@@ -7331,7 +8501,7 @@
           <a:p>
             <a:fld id="{6383FAE1-13DE-4511-8C1B-C8AFB720664C}" type="datetimeFigureOut">
               <a:rPr lang="en-US" smtClean="0"/>
-              <a:t>10/20/2025</a:t>
+              <a:t>4/7/2026</a:t>
             </a:fld>
             <a:endParaRPr lang="en-US"/>
           </a:p>
@@ -7743,7 +8913,7 @@
           <a:p>
             <a:fld id="{6383FAE1-13DE-4511-8C1B-C8AFB720664C}" type="datetimeFigureOut">
               <a:rPr lang="en-US" smtClean="0"/>
-              <a:t>10/20/2025</a:t>
+              <a:t>4/7/2026</a:t>
             </a:fld>
             <a:endParaRPr lang="en-US"/>
           </a:p>
@@ -7884,7 +9054,7 @@
           <a:p>
             <a:fld id="{6383FAE1-13DE-4511-8C1B-C8AFB720664C}" type="datetimeFigureOut">
               <a:rPr lang="en-US" smtClean="0"/>
-              <a:t>10/20/2025</a:t>
+              <a:t>4/7/2026</a:t>
             </a:fld>
             <a:endParaRPr lang="en-US"/>
           </a:p>
@@ -7997,7 +9167,7 @@
           <a:p>
             <a:fld id="{6383FAE1-13DE-4511-8C1B-C8AFB720664C}" type="datetimeFigureOut">
               <a:rPr lang="en-US" smtClean="0"/>
-              <a:t>10/20/2025</a:t>
+              <a:t>4/7/2026</a:t>
             </a:fld>
             <a:endParaRPr lang="en-US"/>
           </a:p>
@@ -8308,7 +9478,7 @@
           <a:p>
             <a:fld id="{6383FAE1-13DE-4511-8C1B-C8AFB720664C}" type="datetimeFigureOut">
               <a:rPr lang="en-US" smtClean="0"/>
-              <a:t>10/20/2025</a:t>
+              <a:t>4/7/2026</a:t>
             </a:fld>
             <a:endParaRPr lang="en-US"/>
           </a:p>
@@ -8599,7 +9769,7 @@
           <a:p>
             <a:fld id="{6383FAE1-13DE-4511-8C1B-C8AFB720664C}" type="datetimeFigureOut">
               <a:rPr lang="en-US" smtClean="0"/>
-              <a:t>10/20/2025</a:t>
+              <a:t>4/7/2026</a:t>
             </a:fld>
             <a:endParaRPr lang="en-US"/>
           </a:p>
@@ -8843,7 +10013,7 @@
           <a:p>
             <a:fld id="{6383FAE1-13DE-4511-8C1B-C8AFB720664C}" type="datetimeFigureOut">
               <a:rPr lang="en-US" smtClean="0"/>
-              <a:t>10/20/2025</a:t>
+              <a:t>4/7/2026</a:t>
             </a:fld>
             <a:endParaRPr lang="en-US"/>
           </a:p>
@@ -9786,8 +10956,8 @@
           </a:p>
         </p:txBody>
       </p:sp>
-      <mc:AlternateContent xmlns:mc="http://schemas.openxmlformats.org/markup-compatibility/2006">
-        <mc:Choice xmlns:p14="http://schemas.microsoft.com/office/powerpoint/2010/main" Requires="p14">
+      <mc:AlternateContent xmlns:mc="http://schemas.openxmlformats.org/markup-compatibility/2006" xmlns:p14="http://schemas.microsoft.com/office/powerpoint/2010/main">
+        <mc:Choice Requires="p14">
           <p:contentPart p14:bwMode="auto" r:id="rId2">
             <p14:nvContentPartPr>
               <p14:cNvPr id="12" name="Ink 11">
@@ -9806,7 +10976,7 @@
             </p14:xfrm>
           </p:contentPart>
         </mc:Choice>
-        <mc:Fallback>
+        <mc:Fallback xmlns="">
           <p:pic>
             <p:nvPicPr>
               <p:cNvPr id="12" name="Ink 11">
@@ -9837,8 +11007,8 @@
           </p:pic>
         </mc:Fallback>
       </mc:AlternateContent>
-      <mc:AlternateContent xmlns:mc="http://schemas.openxmlformats.org/markup-compatibility/2006">
-        <mc:Choice xmlns:p14="http://schemas.microsoft.com/office/powerpoint/2010/main" Requires="p14">
+      <mc:AlternateContent xmlns:mc="http://schemas.openxmlformats.org/markup-compatibility/2006" xmlns:p14="http://schemas.microsoft.com/office/powerpoint/2010/main">
+        <mc:Choice Requires="p14">
           <p:contentPart p14:bwMode="auto" r:id="rId4">
             <p14:nvContentPartPr>
               <p14:cNvPr id="19" name="Ink 18">
@@ -9857,7 +11027,7 @@
             </p14:xfrm>
           </p:contentPart>
         </mc:Choice>
-        <mc:Fallback>
+        <mc:Fallback xmlns="">
           <p:pic>
             <p:nvPicPr>
               <p:cNvPr id="19" name="Ink 18">
@@ -9908,8 +11078,8 @@
             <a:chExt cx="1705320" cy="1038600"/>
           </a:xfrm>
         </p:grpSpPr>
-        <mc:AlternateContent xmlns:mc="http://schemas.openxmlformats.org/markup-compatibility/2006">
-          <mc:Choice xmlns:p14="http://schemas.microsoft.com/office/powerpoint/2010/main" Requires="p14">
+        <mc:AlternateContent xmlns:mc="http://schemas.openxmlformats.org/markup-compatibility/2006" xmlns:p14="http://schemas.microsoft.com/office/powerpoint/2010/main">
+          <mc:Choice Requires="p14">
             <p:contentPart p14:bwMode="auto" r:id="rId6">
               <p14:nvContentPartPr>
                 <p14:cNvPr id="3" name="Ink 2">
@@ -9928,7 +11098,7 @@
               </p14:xfrm>
             </p:contentPart>
           </mc:Choice>
-          <mc:Fallback>
+          <mc:Fallback xmlns="">
             <p:pic>
               <p:nvPicPr>
                 <p:cNvPr id="3" name="Ink 2">
@@ -9959,8 +11129,8 @@
             </p:pic>
           </mc:Fallback>
         </mc:AlternateContent>
-        <mc:AlternateContent xmlns:mc="http://schemas.openxmlformats.org/markup-compatibility/2006">
-          <mc:Choice xmlns:p14="http://schemas.microsoft.com/office/powerpoint/2010/main" Requires="p14">
+        <mc:AlternateContent xmlns:mc="http://schemas.openxmlformats.org/markup-compatibility/2006" xmlns:p14="http://schemas.microsoft.com/office/powerpoint/2010/main">
+          <mc:Choice Requires="p14">
             <p:contentPart p14:bwMode="auto" r:id="rId8">
               <p14:nvContentPartPr>
                 <p14:cNvPr id="5" name="Ink 4">
@@ -9979,7 +11149,7 @@
               </p14:xfrm>
             </p:contentPart>
           </mc:Choice>
-          <mc:Fallback>
+          <mc:Fallback xmlns="">
             <p:pic>
               <p:nvPicPr>
                 <p:cNvPr id="5" name="Ink 4">
@@ -10010,8 +11180,8 @@
             </p:pic>
           </mc:Fallback>
         </mc:AlternateContent>
-        <mc:AlternateContent xmlns:mc="http://schemas.openxmlformats.org/markup-compatibility/2006">
-          <mc:Choice xmlns:p14="http://schemas.microsoft.com/office/powerpoint/2010/main" Requires="p14">
+        <mc:AlternateContent xmlns:mc="http://schemas.openxmlformats.org/markup-compatibility/2006" xmlns:p14="http://schemas.microsoft.com/office/powerpoint/2010/main">
+          <mc:Choice Requires="p14">
             <p:contentPart p14:bwMode="auto" r:id="rId10">
               <p14:nvContentPartPr>
                 <p14:cNvPr id="6" name="Ink 5">
@@ -10030,7 +11200,7 @@
               </p14:xfrm>
             </p:contentPart>
           </mc:Choice>
-          <mc:Fallback>
+          <mc:Fallback xmlns="">
             <p:pic>
               <p:nvPicPr>
                 <p:cNvPr id="6" name="Ink 5">
@@ -10061,8 +11231,8 @@
             </p:pic>
           </mc:Fallback>
         </mc:AlternateContent>
-        <mc:AlternateContent xmlns:mc="http://schemas.openxmlformats.org/markup-compatibility/2006">
-          <mc:Choice xmlns:p14="http://schemas.microsoft.com/office/powerpoint/2010/main" Requires="p14">
+        <mc:AlternateContent xmlns:mc="http://schemas.openxmlformats.org/markup-compatibility/2006" xmlns:p14="http://schemas.microsoft.com/office/powerpoint/2010/main">
+          <mc:Choice Requires="p14">
             <p:contentPart p14:bwMode="auto" r:id="rId12">
               <p14:nvContentPartPr>
                 <p14:cNvPr id="7" name="Ink 6">
@@ -10081,7 +11251,7 @@
               </p14:xfrm>
             </p:contentPart>
           </mc:Choice>
-          <mc:Fallback>
+          <mc:Fallback xmlns="">
             <p:pic>
               <p:nvPicPr>
                 <p:cNvPr id="7" name="Ink 6">
@@ -10112,8 +11282,8 @@
             </p:pic>
           </mc:Fallback>
         </mc:AlternateContent>
-        <mc:AlternateContent xmlns:mc="http://schemas.openxmlformats.org/markup-compatibility/2006">
-          <mc:Choice xmlns:p14="http://schemas.microsoft.com/office/powerpoint/2010/main" Requires="p14">
+        <mc:AlternateContent xmlns:mc="http://schemas.openxmlformats.org/markup-compatibility/2006" xmlns:p14="http://schemas.microsoft.com/office/powerpoint/2010/main">
+          <mc:Choice Requires="p14">
             <p:contentPart p14:bwMode="auto" r:id="rId14">
               <p14:nvContentPartPr>
                 <p14:cNvPr id="8" name="Ink 7">
@@ -10132,7 +11302,7 @@
               </p14:xfrm>
             </p:contentPart>
           </mc:Choice>
-          <mc:Fallback>
+          <mc:Fallback xmlns="">
             <p:pic>
               <p:nvPicPr>
                 <p:cNvPr id="8" name="Ink 7">
@@ -10163,8 +11333,8 @@
             </p:pic>
           </mc:Fallback>
         </mc:AlternateContent>
-        <mc:AlternateContent xmlns:mc="http://schemas.openxmlformats.org/markup-compatibility/2006">
-          <mc:Choice xmlns:p14="http://schemas.microsoft.com/office/powerpoint/2010/main" Requires="p14">
+        <mc:AlternateContent xmlns:mc="http://schemas.openxmlformats.org/markup-compatibility/2006" xmlns:p14="http://schemas.microsoft.com/office/powerpoint/2010/main">
+          <mc:Choice Requires="p14">
             <p:contentPart p14:bwMode="auto" r:id="rId16">
               <p14:nvContentPartPr>
                 <p14:cNvPr id="9" name="Ink 8">
@@ -10183,7 +11353,7 @@
               </p14:xfrm>
             </p:contentPart>
           </mc:Choice>
-          <mc:Fallback>
+          <mc:Fallback xmlns="">
             <p:pic>
               <p:nvPicPr>
                 <p:cNvPr id="9" name="Ink 8">
@@ -10214,8 +11384,8 @@
             </p:pic>
           </mc:Fallback>
         </mc:AlternateContent>
-        <mc:AlternateContent xmlns:mc="http://schemas.openxmlformats.org/markup-compatibility/2006">
-          <mc:Choice xmlns:p14="http://schemas.microsoft.com/office/powerpoint/2010/main" Requires="p14">
+        <mc:AlternateContent xmlns:mc="http://schemas.openxmlformats.org/markup-compatibility/2006" xmlns:p14="http://schemas.microsoft.com/office/powerpoint/2010/main">
+          <mc:Choice Requires="p14">
             <p:contentPart p14:bwMode="auto" r:id="rId18">
               <p14:nvContentPartPr>
                 <p14:cNvPr id="10" name="Ink 9">
@@ -10234,7 +11404,7 @@
               </p14:xfrm>
             </p:contentPart>
           </mc:Choice>
-          <mc:Fallback>
+          <mc:Fallback xmlns="">
             <p:pic>
               <p:nvPicPr>
                 <p:cNvPr id="10" name="Ink 9">
@@ -10265,8 +11435,8 @@
             </p:pic>
           </mc:Fallback>
         </mc:AlternateContent>
-        <mc:AlternateContent xmlns:mc="http://schemas.openxmlformats.org/markup-compatibility/2006">
-          <mc:Choice xmlns:p14="http://schemas.microsoft.com/office/powerpoint/2010/main" Requires="p14">
+        <mc:AlternateContent xmlns:mc="http://schemas.openxmlformats.org/markup-compatibility/2006" xmlns:p14="http://schemas.microsoft.com/office/powerpoint/2010/main">
+          <mc:Choice Requires="p14">
             <p:contentPart p14:bwMode="auto" r:id="rId20">
               <p14:nvContentPartPr>
                 <p14:cNvPr id="21" name="Ink 20">
@@ -10285,7 +11455,7 @@
               </p14:xfrm>
             </p:contentPart>
           </mc:Choice>
-          <mc:Fallback>
+          <mc:Fallback xmlns="">
             <p:pic>
               <p:nvPicPr>
                 <p:cNvPr id="21" name="Ink 20">
@@ -10316,8 +11486,8 @@
             </p:pic>
           </mc:Fallback>
         </mc:AlternateContent>
-        <mc:AlternateContent xmlns:mc="http://schemas.openxmlformats.org/markup-compatibility/2006">
-          <mc:Choice xmlns:p14="http://schemas.microsoft.com/office/powerpoint/2010/main" Requires="p14">
+        <mc:AlternateContent xmlns:mc="http://schemas.openxmlformats.org/markup-compatibility/2006" xmlns:p14="http://schemas.microsoft.com/office/powerpoint/2010/main">
+          <mc:Choice Requires="p14">
             <p:contentPart p14:bwMode="auto" r:id="rId22">
               <p14:nvContentPartPr>
                 <p14:cNvPr id="22" name="Ink 21">
@@ -10336,7 +11506,7 @@
               </p14:xfrm>
             </p:contentPart>
           </mc:Choice>
-          <mc:Fallback>
+          <mc:Fallback xmlns="">
             <p:pic>
               <p:nvPicPr>
                 <p:cNvPr id="22" name="Ink 21">
@@ -10367,8 +11537,8 @@
             </p:pic>
           </mc:Fallback>
         </mc:AlternateContent>
-        <mc:AlternateContent xmlns:mc="http://schemas.openxmlformats.org/markup-compatibility/2006">
-          <mc:Choice xmlns:p14="http://schemas.microsoft.com/office/powerpoint/2010/main" Requires="p14">
+        <mc:AlternateContent xmlns:mc="http://schemas.openxmlformats.org/markup-compatibility/2006" xmlns:p14="http://schemas.microsoft.com/office/powerpoint/2010/main">
+          <mc:Choice Requires="p14">
             <p:contentPart p14:bwMode="auto" r:id="rId24">
               <p14:nvContentPartPr>
                 <p14:cNvPr id="24" name="Ink 23">
@@ -10387,7 +11557,7 @@
               </p14:xfrm>
             </p:contentPart>
           </mc:Choice>
-          <mc:Fallback>
+          <mc:Fallback xmlns="">
             <p:pic>
               <p:nvPicPr>
                 <p:cNvPr id="24" name="Ink 23">
@@ -10433,6 +11603,2320 @@
 </file>
 
 <file path=ppt/slides/slide10.xml><?xml version="1.0" encoding="utf-8"?>
+<p:sld xmlns:a="http://schemas.openxmlformats.org/drawingml/2006/main" xmlns:r="http://schemas.openxmlformats.org/officeDocument/2006/relationships" xmlns:p="http://schemas.openxmlformats.org/presentationml/2006/main">
+  <p:cSld>
+    <p:spTree>
+      <p:nvGrpSpPr>
+        <p:cNvPr id="1" name="">
+          <a:extLst>
+            <a:ext uri="{FF2B5EF4-FFF2-40B4-BE49-F238E27FC236}">
+              <a16:creationId xmlns:a16="http://schemas.microsoft.com/office/drawing/2014/main" id="{35B916AE-C25E-5260-D21B-147FC161BEBD}"/>
+            </a:ext>
+          </a:extLst>
+        </p:cNvPr>
+        <p:cNvGrpSpPr/>
+        <p:nvPr/>
+      </p:nvGrpSpPr>
+      <p:grpSpPr>
+        <a:xfrm>
+          <a:off x="0" y="0"/>
+          <a:ext cx="0" cy="0"/>
+          <a:chOff x="0" y="0"/>
+          <a:chExt cx="0" cy="0"/>
+        </a:xfrm>
+      </p:grpSpPr>
+      <p:sp>
+        <p:nvSpPr>
+          <p:cNvPr id="3" name="TextBox 2">
+            <a:extLst>
+              <a:ext uri="{FF2B5EF4-FFF2-40B4-BE49-F238E27FC236}">
+                <a16:creationId xmlns:a16="http://schemas.microsoft.com/office/drawing/2014/main" id="{B070326C-4B9C-CDA3-FF65-58604DAAF70E}"/>
+              </a:ext>
+            </a:extLst>
+          </p:cNvPr>
+          <p:cNvSpPr txBox="1"/>
+          <p:nvPr/>
+        </p:nvSpPr>
+        <p:spPr>
+          <a:xfrm>
+            <a:off x="160020" y="281678"/>
+            <a:ext cx="11681460" cy="3046988"/>
+          </a:xfrm>
+          <a:prstGeom prst="rect">
+            <a:avLst/>
+          </a:prstGeom>
+          <a:noFill/>
+        </p:spPr>
+        <p:txBody>
+          <a:bodyPr wrap="square">
+            <a:spAutoFit/>
+          </a:bodyPr>
+          <a:lstStyle/>
+          <a:p>
+            <a:pPr>
+              <a:buNone/>
+            </a:pPr>
+            <a:r>
+              <a:rPr lang="en-US" sz="2400" b="1" dirty="0">
+                <a:solidFill>
+                  <a:schemeClr val="accent6">
+                    <a:lumMod val="60000"/>
+                    <a:lumOff val="40000"/>
+                  </a:schemeClr>
+                </a:solidFill>
+              </a:rPr>
+              <a:t>Problem: </a:t>
+            </a:r>
+          </a:p>
+          <a:p>
+            <a:pPr>
+              <a:buNone/>
+            </a:pPr>
+            <a:r>
+              <a:rPr lang="en-US" sz="2400" dirty="0">
+                <a:solidFill>
+                  <a:schemeClr val="accent6">
+                    <a:lumMod val="60000"/>
+                    <a:lumOff val="40000"/>
+                  </a:schemeClr>
+                </a:solidFill>
+              </a:rPr>
+              <a:t>You’re the </a:t>
+            </a:r>
+            <a:r>
+              <a:rPr lang="en-US" sz="2400" b="1" dirty="0">
+                <a:solidFill>
+                  <a:schemeClr val="accent6">
+                    <a:lumMod val="60000"/>
+                    <a:lumOff val="40000"/>
+                  </a:schemeClr>
+                </a:solidFill>
+              </a:rPr>
+              <a:t>quality manager</a:t>
+            </a:r>
+            <a:r>
+              <a:rPr lang="en-US" sz="2400" dirty="0">
+                <a:solidFill>
+                  <a:schemeClr val="accent6">
+                    <a:lumMod val="60000"/>
+                    <a:lumOff val="40000"/>
+                  </a:schemeClr>
+                </a:solidFill>
+              </a:rPr>
+              <a:t> at a company that just received a </a:t>
+            </a:r>
+            <a:r>
+              <a:rPr lang="en-US" sz="2400" b="1" dirty="0">
+                <a:solidFill>
+                  <a:schemeClr val="accent6">
+                    <a:lumMod val="60000"/>
+                    <a:lumOff val="40000"/>
+                  </a:schemeClr>
+                </a:solidFill>
+              </a:rPr>
+              <a:t>truckload of 10,000 mangoes</a:t>
+            </a:r>
+            <a:r>
+              <a:rPr lang="en-US" sz="2400" dirty="0">
+                <a:solidFill>
+                  <a:schemeClr val="accent6">
+                    <a:lumMod val="60000"/>
+                    <a:lumOff val="40000"/>
+                  </a:schemeClr>
+                </a:solidFill>
+              </a:rPr>
+              <a:t> from farmers living in East, West, North, South of country.</a:t>
+            </a:r>
+          </a:p>
+          <a:p>
+            <a:pPr>
+              <a:buNone/>
+            </a:pPr>
+            <a:r>
+              <a:rPr lang="en-US" sz="2400" dirty="0">
+                <a:solidFill>
+                  <a:schemeClr val="accent6">
+                    <a:lumMod val="60000"/>
+                    <a:lumOff val="40000"/>
+                  </a:schemeClr>
+                </a:solidFill>
+              </a:rPr>
+              <a:t>Your boss says:  “Check if the shipment is good enough to send to the export market.”</a:t>
+            </a:r>
+          </a:p>
+          <a:p>
+            <a:pPr>
+              <a:buNone/>
+            </a:pPr>
+            <a:endParaRPr lang="en-US" sz="2400" dirty="0">
+              <a:solidFill>
+                <a:schemeClr val="accent6">
+                  <a:lumMod val="60000"/>
+                  <a:lumOff val="40000"/>
+                </a:schemeClr>
+              </a:solidFill>
+            </a:endParaRPr>
+          </a:p>
+          <a:p>
+            <a:pPr>
+              <a:buNone/>
+            </a:pPr>
+            <a:r>
+              <a:rPr lang="en-US" sz="2400" dirty="0">
+                <a:solidFill>
+                  <a:schemeClr val="accent6">
+                    <a:lumMod val="60000"/>
+                    <a:lumOff val="40000"/>
+                  </a:schemeClr>
+                </a:solidFill>
+              </a:rPr>
+              <a:t>You can’t cut open </a:t>
+            </a:r>
+            <a:r>
+              <a:rPr lang="en-US" sz="2400" b="1" dirty="0">
+                <a:solidFill>
+                  <a:schemeClr val="accent6">
+                    <a:lumMod val="60000"/>
+                    <a:lumOff val="40000"/>
+                  </a:schemeClr>
+                </a:solidFill>
+              </a:rPr>
+              <a:t>all 10,000 mangoes</a:t>
+            </a:r>
+            <a:r>
+              <a:rPr lang="en-US" sz="2400" dirty="0">
+                <a:solidFill>
+                  <a:schemeClr val="accent6">
+                    <a:lumMod val="60000"/>
+                    <a:lumOff val="40000"/>
+                  </a:schemeClr>
+                </a:solidFill>
+              </a:rPr>
+              <a:t> to test sweetness and ripeness.  You only have time to test </a:t>
+            </a:r>
+            <a:r>
+              <a:rPr lang="en-US" sz="2400" b="1" dirty="0">
+                <a:solidFill>
+                  <a:schemeClr val="accent6">
+                    <a:lumMod val="60000"/>
+                    <a:lumOff val="40000"/>
+                  </a:schemeClr>
+                </a:solidFill>
+              </a:rPr>
+              <a:t>50 mangoes</a:t>
+            </a:r>
+            <a:r>
+              <a:rPr lang="en-US" sz="2400" dirty="0">
+                <a:solidFill>
+                  <a:schemeClr val="accent6">
+                    <a:lumMod val="60000"/>
+                    <a:lumOff val="40000"/>
+                  </a:schemeClr>
+                </a:solidFill>
+              </a:rPr>
+              <a:t>.</a:t>
+            </a:r>
+          </a:p>
+          <a:p>
+            <a:pPr>
+              <a:buNone/>
+            </a:pPr>
+            <a:r>
+              <a:rPr lang="en-US" sz="2400" dirty="0">
+                <a:solidFill>
+                  <a:schemeClr val="accent6">
+                    <a:lumMod val="60000"/>
+                    <a:lumOff val="40000"/>
+                  </a:schemeClr>
+                </a:solidFill>
+              </a:rPr>
+              <a:t>How will you pick those 50 mangoes so that your decision represents the </a:t>
+            </a:r>
+            <a:r>
+              <a:rPr lang="en-US" sz="2400" b="1" dirty="0">
+                <a:solidFill>
+                  <a:schemeClr val="accent6">
+                    <a:lumMod val="60000"/>
+                    <a:lumOff val="40000"/>
+                  </a:schemeClr>
+                </a:solidFill>
+              </a:rPr>
+              <a:t>whole truckload </a:t>
+            </a:r>
+            <a:r>
+              <a:rPr lang="en-US" sz="2400" dirty="0">
+                <a:solidFill>
+                  <a:schemeClr val="accent6">
+                    <a:lumMod val="60000"/>
+                    <a:lumOff val="40000"/>
+                  </a:schemeClr>
+                </a:solidFill>
+              </a:rPr>
+              <a:t>?</a:t>
+            </a:r>
+          </a:p>
+        </p:txBody>
+      </p:sp>
+      <mc:AlternateContent xmlns:mc="http://schemas.openxmlformats.org/markup-compatibility/2006">
+        <mc:Choice xmlns:p14="http://schemas.microsoft.com/office/powerpoint/2010/main" Requires="p14">
+          <p:contentPart p14:bwMode="auto" r:id="rId2">
+            <p14:nvContentPartPr>
+              <p14:cNvPr id="2" name="Ink 1">
+                <a:extLst>
+                  <a:ext uri="{FF2B5EF4-FFF2-40B4-BE49-F238E27FC236}">
+                    <a16:creationId xmlns:a16="http://schemas.microsoft.com/office/drawing/2014/main" id="{B161FC14-D3CE-80E2-8840-22E7FA551260}"/>
+                  </a:ext>
+                </a:extLst>
+              </p14:cNvPr>
+              <p14:cNvContentPartPr/>
+              <p14:nvPr/>
+            </p14:nvContentPartPr>
+            <p14:xfrm>
+              <a:off x="9476424" y="3763152"/>
+              <a:ext cx="2489400" cy="1425600"/>
+            </p14:xfrm>
+          </p:contentPart>
+        </mc:Choice>
+        <mc:Fallback>
+          <p:pic>
+            <p:nvPicPr>
+              <p:cNvPr id="2" name="Ink 1">
+                <a:extLst>
+                  <a:ext uri="{FF2B5EF4-FFF2-40B4-BE49-F238E27FC236}">
+                    <a16:creationId xmlns:a16="http://schemas.microsoft.com/office/drawing/2014/main" id="{B161FC14-D3CE-80E2-8840-22E7FA551260}"/>
+                  </a:ext>
+                </a:extLst>
+              </p:cNvPr>
+              <p:cNvPicPr/>
+              <p:nvPr/>
+            </p:nvPicPr>
+            <p:blipFill>
+              <a:blip r:embed="rId3"/>
+              <a:stretch>
+                <a:fillRect/>
+              </a:stretch>
+            </p:blipFill>
+            <p:spPr>
+              <a:xfrm>
+                <a:off x="9440424" y="3727152"/>
+                <a:ext cx="2561040" cy="1497240"/>
+              </a:xfrm>
+              <a:prstGeom prst="rect">
+                <a:avLst/>
+              </a:prstGeom>
+            </p:spPr>
+          </p:pic>
+        </mc:Fallback>
+      </mc:AlternateContent>
+      <p:grpSp>
+        <p:nvGrpSpPr>
+          <p:cNvPr id="4" name="Group 3">
+            <a:extLst>
+              <a:ext uri="{FF2B5EF4-FFF2-40B4-BE49-F238E27FC236}">
+                <a16:creationId xmlns:a16="http://schemas.microsoft.com/office/drawing/2014/main" id="{8AC39236-A046-EB91-BAB1-E51F26599046}"/>
+              </a:ext>
+            </a:extLst>
+          </p:cNvPr>
+          <p:cNvGrpSpPr/>
+          <p:nvPr/>
+        </p:nvGrpSpPr>
+        <p:grpSpPr>
+          <a:xfrm>
+            <a:off x="9747864" y="3896712"/>
+            <a:ext cx="1705320" cy="1038600"/>
+            <a:chOff x="9564984" y="1894176"/>
+            <a:chExt cx="1705320" cy="1038600"/>
+          </a:xfrm>
+        </p:grpSpPr>
+        <mc:AlternateContent xmlns:mc="http://schemas.openxmlformats.org/markup-compatibility/2006" xmlns:p14="http://schemas.microsoft.com/office/powerpoint/2010/main">
+          <mc:Choice Requires="p14">
+            <p:contentPart p14:bwMode="auto" r:id="rId4">
+              <p14:nvContentPartPr>
+                <p14:cNvPr id="5" name="Ink 4">
+                  <a:extLst>
+                    <a:ext uri="{FF2B5EF4-FFF2-40B4-BE49-F238E27FC236}">
+                      <a16:creationId xmlns:a16="http://schemas.microsoft.com/office/drawing/2014/main" id="{CD78B032-F2D8-FB01-2198-1E953D59B685}"/>
+                    </a:ext>
+                  </a:extLst>
+                </p14:cNvPr>
+                <p14:cNvContentPartPr/>
+                <p14:nvPr/>
+              </p14:nvContentPartPr>
+              <p14:xfrm>
+                <a:off x="10197504" y="1894176"/>
+                <a:ext cx="213840" cy="233280"/>
+              </p14:xfrm>
+            </p:contentPart>
+          </mc:Choice>
+          <mc:Fallback xmlns="">
+            <p:pic>
+              <p:nvPicPr>
+                <p:cNvPr id="5" name="Ink 4">
+                  <a:extLst>
+                    <a:ext uri="{FF2B5EF4-FFF2-40B4-BE49-F238E27FC236}">
+                      <a16:creationId xmlns:a16="http://schemas.microsoft.com/office/drawing/2014/main" id="{CD78B032-F2D8-FB01-2198-1E953D59B685}"/>
+                    </a:ext>
+                  </a:extLst>
+                </p:cNvPr>
+                <p:cNvPicPr/>
+                <p:nvPr/>
+              </p:nvPicPr>
+              <p:blipFill>
+                <a:blip r:embed="rId5"/>
+                <a:stretch>
+                  <a:fillRect/>
+                </a:stretch>
+              </p:blipFill>
+              <p:spPr>
+                <a:xfrm>
+                  <a:off x="10161864" y="1858176"/>
+                  <a:ext cx="285480" cy="304920"/>
+                </a:xfrm>
+                <a:prstGeom prst="rect">
+                  <a:avLst/>
+                </a:prstGeom>
+              </p:spPr>
+            </p:pic>
+          </mc:Fallback>
+        </mc:AlternateContent>
+        <mc:AlternateContent xmlns:mc="http://schemas.openxmlformats.org/markup-compatibility/2006" xmlns:p14="http://schemas.microsoft.com/office/powerpoint/2010/main">
+          <mc:Choice Requires="p14">
+            <p:contentPart p14:bwMode="auto" r:id="rId6">
+              <p14:nvContentPartPr>
+                <p14:cNvPr id="6" name="Ink 5">
+                  <a:extLst>
+                    <a:ext uri="{FF2B5EF4-FFF2-40B4-BE49-F238E27FC236}">
+                      <a16:creationId xmlns:a16="http://schemas.microsoft.com/office/drawing/2014/main" id="{AABFE765-875C-CEB7-D011-CA09C0F1C3F2}"/>
+                    </a:ext>
+                  </a:extLst>
+                </p14:cNvPr>
+                <p14:cNvContentPartPr/>
+                <p14:nvPr/>
+              </p14:nvContentPartPr>
+              <p14:xfrm>
+                <a:off x="10129464" y="2691216"/>
+                <a:ext cx="284760" cy="182160"/>
+              </p14:xfrm>
+            </p:contentPart>
+          </mc:Choice>
+          <mc:Fallback xmlns="">
+            <p:pic>
+              <p:nvPicPr>
+                <p:cNvPr id="6" name="Ink 5">
+                  <a:extLst>
+                    <a:ext uri="{FF2B5EF4-FFF2-40B4-BE49-F238E27FC236}">
+                      <a16:creationId xmlns:a16="http://schemas.microsoft.com/office/drawing/2014/main" id="{AABFE765-875C-CEB7-D011-CA09C0F1C3F2}"/>
+                    </a:ext>
+                  </a:extLst>
+                </p:cNvPr>
+                <p:cNvPicPr/>
+                <p:nvPr/>
+              </p:nvPicPr>
+              <p:blipFill>
+                <a:blip r:embed="rId7"/>
+                <a:stretch>
+                  <a:fillRect/>
+                </a:stretch>
+              </p:blipFill>
+              <p:spPr>
+                <a:xfrm>
+                  <a:off x="10093824" y="2655216"/>
+                  <a:ext cx="356400" cy="253800"/>
+                </a:xfrm>
+                <a:prstGeom prst="rect">
+                  <a:avLst/>
+                </a:prstGeom>
+              </p:spPr>
+            </p:pic>
+          </mc:Fallback>
+        </mc:AlternateContent>
+        <mc:AlternateContent xmlns:mc="http://schemas.openxmlformats.org/markup-compatibility/2006" xmlns:p14="http://schemas.microsoft.com/office/powerpoint/2010/main">
+          <mc:Choice Requires="p14">
+            <p:contentPart p14:bwMode="auto" r:id="rId8">
+              <p14:nvContentPartPr>
+                <p14:cNvPr id="7" name="Ink 6">
+                  <a:extLst>
+                    <a:ext uri="{FF2B5EF4-FFF2-40B4-BE49-F238E27FC236}">
+                      <a16:creationId xmlns:a16="http://schemas.microsoft.com/office/drawing/2014/main" id="{BD6E7E84-4609-24DF-0A31-13E704E79263}"/>
+                    </a:ext>
+                  </a:extLst>
+                </p14:cNvPr>
+                <p14:cNvContentPartPr/>
+                <p14:nvPr/>
+              </p14:nvContentPartPr>
+              <p14:xfrm>
+                <a:off x="9658584" y="2311776"/>
+                <a:ext cx="295200" cy="199800"/>
+              </p14:xfrm>
+            </p:contentPart>
+          </mc:Choice>
+          <mc:Fallback xmlns="">
+            <p:pic>
+              <p:nvPicPr>
+                <p:cNvPr id="7" name="Ink 6">
+                  <a:extLst>
+                    <a:ext uri="{FF2B5EF4-FFF2-40B4-BE49-F238E27FC236}">
+                      <a16:creationId xmlns:a16="http://schemas.microsoft.com/office/drawing/2014/main" id="{BD6E7E84-4609-24DF-0A31-13E704E79263}"/>
+                    </a:ext>
+                  </a:extLst>
+                </p:cNvPr>
+                <p:cNvPicPr/>
+                <p:nvPr/>
+              </p:nvPicPr>
+              <p:blipFill>
+                <a:blip r:embed="rId9"/>
+                <a:stretch>
+                  <a:fillRect/>
+                </a:stretch>
+              </p:blipFill>
+              <p:spPr>
+                <a:xfrm>
+                  <a:off x="9622944" y="2275776"/>
+                  <a:ext cx="366840" cy="271440"/>
+                </a:xfrm>
+                <a:prstGeom prst="rect">
+                  <a:avLst/>
+                </a:prstGeom>
+              </p:spPr>
+            </p:pic>
+          </mc:Fallback>
+        </mc:AlternateContent>
+        <mc:AlternateContent xmlns:mc="http://schemas.openxmlformats.org/markup-compatibility/2006" xmlns:p14="http://schemas.microsoft.com/office/powerpoint/2010/main">
+          <mc:Choice Requires="p14">
+            <p:contentPart p14:bwMode="auto" r:id="rId10">
+              <p14:nvContentPartPr>
+                <p14:cNvPr id="8" name="Ink 7">
+                  <a:extLst>
+                    <a:ext uri="{FF2B5EF4-FFF2-40B4-BE49-F238E27FC236}">
+                      <a16:creationId xmlns:a16="http://schemas.microsoft.com/office/drawing/2014/main" id="{B62A6372-100D-62C6-0456-24EC049412BA}"/>
+                    </a:ext>
+                  </a:extLst>
+                </p14:cNvPr>
+                <p14:cNvContentPartPr/>
+                <p14:nvPr/>
+              </p14:nvContentPartPr>
+              <p14:xfrm>
+                <a:off x="10820664" y="2324736"/>
+                <a:ext cx="55800" cy="173520"/>
+              </p14:xfrm>
+            </p:contentPart>
+          </mc:Choice>
+          <mc:Fallback xmlns="">
+            <p:pic>
+              <p:nvPicPr>
+                <p:cNvPr id="8" name="Ink 7">
+                  <a:extLst>
+                    <a:ext uri="{FF2B5EF4-FFF2-40B4-BE49-F238E27FC236}">
+                      <a16:creationId xmlns:a16="http://schemas.microsoft.com/office/drawing/2014/main" id="{B62A6372-100D-62C6-0456-24EC049412BA}"/>
+                    </a:ext>
+                  </a:extLst>
+                </p:cNvPr>
+                <p:cNvPicPr/>
+                <p:nvPr/>
+              </p:nvPicPr>
+              <p:blipFill>
+                <a:blip r:embed="rId11"/>
+                <a:stretch>
+                  <a:fillRect/>
+                </a:stretch>
+              </p:blipFill>
+              <p:spPr>
+                <a:xfrm>
+                  <a:off x="10785024" y="2288736"/>
+                  <a:ext cx="127440" cy="245160"/>
+                </a:xfrm>
+                <a:prstGeom prst="rect">
+                  <a:avLst/>
+                </a:prstGeom>
+              </p:spPr>
+            </p:pic>
+          </mc:Fallback>
+        </mc:AlternateContent>
+        <mc:AlternateContent xmlns:mc="http://schemas.openxmlformats.org/markup-compatibility/2006" xmlns:p14="http://schemas.microsoft.com/office/powerpoint/2010/main">
+          <mc:Choice Requires="p14">
+            <p:contentPart p14:bwMode="auto" r:id="rId12">
+              <p14:nvContentPartPr>
+                <p14:cNvPr id="9" name="Ink 8">
+                  <a:extLst>
+                    <a:ext uri="{FF2B5EF4-FFF2-40B4-BE49-F238E27FC236}">
+                      <a16:creationId xmlns:a16="http://schemas.microsoft.com/office/drawing/2014/main" id="{F3E672FC-7A41-4A53-2D23-4AB778D04C7F}"/>
+                    </a:ext>
+                  </a:extLst>
+                </p14:cNvPr>
+                <p14:cNvContentPartPr/>
+                <p14:nvPr/>
+              </p14:nvContentPartPr>
+              <p14:xfrm>
+                <a:off x="10833624" y="2276496"/>
+                <a:ext cx="299160" cy="25200"/>
+              </p14:xfrm>
+            </p:contentPart>
+          </mc:Choice>
+          <mc:Fallback xmlns="">
+            <p:pic>
+              <p:nvPicPr>
+                <p:cNvPr id="9" name="Ink 8">
+                  <a:extLst>
+                    <a:ext uri="{FF2B5EF4-FFF2-40B4-BE49-F238E27FC236}">
+                      <a16:creationId xmlns:a16="http://schemas.microsoft.com/office/drawing/2014/main" id="{F3E672FC-7A41-4A53-2D23-4AB778D04C7F}"/>
+                    </a:ext>
+                  </a:extLst>
+                </p:cNvPr>
+                <p:cNvPicPr/>
+                <p:nvPr/>
+              </p:nvPicPr>
+              <p:blipFill>
+                <a:blip r:embed="rId13"/>
+                <a:stretch>
+                  <a:fillRect/>
+                </a:stretch>
+              </p:blipFill>
+              <p:spPr>
+                <a:xfrm>
+                  <a:off x="10797624" y="2240856"/>
+                  <a:ext cx="370800" cy="96840"/>
+                </a:xfrm>
+                <a:prstGeom prst="rect">
+                  <a:avLst/>
+                </a:prstGeom>
+              </p:spPr>
+            </p:pic>
+          </mc:Fallback>
+        </mc:AlternateContent>
+        <mc:AlternateContent xmlns:mc="http://schemas.openxmlformats.org/markup-compatibility/2006" xmlns:p14="http://schemas.microsoft.com/office/powerpoint/2010/main">
+          <mc:Choice Requires="p14">
+            <p:contentPart p14:bwMode="auto" r:id="rId14">
+              <p14:nvContentPartPr>
+                <p14:cNvPr id="10" name="Ink 9">
+                  <a:extLst>
+                    <a:ext uri="{FF2B5EF4-FFF2-40B4-BE49-F238E27FC236}">
+                      <a16:creationId xmlns:a16="http://schemas.microsoft.com/office/drawing/2014/main" id="{CC9F2E77-A6BA-F1CD-EFB6-52D76FEEA777}"/>
+                    </a:ext>
+                  </a:extLst>
+                </p14:cNvPr>
+                <p14:cNvContentPartPr/>
+                <p14:nvPr/>
+              </p14:nvContentPartPr>
+              <p14:xfrm>
+                <a:off x="10930464" y="2393136"/>
+                <a:ext cx="135720" cy="14760"/>
+              </p14:xfrm>
+            </p:contentPart>
+          </mc:Choice>
+          <mc:Fallback xmlns="">
+            <p:pic>
+              <p:nvPicPr>
+                <p:cNvPr id="10" name="Ink 9">
+                  <a:extLst>
+                    <a:ext uri="{FF2B5EF4-FFF2-40B4-BE49-F238E27FC236}">
+                      <a16:creationId xmlns:a16="http://schemas.microsoft.com/office/drawing/2014/main" id="{CC9F2E77-A6BA-F1CD-EFB6-52D76FEEA777}"/>
+                    </a:ext>
+                  </a:extLst>
+                </p:cNvPr>
+                <p:cNvPicPr/>
+                <p:nvPr/>
+              </p:nvPicPr>
+              <p:blipFill>
+                <a:blip r:embed="rId15"/>
+                <a:stretch>
+                  <a:fillRect/>
+                </a:stretch>
+              </p:blipFill>
+              <p:spPr>
+                <a:xfrm>
+                  <a:off x="10894464" y="2357136"/>
+                  <a:ext cx="207360" cy="86400"/>
+                </a:xfrm>
+                <a:prstGeom prst="rect">
+                  <a:avLst/>
+                </a:prstGeom>
+              </p:spPr>
+            </p:pic>
+          </mc:Fallback>
+        </mc:AlternateContent>
+        <mc:AlternateContent xmlns:mc="http://schemas.openxmlformats.org/markup-compatibility/2006" xmlns:p14="http://schemas.microsoft.com/office/powerpoint/2010/main">
+          <mc:Choice Requires="p14">
+            <p:contentPart p14:bwMode="auto" r:id="rId16">
+              <p14:nvContentPartPr>
+                <p14:cNvPr id="11" name="Ink 10">
+                  <a:extLst>
+                    <a:ext uri="{FF2B5EF4-FFF2-40B4-BE49-F238E27FC236}">
+                      <a16:creationId xmlns:a16="http://schemas.microsoft.com/office/drawing/2014/main" id="{0A1C3762-7FB2-2270-CCC6-5D290214B965}"/>
+                    </a:ext>
+                  </a:extLst>
+                </p14:cNvPr>
+                <p14:cNvContentPartPr/>
+                <p14:nvPr/>
+              </p14:nvContentPartPr>
+              <p14:xfrm>
+                <a:off x="10878624" y="2528856"/>
+                <a:ext cx="173520" cy="5400"/>
+              </p14:xfrm>
+            </p:contentPart>
+          </mc:Choice>
+          <mc:Fallback xmlns="">
+            <p:pic>
+              <p:nvPicPr>
+                <p:cNvPr id="11" name="Ink 10">
+                  <a:extLst>
+                    <a:ext uri="{FF2B5EF4-FFF2-40B4-BE49-F238E27FC236}">
+                      <a16:creationId xmlns:a16="http://schemas.microsoft.com/office/drawing/2014/main" id="{0A1C3762-7FB2-2270-CCC6-5D290214B965}"/>
+                    </a:ext>
+                  </a:extLst>
+                </p:cNvPr>
+                <p:cNvPicPr/>
+                <p:nvPr/>
+              </p:nvPicPr>
+              <p:blipFill>
+                <a:blip r:embed="rId17"/>
+                <a:stretch>
+                  <a:fillRect/>
+                </a:stretch>
+              </p:blipFill>
+              <p:spPr>
+                <a:xfrm>
+                  <a:off x="10842984" y="2493216"/>
+                  <a:ext cx="245160" cy="77040"/>
+                </a:xfrm>
+                <a:prstGeom prst="rect">
+                  <a:avLst/>
+                </a:prstGeom>
+              </p:spPr>
+            </p:pic>
+          </mc:Fallback>
+        </mc:AlternateContent>
+        <mc:AlternateContent xmlns:mc="http://schemas.openxmlformats.org/markup-compatibility/2006" xmlns:p14="http://schemas.microsoft.com/office/powerpoint/2010/main">
+          <mc:Choice Requires="p14">
+            <p:contentPart p14:bwMode="auto" r:id="rId18">
+              <p14:nvContentPartPr>
+                <p14:cNvPr id="12" name="Ink 11">
+                  <a:extLst>
+                    <a:ext uri="{FF2B5EF4-FFF2-40B4-BE49-F238E27FC236}">
+                      <a16:creationId xmlns:a16="http://schemas.microsoft.com/office/drawing/2014/main" id="{C665B3D5-75FF-DFD8-75D2-7BCFBF5A9D27}"/>
+                    </a:ext>
+                  </a:extLst>
+                </p14:cNvPr>
+                <p14:cNvContentPartPr/>
+                <p14:nvPr/>
+              </p14:nvContentPartPr>
+              <p14:xfrm>
+                <a:off x="10420344" y="2306736"/>
+                <a:ext cx="849960" cy="626040"/>
+              </p14:xfrm>
+            </p:contentPart>
+          </mc:Choice>
+          <mc:Fallback xmlns="">
+            <p:pic>
+              <p:nvPicPr>
+                <p:cNvPr id="12" name="Ink 11">
+                  <a:extLst>
+                    <a:ext uri="{FF2B5EF4-FFF2-40B4-BE49-F238E27FC236}">
+                      <a16:creationId xmlns:a16="http://schemas.microsoft.com/office/drawing/2014/main" id="{C665B3D5-75FF-DFD8-75D2-7BCFBF5A9D27}"/>
+                    </a:ext>
+                  </a:extLst>
+                </p:cNvPr>
+                <p:cNvPicPr/>
+                <p:nvPr/>
+              </p:nvPicPr>
+              <p:blipFill>
+                <a:blip r:embed="rId19"/>
+                <a:stretch>
+                  <a:fillRect/>
+                </a:stretch>
+              </p:blipFill>
+              <p:spPr>
+                <a:xfrm>
+                  <a:off x="10384344" y="2271096"/>
+                  <a:ext cx="921600" cy="697680"/>
+                </a:xfrm>
+                <a:prstGeom prst="rect">
+                  <a:avLst/>
+                </a:prstGeom>
+              </p:spPr>
+            </p:pic>
+          </mc:Fallback>
+        </mc:AlternateContent>
+        <mc:AlternateContent xmlns:mc="http://schemas.openxmlformats.org/markup-compatibility/2006" xmlns:p14="http://schemas.microsoft.com/office/powerpoint/2010/main">
+          <mc:Choice Requires="p14">
+            <p:contentPart p14:bwMode="auto" r:id="rId20">
+              <p14:nvContentPartPr>
+                <p14:cNvPr id="13" name="Ink 12">
+                  <a:extLst>
+                    <a:ext uri="{FF2B5EF4-FFF2-40B4-BE49-F238E27FC236}">
+                      <a16:creationId xmlns:a16="http://schemas.microsoft.com/office/drawing/2014/main" id="{BB77EF42-67FF-51C3-197B-DAD9D1FA2277}"/>
+                    </a:ext>
+                  </a:extLst>
+                </p14:cNvPr>
+                <p14:cNvContentPartPr/>
+                <p14:nvPr/>
+              </p14:nvContentPartPr>
+              <p14:xfrm>
+                <a:off x="9564984" y="2473776"/>
+                <a:ext cx="890640" cy="315000"/>
+              </p14:xfrm>
+            </p:contentPart>
+          </mc:Choice>
+          <mc:Fallback xmlns="">
+            <p:pic>
+              <p:nvPicPr>
+                <p:cNvPr id="13" name="Ink 12">
+                  <a:extLst>
+                    <a:ext uri="{FF2B5EF4-FFF2-40B4-BE49-F238E27FC236}">
+                      <a16:creationId xmlns:a16="http://schemas.microsoft.com/office/drawing/2014/main" id="{BB77EF42-67FF-51C3-197B-DAD9D1FA2277}"/>
+                    </a:ext>
+                  </a:extLst>
+                </p:cNvPr>
+                <p:cNvPicPr/>
+                <p:nvPr/>
+              </p:nvPicPr>
+              <p:blipFill>
+                <a:blip r:embed="rId21"/>
+                <a:stretch>
+                  <a:fillRect/>
+                </a:stretch>
+              </p:blipFill>
+              <p:spPr>
+                <a:xfrm>
+                  <a:off x="9528984" y="2438136"/>
+                  <a:ext cx="962280" cy="386640"/>
+                </a:xfrm>
+                <a:prstGeom prst="rect">
+                  <a:avLst/>
+                </a:prstGeom>
+              </p:spPr>
+            </p:pic>
+          </mc:Fallback>
+        </mc:AlternateContent>
+        <mc:AlternateContent xmlns:mc="http://schemas.openxmlformats.org/markup-compatibility/2006" xmlns:p14="http://schemas.microsoft.com/office/powerpoint/2010/main">
+          <mc:Choice Requires="p14">
+            <p:contentPart p14:bwMode="auto" r:id="rId22">
+              <p14:nvContentPartPr>
+                <p14:cNvPr id="14" name="Ink 13">
+                  <a:extLst>
+                    <a:ext uri="{FF2B5EF4-FFF2-40B4-BE49-F238E27FC236}">
+                      <a16:creationId xmlns:a16="http://schemas.microsoft.com/office/drawing/2014/main" id="{2274C4E0-C1EE-A89C-4509-8AB995F38CF5}"/>
+                    </a:ext>
+                  </a:extLst>
+                </p14:cNvPr>
+                <p14:cNvContentPartPr/>
+                <p14:nvPr/>
+              </p14:nvContentPartPr>
+              <p14:xfrm>
+                <a:off x="10390104" y="2300616"/>
+                <a:ext cx="70560" cy="146160"/>
+              </p14:xfrm>
+            </p:contentPart>
+          </mc:Choice>
+          <mc:Fallback xmlns="">
+            <p:pic>
+              <p:nvPicPr>
+                <p:cNvPr id="14" name="Ink 13">
+                  <a:extLst>
+                    <a:ext uri="{FF2B5EF4-FFF2-40B4-BE49-F238E27FC236}">
+                      <a16:creationId xmlns:a16="http://schemas.microsoft.com/office/drawing/2014/main" id="{2274C4E0-C1EE-A89C-4509-8AB995F38CF5}"/>
+                    </a:ext>
+                  </a:extLst>
+                </p:cNvPr>
+                <p:cNvPicPr/>
+                <p:nvPr/>
+              </p:nvPicPr>
+              <p:blipFill>
+                <a:blip r:embed="rId23"/>
+                <a:stretch>
+                  <a:fillRect/>
+                </a:stretch>
+              </p:blipFill>
+              <p:spPr>
+                <a:xfrm>
+                  <a:off x="10354464" y="2264616"/>
+                  <a:ext cx="142200" cy="217800"/>
+                </a:xfrm>
+                <a:prstGeom prst="rect">
+                  <a:avLst/>
+                </a:prstGeom>
+              </p:spPr>
+            </p:pic>
+          </mc:Fallback>
+        </mc:AlternateContent>
+      </p:grpSp>
+      <p:grpSp>
+        <p:nvGrpSpPr>
+          <p:cNvPr id="19" name="Group 18">
+            <a:extLst>
+              <a:ext uri="{FF2B5EF4-FFF2-40B4-BE49-F238E27FC236}">
+                <a16:creationId xmlns:a16="http://schemas.microsoft.com/office/drawing/2014/main" id="{FFA449C8-E412-BC7C-A090-D4B45AE10894}"/>
+              </a:ext>
+            </a:extLst>
+          </p:cNvPr>
+          <p:cNvGrpSpPr/>
+          <p:nvPr/>
+        </p:nvGrpSpPr>
+        <p:grpSpPr>
+          <a:xfrm>
+            <a:off x="9805104" y="3891888"/>
+            <a:ext cx="1516680" cy="1008720"/>
+            <a:chOff x="9805104" y="3041496"/>
+            <a:chExt cx="1516680" cy="1008720"/>
+          </a:xfrm>
+        </p:grpSpPr>
+        <mc:AlternateContent xmlns:mc="http://schemas.openxmlformats.org/markup-compatibility/2006" xmlns:p14="http://schemas.microsoft.com/office/powerpoint/2010/main">
+          <mc:Choice Requires="p14">
+            <p:contentPart p14:bwMode="auto" r:id="rId24">
+              <p14:nvContentPartPr>
+                <p14:cNvPr id="15" name="Ink 14">
+                  <a:extLst>
+                    <a:ext uri="{FF2B5EF4-FFF2-40B4-BE49-F238E27FC236}">
+                      <a16:creationId xmlns:a16="http://schemas.microsoft.com/office/drawing/2014/main" id="{D4DEBE2D-B27B-11F0-DAD9-5515AD09ECAF}"/>
+                    </a:ext>
+                  </a:extLst>
+                </p14:cNvPr>
+                <p14:cNvContentPartPr/>
+                <p14:nvPr/>
+              </p14:nvContentPartPr>
+              <p14:xfrm>
+                <a:off x="9895824" y="3041496"/>
+                <a:ext cx="1230840" cy="414000"/>
+              </p14:xfrm>
+            </p:contentPart>
+          </mc:Choice>
+          <mc:Fallback xmlns="">
+            <p:pic>
+              <p:nvPicPr>
+                <p:cNvPr id="15" name="Ink 14">
+                  <a:extLst>
+                    <a:ext uri="{FF2B5EF4-FFF2-40B4-BE49-F238E27FC236}">
+                      <a16:creationId xmlns:a16="http://schemas.microsoft.com/office/drawing/2014/main" id="{D4DEBE2D-B27B-11F0-DAD9-5515AD09ECAF}"/>
+                    </a:ext>
+                  </a:extLst>
+                </p:cNvPr>
+                <p:cNvPicPr/>
+                <p:nvPr/>
+              </p:nvPicPr>
+              <p:blipFill>
+                <a:blip r:embed="rId25"/>
+                <a:stretch>
+                  <a:fillRect/>
+                </a:stretch>
+              </p:blipFill>
+              <p:spPr>
+                <a:xfrm>
+                  <a:off x="9859824" y="3005856"/>
+                  <a:ext cx="1302480" cy="485640"/>
+                </a:xfrm>
+                <a:prstGeom prst="rect">
+                  <a:avLst/>
+                </a:prstGeom>
+              </p:spPr>
+            </p:pic>
+          </mc:Fallback>
+        </mc:AlternateContent>
+        <mc:AlternateContent xmlns:mc="http://schemas.openxmlformats.org/markup-compatibility/2006" xmlns:p14="http://schemas.microsoft.com/office/powerpoint/2010/main">
+          <mc:Choice Requires="p14">
+            <p:contentPart p14:bwMode="auto" r:id="rId26">
+              <p14:nvContentPartPr>
+                <p14:cNvPr id="16" name="Ink 15">
+                  <a:extLst>
+                    <a:ext uri="{FF2B5EF4-FFF2-40B4-BE49-F238E27FC236}">
+                      <a16:creationId xmlns:a16="http://schemas.microsoft.com/office/drawing/2014/main" id="{ADA55B22-B992-D36D-B302-E2726A8CB298}"/>
+                    </a:ext>
+                  </a:extLst>
+                </p14:cNvPr>
+                <p14:cNvContentPartPr/>
+                <p14:nvPr/>
+              </p14:nvContentPartPr>
+              <p14:xfrm>
+                <a:off x="10621944" y="3497976"/>
+                <a:ext cx="21960" cy="64800"/>
+              </p14:xfrm>
+            </p:contentPart>
+          </mc:Choice>
+          <mc:Fallback xmlns="">
+            <p:pic>
+              <p:nvPicPr>
+                <p:cNvPr id="16" name="Ink 15">
+                  <a:extLst>
+                    <a:ext uri="{FF2B5EF4-FFF2-40B4-BE49-F238E27FC236}">
+                      <a16:creationId xmlns:a16="http://schemas.microsoft.com/office/drawing/2014/main" id="{ADA55B22-B992-D36D-B302-E2726A8CB298}"/>
+                    </a:ext>
+                  </a:extLst>
+                </p:cNvPr>
+                <p:cNvPicPr/>
+                <p:nvPr/>
+              </p:nvPicPr>
+              <p:blipFill>
+                <a:blip r:embed="rId27"/>
+                <a:stretch>
+                  <a:fillRect/>
+                </a:stretch>
+              </p:blipFill>
+              <p:spPr>
+                <a:xfrm>
+                  <a:off x="10586304" y="3461976"/>
+                  <a:ext cx="93600" cy="136440"/>
+                </a:xfrm>
+                <a:prstGeom prst="rect">
+                  <a:avLst/>
+                </a:prstGeom>
+              </p:spPr>
+            </p:pic>
+          </mc:Fallback>
+        </mc:AlternateContent>
+        <mc:AlternateContent xmlns:mc="http://schemas.openxmlformats.org/markup-compatibility/2006" xmlns:p14="http://schemas.microsoft.com/office/powerpoint/2010/main">
+          <mc:Choice Requires="p14">
+            <p:contentPart p14:bwMode="auto" r:id="rId28">
+              <p14:nvContentPartPr>
+                <p14:cNvPr id="17" name="Ink 16">
+                  <a:extLst>
+                    <a:ext uri="{FF2B5EF4-FFF2-40B4-BE49-F238E27FC236}">
+                      <a16:creationId xmlns:a16="http://schemas.microsoft.com/office/drawing/2014/main" id="{694DBAD0-D11F-04AD-69E9-78AC3BD13DC3}"/>
+                    </a:ext>
+                  </a:extLst>
+                </p14:cNvPr>
+                <p14:cNvContentPartPr/>
+                <p14:nvPr/>
+              </p14:nvContentPartPr>
+              <p14:xfrm>
+                <a:off x="9805104" y="3618216"/>
+                <a:ext cx="792720" cy="309240"/>
+              </p14:xfrm>
+            </p:contentPart>
+          </mc:Choice>
+          <mc:Fallback xmlns="">
+            <p:pic>
+              <p:nvPicPr>
+                <p:cNvPr id="17" name="Ink 16">
+                  <a:extLst>
+                    <a:ext uri="{FF2B5EF4-FFF2-40B4-BE49-F238E27FC236}">
+                      <a16:creationId xmlns:a16="http://schemas.microsoft.com/office/drawing/2014/main" id="{694DBAD0-D11F-04AD-69E9-78AC3BD13DC3}"/>
+                    </a:ext>
+                  </a:extLst>
+                </p:cNvPr>
+                <p:cNvPicPr/>
+                <p:nvPr/>
+              </p:nvPicPr>
+              <p:blipFill>
+                <a:blip r:embed="rId29"/>
+                <a:stretch>
+                  <a:fillRect/>
+                </a:stretch>
+              </p:blipFill>
+              <p:spPr>
+                <a:xfrm>
+                  <a:off x="9769464" y="3582216"/>
+                  <a:ext cx="864360" cy="380880"/>
+                </a:xfrm>
+                <a:prstGeom prst="rect">
+                  <a:avLst/>
+                </a:prstGeom>
+              </p:spPr>
+            </p:pic>
+          </mc:Fallback>
+        </mc:AlternateContent>
+        <mc:AlternateContent xmlns:mc="http://schemas.openxmlformats.org/markup-compatibility/2006" xmlns:p14="http://schemas.microsoft.com/office/powerpoint/2010/main">
+          <mc:Choice Requires="p14">
+            <p:contentPart p14:bwMode="auto" r:id="rId30">
+              <p14:nvContentPartPr>
+                <p14:cNvPr id="18" name="Ink 17">
+                  <a:extLst>
+                    <a:ext uri="{FF2B5EF4-FFF2-40B4-BE49-F238E27FC236}">
+                      <a16:creationId xmlns:a16="http://schemas.microsoft.com/office/drawing/2014/main" id="{8501ECDD-3854-77FA-51C4-D6BC2020D5D2}"/>
+                    </a:ext>
+                  </a:extLst>
+                </p14:cNvPr>
+                <p14:cNvContentPartPr/>
+                <p14:nvPr/>
+              </p14:nvContentPartPr>
+              <p14:xfrm>
+                <a:off x="10579464" y="3657456"/>
+                <a:ext cx="742320" cy="392760"/>
+              </p14:xfrm>
+            </p:contentPart>
+          </mc:Choice>
+          <mc:Fallback xmlns="">
+            <p:pic>
+              <p:nvPicPr>
+                <p:cNvPr id="18" name="Ink 17">
+                  <a:extLst>
+                    <a:ext uri="{FF2B5EF4-FFF2-40B4-BE49-F238E27FC236}">
+                      <a16:creationId xmlns:a16="http://schemas.microsoft.com/office/drawing/2014/main" id="{8501ECDD-3854-77FA-51C4-D6BC2020D5D2}"/>
+                    </a:ext>
+                  </a:extLst>
+                </p:cNvPr>
+                <p:cNvPicPr/>
+                <p:nvPr/>
+              </p:nvPicPr>
+              <p:blipFill>
+                <a:blip r:embed="rId31"/>
+                <a:stretch>
+                  <a:fillRect/>
+                </a:stretch>
+              </p:blipFill>
+              <p:spPr>
+                <a:xfrm>
+                  <a:off x="10543464" y="3621456"/>
+                  <a:ext cx="813960" cy="464400"/>
+                </a:xfrm>
+                <a:prstGeom prst="rect">
+                  <a:avLst/>
+                </a:prstGeom>
+              </p:spPr>
+            </p:pic>
+          </mc:Fallback>
+        </mc:AlternateContent>
+      </p:grpSp>
+    </p:spTree>
+    <p:extLst>
+      <p:ext uri="{BB962C8B-B14F-4D97-AF65-F5344CB8AC3E}">
+        <p14:creationId xmlns:p14="http://schemas.microsoft.com/office/powerpoint/2010/main" val="699487337"/>
+      </p:ext>
+    </p:extLst>
+  </p:cSld>
+  <p:clrMapOvr>
+    <a:masterClrMapping/>
+  </p:clrMapOvr>
+</p:sld>
+</file>
+
+<file path=ppt/slides/slide11.xml><?xml version="1.0" encoding="utf-8"?>
+<p:sld xmlns:a="http://schemas.openxmlformats.org/drawingml/2006/main" xmlns:r="http://schemas.openxmlformats.org/officeDocument/2006/relationships" xmlns:p="http://schemas.openxmlformats.org/presentationml/2006/main">
+  <p:cSld>
+    <p:spTree>
+      <p:nvGrpSpPr>
+        <p:cNvPr id="1" name="">
+          <a:extLst>
+            <a:ext uri="{FF2B5EF4-FFF2-40B4-BE49-F238E27FC236}">
+              <a16:creationId xmlns:a16="http://schemas.microsoft.com/office/drawing/2014/main" id="{5C3CF6AB-D89D-C4E6-DB83-143E453A3FD9}"/>
+            </a:ext>
+          </a:extLst>
+        </p:cNvPr>
+        <p:cNvGrpSpPr/>
+        <p:nvPr/>
+      </p:nvGrpSpPr>
+      <p:grpSpPr>
+        <a:xfrm>
+          <a:off x="0" y="0"/>
+          <a:ext cx="0" cy="0"/>
+          <a:chOff x="0" y="0"/>
+          <a:chExt cx="0" cy="0"/>
+        </a:xfrm>
+      </p:grpSpPr>
+      <p:sp>
+        <p:nvSpPr>
+          <p:cNvPr id="3" name="TextBox 2">
+            <a:extLst>
+              <a:ext uri="{FF2B5EF4-FFF2-40B4-BE49-F238E27FC236}">
+                <a16:creationId xmlns:a16="http://schemas.microsoft.com/office/drawing/2014/main" id="{A949DB04-D04A-26AC-5096-E3FAC895CE0A}"/>
+              </a:ext>
+            </a:extLst>
+          </p:cNvPr>
+          <p:cNvSpPr txBox="1"/>
+          <p:nvPr/>
+        </p:nvSpPr>
+        <p:spPr>
+          <a:xfrm>
+            <a:off x="160020" y="281678"/>
+            <a:ext cx="11293164" cy="6370975"/>
+          </a:xfrm>
+          <a:prstGeom prst="rect">
+            <a:avLst/>
+          </a:prstGeom>
+          <a:noFill/>
+        </p:spPr>
+        <p:txBody>
+          <a:bodyPr wrap="square">
+            <a:spAutoFit/>
+          </a:bodyPr>
+          <a:lstStyle/>
+          <a:p>
+            <a:r>
+              <a:rPr lang="en-US" sz="2400" dirty="0">
+                <a:solidFill>
+                  <a:schemeClr val="accent6">
+                    <a:lumMod val="60000"/>
+                    <a:lumOff val="40000"/>
+                  </a:schemeClr>
+                </a:solidFill>
+              </a:rPr>
+              <a:t>Answer: Since the mangoes came from </a:t>
+            </a:r>
+            <a:r>
+              <a:rPr lang="en-US" sz="2400" b="1" dirty="0">
+                <a:solidFill>
+                  <a:schemeClr val="accent6">
+                    <a:lumMod val="60000"/>
+                    <a:lumOff val="40000"/>
+                  </a:schemeClr>
+                </a:solidFill>
+              </a:rPr>
+              <a:t>different regions</a:t>
+            </a:r>
+            <a:r>
+              <a:rPr lang="en-US" sz="2400" dirty="0">
+                <a:solidFill>
+                  <a:schemeClr val="accent6">
+                    <a:lumMod val="60000"/>
+                    <a:lumOff val="40000"/>
+                  </a:schemeClr>
+                </a:solidFill>
+              </a:rPr>
+              <a:t> (E, W, N, S), their quality may differ by source.</a:t>
+            </a:r>
+            <a:br>
+              <a:rPr lang="en-US" sz="2400" dirty="0">
+                <a:solidFill>
+                  <a:schemeClr val="accent6">
+                    <a:lumMod val="60000"/>
+                    <a:lumOff val="40000"/>
+                  </a:schemeClr>
+                </a:solidFill>
+              </a:rPr>
+            </a:br>
+            <a:r>
+              <a:rPr lang="en-US" sz="2400" dirty="0">
+                <a:solidFill>
+                  <a:schemeClr val="accent6">
+                    <a:lumMod val="60000"/>
+                    <a:lumOff val="40000"/>
+                  </a:schemeClr>
+                </a:solidFill>
+              </a:rPr>
+              <a:t>So, you should d</a:t>
+            </a:r>
+            <a:r>
+              <a:rPr lang="en-US" sz="2400" b="1" dirty="0">
+                <a:solidFill>
+                  <a:schemeClr val="accent6">
+                    <a:lumMod val="60000"/>
+                    <a:lumOff val="40000"/>
+                  </a:schemeClr>
+                </a:solidFill>
+              </a:rPr>
+              <a:t>ivide</a:t>
+            </a:r>
+            <a:r>
+              <a:rPr lang="en-US" sz="2400" dirty="0">
+                <a:solidFill>
+                  <a:schemeClr val="accent6">
+                    <a:lumMod val="60000"/>
+                    <a:lumOff val="40000"/>
+                  </a:schemeClr>
+                </a:solidFill>
+              </a:rPr>
+              <a:t> the 10,000 mangoes into 4 strata (E, W, N, S). </a:t>
+            </a:r>
+          </a:p>
+          <a:p>
+            <a:r>
+              <a:rPr lang="en-US" sz="2400" dirty="0">
+                <a:solidFill>
+                  <a:schemeClr val="accent6">
+                    <a:lumMod val="60000"/>
+                    <a:lumOff val="40000"/>
+                  </a:schemeClr>
+                </a:solidFill>
+              </a:rPr>
+              <a:t>Example:</a:t>
+            </a:r>
+          </a:p>
+          <a:p>
+            <a:pPr lvl="1"/>
+            <a:r>
+              <a:rPr lang="en-US" sz="2400" dirty="0">
+                <a:solidFill>
+                  <a:schemeClr val="accent6">
+                    <a:lumMod val="60000"/>
+                    <a:lumOff val="40000"/>
+                  </a:schemeClr>
+                </a:solidFill>
+              </a:rPr>
+              <a:t>East:     4,000 mangoes</a:t>
+            </a:r>
+          </a:p>
+          <a:p>
+            <a:pPr lvl="1"/>
+            <a:r>
+              <a:rPr lang="en-US" sz="2400" dirty="0">
+                <a:solidFill>
+                  <a:schemeClr val="accent6">
+                    <a:lumMod val="60000"/>
+                    <a:lumOff val="40000"/>
+                  </a:schemeClr>
+                </a:solidFill>
+              </a:rPr>
+              <a:t>West:   3,000 mangoes</a:t>
+            </a:r>
+          </a:p>
+          <a:p>
+            <a:pPr lvl="1"/>
+            <a:r>
+              <a:rPr lang="en-US" sz="2400" dirty="0">
+                <a:solidFill>
+                  <a:schemeClr val="accent6">
+                    <a:lumMod val="60000"/>
+                    <a:lumOff val="40000"/>
+                  </a:schemeClr>
+                </a:solidFill>
+              </a:rPr>
+              <a:t>North:  3,000 mangoes</a:t>
+            </a:r>
+          </a:p>
+          <a:p>
+            <a:pPr lvl="1"/>
+            <a:r>
+              <a:rPr lang="en-US" sz="2400" dirty="0">
+                <a:solidFill>
+                  <a:schemeClr val="accent6">
+                    <a:lumMod val="60000"/>
+                    <a:lumOff val="40000"/>
+                  </a:schemeClr>
+                </a:solidFill>
+              </a:rPr>
+              <a:t>South:  0 mangoes</a:t>
+            </a:r>
+          </a:p>
+          <a:p>
+            <a:pPr lvl="1"/>
+            <a:endParaRPr lang="en-US" sz="2400" dirty="0">
+              <a:solidFill>
+                <a:schemeClr val="accent6">
+                  <a:lumMod val="60000"/>
+                  <a:lumOff val="40000"/>
+                </a:schemeClr>
+              </a:solidFill>
+            </a:endParaRPr>
+          </a:p>
+          <a:p>
+            <a:r>
+              <a:rPr lang="en-US" sz="2400" dirty="0">
+                <a:solidFill>
+                  <a:schemeClr val="accent6">
+                    <a:lumMod val="60000"/>
+                    <a:lumOff val="40000"/>
+                  </a:schemeClr>
+                </a:solidFill>
+              </a:rPr>
+              <a:t>Here 50 is 50/10,000 x 100 = 0.5%. So, </a:t>
+            </a:r>
+            <a:r>
+              <a:rPr lang="en-US" sz="2400" b="1" dirty="0">
+                <a:solidFill>
+                  <a:schemeClr val="accent6">
+                    <a:lumMod val="60000"/>
+                    <a:lumOff val="40000"/>
+                  </a:schemeClr>
+                </a:solidFill>
+              </a:rPr>
+              <a:t>Sample proportionally</a:t>
+            </a:r>
+            <a:r>
+              <a:rPr lang="en-US" sz="2400" dirty="0">
+                <a:solidFill>
+                  <a:schemeClr val="accent6">
+                    <a:lumMod val="60000"/>
+                    <a:lumOff val="40000"/>
+                  </a:schemeClr>
+                </a:solidFill>
+              </a:rPr>
+              <a:t> from each stratum, that is, 0.5% from each strata:</a:t>
+            </a:r>
+          </a:p>
+          <a:p>
+            <a:pPr lvl="1"/>
+            <a:r>
+              <a:rPr lang="en-US" sz="2400" dirty="0">
+                <a:solidFill>
+                  <a:schemeClr val="accent6">
+                    <a:lumMod val="60000"/>
+                    <a:lumOff val="40000"/>
+                  </a:schemeClr>
+                </a:solidFill>
+              </a:rPr>
+              <a:t>East     → 4,000  × 0.5 = </a:t>
+            </a:r>
+            <a:r>
+              <a:rPr lang="en-US" sz="2400" b="1" dirty="0">
+                <a:solidFill>
+                  <a:schemeClr val="accent6">
+                    <a:lumMod val="60000"/>
+                    <a:lumOff val="40000"/>
+                  </a:schemeClr>
+                </a:solidFill>
+              </a:rPr>
+              <a:t>20 mangoes</a:t>
+            </a:r>
+            <a:endParaRPr lang="en-US" sz="2400" dirty="0">
+              <a:solidFill>
+                <a:schemeClr val="accent6">
+                  <a:lumMod val="60000"/>
+                  <a:lumOff val="40000"/>
+                </a:schemeClr>
+              </a:solidFill>
+            </a:endParaRPr>
+          </a:p>
+          <a:p>
+            <a:pPr lvl="1"/>
+            <a:r>
+              <a:rPr lang="en-US" sz="2400" dirty="0">
+                <a:solidFill>
+                  <a:schemeClr val="accent6">
+                    <a:lumMod val="60000"/>
+                    <a:lumOff val="40000"/>
+                  </a:schemeClr>
+                </a:solidFill>
+              </a:rPr>
+              <a:t>West   → 3,000 × 0.5 = </a:t>
+            </a:r>
+            <a:r>
+              <a:rPr lang="en-US" sz="2400" b="1" dirty="0">
+                <a:solidFill>
+                  <a:schemeClr val="accent6">
+                    <a:lumMod val="60000"/>
+                    <a:lumOff val="40000"/>
+                  </a:schemeClr>
+                </a:solidFill>
+              </a:rPr>
+              <a:t>15 mangoes</a:t>
+            </a:r>
+            <a:endParaRPr lang="en-US" sz="2400" dirty="0">
+              <a:solidFill>
+                <a:schemeClr val="accent6">
+                  <a:lumMod val="60000"/>
+                  <a:lumOff val="40000"/>
+                </a:schemeClr>
+              </a:solidFill>
+            </a:endParaRPr>
+          </a:p>
+          <a:p>
+            <a:pPr lvl="1"/>
+            <a:r>
+              <a:rPr lang="en-US" sz="2400" dirty="0">
+                <a:solidFill>
+                  <a:schemeClr val="accent6">
+                    <a:lumMod val="60000"/>
+                    <a:lumOff val="40000"/>
+                  </a:schemeClr>
+                </a:solidFill>
+              </a:rPr>
+              <a:t>North  → 3,000 × 0.5 = </a:t>
+            </a:r>
+            <a:r>
+              <a:rPr lang="en-US" sz="2400" b="1" dirty="0">
+                <a:solidFill>
+                  <a:schemeClr val="accent6">
+                    <a:lumMod val="60000"/>
+                    <a:lumOff val="40000"/>
+                  </a:schemeClr>
+                </a:solidFill>
+              </a:rPr>
+              <a:t>15 mangoes</a:t>
+            </a:r>
+          </a:p>
+          <a:p>
+            <a:pPr lvl="1"/>
+            <a:r>
+              <a:rPr lang="en-US" sz="2400" dirty="0">
+                <a:solidFill>
+                  <a:schemeClr val="accent6">
+                    <a:lumMod val="60000"/>
+                    <a:lumOff val="40000"/>
+                  </a:schemeClr>
+                </a:solidFill>
+              </a:rPr>
+              <a:t>South  → 0 × 0.5         = </a:t>
+            </a:r>
+            <a:r>
+              <a:rPr lang="en-US" sz="2400" b="1" dirty="0">
+                <a:solidFill>
+                  <a:schemeClr val="accent6">
+                    <a:lumMod val="60000"/>
+                    <a:lumOff val="40000"/>
+                  </a:schemeClr>
+                </a:solidFill>
+              </a:rPr>
+              <a:t>0   mangoes   </a:t>
+            </a:r>
+          </a:p>
+          <a:p>
+            <a:pPr lvl="1"/>
+            <a:r>
+              <a:rPr lang="en-US" sz="2400" dirty="0">
+                <a:solidFill>
+                  <a:schemeClr val="accent6">
+                    <a:lumMod val="60000"/>
+                    <a:lumOff val="40000"/>
+                  </a:schemeClr>
+                </a:solidFill>
+              </a:rPr>
+              <a:t>Then </a:t>
+            </a:r>
+            <a:r>
+              <a:rPr lang="en-US" sz="2400" b="1" dirty="0">
+                <a:solidFill>
+                  <a:schemeClr val="accent6">
+                    <a:lumMod val="60000"/>
+                    <a:lumOff val="40000"/>
+                  </a:schemeClr>
+                </a:solidFill>
+              </a:rPr>
+              <a:t>randomly select</a:t>
+            </a:r>
+            <a:r>
+              <a:rPr lang="en-US" sz="2400" dirty="0">
+                <a:solidFill>
+                  <a:schemeClr val="accent6">
+                    <a:lumMod val="60000"/>
+                    <a:lumOff val="40000"/>
+                  </a:schemeClr>
+                </a:solidFill>
+              </a:rPr>
+              <a:t> those mangoes within each group. So, we use </a:t>
+            </a:r>
+            <a:r>
+              <a:rPr lang="en-US" sz="2400" b="1" dirty="0">
+                <a:solidFill>
+                  <a:schemeClr val="accent4">
+                    <a:lumMod val="60000"/>
+                    <a:lumOff val="40000"/>
+                  </a:schemeClr>
+                </a:solidFill>
+              </a:rPr>
+              <a:t>Stratified Random Sampling</a:t>
+            </a:r>
+            <a:r>
+              <a:rPr lang="en-US" sz="2400" dirty="0">
+                <a:solidFill>
+                  <a:schemeClr val="accent6">
+                    <a:lumMod val="60000"/>
+                    <a:lumOff val="40000"/>
+                  </a:schemeClr>
+                </a:solidFill>
+              </a:rPr>
+              <a:t>.</a:t>
+            </a:r>
+          </a:p>
+        </p:txBody>
+      </p:sp>
+      <mc:AlternateContent xmlns:mc="http://schemas.openxmlformats.org/markup-compatibility/2006">
+        <mc:Choice xmlns:p14="http://schemas.microsoft.com/office/powerpoint/2010/main" Requires="p14">
+          <p:contentPart p14:bwMode="auto" r:id="rId2">
+            <p14:nvContentPartPr>
+              <p14:cNvPr id="20" name="Ink 19">
+                <a:extLst>
+                  <a:ext uri="{FF2B5EF4-FFF2-40B4-BE49-F238E27FC236}">
+                    <a16:creationId xmlns:a16="http://schemas.microsoft.com/office/drawing/2014/main" id="{7CE28930-170E-6E5B-208B-3456BE2D104E}"/>
+                  </a:ext>
+                </a:extLst>
+              </p14:cNvPr>
+              <p14:cNvContentPartPr/>
+              <p14:nvPr/>
+            </p14:nvContentPartPr>
+            <p14:xfrm>
+              <a:off x="9398844" y="4248648"/>
+              <a:ext cx="2489400" cy="1425600"/>
+            </p14:xfrm>
+          </p:contentPart>
+        </mc:Choice>
+        <mc:Fallback>
+          <p:pic>
+            <p:nvPicPr>
+              <p:cNvPr id="20" name="Ink 19">
+                <a:extLst>
+                  <a:ext uri="{FF2B5EF4-FFF2-40B4-BE49-F238E27FC236}">
+                    <a16:creationId xmlns:a16="http://schemas.microsoft.com/office/drawing/2014/main" id="{7CE28930-170E-6E5B-208B-3456BE2D104E}"/>
+                  </a:ext>
+                </a:extLst>
+              </p:cNvPr>
+              <p:cNvPicPr/>
+              <p:nvPr/>
+            </p:nvPicPr>
+            <p:blipFill>
+              <a:blip r:embed="rId3"/>
+              <a:stretch>
+                <a:fillRect/>
+              </a:stretch>
+            </p:blipFill>
+            <p:spPr>
+              <a:xfrm>
+                <a:off x="9362844" y="4212648"/>
+                <a:ext cx="2561040" cy="1497240"/>
+              </a:xfrm>
+              <a:prstGeom prst="rect">
+                <a:avLst/>
+              </a:prstGeom>
+            </p:spPr>
+          </p:pic>
+        </mc:Fallback>
+      </mc:AlternateContent>
+      <p:grpSp>
+        <p:nvGrpSpPr>
+          <p:cNvPr id="21" name="Group 20">
+            <a:extLst>
+              <a:ext uri="{FF2B5EF4-FFF2-40B4-BE49-F238E27FC236}">
+                <a16:creationId xmlns:a16="http://schemas.microsoft.com/office/drawing/2014/main" id="{0734363F-BC14-747F-85DB-C439F6430F59}"/>
+              </a:ext>
+            </a:extLst>
+          </p:cNvPr>
+          <p:cNvGrpSpPr/>
+          <p:nvPr/>
+        </p:nvGrpSpPr>
+        <p:grpSpPr>
+          <a:xfrm>
+            <a:off x="9747864" y="4481928"/>
+            <a:ext cx="1705320" cy="1038600"/>
+            <a:chOff x="9564984" y="1894176"/>
+            <a:chExt cx="1705320" cy="1038600"/>
+          </a:xfrm>
+        </p:grpSpPr>
+        <mc:AlternateContent xmlns:mc="http://schemas.openxmlformats.org/markup-compatibility/2006" xmlns:p14="http://schemas.microsoft.com/office/powerpoint/2010/main">
+          <mc:Choice Requires="p14">
+            <p:contentPart p14:bwMode="auto" r:id="rId4">
+              <p14:nvContentPartPr>
+                <p14:cNvPr id="22" name="Ink 21">
+                  <a:extLst>
+                    <a:ext uri="{FF2B5EF4-FFF2-40B4-BE49-F238E27FC236}">
+                      <a16:creationId xmlns:a16="http://schemas.microsoft.com/office/drawing/2014/main" id="{0382A34F-0967-240B-5DA0-432DBF314760}"/>
+                    </a:ext>
+                  </a:extLst>
+                </p14:cNvPr>
+                <p14:cNvContentPartPr/>
+                <p14:nvPr/>
+              </p14:nvContentPartPr>
+              <p14:xfrm>
+                <a:off x="10197504" y="1894176"/>
+                <a:ext cx="213840" cy="233280"/>
+              </p14:xfrm>
+            </p:contentPart>
+          </mc:Choice>
+          <mc:Fallback xmlns="">
+            <p:pic>
+              <p:nvPicPr>
+                <p:cNvPr id="5" name="Ink 4">
+                  <a:extLst>
+                    <a:ext uri="{FF2B5EF4-FFF2-40B4-BE49-F238E27FC236}">
+                      <a16:creationId xmlns:a16="http://schemas.microsoft.com/office/drawing/2014/main" id="{CD78B032-F2D8-FB01-2198-1E953D59B685}"/>
+                    </a:ext>
+                  </a:extLst>
+                </p:cNvPr>
+                <p:cNvPicPr/>
+                <p:nvPr/>
+              </p:nvPicPr>
+              <p:blipFill>
+                <a:blip r:embed="rId5"/>
+                <a:stretch>
+                  <a:fillRect/>
+                </a:stretch>
+              </p:blipFill>
+              <p:spPr>
+                <a:xfrm>
+                  <a:off x="10161864" y="1858176"/>
+                  <a:ext cx="285480" cy="304920"/>
+                </a:xfrm>
+                <a:prstGeom prst="rect">
+                  <a:avLst/>
+                </a:prstGeom>
+              </p:spPr>
+            </p:pic>
+          </mc:Fallback>
+        </mc:AlternateContent>
+        <mc:AlternateContent xmlns:mc="http://schemas.openxmlformats.org/markup-compatibility/2006" xmlns:p14="http://schemas.microsoft.com/office/powerpoint/2010/main">
+          <mc:Choice Requires="p14">
+            <p:contentPart p14:bwMode="auto" r:id="rId6">
+              <p14:nvContentPartPr>
+                <p14:cNvPr id="23" name="Ink 22">
+                  <a:extLst>
+                    <a:ext uri="{FF2B5EF4-FFF2-40B4-BE49-F238E27FC236}">
+                      <a16:creationId xmlns:a16="http://schemas.microsoft.com/office/drawing/2014/main" id="{F7F01ADE-31FB-6613-F62C-49122D83C6B3}"/>
+                    </a:ext>
+                  </a:extLst>
+                </p14:cNvPr>
+                <p14:cNvContentPartPr/>
+                <p14:nvPr/>
+              </p14:nvContentPartPr>
+              <p14:xfrm>
+                <a:off x="10129464" y="2691216"/>
+                <a:ext cx="284760" cy="182160"/>
+              </p14:xfrm>
+            </p:contentPart>
+          </mc:Choice>
+          <mc:Fallback xmlns="">
+            <p:pic>
+              <p:nvPicPr>
+                <p:cNvPr id="6" name="Ink 5">
+                  <a:extLst>
+                    <a:ext uri="{FF2B5EF4-FFF2-40B4-BE49-F238E27FC236}">
+                      <a16:creationId xmlns:a16="http://schemas.microsoft.com/office/drawing/2014/main" id="{AABFE765-875C-CEB7-D011-CA09C0F1C3F2}"/>
+                    </a:ext>
+                  </a:extLst>
+                </p:cNvPr>
+                <p:cNvPicPr/>
+                <p:nvPr/>
+              </p:nvPicPr>
+              <p:blipFill>
+                <a:blip r:embed="rId7"/>
+                <a:stretch>
+                  <a:fillRect/>
+                </a:stretch>
+              </p:blipFill>
+              <p:spPr>
+                <a:xfrm>
+                  <a:off x="10093824" y="2655216"/>
+                  <a:ext cx="356400" cy="253800"/>
+                </a:xfrm>
+                <a:prstGeom prst="rect">
+                  <a:avLst/>
+                </a:prstGeom>
+              </p:spPr>
+            </p:pic>
+          </mc:Fallback>
+        </mc:AlternateContent>
+        <mc:AlternateContent xmlns:mc="http://schemas.openxmlformats.org/markup-compatibility/2006" xmlns:p14="http://schemas.microsoft.com/office/powerpoint/2010/main">
+          <mc:Choice Requires="p14">
+            <p:contentPart p14:bwMode="auto" r:id="rId8">
+              <p14:nvContentPartPr>
+                <p14:cNvPr id="24" name="Ink 23">
+                  <a:extLst>
+                    <a:ext uri="{FF2B5EF4-FFF2-40B4-BE49-F238E27FC236}">
+                      <a16:creationId xmlns:a16="http://schemas.microsoft.com/office/drawing/2014/main" id="{8D530DA6-5200-F81A-6243-4882ED6DF1FF}"/>
+                    </a:ext>
+                  </a:extLst>
+                </p14:cNvPr>
+                <p14:cNvContentPartPr/>
+                <p14:nvPr/>
+              </p14:nvContentPartPr>
+              <p14:xfrm>
+                <a:off x="9658584" y="2311776"/>
+                <a:ext cx="295200" cy="199800"/>
+              </p14:xfrm>
+            </p:contentPart>
+          </mc:Choice>
+          <mc:Fallback xmlns="">
+            <p:pic>
+              <p:nvPicPr>
+                <p:cNvPr id="7" name="Ink 6">
+                  <a:extLst>
+                    <a:ext uri="{FF2B5EF4-FFF2-40B4-BE49-F238E27FC236}">
+                      <a16:creationId xmlns:a16="http://schemas.microsoft.com/office/drawing/2014/main" id="{BD6E7E84-4609-24DF-0A31-13E704E79263}"/>
+                    </a:ext>
+                  </a:extLst>
+                </p:cNvPr>
+                <p:cNvPicPr/>
+                <p:nvPr/>
+              </p:nvPicPr>
+              <p:blipFill>
+                <a:blip r:embed="rId9"/>
+                <a:stretch>
+                  <a:fillRect/>
+                </a:stretch>
+              </p:blipFill>
+              <p:spPr>
+                <a:xfrm>
+                  <a:off x="9622944" y="2275776"/>
+                  <a:ext cx="366840" cy="271440"/>
+                </a:xfrm>
+                <a:prstGeom prst="rect">
+                  <a:avLst/>
+                </a:prstGeom>
+              </p:spPr>
+            </p:pic>
+          </mc:Fallback>
+        </mc:AlternateContent>
+        <mc:AlternateContent xmlns:mc="http://schemas.openxmlformats.org/markup-compatibility/2006" xmlns:p14="http://schemas.microsoft.com/office/powerpoint/2010/main">
+          <mc:Choice Requires="p14">
+            <p:contentPart p14:bwMode="auto" r:id="rId10">
+              <p14:nvContentPartPr>
+                <p14:cNvPr id="25" name="Ink 24">
+                  <a:extLst>
+                    <a:ext uri="{FF2B5EF4-FFF2-40B4-BE49-F238E27FC236}">
+                      <a16:creationId xmlns:a16="http://schemas.microsoft.com/office/drawing/2014/main" id="{0E3203EA-00B8-759D-72B9-6EFB6C66282A}"/>
+                    </a:ext>
+                  </a:extLst>
+                </p14:cNvPr>
+                <p14:cNvContentPartPr/>
+                <p14:nvPr/>
+              </p14:nvContentPartPr>
+              <p14:xfrm>
+                <a:off x="10820664" y="2324736"/>
+                <a:ext cx="55800" cy="173520"/>
+              </p14:xfrm>
+            </p:contentPart>
+          </mc:Choice>
+          <mc:Fallback xmlns="">
+            <p:pic>
+              <p:nvPicPr>
+                <p:cNvPr id="8" name="Ink 7">
+                  <a:extLst>
+                    <a:ext uri="{FF2B5EF4-FFF2-40B4-BE49-F238E27FC236}">
+                      <a16:creationId xmlns:a16="http://schemas.microsoft.com/office/drawing/2014/main" id="{B62A6372-100D-62C6-0456-24EC049412BA}"/>
+                    </a:ext>
+                  </a:extLst>
+                </p:cNvPr>
+                <p:cNvPicPr/>
+                <p:nvPr/>
+              </p:nvPicPr>
+              <p:blipFill>
+                <a:blip r:embed="rId11"/>
+                <a:stretch>
+                  <a:fillRect/>
+                </a:stretch>
+              </p:blipFill>
+              <p:spPr>
+                <a:xfrm>
+                  <a:off x="10785024" y="2288736"/>
+                  <a:ext cx="127440" cy="245160"/>
+                </a:xfrm>
+                <a:prstGeom prst="rect">
+                  <a:avLst/>
+                </a:prstGeom>
+              </p:spPr>
+            </p:pic>
+          </mc:Fallback>
+        </mc:AlternateContent>
+        <mc:AlternateContent xmlns:mc="http://schemas.openxmlformats.org/markup-compatibility/2006" xmlns:p14="http://schemas.microsoft.com/office/powerpoint/2010/main">
+          <mc:Choice Requires="p14">
+            <p:contentPart p14:bwMode="auto" r:id="rId12">
+              <p14:nvContentPartPr>
+                <p14:cNvPr id="26" name="Ink 25">
+                  <a:extLst>
+                    <a:ext uri="{FF2B5EF4-FFF2-40B4-BE49-F238E27FC236}">
+                      <a16:creationId xmlns:a16="http://schemas.microsoft.com/office/drawing/2014/main" id="{10A8BEAA-2DB5-041D-7989-C6F267C0554A}"/>
+                    </a:ext>
+                  </a:extLst>
+                </p14:cNvPr>
+                <p14:cNvContentPartPr/>
+                <p14:nvPr/>
+              </p14:nvContentPartPr>
+              <p14:xfrm>
+                <a:off x="10833624" y="2276496"/>
+                <a:ext cx="299160" cy="25200"/>
+              </p14:xfrm>
+            </p:contentPart>
+          </mc:Choice>
+          <mc:Fallback xmlns="">
+            <p:pic>
+              <p:nvPicPr>
+                <p:cNvPr id="9" name="Ink 8">
+                  <a:extLst>
+                    <a:ext uri="{FF2B5EF4-FFF2-40B4-BE49-F238E27FC236}">
+                      <a16:creationId xmlns:a16="http://schemas.microsoft.com/office/drawing/2014/main" id="{F3E672FC-7A41-4A53-2D23-4AB778D04C7F}"/>
+                    </a:ext>
+                  </a:extLst>
+                </p:cNvPr>
+                <p:cNvPicPr/>
+                <p:nvPr/>
+              </p:nvPicPr>
+              <p:blipFill>
+                <a:blip r:embed="rId13"/>
+                <a:stretch>
+                  <a:fillRect/>
+                </a:stretch>
+              </p:blipFill>
+              <p:spPr>
+                <a:xfrm>
+                  <a:off x="10797624" y="2240856"/>
+                  <a:ext cx="370800" cy="96840"/>
+                </a:xfrm>
+                <a:prstGeom prst="rect">
+                  <a:avLst/>
+                </a:prstGeom>
+              </p:spPr>
+            </p:pic>
+          </mc:Fallback>
+        </mc:AlternateContent>
+        <mc:AlternateContent xmlns:mc="http://schemas.openxmlformats.org/markup-compatibility/2006" xmlns:p14="http://schemas.microsoft.com/office/powerpoint/2010/main">
+          <mc:Choice Requires="p14">
+            <p:contentPart p14:bwMode="auto" r:id="rId14">
+              <p14:nvContentPartPr>
+                <p14:cNvPr id="27" name="Ink 26">
+                  <a:extLst>
+                    <a:ext uri="{FF2B5EF4-FFF2-40B4-BE49-F238E27FC236}">
+                      <a16:creationId xmlns:a16="http://schemas.microsoft.com/office/drawing/2014/main" id="{0506CCBE-15E7-AD40-EB65-6EA725EA2743}"/>
+                    </a:ext>
+                  </a:extLst>
+                </p14:cNvPr>
+                <p14:cNvContentPartPr/>
+                <p14:nvPr/>
+              </p14:nvContentPartPr>
+              <p14:xfrm>
+                <a:off x="10930464" y="2393136"/>
+                <a:ext cx="135720" cy="14760"/>
+              </p14:xfrm>
+            </p:contentPart>
+          </mc:Choice>
+          <mc:Fallback xmlns="">
+            <p:pic>
+              <p:nvPicPr>
+                <p:cNvPr id="10" name="Ink 9">
+                  <a:extLst>
+                    <a:ext uri="{FF2B5EF4-FFF2-40B4-BE49-F238E27FC236}">
+                      <a16:creationId xmlns:a16="http://schemas.microsoft.com/office/drawing/2014/main" id="{CC9F2E77-A6BA-F1CD-EFB6-52D76FEEA777}"/>
+                    </a:ext>
+                  </a:extLst>
+                </p:cNvPr>
+                <p:cNvPicPr/>
+                <p:nvPr/>
+              </p:nvPicPr>
+              <p:blipFill>
+                <a:blip r:embed="rId15"/>
+                <a:stretch>
+                  <a:fillRect/>
+                </a:stretch>
+              </p:blipFill>
+              <p:spPr>
+                <a:xfrm>
+                  <a:off x="10894464" y="2357136"/>
+                  <a:ext cx="207360" cy="86400"/>
+                </a:xfrm>
+                <a:prstGeom prst="rect">
+                  <a:avLst/>
+                </a:prstGeom>
+              </p:spPr>
+            </p:pic>
+          </mc:Fallback>
+        </mc:AlternateContent>
+        <mc:AlternateContent xmlns:mc="http://schemas.openxmlformats.org/markup-compatibility/2006" xmlns:p14="http://schemas.microsoft.com/office/powerpoint/2010/main">
+          <mc:Choice Requires="p14">
+            <p:contentPart p14:bwMode="auto" r:id="rId16">
+              <p14:nvContentPartPr>
+                <p14:cNvPr id="28" name="Ink 27">
+                  <a:extLst>
+                    <a:ext uri="{FF2B5EF4-FFF2-40B4-BE49-F238E27FC236}">
+                      <a16:creationId xmlns:a16="http://schemas.microsoft.com/office/drawing/2014/main" id="{49B81915-16F8-69B8-BFF6-ECEB92E8855B}"/>
+                    </a:ext>
+                  </a:extLst>
+                </p14:cNvPr>
+                <p14:cNvContentPartPr/>
+                <p14:nvPr/>
+              </p14:nvContentPartPr>
+              <p14:xfrm>
+                <a:off x="10878624" y="2528856"/>
+                <a:ext cx="173520" cy="5400"/>
+              </p14:xfrm>
+            </p:contentPart>
+          </mc:Choice>
+          <mc:Fallback xmlns="">
+            <p:pic>
+              <p:nvPicPr>
+                <p:cNvPr id="11" name="Ink 10">
+                  <a:extLst>
+                    <a:ext uri="{FF2B5EF4-FFF2-40B4-BE49-F238E27FC236}">
+                      <a16:creationId xmlns:a16="http://schemas.microsoft.com/office/drawing/2014/main" id="{0A1C3762-7FB2-2270-CCC6-5D290214B965}"/>
+                    </a:ext>
+                  </a:extLst>
+                </p:cNvPr>
+                <p:cNvPicPr/>
+                <p:nvPr/>
+              </p:nvPicPr>
+              <p:blipFill>
+                <a:blip r:embed="rId17"/>
+                <a:stretch>
+                  <a:fillRect/>
+                </a:stretch>
+              </p:blipFill>
+              <p:spPr>
+                <a:xfrm>
+                  <a:off x="10842984" y="2493216"/>
+                  <a:ext cx="245160" cy="77040"/>
+                </a:xfrm>
+                <a:prstGeom prst="rect">
+                  <a:avLst/>
+                </a:prstGeom>
+              </p:spPr>
+            </p:pic>
+          </mc:Fallback>
+        </mc:AlternateContent>
+        <mc:AlternateContent xmlns:mc="http://schemas.openxmlformats.org/markup-compatibility/2006" xmlns:p14="http://schemas.microsoft.com/office/powerpoint/2010/main">
+          <mc:Choice Requires="p14">
+            <p:contentPart p14:bwMode="auto" r:id="rId18">
+              <p14:nvContentPartPr>
+                <p14:cNvPr id="29" name="Ink 28">
+                  <a:extLst>
+                    <a:ext uri="{FF2B5EF4-FFF2-40B4-BE49-F238E27FC236}">
+                      <a16:creationId xmlns:a16="http://schemas.microsoft.com/office/drawing/2014/main" id="{93971A0F-CB2A-A121-B03F-51246E45188F}"/>
+                    </a:ext>
+                  </a:extLst>
+                </p14:cNvPr>
+                <p14:cNvContentPartPr/>
+                <p14:nvPr/>
+              </p14:nvContentPartPr>
+              <p14:xfrm>
+                <a:off x="10420344" y="2306736"/>
+                <a:ext cx="849960" cy="626040"/>
+              </p14:xfrm>
+            </p:contentPart>
+          </mc:Choice>
+          <mc:Fallback xmlns="">
+            <p:pic>
+              <p:nvPicPr>
+                <p:cNvPr id="12" name="Ink 11">
+                  <a:extLst>
+                    <a:ext uri="{FF2B5EF4-FFF2-40B4-BE49-F238E27FC236}">
+                      <a16:creationId xmlns:a16="http://schemas.microsoft.com/office/drawing/2014/main" id="{C665B3D5-75FF-DFD8-75D2-7BCFBF5A9D27}"/>
+                    </a:ext>
+                  </a:extLst>
+                </p:cNvPr>
+                <p:cNvPicPr/>
+                <p:nvPr/>
+              </p:nvPicPr>
+              <p:blipFill>
+                <a:blip r:embed="rId19"/>
+                <a:stretch>
+                  <a:fillRect/>
+                </a:stretch>
+              </p:blipFill>
+              <p:spPr>
+                <a:xfrm>
+                  <a:off x="10384344" y="2271096"/>
+                  <a:ext cx="921600" cy="697680"/>
+                </a:xfrm>
+                <a:prstGeom prst="rect">
+                  <a:avLst/>
+                </a:prstGeom>
+              </p:spPr>
+            </p:pic>
+          </mc:Fallback>
+        </mc:AlternateContent>
+        <mc:AlternateContent xmlns:mc="http://schemas.openxmlformats.org/markup-compatibility/2006" xmlns:p14="http://schemas.microsoft.com/office/powerpoint/2010/main">
+          <mc:Choice Requires="p14">
+            <p:contentPart p14:bwMode="auto" r:id="rId20">
+              <p14:nvContentPartPr>
+                <p14:cNvPr id="30" name="Ink 29">
+                  <a:extLst>
+                    <a:ext uri="{FF2B5EF4-FFF2-40B4-BE49-F238E27FC236}">
+                      <a16:creationId xmlns:a16="http://schemas.microsoft.com/office/drawing/2014/main" id="{36AF30FF-62B9-8557-0187-4439C2B6D8C2}"/>
+                    </a:ext>
+                  </a:extLst>
+                </p14:cNvPr>
+                <p14:cNvContentPartPr/>
+                <p14:nvPr/>
+              </p14:nvContentPartPr>
+              <p14:xfrm>
+                <a:off x="9564984" y="2473776"/>
+                <a:ext cx="890640" cy="315000"/>
+              </p14:xfrm>
+            </p:contentPart>
+          </mc:Choice>
+          <mc:Fallback xmlns="">
+            <p:pic>
+              <p:nvPicPr>
+                <p:cNvPr id="13" name="Ink 12">
+                  <a:extLst>
+                    <a:ext uri="{FF2B5EF4-FFF2-40B4-BE49-F238E27FC236}">
+                      <a16:creationId xmlns:a16="http://schemas.microsoft.com/office/drawing/2014/main" id="{BB77EF42-67FF-51C3-197B-DAD9D1FA2277}"/>
+                    </a:ext>
+                  </a:extLst>
+                </p:cNvPr>
+                <p:cNvPicPr/>
+                <p:nvPr/>
+              </p:nvPicPr>
+              <p:blipFill>
+                <a:blip r:embed="rId21"/>
+                <a:stretch>
+                  <a:fillRect/>
+                </a:stretch>
+              </p:blipFill>
+              <p:spPr>
+                <a:xfrm>
+                  <a:off x="9528984" y="2438136"/>
+                  <a:ext cx="962280" cy="386640"/>
+                </a:xfrm>
+                <a:prstGeom prst="rect">
+                  <a:avLst/>
+                </a:prstGeom>
+              </p:spPr>
+            </p:pic>
+          </mc:Fallback>
+        </mc:AlternateContent>
+        <mc:AlternateContent xmlns:mc="http://schemas.openxmlformats.org/markup-compatibility/2006" xmlns:p14="http://schemas.microsoft.com/office/powerpoint/2010/main">
+          <mc:Choice Requires="p14">
+            <p:contentPart p14:bwMode="auto" r:id="rId22">
+              <p14:nvContentPartPr>
+                <p14:cNvPr id="31" name="Ink 30">
+                  <a:extLst>
+                    <a:ext uri="{FF2B5EF4-FFF2-40B4-BE49-F238E27FC236}">
+                      <a16:creationId xmlns:a16="http://schemas.microsoft.com/office/drawing/2014/main" id="{D0A77171-0885-397E-81A0-97D6DBBEE511}"/>
+                    </a:ext>
+                  </a:extLst>
+                </p14:cNvPr>
+                <p14:cNvContentPartPr/>
+                <p14:nvPr/>
+              </p14:nvContentPartPr>
+              <p14:xfrm>
+                <a:off x="10390104" y="2300616"/>
+                <a:ext cx="70560" cy="146160"/>
+              </p14:xfrm>
+            </p:contentPart>
+          </mc:Choice>
+          <mc:Fallback xmlns="">
+            <p:pic>
+              <p:nvPicPr>
+                <p:cNvPr id="14" name="Ink 13">
+                  <a:extLst>
+                    <a:ext uri="{FF2B5EF4-FFF2-40B4-BE49-F238E27FC236}">
+                      <a16:creationId xmlns:a16="http://schemas.microsoft.com/office/drawing/2014/main" id="{2274C4E0-C1EE-A89C-4509-8AB995F38CF5}"/>
+                    </a:ext>
+                  </a:extLst>
+                </p:cNvPr>
+                <p:cNvPicPr/>
+                <p:nvPr/>
+              </p:nvPicPr>
+              <p:blipFill>
+                <a:blip r:embed="rId23"/>
+                <a:stretch>
+                  <a:fillRect/>
+                </a:stretch>
+              </p:blipFill>
+              <p:spPr>
+                <a:xfrm>
+                  <a:off x="10354464" y="2264616"/>
+                  <a:ext cx="142200" cy="217800"/>
+                </a:xfrm>
+                <a:prstGeom prst="rect">
+                  <a:avLst/>
+                </a:prstGeom>
+              </p:spPr>
+            </p:pic>
+          </mc:Fallback>
+        </mc:AlternateContent>
+      </p:grpSp>
+      <p:grpSp>
+        <p:nvGrpSpPr>
+          <p:cNvPr id="32" name="Group 31">
+            <a:extLst>
+              <a:ext uri="{FF2B5EF4-FFF2-40B4-BE49-F238E27FC236}">
+                <a16:creationId xmlns:a16="http://schemas.microsoft.com/office/drawing/2014/main" id="{1ECD7FE7-3107-81E0-D42F-352DDC1BA0AD}"/>
+              </a:ext>
+            </a:extLst>
+          </p:cNvPr>
+          <p:cNvGrpSpPr/>
+          <p:nvPr/>
+        </p:nvGrpSpPr>
+        <p:grpSpPr>
+          <a:xfrm>
+            <a:off x="9805104" y="4477104"/>
+            <a:ext cx="1516680" cy="1008720"/>
+            <a:chOff x="9805104" y="3041496"/>
+            <a:chExt cx="1516680" cy="1008720"/>
+          </a:xfrm>
+        </p:grpSpPr>
+        <mc:AlternateContent xmlns:mc="http://schemas.openxmlformats.org/markup-compatibility/2006" xmlns:p14="http://schemas.microsoft.com/office/powerpoint/2010/main">
+          <mc:Choice Requires="p14">
+            <p:contentPart p14:bwMode="auto" r:id="rId24">
+              <p14:nvContentPartPr>
+                <p14:cNvPr id="33" name="Ink 32">
+                  <a:extLst>
+                    <a:ext uri="{FF2B5EF4-FFF2-40B4-BE49-F238E27FC236}">
+                      <a16:creationId xmlns:a16="http://schemas.microsoft.com/office/drawing/2014/main" id="{C77A0815-B713-674B-3351-5A9FCCD8142A}"/>
+                    </a:ext>
+                  </a:extLst>
+                </p14:cNvPr>
+                <p14:cNvContentPartPr/>
+                <p14:nvPr/>
+              </p14:nvContentPartPr>
+              <p14:xfrm>
+                <a:off x="9895824" y="3041496"/>
+                <a:ext cx="1230840" cy="414000"/>
+              </p14:xfrm>
+            </p:contentPart>
+          </mc:Choice>
+          <mc:Fallback xmlns="">
+            <p:pic>
+              <p:nvPicPr>
+                <p:cNvPr id="15" name="Ink 14">
+                  <a:extLst>
+                    <a:ext uri="{FF2B5EF4-FFF2-40B4-BE49-F238E27FC236}">
+                      <a16:creationId xmlns:a16="http://schemas.microsoft.com/office/drawing/2014/main" id="{D4DEBE2D-B27B-11F0-DAD9-5515AD09ECAF}"/>
+                    </a:ext>
+                  </a:extLst>
+                </p:cNvPr>
+                <p:cNvPicPr/>
+                <p:nvPr/>
+              </p:nvPicPr>
+              <p:blipFill>
+                <a:blip r:embed="rId25"/>
+                <a:stretch>
+                  <a:fillRect/>
+                </a:stretch>
+              </p:blipFill>
+              <p:spPr>
+                <a:xfrm>
+                  <a:off x="9859824" y="3005856"/>
+                  <a:ext cx="1302480" cy="485640"/>
+                </a:xfrm>
+                <a:prstGeom prst="rect">
+                  <a:avLst/>
+                </a:prstGeom>
+              </p:spPr>
+            </p:pic>
+          </mc:Fallback>
+        </mc:AlternateContent>
+        <mc:AlternateContent xmlns:mc="http://schemas.openxmlformats.org/markup-compatibility/2006" xmlns:p14="http://schemas.microsoft.com/office/powerpoint/2010/main">
+          <mc:Choice Requires="p14">
+            <p:contentPart p14:bwMode="auto" r:id="rId26">
+              <p14:nvContentPartPr>
+                <p14:cNvPr id="34" name="Ink 33">
+                  <a:extLst>
+                    <a:ext uri="{FF2B5EF4-FFF2-40B4-BE49-F238E27FC236}">
+                      <a16:creationId xmlns:a16="http://schemas.microsoft.com/office/drawing/2014/main" id="{04829FC9-03DB-62DD-6C1E-D662965F13C8}"/>
+                    </a:ext>
+                  </a:extLst>
+                </p14:cNvPr>
+                <p14:cNvContentPartPr/>
+                <p14:nvPr/>
+              </p14:nvContentPartPr>
+              <p14:xfrm>
+                <a:off x="10621944" y="3497976"/>
+                <a:ext cx="21960" cy="64800"/>
+              </p14:xfrm>
+            </p:contentPart>
+          </mc:Choice>
+          <mc:Fallback xmlns="">
+            <p:pic>
+              <p:nvPicPr>
+                <p:cNvPr id="16" name="Ink 15">
+                  <a:extLst>
+                    <a:ext uri="{FF2B5EF4-FFF2-40B4-BE49-F238E27FC236}">
+                      <a16:creationId xmlns:a16="http://schemas.microsoft.com/office/drawing/2014/main" id="{ADA55B22-B992-D36D-B302-E2726A8CB298}"/>
+                    </a:ext>
+                  </a:extLst>
+                </p:cNvPr>
+                <p:cNvPicPr/>
+                <p:nvPr/>
+              </p:nvPicPr>
+              <p:blipFill>
+                <a:blip r:embed="rId27"/>
+                <a:stretch>
+                  <a:fillRect/>
+                </a:stretch>
+              </p:blipFill>
+              <p:spPr>
+                <a:xfrm>
+                  <a:off x="10586304" y="3461976"/>
+                  <a:ext cx="93600" cy="136440"/>
+                </a:xfrm>
+                <a:prstGeom prst="rect">
+                  <a:avLst/>
+                </a:prstGeom>
+              </p:spPr>
+            </p:pic>
+          </mc:Fallback>
+        </mc:AlternateContent>
+        <mc:AlternateContent xmlns:mc="http://schemas.openxmlformats.org/markup-compatibility/2006" xmlns:p14="http://schemas.microsoft.com/office/powerpoint/2010/main">
+          <mc:Choice Requires="p14">
+            <p:contentPart p14:bwMode="auto" r:id="rId28">
+              <p14:nvContentPartPr>
+                <p14:cNvPr id="35" name="Ink 34">
+                  <a:extLst>
+                    <a:ext uri="{FF2B5EF4-FFF2-40B4-BE49-F238E27FC236}">
+                      <a16:creationId xmlns:a16="http://schemas.microsoft.com/office/drawing/2014/main" id="{B997EAC3-8DBE-3854-C1DF-6B8294C01455}"/>
+                    </a:ext>
+                  </a:extLst>
+                </p14:cNvPr>
+                <p14:cNvContentPartPr/>
+                <p14:nvPr/>
+              </p14:nvContentPartPr>
+              <p14:xfrm>
+                <a:off x="9805104" y="3618216"/>
+                <a:ext cx="792720" cy="309240"/>
+              </p14:xfrm>
+            </p:contentPart>
+          </mc:Choice>
+          <mc:Fallback xmlns="">
+            <p:pic>
+              <p:nvPicPr>
+                <p:cNvPr id="17" name="Ink 16">
+                  <a:extLst>
+                    <a:ext uri="{FF2B5EF4-FFF2-40B4-BE49-F238E27FC236}">
+                      <a16:creationId xmlns:a16="http://schemas.microsoft.com/office/drawing/2014/main" id="{694DBAD0-D11F-04AD-69E9-78AC3BD13DC3}"/>
+                    </a:ext>
+                  </a:extLst>
+                </p:cNvPr>
+                <p:cNvPicPr/>
+                <p:nvPr/>
+              </p:nvPicPr>
+              <p:blipFill>
+                <a:blip r:embed="rId29"/>
+                <a:stretch>
+                  <a:fillRect/>
+                </a:stretch>
+              </p:blipFill>
+              <p:spPr>
+                <a:xfrm>
+                  <a:off x="9769464" y="3582216"/>
+                  <a:ext cx="864360" cy="380880"/>
+                </a:xfrm>
+                <a:prstGeom prst="rect">
+                  <a:avLst/>
+                </a:prstGeom>
+              </p:spPr>
+            </p:pic>
+          </mc:Fallback>
+        </mc:AlternateContent>
+        <mc:AlternateContent xmlns:mc="http://schemas.openxmlformats.org/markup-compatibility/2006" xmlns:p14="http://schemas.microsoft.com/office/powerpoint/2010/main">
+          <mc:Choice Requires="p14">
+            <p:contentPart p14:bwMode="auto" r:id="rId30">
+              <p14:nvContentPartPr>
+                <p14:cNvPr id="36" name="Ink 35">
+                  <a:extLst>
+                    <a:ext uri="{FF2B5EF4-FFF2-40B4-BE49-F238E27FC236}">
+                      <a16:creationId xmlns:a16="http://schemas.microsoft.com/office/drawing/2014/main" id="{949878AF-3A13-5680-8CF4-BDF61A3F519B}"/>
+                    </a:ext>
+                  </a:extLst>
+                </p14:cNvPr>
+                <p14:cNvContentPartPr/>
+                <p14:nvPr/>
+              </p14:nvContentPartPr>
+              <p14:xfrm>
+                <a:off x="10579464" y="3657456"/>
+                <a:ext cx="742320" cy="392760"/>
+              </p14:xfrm>
+            </p:contentPart>
+          </mc:Choice>
+          <mc:Fallback xmlns="">
+            <p:pic>
+              <p:nvPicPr>
+                <p:cNvPr id="18" name="Ink 17">
+                  <a:extLst>
+                    <a:ext uri="{FF2B5EF4-FFF2-40B4-BE49-F238E27FC236}">
+                      <a16:creationId xmlns:a16="http://schemas.microsoft.com/office/drawing/2014/main" id="{8501ECDD-3854-77FA-51C4-D6BC2020D5D2}"/>
+                    </a:ext>
+                  </a:extLst>
+                </p:cNvPr>
+                <p:cNvPicPr/>
+                <p:nvPr/>
+              </p:nvPicPr>
+              <p:blipFill>
+                <a:blip r:embed="rId31"/>
+                <a:stretch>
+                  <a:fillRect/>
+                </a:stretch>
+              </p:blipFill>
+              <p:spPr>
+                <a:xfrm>
+                  <a:off x="10543464" y="3621456"/>
+                  <a:ext cx="813960" cy="464400"/>
+                </a:xfrm>
+                <a:prstGeom prst="rect">
+                  <a:avLst/>
+                </a:prstGeom>
+              </p:spPr>
+            </p:pic>
+          </mc:Fallback>
+        </mc:AlternateContent>
+      </p:grpSp>
+    </p:spTree>
+    <p:extLst>
+      <p:ext uri="{BB962C8B-B14F-4D97-AF65-F5344CB8AC3E}">
+        <p14:creationId xmlns:p14="http://schemas.microsoft.com/office/powerpoint/2010/main" val="687623817"/>
+      </p:ext>
+    </p:extLst>
+  </p:cSld>
+  <p:clrMapOvr>
+    <a:masterClrMapping/>
+  </p:clrMapOvr>
+</p:sld>
+</file>
+
+<file path=ppt/slides/slide12.xml><?xml version="1.0" encoding="utf-8"?>
 <p:sld xmlns:a="http://schemas.openxmlformats.org/drawingml/2006/main" xmlns:r="http://schemas.openxmlformats.org/officeDocument/2006/relationships" xmlns:p="http://schemas.openxmlformats.org/presentationml/2006/main">
   <p:cSld>
     <p:spTree>
@@ -10507,35 +13991,35 @@
           <p:nvPr>
             <p:extLst>
               <p:ext uri="{D42A27DB-BD31-4B8C-83A1-F6EECF244321}">
-                <p14:modId xmlns:p14="http://schemas.microsoft.com/office/powerpoint/2010/main" val="2952445345"/>
+                <p14:modId xmlns:p14="http://schemas.microsoft.com/office/powerpoint/2010/main" val="966596037"/>
               </p:ext>
             </p:extLst>
           </p:nvPr>
         </p:nvGraphicFramePr>
         <p:xfrm>
-          <a:off x="274320" y="2044478"/>
-          <a:ext cx="11466576" cy="4419600"/>
+          <a:off x="100584" y="969264"/>
+          <a:ext cx="11466576" cy="5577840"/>
         </p:xfrm>
         <a:graphic>
           <a:graphicData uri="http://schemas.openxmlformats.org/drawingml/2006/table">
             <a:tbl>
               <a:tblPr/>
               <a:tblGrid>
-                <a:gridCol w="3822192">
+                <a:gridCol w="3374136">
                   <a:extLst>
                     <a:ext uri="{9D8B030D-6E8A-4147-A177-3AD203B41FA5}">
                       <a16:colId xmlns:a16="http://schemas.microsoft.com/office/drawing/2014/main" val="805926443"/>
                     </a:ext>
                   </a:extLst>
                 </a:gridCol>
-                <a:gridCol w="3822192">
+                <a:gridCol w="4023360">
                   <a:extLst>
                     <a:ext uri="{9D8B030D-6E8A-4147-A177-3AD203B41FA5}">
                       <a16:colId xmlns:a16="http://schemas.microsoft.com/office/drawing/2014/main" val="2948705484"/>
                     </a:ext>
                   </a:extLst>
                 </a:gridCol>
-                <a:gridCol w="3822192">
+                <a:gridCol w="4069080">
                   <a:extLst>
                     <a:ext uri="{9D8B030D-6E8A-4147-A177-3AD203B41FA5}">
                       <a16:colId xmlns:a16="http://schemas.microsoft.com/office/drawing/2014/main" val="4155991837"/>
@@ -10553,7 +14037,7 @@
                         <a:buNone/>
                       </a:pPr>
                       <a:r>
-                        <a:rPr lang="en-US" sz="2000" b="1" u="sng" dirty="0">
+                        <a:rPr lang="en-US" sz="2400" b="1" u="sng" dirty="0">
                           <a:solidFill>
                             <a:schemeClr val="accent6">
                               <a:lumMod val="60000"/>
@@ -10594,7 +14078,7 @@
                         <a:buNone/>
                       </a:pPr>
                       <a:r>
-                        <a:rPr lang="en-US" sz="2000" b="1" u="sng" dirty="0">
+                        <a:rPr lang="en-US" sz="2400" b="1" u="sng" dirty="0">
                           <a:solidFill>
                             <a:schemeClr val="accent6">
                               <a:lumMod val="60000"/>
@@ -10635,7 +14119,7 @@
                         <a:buNone/>
                       </a:pPr>
                       <a:r>
-                        <a:rPr lang="en-US" sz="2000" b="1" u="sng" dirty="0">
+                        <a:rPr lang="en-US" sz="2400" b="1" u="sng" dirty="0">
                           <a:solidFill>
                             <a:schemeClr val="accent6">
                               <a:lumMod val="60000"/>
@@ -10683,7 +14167,7 @@
                         <a:buNone/>
                       </a:pPr>
                       <a:r>
-                        <a:rPr lang="en-US" sz="2000" b="1" dirty="0">
+                        <a:rPr lang="en-US" sz="2400" b="1" dirty="0">
                           <a:solidFill>
                             <a:schemeClr val="accent6">
                               <a:lumMod val="60000"/>
@@ -10693,7 +14177,7 @@
                         </a:rPr>
                         <a:t>Convenience Sampling</a:t>
                       </a:r>
-                      <a:endParaRPr lang="en-US" sz="2000" dirty="0">
+                      <a:endParaRPr lang="en-US" sz="2400" dirty="0">
                         <a:solidFill>
                           <a:schemeClr val="accent6">
                             <a:lumMod val="60000"/>
@@ -10744,7 +14228,7 @@
                         <a:buNone/>
                       </a:pPr>
                       <a:r>
-                        <a:rPr lang="en-US" sz="2000">
+                        <a:rPr lang="en-US" sz="2400" dirty="0">
                           <a:solidFill>
                             <a:schemeClr val="accent6">
                               <a:lumMod val="60000"/>
@@ -10797,7 +14281,7 @@
                         <a:buNone/>
                       </a:pPr>
                       <a:r>
-                        <a:rPr lang="en-US" sz="2000" dirty="0">
+                        <a:rPr lang="en-US" sz="2400" dirty="0">
                           <a:solidFill>
                             <a:schemeClr val="accent6">
                               <a:lumMod val="60000"/>
@@ -10808,7 +14292,7 @@
                         <a:t>Survey people in </a:t>
                       </a:r>
                       <a:r>
-                        <a:rPr lang="en-US" sz="2000" b="1" dirty="0">
+                        <a:rPr lang="en-US" sz="2400" b="1" dirty="0">
                           <a:solidFill>
                             <a:schemeClr val="accent6">
                               <a:lumMod val="60000"/>
@@ -10819,7 +14303,7 @@
                         <a:t>your School</a:t>
                       </a:r>
                       <a:r>
-                        <a:rPr lang="en-US" sz="2000" dirty="0">
+                        <a:rPr lang="en-US" sz="2400" dirty="0">
                           <a:solidFill>
                             <a:schemeClr val="accent6">
                               <a:lumMod val="60000"/>
@@ -10879,7 +14363,7 @@
                         <a:buNone/>
                       </a:pPr>
                       <a:r>
-                        <a:rPr lang="en-US" sz="2000" b="1" dirty="0">
+                        <a:rPr lang="en-US" sz="2400" b="1" dirty="0">
                           <a:solidFill>
                             <a:schemeClr val="accent6">
                               <a:lumMod val="60000"/>
@@ -10889,7 +14373,7 @@
                         </a:rPr>
                         <a:t>Judgment Sampling</a:t>
                       </a:r>
-                      <a:endParaRPr lang="en-US" sz="2000" dirty="0">
+                      <a:endParaRPr lang="en-US" sz="2400" dirty="0">
                         <a:solidFill>
                           <a:schemeClr val="accent6">
                             <a:lumMod val="60000"/>
@@ -10940,7 +14424,7 @@
                         <a:buNone/>
                       </a:pPr>
                       <a:r>
-                        <a:rPr lang="en-US" sz="2000" dirty="0">
+                        <a:rPr lang="en-US" sz="2400" dirty="0">
                           <a:solidFill>
                             <a:schemeClr val="accent6">
                               <a:lumMod val="60000"/>
@@ -10993,7 +14477,7 @@
                         <a:buNone/>
                       </a:pPr>
                       <a:r>
-                        <a:rPr lang="en-US" sz="2000" dirty="0">
+                        <a:rPr lang="en-US" sz="2400" dirty="0">
                           <a:solidFill>
                             <a:schemeClr val="accent6">
                               <a:lumMod val="60000"/>
@@ -11053,7 +14537,7 @@
                         <a:buNone/>
                       </a:pPr>
                       <a:r>
-                        <a:rPr lang="en-US" sz="2000" b="1" dirty="0">
+                        <a:rPr lang="en-US" sz="2400" b="1" dirty="0">
                           <a:solidFill>
                             <a:schemeClr val="accent6">
                               <a:lumMod val="60000"/>
@@ -11063,7 +14547,7 @@
                         </a:rPr>
                         <a:t>Quota Sampling</a:t>
                       </a:r>
-                      <a:endParaRPr lang="en-US" sz="2000" dirty="0">
+                      <a:endParaRPr lang="en-US" sz="2400" dirty="0">
                         <a:solidFill>
                           <a:schemeClr val="accent6">
                             <a:lumMod val="60000"/>
@@ -11114,7 +14598,7 @@
                         <a:buNone/>
                       </a:pPr>
                       <a:r>
-                        <a:rPr lang="en-US" sz="2000" dirty="0">
+                        <a:rPr lang="en-US" sz="2400" dirty="0">
                           <a:solidFill>
                             <a:schemeClr val="accent6">
                               <a:lumMod val="60000"/>
@@ -11167,7 +14651,7 @@
                         <a:buNone/>
                       </a:pPr>
                       <a:r>
-                        <a:rPr lang="en-US" sz="2000" dirty="0">
+                        <a:rPr lang="en-US" sz="2400" dirty="0">
                           <a:solidFill>
                             <a:schemeClr val="accent6">
                               <a:lumMod val="60000"/>
@@ -11227,7 +14711,7 @@
                         <a:buNone/>
                       </a:pPr>
                       <a:r>
-                        <a:rPr lang="en-US" sz="2000" b="1" dirty="0">
+                        <a:rPr lang="en-US" sz="2400" b="1" dirty="0">
                           <a:solidFill>
                             <a:schemeClr val="accent6">
                               <a:lumMod val="60000"/>
@@ -11237,7 +14721,7 @@
                         </a:rPr>
                         <a:t>Snowball Sampling</a:t>
                       </a:r>
-                      <a:endParaRPr lang="en-US" sz="2000" dirty="0">
+                      <a:endParaRPr lang="en-US" sz="2400" dirty="0">
                         <a:solidFill>
                           <a:schemeClr val="accent6">
                             <a:lumMod val="60000"/>
@@ -11288,7 +14772,7 @@
                         <a:buNone/>
                       </a:pPr>
                       <a:r>
-                        <a:rPr lang="en-US" sz="2000" dirty="0">
+                        <a:rPr lang="en-US" sz="2400" dirty="0">
                           <a:solidFill>
                             <a:schemeClr val="accent6">
                               <a:lumMod val="60000"/>
@@ -11341,7 +14825,7 @@
                         <a:buNone/>
                       </a:pPr>
                       <a:r>
-                        <a:rPr lang="en-US" sz="2000" dirty="0">
+                        <a:rPr lang="en-US" sz="2400" dirty="0">
                           <a:solidFill>
                             <a:schemeClr val="accent6">
                               <a:lumMod val="60000"/>
@@ -11408,7 +14892,7 @@
 </p:sld>
 </file>
 
-<file path=ppt/slides/slide11.xml><?xml version="1.0" encoding="utf-8"?>
+<file path=ppt/slides/slide13.xml><?xml version="1.0" encoding="utf-8"?>
 <p:sld xmlns:a="http://schemas.openxmlformats.org/drawingml/2006/main" xmlns:r="http://schemas.openxmlformats.org/officeDocument/2006/relationships" xmlns:p="http://schemas.openxmlformats.org/presentationml/2006/main">
   <p:cSld>
     <p:spTree>
@@ -11582,93 +15066,48 @@
               <a:buNone/>
             </a:pPr>
             <a:r>
-              <a:rPr lang="en-US" sz="2000" b="1" dirty="0"/>
+              <a:rPr lang="en-US" sz="2400" b="1" dirty="0"/>
               <a:t>Sampling</a:t>
             </a:r>
             <a:r>
-              <a:rPr lang="en-US" sz="2000" dirty="0"/>
+              <a:rPr lang="en-US" sz="2400" dirty="0"/>
               <a:t> is the process of selecting a </a:t>
             </a:r>
             <a:r>
-              <a:rPr lang="en-US" sz="2000" b="1" dirty="0"/>
+              <a:rPr lang="en-US" sz="2400" b="1" dirty="0"/>
               <a:t>small subset (sample)</a:t>
             </a:r>
             <a:r>
-              <a:rPr lang="en-US" sz="2000" dirty="0"/>
+              <a:rPr lang="en-US" sz="2400" dirty="0"/>
               <a:t> from a </a:t>
             </a:r>
             <a:r>
-              <a:rPr lang="en-US" sz="2000" b="1" dirty="0"/>
+              <a:rPr lang="en-US" sz="2400" b="1" dirty="0"/>
               <a:t>larger group (population)</a:t>
             </a:r>
             <a:r>
-              <a:rPr lang="en-US" sz="2000" dirty="0"/>
+              <a:rPr lang="en-US" sz="2400" dirty="0"/>
               <a:t> to draw conclusions about the entire population. You could be drawing conclusion about mean, variance, etc.</a:t>
             </a:r>
           </a:p>
           <a:p>
             <a:r>
-              <a:rPr lang="en-US" sz="2000" b="1" dirty="0"/>
+              <a:rPr lang="en-US" sz="2400" b="1" dirty="0"/>
               <a:t>Population</a:t>
             </a:r>
             <a:r>
-              <a:rPr lang="en-US" sz="2000" dirty="0"/>
+              <a:rPr lang="en-US" sz="2400" dirty="0"/>
               <a:t> → The entire group you want to study e.g., all college students in Country</a:t>
             </a:r>
           </a:p>
           <a:p>
             <a:r>
-              <a:rPr lang="en-US" sz="2000" b="1" dirty="0"/>
+              <a:rPr lang="en-US" sz="2400" b="1" dirty="0"/>
               <a:t>Sample</a:t>
             </a:r>
             <a:r>
-              <a:rPr lang="en-US" sz="2000" dirty="0"/>
+              <a:rPr lang="en-US" sz="2400" dirty="0"/>
               <a:t> → A smaller group chosen from the population e.g., 500 students selected from different colleges</a:t>
-            </a:r>
-          </a:p>
-          <a:p>
-            <a:pPr marL="0" indent="0">
-              <a:buNone/>
-            </a:pPr>
-            <a:r>
-              <a:rPr lang="en-US" sz="2000" b="1" dirty="0"/>
-              <a:t>Why sampling ?</a:t>
-            </a:r>
-            <a:r>
-              <a:rPr lang="en-US" sz="2000" dirty="0"/>
-              <a:t> Because collecting data from the entire population is usually </a:t>
-            </a:r>
-            <a:r>
-              <a:rPr lang="en-US" sz="2000" b="1" dirty="0"/>
-              <a:t>impractical or expensive</a:t>
-            </a:r>
-            <a:r>
-              <a:rPr lang="en-US" sz="2000" dirty="0"/>
-              <a:t>, we rely on </a:t>
-            </a:r>
-            <a:r>
-              <a:rPr lang="en-US" sz="2000" b="1" dirty="0"/>
-              <a:t>samples</a:t>
-            </a:r>
-            <a:r>
-              <a:rPr lang="en-US" sz="2000" dirty="0"/>
-              <a:t>. </a:t>
-            </a:r>
-            <a:r>
-              <a:rPr lang="en-US" sz="2000" b="1" dirty="0"/>
-              <a:t>For example,</a:t>
-            </a:r>
-            <a:r>
-              <a:rPr lang="en-US" sz="2000" dirty="0"/>
-              <a:t> suppose a </a:t>
-            </a:r>
-            <a:r>
-              <a:rPr lang="en-US" sz="2000" b="1" dirty="0"/>
-              <a:t>drug manufacturer</a:t>
-            </a:r>
-            <a:r>
-              <a:rPr lang="en-US" sz="2000" dirty="0"/>
-              <a:t> would like to research the adverse side effects of a drug on the country’s population. In that case, it is almost impossible to conduct a research study that involves everyone. In this case, the manufacturer decides on a sample of people from each demographic and then researches side effects of drugs.</a:t>
             </a:r>
           </a:p>
         </p:txBody>
@@ -12867,6 +16306,1416 @@
         <p:cNvPr id="1" name="">
           <a:extLst>
             <a:ext uri="{FF2B5EF4-FFF2-40B4-BE49-F238E27FC236}">
+              <a16:creationId xmlns:a16="http://schemas.microsoft.com/office/drawing/2014/main" id="{84938782-767C-FABA-E0C5-88D157263231}"/>
+            </a:ext>
+          </a:extLst>
+        </p:cNvPr>
+        <p:cNvGrpSpPr/>
+        <p:nvPr/>
+      </p:nvGrpSpPr>
+      <p:grpSpPr>
+        <a:xfrm>
+          <a:off x="0" y="0"/>
+          <a:ext cx="0" cy="0"/>
+          <a:chOff x="0" y="0"/>
+          <a:chExt cx="0" cy="0"/>
+        </a:xfrm>
+      </p:grpSpPr>
+      <p:sp>
+        <p:nvSpPr>
+          <p:cNvPr id="2" name="Title 1">
+            <a:extLst>
+              <a:ext uri="{FF2B5EF4-FFF2-40B4-BE49-F238E27FC236}">
+                <a16:creationId xmlns:a16="http://schemas.microsoft.com/office/drawing/2014/main" id="{FA043EC7-CF1A-2757-A3FA-9FD3B9A664A2}"/>
+              </a:ext>
+            </a:extLst>
+          </p:cNvPr>
+          <p:cNvSpPr>
+            <a:spLocks noGrp="1"/>
+          </p:cNvSpPr>
+          <p:nvPr>
+            <p:ph type="title"/>
+          </p:nvPr>
+        </p:nvSpPr>
+        <p:spPr>
+          <a:xfrm>
+            <a:off x="274320" y="54229"/>
+            <a:ext cx="11466576" cy="509511"/>
+          </a:xfrm>
+        </p:spPr>
+        <p:txBody>
+          <a:bodyPr>
+            <a:normAutofit fontScale="90000"/>
+          </a:bodyPr>
+          <a:lstStyle/>
+          <a:p>
+            <a:pPr algn="ctr"/>
+            <a:r>
+              <a:rPr lang="en-US" sz="3600" dirty="0"/>
+              <a:t>What is Sampling and Why Do We Need It?</a:t>
+            </a:r>
+          </a:p>
+        </p:txBody>
+      </p:sp>
+      <p:pic>
+        <p:nvPicPr>
+          <p:cNvPr id="5" name="Picture 4">
+            <a:extLst>
+              <a:ext uri="{FF2B5EF4-FFF2-40B4-BE49-F238E27FC236}">
+                <a16:creationId xmlns:a16="http://schemas.microsoft.com/office/drawing/2014/main" id="{5C76C108-D585-D1DB-5C70-4DDE89605478}"/>
+              </a:ext>
+            </a:extLst>
+          </p:cNvPr>
+          <p:cNvPicPr>
+            <a:picLocks noChangeAspect="1"/>
+          </p:cNvPicPr>
+          <p:nvPr/>
+        </p:nvPicPr>
+        <p:blipFill>
+          <a:blip r:embed="rId2"/>
+          <a:stretch>
+            <a:fillRect/>
+          </a:stretch>
+        </p:blipFill>
+        <p:spPr>
+          <a:xfrm>
+            <a:off x="5774004" y="3744726"/>
+            <a:ext cx="6191330" cy="2991609"/>
+          </a:xfrm>
+          <a:prstGeom prst="rect">
+            <a:avLst/>
+          </a:prstGeom>
+        </p:spPr>
+      </p:pic>
+      <p:grpSp>
+        <p:nvGrpSpPr>
+          <p:cNvPr id="30" name="Group 29">
+            <a:extLst>
+              <a:ext uri="{FF2B5EF4-FFF2-40B4-BE49-F238E27FC236}">
+                <a16:creationId xmlns:a16="http://schemas.microsoft.com/office/drawing/2014/main" id="{982F4F0B-4A8E-24A1-082C-5FB5A0EBC1A8}"/>
+              </a:ext>
+            </a:extLst>
+          </p:cNvPr>
+          <p:cNvGrpSpPr/>
+          <p:nvPr/>
+        </p:nvGrpSpPr>
+        <p:grpSpPr>
+          <a:xfrm>
+            <a:off x="5400548" y="3777687"/>
+            <a:ext cx="6555916" cy="2987042"/>
+            <a:chOff x="3536424" y="2525256"/>
+            <a:chExt cx="8420040" cy="4237560"/>
+          </a:xfrm>
+        </p:grpSpPr>
+        <mc:AlternateContent xmlns:mc="http://schemas.openxmlformats.org/markup-compatibility/2006">
+          <mc:Choice xmlns:p14="http://schemas.microsoft.com/office/powerpoint/2010/main" Requires="p14">
+            <p:contentPart p14:bwMode="auto" r:id="rId3">
+              <p14:nvContentPartPr>
+                <p14:cNvPr id="6" name="Ink 5">
+                  <a:extLst>
+                    <a:ext uri="{FF2B5EF4-FFF2-40B4-BE49-F238E27FC236}">
+                      <a16:creationId xmlns:a16="http://schemas.microsoft.com/office/drawing/2014/main" id="{66449A6A-48EA-648F-B89A-0658E927655B}"/>
+                    </a:ext>
+                  </a:extLst>
+                </p14:cNvPr>
+                <p14:cNvContentPartPr/>
+                <p14:nvPr/>
+              </p14:nvContentPartPr>
+              <p14:xfrm>
+                <a:off x="8228076" y="4483905"/>
+                <a:ext cx="1882156" cy="2168640"/>
+              </p14:xfrm>
+            </p:contentPart>
+          </mc:Choice>
+          <mc:Fallback>
+            <p:pic>
+              <p:nvPicPr>
+                <p:cNvPr id="6" name="Ink 5">
+                  <a:extLst>
+                    <a:ext uri="{FF2B5EF4-FFF2-40B4-BE49-F238E27FC236}">
+                      <a16:creationId xmlns:a16="http://schemas.microsoft.com/office/drawing/2014/main" id="{66449A6A-48EA-648F-B89A-0658E927655B}"/>
+                    </a:ext>
+                  </a:extLst>
+                </p:cNvPr>
+                <p:cNvPicPr/>
+                <p:nvPr/>
+              </p:nvPicPr>
+              <p:blipFill>
+                <a:blip r:embed="rId4"/>
+                <a:stretch>
+                  <a:fillRect/>
+                </a:stretch>
+              </p:blipFill>
+              <p:spPr>
+                <a:xfrm>
+                  <a:off x="8181843" y="4432842"/>
+                  <a:ext cx="1974160" cy="2270255"/>
+                </a:xfrm>
+                <a:prstGeom prst="rect">
+                  <a:avLst/>
+                </a:prstGeom>
+              </p:spPr>
+            </p:pic>
+          </mc:Fallback>
+        </mc:AlternateContent>
+        <mc:AlternateContent xmlns:mc="http://schemas.openxmlformats.org/markup-compatibility/2006">
+          <mc:Choice xmlns:p14="http://schemas.microsoft.com/office/powerpoint/2010/main" Requires="p14">
+            <p:contentPart p14:bwMode="auto" r:id="rId5">
+              <p14:nvContentPartPr>
+                <p14:cNvPr id="7" name="Ink 6">
+                  <a:extLst>
+                    <a:ext uri="{FF2B5EF4-FFF2-40B4-BE49-F238E27FC236}">
+                      <a16:creationId xmlns:a16="http://schemas.microsoft.com/office/drawing/2014/main" id="{AF20FEC2-444F-8A5B-CFD2-A28D0D479DB4}"/>
+                    </a:ext>
+                  </a:extLst>
+                </p14:cNvPr>
+                <p14:cNvContentPartPr/>
+                <p14:nvPr/>
+              </p14:nvContentPartPr>
+              <p14:xfrm>
+                <a:off x="8102304" y="4303656"/>
+                <a:ext cx="243720" cy="218520"/>
+              </p14:xfrm>
+            </p:contentPart>
+          </mc:Choice>
+          <mc:Fallback>
+            <p:pic>
+              <p:nvPicPr>
+                <p:cNvPr id="7" name="Ink 6">
+                  <a:extLst>
+                    <a:ext uri="{FF2B5EF4-FFF2-40B4-BE49-F238E27FC236}">
+                      <a16:creationId xmlns:a16="http://schemas.microsoft.com/office/drawing/2014/main" id="{AF20FEC2-444F-8A5B-CFD2-A28D0D479DB4}"/>
+                    </a:ext>
+                  </a:extLst>
+                </p:cNvPr>
+                <p:cNvPicPr/>
+                <p:nvPr/>
+              </p:nvPicPr>
+              <p:blipFill>
+                <a:blip r:embed="rId6"/>
+                <a:stretch>
+                  <a:fillRect/>
+                </a:stretch>
+              </p:blipFill>
+              <p:spPr>
+                <a:xfrm>
+                  <a:off x="8056057" y="4252719"/>
+                  <a:ext cx="335751" cy="319885"/>
+                </a:xfrm>
+                <a:prstGeom prst="rect">
+                  <a:avLst/>
+                </a:prstGeom>
+              </p:spPr>
+            </p:pic>
+          </mc:Fallback>
+        </mc:AlternateContent>
+        <mc:AlternateContent xmlns:mc="http://schemas.openxmlformats.org/markup-compatibility/2006">
+          <mc:Choice xmlns:p14="http://schemas.microsoft.com/office/powerpoint/2010/main" Requires="p14">
+            <p:contentPart p14:bwMode="auto" r:id="rId7">
+              <p14:nvContentPartPr>
+                <p14:cNvPr id="8" name="Ink 7">
+                  <a:extLst>
+                    <a:ext uri="{FF2B5EF4-FFF2-40B4-BE49-F238E27FC236}">
+                      <a16:creationId xmlns:a16="http://schemas.microsoft.com/office/drawing/2014/main" id="{1C6B0080-1E9A-783A-5A9F-F8E9389B5237}"/>
+                    </a:ext>
+                  </a:extLst>
+                </p14:cNvPr>
+                <p14:cNvContentPartPr/>
+                <p14:nvPr/>
+              </p14:nvContentPartPr>
+              <p14:xfrm>
+                <a:off x="8428104" y="4351896"/>
+                <a:ext cx="181080" cy="124560"/>
+              </p14:xfrm>
+            </p:contentPart>
+          </mc:Choice>
+          <mc:Fallback>
+            <p:pic>
+              <p:nvPicPr>
+                <p:cNvPr id="8" name="Ink 7">
+                  <a:extLst>
+                    <a:ext uri="{FF2B5EF4-FFF2-40B4-BE49-F238E27FC236}">
+                      <a16:creationId xmlns:a16="http://schemas.microsoft.com/office/drawing/2014/main" id="{1C6B0080-1E9A-783A-5A9F-F8E9389B5237}"/>
+                    </a:ext>
+                  </a:extLst>
+                </p:cNvPr>
+                <p:cNvPicPr/>
+                <p:nvPr/>
+              </p:nvPicPr>
+              <p:blipFill>
+                <a:blip r:embed="rId8"/>
+                <a:stretch>
+                  <a:fillRect/>
+                </a:stretch>
+              </p:blipFill>
+              <p:spPr>
+                <a:xfrm>
+                  <a:off x="8381910" y="4301055"/>
+                  <a:ext cx="273006" cy="225733"/>
+                </a:xfrm>
+                <a:prstGeom prst="rect">
+                  <a:avLst/>
+                </a:prstGeom>
+              </p:spPr>
+            </p:pic>
+          </mc:Fallback>
+        </mc:AlternateContent>
+        <mc:AlternateContent xmlns:mc="http://schemas.openxmlformats.org/markup-compatibility/2006">
+          <mc:Choice xmlns:p14="http://schemas.microsoft.com/office/powerpoint/2010/main" Requires="p14">
+            <p:contentPart p14:bwMode="auto" r:id="rId9">
+              <p14:nvContentPartPr>
+                <p14:cNvPr id="9" name="Ink 8">
+                  <a:extLst>
+                    <a:ext uri="{FF2B5EF4-FFF2-40B4-BE49-F238E27FC236}">
+                      <a16:creationId xmlns:a16="http://schemas.microsoft.com/office/drawing/2014/main" id="{52C4BF13-198E-1438-E85B-E37300A3FA29}"/>
+                    </a:ext>
+                  </a:extLst>
+                </p14:cNvPr>
+                <p14:cNvContentPartPr/>
+                <p14:nvPr/>
+              </p14:nvContentPartPr>
+              <p14:xfrm>
+                <a:off x="8643384" y="4299336"/>
+                <a:ext cx="175320" cy="164160"/>
+              </p14:xfrm>
+            </p:contentPart>
+          </mc:Choice>
+          <mc:Fallback>
+            <p:pic>
+              <p:nvPicPr>
+                <p:cNvPr id="9" name="Ink 8">
+                  <a:extLst>
+                    <a:ext uri="{FF2B5EF4-FFF2-40B4-BE49-F238E27FC236}">
+                      <a16:creationId xmlns:a16="http://schemas.microsoft.com/office/drawing/2014/main" id="{52C4BF13-198E-1438-E85B-E37300A3FA29}"/>
+                    </a:ext>
+                  </a:extLst>
+                </p:cNvPr>
+                <p:cNvPicPr/>
+                <p:nvPr/>
+              </p:nvPicPr>
+              <p:blipFill>
+                <a:blip r:embed="rId10"/>
+                <a:stretch>
+                  <a:fillRect/>
+                </a:stretch>
+              </p:blipFill>
+              <p:spPr>
+                <a:xfrm>
+                  <a:off x="8597125" y="4248355"/>
+                  <a:ext cx="267375" cy="265613"/>
+                </a:xfrm>
+                <a:prstGeom prst="rect">
+                  <a:avLst/>
+                </a:prstGeom>
+              </p:spPr>
+            </p:pic>
+          </mc:Fallback>
+        </mc:AlternateContent>
+        <mc:AlternateContent xmlns:mc="http://schemas.openxmlformats.org/markup-compatibility/2006">
+          <mc:Choice xmlns:p14="http://schemas.microsoft.com/office/powerpoint/2010/main" Requires="p14">
+            <p:contentPart p14:bwMode="auto" r:id="rId11">
+              <p14:nvContentPartPr>
+                <p14:cNvPr id="10" name="Ink 9">
+                  <a:extLst>
+                    <a:ext uri="{FF2B5EF4-FFF2-40B4-BE49-F238E27FC236}">
+                      <a16:creationId xmlns:a16="http://schemas.microsoft.com/office/drawing/2014/main" id="{12FDFB09-CCBF-DE9A-6F7C-9B39F6BEA500}"/>
+                    </a:ext>
+                  </a:extLst>
+                </p14:cNvPr>
+                <p14:cNvContentPartPr/>
+                <p14:nvPr/>
+              </p14:nvContentPartPr>
+              <p14:xfrm>
+                <a:off x="8910144" y="4285656"/>
+                <a:ext cx="145440" cy="315000"/>
+              </p14:xfrm>
+            </p:contentPart>
+          </mc:Choice>
+          <mc:Fallback>
+            <p:pic>
+              <p:nvPicPr>
+                <p:cNvPr id="10" name="Ink 9">
+                  <a:extLst>
+                    <a:ext uri="{FF2B5EF4-FFF2-40B4-BE49-F238E27FC236}">
+                      <a16:creationId xmlns:a16="http://schemas.microsoft.com/office/drawing/2014/main" id="{12FDFB09-CCBF-DE9A-6F7C-9B39F6BEA500}"/>
+                    </a:ext>
+                  </a:extLst>
+                </p:cNvPr>
+                <p:cNvPicPr/>
+                <p:nvPr/>
+              </p:nvPicPr>
+              <p:blipFill>
+                <a:blip r:embed="rId12"/>
+                <a:stretch>
+                  <a:fillRect/>
+                </a:stretch>
+              </p:blipFill>
+              <p:spPr>
+                <a:xfrm>
+                  <a:off x="8863973" y="4234603"/>
+                  <a:ext cx="237321" cy="416596"/>
+                </a:xfrm>
+                <a:prstGeom prst="rect">
+                  <a:avLst/>
+                </a:prstGeom>
+              </p:spPr>
+            </p:pic>
+          </mc:Fallback>
+        </mc:AlternateContent>
+        <mc:AlternateContent xmlns:mc="http://schemas.openxmlformats.org/markup-compatibility/2006">
+          <mc:Choice xmlns:p14="http://schemas.microsoft.com/office/powerpoint/2010/main" Requires="p14">
+            <p:contentPart p14:bwMode="auto" r:id="rId13">
+              <p14:nvContentPartPr>
+                <p14:cNvPr id="11" name="Ink 10">
+                  <a:extLst>
+                    <a:ext uri="{FF2B5EF4-FFF2-40B4-BE49-F238E27FC236}">
+                      <a16:creationId xmlns:a16="http://schemas.microsoft.com/office/drawing/2014/main" id="{09C6B804-8634-E58B-6B6D-BB9A0052C925}"/>
+                    </a:ext>
+                  </a:extLst>
+                </p14:cNvPr>
+                <p14:cNvContentPartPr/>
+                <p14:nvPr/>
+              </p14:nvContentPartPr>
+              <p14:xfrm>
+                <a:off x="9084024" y="4114656"/>
+                <a:ext cx="66960" cy="301320"/>
+              </p14:xfrm>
+            </p:contentPart>
+          </mc:Choice>
+          <mc:Fallback>
+            <p:pic>
+              <p:nvPicPr>
+                <p:cNvPr id="11" name="Ink 10">
+                  <a:extLst>
+                    <a:ext uri="{FF2B5EF4-FFF2-40B4-BE49-F238E27FC236}">
+                      <a16:creationId xmlns:a16="http://schemas.microsoft.com/office/drawing/2014/main" id="{09C6B804-8634-E58B-6B6D-BB9A0052C925}"/>
+                    </a:ext>
+                  </a:extLst>
+                </p:cNvPr>
+                <p:cNvPicPr/>
+                <p:nvPr/>
+              </p:nvPicPr>
+              <p:blipFill>
+                <a:blip r:embed="rId14"/>
+                <a:stretch>
+                  <a:fillRect/>
+                </a:stretch>
+              </p:blipFill>
+              <p:spPr>
+                <a:xfrm>
+                  <a:off x="9038161" y="4063585"/>
+                  <a:ext cx="158227" cy="402952"/>
+                </a:xfrm>
+                <a:prstGeom prst="rect">
+                  <a:avLst/>
+                </a:prstGeom>
+              </p:spPr>
+            </p:pic>
+          </mc:Fallback>
+        </mc:AlternateContent>
+        <mc:AlternateContent xmlns:mc="http://schemas.openxmlformats.org/markup-compatibility/2006">
+          <mc:Choice xmlns:p14="http://schemas.microsoft.com/office/powerpoint/2010/main" Requires="p14">
+            <p:contentPart p14:bwMode="auto" r:id="rId15">
+              <p14:nvContentPartPr>
+                <p14:cNvPr id="12" name="Ink 11">
+                  <a:extLst>
+                    <a:ext uri="{FF2B5EF4-FFF2-40B4-BE49-F238E27FC236}">
+                      <a16:creationId xmlns:a16="http://schemas.microsoft.com/office/drawing/2014/main" id="{32AE9320-9E08-6FA7-2C22-A2005C6E7C03}"/>
+                    </a:ext>
+                  </a:extLst>
+                </p14:cNvPr>
+                <p14:cNvContentPartPr/>
+                <p14:nvPr/>
+              </p14:nvContentPartPr>
+              <p14:xfrm>
+                <a:off x="9224064" y="4255416"/>
+                <a:ext cx="288720" cy="131040"/>
+              </p14:xfrm>
+            </p:contentPart>
+          </mc:Choice>
+          <mc:Fallback>
+            <p:pic>
+              <p:nvPicPr>
+                <p:cNvPr id="12" name="Ink 11">
+                  <a:extLst>
+                    <a:ext uri="{FF2B5EF4-FFF2-40B4-BE49-F238E27FC236}">
+                      <a16:creationId xmlns:a16="http://schemas.microsoft.com/office/drawing/2014/main" id="{32AE9320-9E08-6FA7-2C22-A2005C6E7C03}"/>
+                    </a:ext>
+                  </a:extLst>
+                </p:cNvPr>
+                <p:cNvPicPr/>
+                <p:nvPr/>
+              </p:nvPicPr>
+              <p:blipFill>
+                <a:blip r:embed="rId16"/>
+                <a:stretch>
+                  <a:fillRect/>
+                </a:stretch>
+              </p:blipFill>
+              <p:spPr>
+                <a:xfrm>
+                  <a:off x="9177869" y="4204428"/>
+                  <a:ext cx="380648" cy="232507"/>
+                </a:xfrm>
+                <a:prstGeom prst="rect">
+                  <a:avLst/>
+                </a:prstGeom>
+              </p:spPr>
+            </p:pic>
+          </mc:Fallback>
+        </mc:AlternateContent>
+        <mc:AlternateContent xmlns:mc="http://schemas.openxmlformats.org/markup-compatibility/2006">
+          <mc:Choice xmlns:p14="http://schemas.microsoft.com/office/powerpoint/2010/main" Requires="p14">
+            <p:contentPart p14:bwMode="auto" r:id="rId17">
+              <p14:nvContentPartPr>
+                <p14:cNvPr id="14" name="Ink 13">
+                  <a:extLst>
+                    <a:ext uri="{FF2B5EF4-FFF2-40B4-BE49-F238E27FC236}">
+                      <a16:creationId xmlns:a16="http://schemas.microsoft.com/office/drawing/2014/main" id="{2A0FB89B-E798-5878-9C3B-BF432D2AFDFC}"/>
+                    </a:ext>
+                  </a:extLst>
+                </p14:cNvPr>
+                <p14:cNvContentPartPr/>
+                <p14:nvPr/>
+              </p14:nvContentPartPr>
+              <p14:xfrm>
+                <a:off x="3536424" y="2630736"/>
+                <a:ext cx="8420040" cy="4132080"/>
+              </p14:xfrm>
+            </p:contentPart>
+          </mc:Choice>
+          <mc:Fallback>
+            <p:pic>
+              <p:nvPicPr>
+                <p:cNvPr id="14" name="Ink 13">
+                  <a:extLst>
+                    <a:ext uri="{FF2B5EF4-FFF2-40B4-BE49-F238E27FC236}">
+                      <a16:creationId xmlns:a16="http://schemas.microsoft.com/office/drawing/2014/main" id="{2A0FB89B-E798-5878-9C3B-BF432D2AFDFC}"/>
+                    </a:ext>
+                  </a:extLst>
+                </p:cNvPr>
+                <p:cNvPicPr/>
+                <p:nvPr/>
+              </p:nvPicPr>
+              <p:blipFill>
+                <a:blip r:embed="rId18"/>
+                <a:stretch>
+                  <a:fillRect/>
+                </a:stretch>
+              </p:blipFill>
+              <p:spPr>
+                <a:xfrm>
+                  <a:off x="3490188" y="2579666"/>
+                  <a:ext cx="8512050" cy="4233709"/>
+                </a:xfrm>
+                <a:prstGeom prst="rect">
+                  <a:avLst/>
+                </a:prstGeom>
+              </p:spPr>
+            </p:pic>
+          </mc:Fallback>
+        </mc:AlternateContent>
+        <mc:AlternateContent xmlns:mc="http://schemas.openxmlformats.org/markup-compatibility/2006">
+          <mc:Choice xmlns:p14="http://schemas.microsoft.com/office/powerpoint/2010/main" Requires="p14">
+            <p:contentPart p14:bwMode="auto" r:id="rId19">
+              <p14:nvContentPartPr>
+                <p14:cNvPr id="16" name="Ink 15">
+                  <a:extLst>
+                    <a:ext uri="{FF2B5EF4-FFF2-40B4-BE49-F238E27FC236}">
+                      <a16:creationId xmlns:a16="http://schemas.microsoft.com/office/drawing/2014/main" id="{1DAE8549-C70B-2378-A572-D387C105113E}"/>
+                    </a:ext>
+                  </a:extLst>
+                </p14:cNvPr>
+                <p14:cNvContentPartPr/>
+                <p14:nvPr/>
+              </p14:nvContentPartPr>
+              <p14:xfrm>
+                <a:off x="3663144" y="2689056"/>
+                <a:ext cx="70560" cy="324720"/>
+              </p14:xfrm>
+            </p:contentPart>
+          </mc:Choice>
+          <mc:Fallback>
+            <p:pic>
+              <p:nvPicPr>
+                <p:cNvPr id="16" name="Ink 15">
+                  <a:extLst>
+                    <a:ext uri="{FF2B5EF4-FFF2-40B4-BE49-F238E27FC236}">
+                      <a16:creationId xmlns:a16="http://schemas.microsoft.com/office/drawing/2014/main" id="{1DAE8549-C70B-2378-A572-D387C105113E}"/>
+                    </a:ext>
+                  </a:extLst>
+                </p:cNvPr>
+                <p:cNvPicPr/>
+                <p:nvPr/>
+              </p:nvPicPr>
+              <p:blipFill>
+                <a:blip r:embed="rId20"/>
+                <a:stretch>
+                  <a:fillRect/>
+                </a:stretch>
+              </p:blipFill>
+              <p:spPr>
+                <a:xfrm>
+                  <a:off x="3617026" y="2638080"/>
+                  <a:ext cx="162334" cy="426163"/>
+                </a:xfrm>
+                <a:prstGeom prst="rect">
+                  <a:avLst/>
+                </a:prstGeom>
+              </p:spPr>
+            </p:pic>
+          </mc:Fallback>
+        </mc:AlternateContent>
+        <mc:AlternateContent xmlns:mc="http://schemas.openxmlformats.org/markup-compatibility/2006">
+          <mc:Choice xmlns:p14="http://schemas.microsoft.com/office/powerpoint/2010/main" Requires="p14">
+            <p:contentPart p14:bwMode="auto" r:id="rId21">
+              <p14:nvContentPartPr>
+                <p14:cNvPr id="17" name="Ink 16">
+                  <a:extLst>
+                    <a:ext uri="{FF2B5EF4-FFF2-40B4-BE49-F238E27FC236}">
+                      <a16:creationId xmlns:a16="http://schemas.microsoft.com/office/drawing/2014/main" id="{FBEE314C-8AE9-6F58-969F-FAFC64CBA2E6}"/>
+                    </a:ext>
+                  </a:extLst>
+                </p14:cNvPr>
+                <p14:cNvContentPartPr/>
+                <p14:nvPr/>
+              </p14:nvContentPartPr>
+              <p14:xfrm>
+                <a:off x="3662424" y="2668536"/>
+                <a:ext cx="211680" cy="120240"/>
+              </p14:xfrm>
+            </p:contentPart>
+          </mc:Choice>
+          <mc:Fallback>
+            <p:pic>
+              <p:nvPicPr>
+                <p:cNvPr id="17" name="Ink 16">
+                  <a:extLst>
+                    <a:ext uri="{FF2B5EF4-FFF2-40B4-BE49-F238E27FC236}">
+                      <a16:creationId xmlns:a16="http://schemas.microsoft.com/office/drawing/2014/main" id="{FBEE314C-8AE9-6F58-969F-FAFC64CBA2E6}"/>
+                    </a:ext>
+                  </a:extLst>
+                </p:cNvPr>
+                <p:cNvPicPr/>
+                <p:nvPr/>
+              </p:nvPicPr>
+              <p:blipFill>
+                <a:blip r:embed="rId22"/>
+                <a:stretch>
+                  <a:fillRect/>
+                </a:stretch>
+              </p:blipFill>
+              <p:spPr>
+                <a:xfrm>
+                  <a:off x="3616206" y="2617587"/>
+                  <a:ext cx="303654" cy="221629"/>
+                </a:xfrm>
+                <a:prstGeom prst="rect">
+                  <a:avLst/>
+                </a:prstGeom>
+              </p:spPr>
+            </p:pic>
+          </mc:Fallback>
+        </mc:AlternateContent>
+        <mc:AlternateContent xmlns:mc="http://schemas.openxmlformats.org/markup-compatibility/2006">
+          <mc:Choice xmlns:p14="http://schemas.microsoft.com/office/powerpoint/2010/main" Requires="p14">
+            <p:contentPart p14:bwMode="auto" r:id="rId23">
+              <p14:nvContentPartPr>
+                <p14:cNvPr id="18" name="Ink 17">
+                  <a:extLst>
+                    <a:ext uri="{FF2B5EF4-FFF2-40B4-BE49-F238E27FC236}">
+                      <a16:creationId xmlns:a16="http://schemas.microsoft.com/office/drawing/2014/main" id="{2C4FEBDB-FB97-B793-B7C2-1A252482CB31}"/>
+                    </a:ext>
+                  </a:extLst>
+                </p14:cNvPr>
+                <p14:cNvContentPartPr/>
+                <p14:nvPr/>
+              </p14:nvContentPartPr>
+              <p14:xfrm>
+                <a:off x="3946104" y="2781936"/>
+                <a:ext cx="142560" cy="118440"/>
+              </p14:xfrm>
+            </p:contentPart>
+          </mc:Choice>
+          <mc:Fallback>
+            <p:pic>
+              <p:nvPicPr>
+                <p:cNvPr id="18" name="Ink 17">
+                  <a:extLst>
+                    <a:ext uri="{FF2B5EF4-FFF2-40B4-BE49-F238E27FC236}">
+                      <a16:creationId xmlns:a16="http://schemas.microsoft.com/office/drawing/2014/main" id="{2C4FEBDB-FB97-B793-B7C2-1A252482CB31}"/>
+                    </a:ext>
+                  </a:extLst>
+                </p:cNvPr>
+                <p:cNvPicPr/>
+                <p:nvPr/>
+              </p:nvPicPr>
+              <p:blipFill>
+                <a:blip r:embed="rId24"/>
+                <a:stretch>
+                  <a:fillRect/>
+                </a:stretch>
+              </p:blipFill>
+              <p:spPr>
+                <a:xfrm>
+                  <a:off x="3899968" y="2731103"/>
+                  <a:ext cx="234370" cy="219597"/>
+                </a:xfrm>
+                <a:prstGeom prst="rect">
+                  <a:avLst/>
+                </a:prstGeom>
+              </p:spPr>
+            </p:pic>
+          </mc:Fallback>
+        </mc:AlternateContent>
+        <mc:AlternateContent xmlns:mc="http://schemas.openxmlformats.org/markup-compatibility/2006">
+          <mc:Choice xmlns:p14="http://schemas.microsoft.com/office/powerpoint/2010/main" Requires="p14">
+            <p:contentPart p14:bwMode="auto" r:id="rId25">
+              <p14:nvContentPartPr>
+                <p14:cNvPr id="19" name="Ink 18">
+                  <a:extLst>
+                    <a:ext uri="{FF2B5EF4-FFF2-40B4-BE49-F238E27FC236}">
+                      <a16:creationId xmlns:a16="http://schemas.microsoft.com/office/drawing/2014/main" id="{5D86C606-75AF-BE29-30A8-E38980617FED}"/>
+                    </a:ext>
+                  </a:extLst>
+                </p14:cNvPr>
+                <p14:cNvContentPartPr/>
+                <p14:nvPr/>
+              </p14:nvContentPartPr>
+              <p14:xfrm>
+                <a:off x="4166064" y="2741976"/>
+                <a:ext cx="193680" cy="299520"/>
+              </p14:xfrm>
+            </p:contentPart>
+          </mc:Choice>
+          <mc:Fallback>
+            <p:pic>
+              <p:nvPicPr>
+                <p:cNvPr id="19" name="Ink 18">
+                  <a:extLst>
+                    <a:ext uri="{FF2B5EF4-FFF2-40B4-BE49-F238E27FC236}">
+                      <a16:creationId xmlns:a16="http://schemas.microsoft.com/office/drawing/2014/main" id="{5D86C606-75AF-BE29-30A8-E38980617FED}"/>
+                    </a:ext>
+                  </a:extLst>
+                </p:cNvPr>
+                <p:cNvPicPr/>
+                <p:nvPr/>
+              </p:nvPicPr>
+              <p:blipFill>
+                <a:blip r:embed="rId26"/>
+                <a:stretch>
+                  <a:fillRect/>
+                </a:stretch>
+              </p:blipFill>
+              <p:spPr>
+                <a:xfrm>
+                  <a:off x="4119840" y="2690950"/>
+                  <a:ext cx="285666" cy="401061"/>
+                </a:xfrm>
+                <a:prstGeom prst="rect">
+                  <a:avLst/>
+                </a:prstGeom>
+              </p:spPr>
+            </p:pic>
+          </mc:Fallback>
+        </mc:AlternateContent>
+        <mc:AlternateContent xmlns:mc="http://schemas.openxmlformats.org/markup-compatibility/2006">
+          <mc:Choice xmlns:p14="http://schemas.microsoft.com/office/powerpoint/2010/main" Requires="p14">
+            <p:contentPart p14:bwMode="auto" r:id="rId27">
+              <p14:nvContentPartPr>
+                <p14:cNvPr id="20" name="Ink 19">
+                  <a:extLst>
+                    <a:ext uri="{FF2B5EF4-FFF2-40B4-BE49-F238E27FC236}">
+                      <a16:creationId xmlns:a16="http://schemas.microsoft.com/office/drawing/2014/main" id="{1EFD53F2-DDD7-4356-A10B-23FC7E588FF9}"/>
+                    </a:ext>
+                  </a:extLst>
+                </p14:cNvPr>
+                <p14:cNvContentPartPr/>
+                <p14:nvPr/>
+              </p14:nvContentPartPr>
+              <p14:xfrm>
+                <a:off x="4458384" y="2773296"/>
+                <a:ext cx="259560" cy="96840"/>
+              </p14:xfrm>
+            </p:contentPart>
+          </mc:Choice>
+          <mc:Fallback>
+            <p:pic>
+              <p:nvPicPr>
+                <p:cNvPr id="20" name="Ink 19">
+                  <a:extLst>
+                    <a:ext uri="{FF2B5EF4-FFF2-40B4-BE49-F238E27FC236}">
+                      <a16:creationId xmlns:a16="http://schemas.microsoft.com/office/drawing/2014/main" id="{1EFD53F2-DDD7-4356-A10B-23FC7E588FF9}"/>
+                    </a:ext>
+                  </a:extLst>
+                </p:cNvPr>
+                <p:cNvPicPr/>
+                <p:nvPr/>
+              </p:nvPicPr>
+              <p:blipFill>
+                <a:blip r:embed="rId28"/>
+                <a:stretch>
+                  <a:fillRect/>
+                </a:stretch>
+              </p:blipFill>
+              <p:spPr>
+                <a:xfrm>
+                  <a:off x="4412199" y="2722328"/>
+                  <a:ext cx="351468" cy="198267"/>
+                </a:xfrm>
+                <a:prstGeom prst="rect">
+                  <a:avLst/>
+                </a:prstGeom>
+              </p:spPr>
+            </p:pic>
+          </mc:Fallback>
+        </mc:AlternateContent>
+        <mc:AlternateContent xmlns:mc="http://schemas.openxmlformats.org/markup-compatibility/2006">
+          <mc:Choice xmlns:p14="http://schemas.microsoft.com/office/powerpoint/2010/main" Requires="p14">
+            <p:contentPart p14:bwMode="auto" r:id="rId29">
+              <p14:nvContentPartPr>
+                <p14:cNvPr id="21" name="Ink 20">
+                  <a:extLst>
+                    <a:ext uri="{FF2B5EF4-FFF2-40B4-BE49-F238E27FC236}">
+                      <a16:creationId xmlns:a16="http://schemas.microsoft.com/office/drawing/2014/main" id="{7FCC51DD-10D3-8E85-D2E9-A17484007E58}"/>
+                    </a:ext>
+                  </a:extLst>
+                </p14:cNvPr>
+                <p14:cNvContentPartPr/>
+                <p14:nvPr/>
+              </p14:nvContentPartPr>
+              <p14:xfrm>
+                <a:off x="4766184" y="2600136"/>
+                <a:ext cx="165240" cy="233280"/>
+              </p14:xfrm>
+            </p:contentPart>
+          </mc:Choice>
+          <mc:Fallback>
+            <p:pic>
+              <p:nvPicPr>
+                <p:cNvPr id="21" name="Ink 20">
+                  <a:extLst>
+                    <a:ext uri="{FF2B5EF4-FFF2-40B4-BE49-F238E27FC236}">
+                      <a16:creationId xmlns:a16="http://schemas.microsoft.com/office/drawing/2014/main" id="{7FCC51DD-10D3-8E85-D2E9-A17484007E58}"/>
+                    </a:ext>
+                  </a:extLst>
+                </p:cNvPr>
+                <p:cNvPicPr/>
+                <p:nvPr/>
+              </p:nvPicPr>
+              <p:blipFill>
+                <a:blip r:embed="rId30"/>
+                <a:stretch>
+                  <a:fillRect/>
+                </a:stretch>
+              </p:blipFill>
+              <p:spPr>
+                <a:xfrm>
+                  <a:off x="4719898" y="2549202"/>
+                  <a:ext cx="257349" cy="334640"/>
+                </a:xfrm>
+                <a:prstGeom prst="rect">
+                  <a:avLst/>
+                </a:prstGeom>
+              </p:spPr>
+            </p:pic>
+          </mc:Fallback>
+        </mc:AlternateContent>
+        <mc:AlternateContent xmlns:mc="http://schemas.openxmlformats.org/markup-compatibility/2006">
+          <mc:Choice xmlns:p14="http://schemas.microsoft.com/office/powerpoint/2010/main" Requires="p14">
+            <p:contentPart p14:bwMode="auto" r:id="rId31">
+              <p14:nvContentPartPr>
+                <p14:cNvPr id="22" name="Ink 21">
+                  <a:extLst>
+                    <a:ext uri="{FF2B5EF4-FFF2-40B4-BE49-F238E27FC236}">
+                      <a16:creationId xmlns:a16="http://schemas.microsoft.com/office/drawing/2014/main" id="{5FC69005-7820-C6CB-7B99-F3A4DA50C783}"/>
+                    </a:ext>
+                  </a:extLst>
+                </p14:cNvPr>
+                <p14:cNvContentPartPr/>
+                <p14:nvPr/>
+              </p14:nvContentPartPr>
+              <p14:xfrm>
+                <a:off x="4994424" y="2694096"/>
+                <a:ext cx="226440" cy="110880"/>
+              </p14:xfrm>
+            </p:contentPart>
+          </mc:Choice>
+          <mc:Fallback>
+            <p:pic>
+              <p:nvPicPr>
+                <p:cNvPr id="22" name="Ink 21">
+                  <a:extLst>
+                    <a:ext uri="{FF2B5EF4-FFF2-40B4-BE49-F238E27FC236}">
+                      <a16:creationId xmlns:a16="http://schemas.microsoft.com/office/drawing/2014/main" id="{5FC69005-7820-C6CB-7B99-F3A4DA50C783}"/>
+                    </a:ext>
+                  </a:extLst>
+                </p:cNvPr>
+                <p:cNvPicPr/>
+                <p:nvPr/>
+              </p:nvPicPr>
+              <p:blipFill>
+                <a:blip r:embed="rId32"/>
+                <a:stretch>
+                  <a:fillRect/>
+                </a:stretch>
+              </p:blipFill>
+              <p:spPr>
+                <a:xfrm>
+                  <a:off x="4948212" y="2642999"/>
+                  <a:ext cx="318402" cy="212563"/>
+                </a:xfrm>
+                <a:prstGeom prst="rect">
+                  <a:avLst/>
+                </a:prstGeom>
+              </p:spPr>
+            </p:pic>
+          </mc:Fallback>
+        </mc:AlternateContent>
+        <mc:AlternateContent xmlns:mc="http://schemas.openxmlformats.org/markup-compatibility/2006">
+          <mc:Choice xmlns:p14="http://schemas.microsoft.com/office/powerpoint/2010/main" Requires="p14">
+            <p:contentPart p14:bwMode="auto" r:id="rId33">
+              <p14:nvContentPartPr>
+                <p14:cNvPr id="23" name="Ink 22">
+                  <a:extLst>
+                    <a:ext uri="{FF2B5EF4-FFF2-40B4-BE49-F238E27FC236}">
+                      <a16:creationId xmlns:a16="http://schemas.microsoft.com/office/drawing/2014/main" id="{72C1E534-9D69-5BEC-5A13-C4AEA8B94E34}"/>
+                    </a:ext>
+                  </a:extLst>
+                </p14:cNvPr>
+                <p14:cNvContentPartPr/>
+                <p14:nvPr/>
+              </p14:nvContentPartPr>
+              <p14:xfrm>
+                <a:off x="5377824" y="2525256"/>
+                <a:ext cx="187200" cy="267120"/>
+              </p14:xfrm>
+            </p:contentPart>
+          </mc:Choice>
+          <mc:Fallback>
+            <p:pic>
+              <p:nvPicPr>
+                <p:cNvPr id="23" name="Ink 22">
+                  <a:extLst>
+                    <a:ext uri="{FF2B5EF4-FFF2-40B4-BE49-F238E27FC236}">
+                      <a16:creationId xmlns:a16="http://schemas.microsoft.com/office/drawing/2014/main" id="{72C1E534-9D69-5BEC-5A13-C4AEA8B94E34}"/>
+                    </a:ext>
+                  </a:extLst>
+                </p:cNvPr>
+                <p:cNvPicPr/>
+                <p:nvPr/>
+              </p:nvPicPr>
+              <p:blipFill>
+                <a:blip r:embed="rId34"/>
+                <a:stretch>
+                  <a:fillRect/>
+                </a:stretch>
+              </p:blipFill>
+              <p:spPr>
+                <a:xfrm>
+                  <a:off x="5331602" y="2474181"/>
+                  <a:ext cx="279182" cy="368758"/>
+                </a:xfrm>
+                <a:prstGeom prst="rect">
+                  <a:avLst/>
+                </a:prstGeom>
+              </p:spPr>
+            </p:pic>
+          </mc:Fallback>
+        </mc:AlternateContent>
+        <mc:AlternateContent xmlns:mc="http://schemas.openxmlformats.org/markup-compatibility/2006">
+          <mc:Choice xmlns:p14="http://schemas.microsoft.com/office/powerpoint/2010/main" Requires="p14">
+            <p:contentPart p14:bwMode="auto" r:id="rId35">
+              <p14:nvContentPartPr>
+                <p14:cNvPr id="24" name="Ink 23">
+                  <a:extLst>
+                    <a:ext uri="{FF2B5EF4-FFF2-40B4-BE49-F238E27FC236}">
+                      <a16:creationId xmlns:a16="http://schemas.microsoft.com/office/drawing/2014/main" id="{11E4717B-DD80-FC95-4627-5495C12A6CE0}"/>
+                    </a:ext>
+                  </a:extLst>
+                </p14:cNvPr>
+                <p14:cNvContentPartPr/>
+                <p14:nvPr/>
+              </p14:nvContentPartPr>
+              <p14:xfrm>
+                <a:off x="5373864" y="2669616"/>
+                <a:ext cx="143280" cy="27720"/>
+              </p14:xfrm>
+            </p:contentPart>
+          </mc:Choice>
+          <mc:Fallback>
+            <p:pic>
+              <p:nvPicPr>
+                <p:cNvPr id="24" name="Ink 23">
+                  <a:extLst>
+                    <a:ext uri="{FF2B5EF4-FFF2-40B4-BE49-F238E27FC236}">
+                      <a16:creationId xmlns:a16="http://schemas.microsoft.com/office/drawing/2014/main" id="{11E4717B-DD80-FC95-4627-5495C12A6CE0}"/>
+                    </a:ext>
+                  </a:extLst>
+                </p:cNvPr>
+                <p:cNvPicPr/>
+                <p:nvPr/>
+              </p:nvPicPr>
+              <p:blipFill>
+                <a:blip r:embed="rId36"/>
+                <a:stretch>
+                  <a:fillRect/>
+                </a:stretch>
+              </p:blipFill>
+              <p:spPr>
+                <a:xfrm>
+                  <a:off x="5327645" y="2619216"/>
+                  <a:ext cx="235257" cy="128016"/>
+                </a:xfrm>
+                <a:prstGeom prst="rect">
+                  <a:avLst/>
+                </a:prstGeom>
+              </p:spPr>
+            </p:pic>
+          </mc:Fallback>
+        </mc:AlternateContent>
+        <mc:AlternateContent xmlns:mc="http://schemas.openxmlformats.org/markup-compatibility/2006">
+          <mc:Choice xmlns:p14="http://schemas.microsoft.com/office/powerpoint/2010/main" Requires="p14">
+            <p:contentPart p14:bwMode="auto" r:id="rId37">
+              <p14:nvContentPartPr>
+                <p14:cNvPr id="25" name="Ink 24">
+                  <a:extLst>
+                    <a:ext uri="{FF2B5EF4-FFF2-40B4-BE49-F238E27FC236}">
+                      <a16:creationId xmlns:a16="http://schemas.microsoft.com/office/drawing/2014/main" id="{CC0707C4-FBCE-E346-1E8D-1345559ECB86}"/>
+                    </a:ext>
+                  </a:extLst>
+                </p14:cNvPr>
+                <p14:cNvContentPartPr/>
+                <p14:nvPr/>
+              </p14:nvContentPartPr>
+              <p14:xfrm>
+                <a:off x="5643864" y="2674296"/>
+                <a:ext cx="36000" cy="123840"/>
+              </p14:xfrm>
+            </p:contentPart>
+          </mc:Choice>
+          <mc:Fallback>
+            <p:pic>
+              <p:nvPicPr>
+                <p:cNvPr id="25" name="Ink 24">
+                  <a:extLst>
+                    <a:ext uri="{FF2B5EF4-FFF2-40B4-BE49-F238E27FC236}">
+                      <a16:creationId xmlns:a16="http://schemas.microsoft.com/office/drawing/2014/main" id="{CC0707C4-FBCE-E346-1E8D-1345559ECB86}"/>
+                    </a:ext>
+                  </a:extLst>
+                </p:cNvPr>
+                <p:cNvPicPr/>
+                <p:nvPr/>
+              </p:nvPicPr>
+              <p:blipFill>
+                <a:blip r:embed="rId38"/>
+                <a:stretch>
+                  <a:fillRect/>
+                </a:stretch>
+              </p:blipFill>
+              <p:spPr>
+                <a:xfrm>
+                  <a:off x="5597111" y="2623333"/>
+                  <a:ext cx="129039" cy="225256"/>
+                </a:xfrm>
+                <a:prstGeom prst="rect">
+                  <a:avLst/>
+                </a:prstGeom>
+              </p:spPr>
+            </p:pic>
+          </mc:Fallback>
+        </mc:AlternateContent>
+        <mc:AlternateContent xmlns:mc="http://schemas.openxmlformats.org/markup-compatibility/2006">
+          <mc:Choice xmlns:p14="http://schemas.microsoft.com/office/powerpoint/2010/main" Requires="p14">
+            <p:contentPart p14:bwMode="auto" r:id="rId39">
+              <p14:nvContentPartPr>
+                <p14:cNvPr id="26" name="Ink 25">
+                  <a:extLst>
+                    <a:ext uri="{FF2B5EF4-FFF2-40B4-BE49-F238E27FC236}">
+                      <a16:creationId xmlns:a16="http://schemas.microsoft.com/office/drawing/2014/main" id="{554F6E30-9437-BA70-5856-874FF764244D}"/>
+                    </a:ext>
+                  </a:extLst>
+                </p14:cNvPr>
+                <p14:cNvContentPartPr/>
+                <p14:nvPr/>
+              </p14:nvContentPartPr>
+              <p14:xfrm>
+                <a:off x="5679504" y="2555496"/>
+                <a:ext cx="3240" cy="6480"/>
+              </p14:xfrm>
+            </p:contentPart>
+          </mc:Choice>
+          <mc:Fallback>
+            <p:pic>
+              <p:nvPicPr>
+                <p:cNvPr id="26" name="Ink 25">
+                  <a:extLst>
+                    <a:ext uri="{FF2B5EF4-FFF2-40B4-BE49-F238E27FC236}">
+                      <a16:creationId xmlns:a16="http://schemas.microsoft.com/office/drawing/2014/main" id="{554F6E30-9437-BA70-5856-874FF764244D}"/>
+                    </a:ext>
+                  </a:extLst>
+                </p:cNvPr>
+                <p:cNvPicPr/>
+                <p:nvPr/>
+              </p:nvPicPr>
+              <p:blipFill>
+                <a:blip r:embed="rId40"/>
+                <a:stretch>
+                  <a:fillRect/>
+                </a:stretch>
+              </p:blipFill>
+              <p:spPr>
+                <a:xfrm>
+                  <a:off x="5639004" y="2505650"/>
+                  <a:ext cx="83835" cy="105674"/>
+                </a:xfrm>
+                <a:prstGeom prst="rect">
+                  <a:avLst/>
+                </a:prstGeom>
+              </p:spPr>
+            </p:pic>
+          </mc:Fallback>
+        </mc:AlternateContent>
+        <mc:AlternateContent xmlns:mc="http://schemas.openxmlformats.org/markup-compatibility/2006">
+          <mc:Choice xmlns:p14="http://schemas.microsoft.com/office/powerpoint/2010/main" Requires="p14">
+            <p:contentPart p14:bwMode="auto" r:id="rId41">
+              <p14:nvContentPartPr>
+                <p14:cNvPr id="27" name="Ink 26">
+                  <a:extLst>
+                    <a:ext uri="{FF2B5EF4-FFF2-40B4-BE49-F238E27FC236}">
+                      <a16:creationId xmlns:a16="http://schemas.microsoft.com/office/drawing/2014/main" id="{407EF05E-EACC-B3BE-1B8D-2AF32208EFFF}"/>
+                    </a:ext>
+                  </a:extLst>
+                </p14:cNvPr>
+                <p14:cNvContentPartPr/>
+                <p14:nvPr/>
+              </p14:nvContentPartPr>
+              <p14:xfrm>
+                <a:off x="5795064" y="2633976"/>
+                <a:ext cx="201240" cy="128160"/>
+              </p14:xfrm>
+            </p:contentPart>
+          </mc:Choice>
+          <mc:Fallback>
+            <p:pic>
+              <p:nvPicPr>
+                <p:cNvPr id="27" name="Ink 26">
+                  <a:extLst>
+                    <a:ext uri="{FF2B5EF4-FFF2-40B4-BE49-F238E27FC236}">
+                      <a16:creationId xmlns:a16="http://schemas.microsoft.com/office/drawing/2014/main" id="{407EF05E-EACC-B3BE-1B8D-2AF32208EFFF}"/>
+                    </a:ext>
+                  </a:extLst>
+                </p:cNvPr>
+                <p:cNvPicPr/>
+                <p:nvPr/>
+              </p:nvPicPr>
+              <p:blipFill>
+                <a:blip r:embed="rId42"/>
+                <a:stretch>
+                  <a:fillRect/>
+                </a:stretch>
+              </p:blipFill>
+              <p:spPr>
+                <a:xfrm>
+                  <a:off x="5748802" y="2582916"/>
+                  <a:ext cx="293302" cy="229769"/>
+                </a:xfrm>
+                <a:prstGeom prst="rect">
+                  <a:avLst/>
+                </a:prstGeom>
+              </p:spPr>
+            </p:pic>
+          </mc:Fallback>
+        </mc:AlternateContent>
+        <mc:AlternateContent xmlns:mc="http://schemas.openxmlformats.org/markup-compatibility/2006">
+          <mc:Choice xmlns:p14="http://schemas.microsoft.com/office/powerpoint/2010/main" Requires="p14">
+            <p:contentPart p14:bwMode="auto" r:id="rId43">
+              <p14:nvContentPartPr>
+                <p14:cNvPr id="28" name="Ink 27">
+                  <a:extLst>
+                    <a:ext uri="{FF2B5EF4-FFF2-40B4-BE49-F238E27FC236}">
+                      <a16:creationId xmlns:a16="http://schemas.microsoft.com/office/drawing/2014/main" id="{65976DD9-9399-EC93-9CBF-D88038B6C188}"/>
+                    </a:ext>
+                  </a:extLst>
+                </p14:cNvPr>
+                <p14:cNvContentPartPr/>
+                <p14:nvPr/>
+              </p14:nvContentPartPr>
+              <p14:xfrm>
+                <a:off x="6093864" y="2629296"/>
+                <a:ext cx="155520" cy="119160"/>
+              </p14:xfrm>
+            </p:contentPart>
+          </mc:Choice>
+          <mc:Fallback>
+            <p:pic>
+              <p:nvPicPr>
+                <p:cNvPr id="28" name="Ink 27">
+                  <a:extLst>
+                    <a:ext uri="{FF2B5EF4-FFF2-40B4-BE49-F238E27FC236}">
+                      <a16:creationId xmlns:a16="http://schemas.microsoft.com/office/drawing/2014/main" id="{65976DD9-9399-EC93-9CBF-D88038B6C188}"/>
+                    </a:ext>
+                  </a:extLst>
+                </p:cNvPr>
+                <p:cNvPicPr/>
+                <p:nvPr/>
+              </p:nvPicPr>
+              <p:blipFill>
+                <a:blip r:embed="rId44"/>
+                <a:stretch>
+                  <a:fillRect/>
+                </a:stretch>
+              </p:blipFill>
+              <p:spPr>
+                <a:xfrm>
+                  <a:off x="6047716" y="2578373"/>
+                  <a:ext cx="247355" cy="220497"/>
+                </a:xfrm>
+                <a:prstGeom prst="rect">
+                  <a:avLst/>
+                </a:prstGeom>
+              </p:spPr>
+            </p:pic>
+          </mc:Fallback>
+        </mc:AlternateContent>
+        <mc:AlternateContent xmlns:mc="http://schemas.openxmlformats.org/markup-compatibility/2006">
+          <mc:Choice xmlns:p14="http://schemas.microsoft.com/office/powerpoint/2010/main" Requires="p14">
+            <p:contentPart p14:bwMode="auto" r:id="rId45">
+              <p14:nvContentPartPr>
+                <p14:cNvPr id="29" name="Ink 28">
+                  <a:extLst>
+                    <a:ext uri="{FF2B5EF4-FFF2-40B4-BE49-F238E27FC236}">
+                      <a16:creationId xmlns:a16="http://schemas.microsoft.com/office/drawing/2014/main" id="{31BD1AE0-8DAC-735C-1558-7D5387C5FA39}"/>
+                    </a:ext>
+                  </a:extLst>
+                </p14:cNvPr>
+                <p14:cNvContentPartPr/>
+                <p14:nvPr/>
+              </p14:nvContentPartPr>
+              <p14:xfrm>
+                <a:off x="5669424" y="2560896"/>
+                <a:ext cx="28800" cy="24120"/>
+              </p14:xfrm>
+            </p:contentPart>
+          </mc:Choice>
+          <mc:Fallback>
+            <p:pic>
+              <p:nvPicPr>
+                <p:cNvPr id="29" name="Ink 28">
+                  <a:extLst>
+                    <a:ext uri="{FF2B5EF4-FFF2-40B4-BE49-F238E27FC236}">
+                      <a16:creationId xmlns:a16="http://schemas.microsoft.com/office/drawing/2014/main" id="{31BD1AE0-8DAC-735C-1558-7D5387C5FA39}"/>
+                    </a:ext>
+                  </a:extLst>
+                </p:cNvPr>
+                <p:cNvPicPr/>
+                <p:nvPr/>
+              </p:nvPicPr>
+              <p:blipFill>
+                <a:blip r:embed="rId46"/>
+                <a:stretch>
+                  <a:fillRect/>
+                </a:stretch>
+              </p:blipFill>
+              <p:spPr>
+                <a:xfrm>
+                  <a:off x="5623710" y="2510646"/>
+                  <a:ext cx="119771" cy="124118"/>
+                </a:xfrm>
+                <a:prstGeom prst="rect">
+                  <a:avLst/>
+                </a:prstGeom>
+              </p:spPr>
+            </p:pic>
+          </mc:Fallback>
+        </mc:AlternateContent>
+      </p:grpSp>
+      <p:sp>
+        <p:nvSpPr>
+          <p:cNvPr id="13" name="TextBox 12">
+            <a:extLst>
+              <a:ext uri="{FF2B5EF4-FFF2-40B4-BE49-F238E27FC236}">
+                <a16:creationId xmlns:a16="http://schemas.microsoft.com/office/drawing/2014/main" id="{5F4FF287-56EE-FE0C-3CAB-E166D592331A}"/>
+              </a:ext>
+            </a:extLst>
+          </p:cNvPr>
+          <p:cNvSpPr txBox="1"/>
+          <p:nvPr/>
+        </p:nvSpPr>
+        <p:spPr>
+          <a:xfrm>
+            <a:off x="73151" y="485847"/>
+            <a:ext cx="11582093" cy="2677656"/>
+          </a:xfrm>
+          <a:prstGeom prst="rect">
+            <a:avLst/>
+          </a:prstGeom>
+          <a:noFill/>
+        </p:spPr>
+        <p:txBody>
+          <a:bodyPr wrap="square">
+            <a:spAutoFit/>
+          </a:bodyPr>
+          <a:lstStyle/>
+          <a:p>
+            <a:pPr marL="0" indent="0">
+              <a:buNone/>
+            </a:pPr>
+            <a:r>
+              <a:rPr lang="en-US" sz="2400" b="1" dirty="0">
+                <a:solidFill>
+                  <a:schemeClr val="accent6">
+                    <a:lumMod val="60000"/>
+                    <a:lumOff val="40000"/>
+                  </a:schemeClr>
+                </a:solidFill>
+              </a:rPr>
+              <a:t>Why sampling ?</a:t>
+            </a:r>
+            <a:r>
+              <a:rPr lang="en-US" sz="2400" dirty="0">
+                <a:solidFill>
+                  <a:schemeClr val="accent6">
+                    <a:lumMod val="60000"/>
+                    <a:lumOff val="40000"/>
+                  </a:schemeClr>
+                </a:solidFill>
+              </a:rPr>
+              <a:t> </a:t>
+            </a:r>
+          </a:p>
+          <a:p>
+            <a:pPr marL="0" indent="0">
+              <a:buNone/>
+            </a:pPr>
+            <a:r>
+              <a:rPr lang="en-US" sz="2400" dirty="0">
+                <a:solidFill>
+                  <a:schemeClr val="accent6">
+                    <a:lumMod val="60000"/>
+                    <a:lumOff val="40000"/>
+                  </a:schemeClr>
+                </a:solidFill>
+              </a:rPr>
+              <a:t>Because collecting data from the entire population is usually </a:t>
+            </a:r>
+            <a:r>
+              <a:rPr lang="en-US" sz="2400" b="1" dirty="0">
+                <a:solidFill>
+                  <a:schemeClr val="accent6">
+                    <a:lumMod val="60000"/>
+                    <a:lumOff val="40000"/>
+                  </a:schemeClr>
+                </a:solidFill>
+              </a:rPr>
+              <a:t>impractical or expensive</a:t>
+            </a:r>
+            <a:r>
+              <a:rPr lang="en-US" sz="2400" dirty="0">
+                <a:solidFill>
+                  <a:schemeClr val="accent6">
+                    <a:lumMod val="60000"/>
+                    <a:lumOff val="40000"/>
+                  </a:schemeClr>
+                </a:solidFill>
+              </a:rPr>
+              <a:t>, we rely on </a:t>
+            </a:r>
+            <a:r>
+              <a:rPr lang="en-US" sz="2400" b="1" dirty="0">
+                <a:solidFill>
+                  <a:schemeClr val="accent6">
+                    <a:lumMod val="60000"/>
+                    <a:lumOff val="40000"/>
+                  </a:schemeClr>
+                </a:solidFill>
+              </a:rPr>
+              <a:t>samples</a:t>
+            </a:r>
+            <a:r>
+              <a:rPr lang="en-US" sz="2400" dirty="0">
+                <a:solidFill>
+                  <a:schemeClr val="accent6">
+                    <a:lumMod val="60000"/>
+                    <a:lumOff val="40000"/>
+                  </a:schemeClr>
+                </a:solidFill>
+              </a:rPr>
+              <a:t>. </a:t>
+            </a:r>
+          </a:p>
+          <a:p>
+            <a:pPr marL="0" indent="0">
+              <a:buNone/>
+            </a:pPr>
+            <a:r>
+              <a:rPr lang="en-US" sz="2400" b="1" dirty="0">
+                <a:solidFill>
+                  <a:schemeClr val="accent6">
+                    <a:lumMod val="60000"/>
+                    <a:lumOff val="40000"/>
+                  </a:schemeClr>
+                </a:solidFill>
+              </a:rPr>
+              <a:t>For example,</a:t>
+            </a:r>
+            <a:r>
+              <a:rPr lang="en-US" sz="2400" dirty="0">
+                <a:solidFill>
+                  <a:schemeClr val="accent6">
+                    <a:lumMod val="60000"/>
+                    <a:lumOff val="40000"/>
+                  </a:schemeClr>
+                </a:solidFill>
+              </a:rPr>
+              <a:t> suppose a </a:t>
+            </a:r>
+            <a:r>
+              <a:rPr lang="en-US" sz="2400" b="1" dirty="0">
+                <a:solidFill>
+                  <a:schemeClr val="accent6">
+                    <a:lumMod val="60000"/>
+                    <a:lumOff val="40000"/>
+                  </a:schemeClr>
+                </a:solidFill>
+              </a:rPr>
+              <a:t>drug manufacturer</a:t>
+            </a:r>
+            <a:r>
+              <a:rPr lang="en-US" sz="2400" dirty="0">
+                <a:solidFill>
+                  <a:schemeClr val="accent6">
+                    <a:lumMod val="60000"/>
+                    <a:lumOff val="40000"/>
+                  </a:schemeClr>
+                </a:solidFill>
+              </a:rPr>
+              <a:t> would like to research the adverse side effects of a drug on the country’s population. In that case, it is almost impossible to conduct a research study that involves everyone. In this case, the manufacturer decides on a sample of people from each demographic and then researches side effects of drugs.</a:t>
+            </a:r>
+          </a:p>
+        </p:txBody>
+      </p:sp>
+    </p:spTree>
+    <p:extLst>
+      <p:ext uri="{BB962C8B-B14F-4D97-AF65-F5344CB8AC3E}">
+        <p14:creationId xmlns:p14="http://schemas.microsoft.com/office/powerpoint/2010/main" val="1024295274"/>
+      </p:ext>
+    </p:extLst>
+  </p:cSld>
+  <p:clrMapOvr>
+    <a:masterClrMapping/>
+  </p:clrMapOvr>
+</p:sld>
+</file>
+
+<file path=ppt/slides/slide4.xml><?xml version="1.0" encoding="utf-8"?>
+<p:sld xmlns:a="http://schemas.openxmlformats.org/drawingml/2006/main" xmlns:r="http://schemas.openxmlformats.org/officeDocument/2006/relationships" xmlns:p="http://schemas.openxmlformats.org/presentationml/2006/main">
+  <p:cSld>
+    <p:spTree>
+      <p:nvGrpSpPr>
+        <p:cNvPr id="1" name="">
+          <a:extLst>
+            <a:ext uri="{FF2B5EF4-FFF2-40B4-BE49-F238E27FC236}">
               <a16:creationId xmlns:a16="http://schemas.microsoft.com/office/drawing/2014/main" id="{361038AC-2614-06A0-6DBD-B0FC5B370E60}"/>
             </a:ext>
           </a:extLst>
@@ -12900,7 +17749,7 @@
         </p:nvSpPr>
         <p:spPr>
           <a:xfrm>
-            <a:off x="838200" y="365125"/>
+            <a:off x="838200" y="301117"/>
             <a:ext cx="10515600" cy="805307"/>
           </a:xfrm>
         </p:spPr>
@@ -12957,7 +17806,40 @@
                   </a:schemeClr>
                 </a:solidFill>
               </a:rPr>
-              <a:t>In 1936, The Literary Digest magazine mailed out 10 million surveys to predict who would win the Presidential election — and they were wrong.</a:t>
+              <a:t>In 1936, The Literary Digest magazine </a:t>
+            </a:r>
+            <a:r>
+              <a:rPr lang="en-US" sz="2400" b="1" dirty="0">
+                <a:solidFill>
+                  <a:schemeClr val="accent6">
+                    <a:lumMod val="60000"/>
+                    <a:lumOff val="40000"/>
+                  </a:schemeClr>
+                </a:solidFill>
+              </a:rPr>
+              <a:t>mailed out 10 million surveys to predict</a:t>
+            </a:r>
+            <a:r>
+              <a:rPr lang="en-US" sz="2400" dirty="0">
+                <a:solidFill>
+                  <a:schemeClr val="accent6">
+                    <a:lumMod val="60000"/>
+                    <a:lumOff val="40000"/>
+                  </a:schemeClr>
+                </a:solidFill>
+              </a:rPr>
+              <a:t> who would win the Presidential election — and </a:t>
+            </a:r>
+            <a:r>
+              <a:rPr lang="en-US" sz="2400" b="1" dirty="0">
+                <a:solidFill>
+                  <a:schemeClr val="accent6">
+                    <a:lumMod val="60000"/>
+                    <a:lumOff val="40000"/>
+                  </a:schemeClr>
+                </a:solidFill>
+              </a:rPr>
+              <a:t>they were wrong.</a:t>
             </a:r>
           </a:p>
           <a:p>
@@ -13023,7 +17905,7 @@
               <a:buNone/>
             </a:pPr>
             <a:r>
-              <a:rPr lang="en-US" sz="2400" dirty="0">
+              <a:rPr lang="en-US" sz="2400" b="1" dirty="0">
                 <a:solidFill>
                   <a:schemeClr val="accent6">
                     <a:lumMod val="60000"/>
@@ -13047,7 +17929,40 @@
                   </a:schemeClr>
                 </a:solidFill>
               </a:rPr>
-              <a:t>Because the magazine sent surveys only to people who had cars, telephones, or magazine subscriptions — mostly wealthier Citizens — and ignored poorer voters.</a:t>
+              <a:t>Because the magazine </a:t>
+            </a:r>
+            <a:r>
+              <a:rPr lang="en-US" sz="2400" b="1" dirty="0">
+                <a:solidFill>
+                  <a:schemeClr val="accent6">
+                    <a:lumMod val="60000"/>
+                    <a:lumOff val="40000"/>
+                  </a:schemeClr>
+                </a:solidFill>
+              </a:rPr>
+              <a:t>sent surveys only to people who had cars, telephones, or magazine subscriptions</a:t>
+            </a:r>
+            <a:r>
+              <a:rPr lang="en-US" sz="2400" dirty="0">
+                <a:solidFill>
+                  <a:schemeClr val="accent6">
+                    <a:lumMod val="60000"/>
+                    <a:lumOff val="40000"/>
+                  </a:schemeClr>
+                </a:solidFill>
+              </a:rPr>
+              <a:t> — mostly wealthier Citizens — and </a:t>
+            </a:r>
+            <a:r>
+              <a:rPr lang="en-US" sz="2400" b="1" dirty="0">
+                <a:solidFill>
+                  <a:schemeClr val="accent6">
+                    <a:lumMod val="60000"/>
+                    <a:lumOff val="40000"/>
+                  </a:schemeClr>
+                </a:solidFill>
+              </a:rPr>
+              <a:t>ignored poorer voters.</a:t>
             </a:r>
           </a:p>
           <a:p>
@@ -13076,7 +17991,18 @@
                   </a:schemeClr>
                 </a:solidFill>
               </a:rPr>
-              <a:t>So even with millions of responses, the sample was biased.</a:t>
+              <a:t>So even with millions of responses, </a:t>
+            </a:r>
+            <a:r>
+              <a:rPr lang="en-US" sz="2400" b="1" dirty="0">
+                <a:solidFill>
+                  <a:schemeClr val="accent6">
+                    <a:lumMod val="60000"/>
+                    <a:lumOff val="40000"/>
+                  </a:schemeClr>
+                </a:solidFill>
+              </a:rPr>
+              <a:t>the sample was biased.</a:t>
             </a:r>
           </a:p>
         </p:txBody>
@@ -13094,7 +18020,7 @@
 </p:sld>
 </file>
 
-<file path=ppt/slides/slide4.xml><?xml version="1.0" encoding="utf-8"?>
+<file path=ppt/slides/slide5.xml><?xml version="1.0" encoding="utf-8"?>
 <p:sld xmlns:a="http://schemas.openxmlformats.org/drawingml/2006/main" xmlns:r="http://schemas.openxmlformats.org/officeDocument/2006/relationships" xmlns:p="http://schemas.openxmlformats.org/presentationml/2006/main">
   <p:cSld>
     <p:spTree>
@@ -14334,8 +19260,8 @@
           </p:txBody>
         </p:sp>
       </p:grpSp>
-      <mc:AlternateContent xmlns:mc="http://schemas.openxmlformats.org/markup-compatibility/2006">
-        <mc:Choice xmlns:p14="http://schemas.microsoft.com/office/powerpoint/2010/main" Requires="p14">
+      <mc:AlternateContent xmlns:mc="http://schemas.openxmlformats.org/markup-compatibility/2006" xmlns:p14="http://schemas.microsoft.com/office/powerpoint/2010/main">
+        <mc:Choice Requires="p14">
           <p:contentPart p14:bwMode="auto" r:id="rId7">
             <p14:nvContentPartPr>
               <p14:cNvPr id="28" name="Ink 27">
@@ -14354,7 +19280,7 @@
             </p14:xfrm>
           </p:contentPart>
         </mc:Choice>
-        <mc:Fallback>
+        <mc:Fallback xmlns="">
           <p:pic>
             <p:nvPicPr>
               <p:cNvPr id="28" name="Ink 27">
@@ -14405,8 +19331,8 @@
             <a:chExt cx="3924360" cy="1035000"/>
           </a:xfrm>
         </p:grpSpPr>
-        <mc:AlternateContent xmlns:mc="http://schemas.openxmlformats.org/markup-compatibility/2006">
-          <mc:Choice xmlns:p14="http://schemas.microsoft.com/office/powerpoint/2010/main" Requires="p14">
+        <mc:AlternateContent xmlns:mc="http://schemas.openxmlformats.org/markup-compatibility/2006" xmlns:p14="http://schemas.microsoft.com/office/powerpoint/2010/main">
+          <mc:Choice Requires="p14">
             <p:contentPart p14:bwMode="auto" r:id="rId9">
               <p14:nvContentPartPr>
                 <p14:cNvPr id="47" name="Ink 46">
@@ -14425,7 +19351,7 @@
               </p14:xfrm>
             </p:contentPart>
           </mc:Choice>
-          <mc:Fallback>
+          <mc:Fallback xmlns="">
             <p:pic>
               <p:nvPicPr>
                 <p:cNvPr id="47" name="Ink 46">
@@ -14456,8 +19382,8 @@
             </p:pic>
           </mc:Fallback>
         </mc:AlternateContent>
-        <mc:AlternateContent xmlns:mc="http://schemas.openxmlformats.org/markup-compatibility/2006">
-          <mc:Choice xmlns:p14="http://schemas.microsoft.com/office/powerpoint/2010/main" Requires="p14">
+        <mc:AlternateContent xmlns:mc="http://schemas.openxmlformats.org/markup-compatibility/2006" xmlns:p14="http://schemas.microsoft.com/office/powerpoint/2010/main">
+          <mc:Choice Requires="p14">
             <p:contentPart p14:bwMode="auto" r:id="rId11">
               <p14:nvContentPartPr>
                 <p14:cNvPr id="48" name="Ink 47">
@@ -14476,7 +19402,7 @@
               </p14:xfrm>
             </p:contentPart>
           </mc:Choice>
-          <mc:Fallback>
+          <mc:Fallback xmlns="">
             <p:pic>
               <p:nvPicPr>
                 <p:cNvPr id="48" name="Ink 47">
@@ -14507,8 +19433,8 @@
             </p:pic>
           </mc:Fallback>
         </mc:AlternateContent>
-        <mc:AlternateContent xmlns:mc="http://schemas.openxmlformats.org/markup-compatibility/2006">
-          <mc:Choice xmlns:p14="http://schemas.microsoft.com/office/powerpoint/2010/main" Requires="p14">
+        <mc:AlternateContent xmlns:mc="http://schemas.openxmlformats.org/markup-compatibility/2006" xmlns:p14="http://schemas.microsoft.com/office/powerpoint/2010/main">
+          <mc:Choice Requires="p14">
             <p:contentPart p14:bwMode="auto" r:id="rId13">
               <p14:nvContentPartPr>
                 <p14:cNvPr id="49" name="Ink 48">
@@ -14527,7 +19453,7 @@
               </p14:xfrm>
             </p:contentPart>
           </mc:Choice>
-          <mc:Fallback>
+          <mc:Fallback xmlns="">
             <p:pic>
               <p:nvPicPr>
                 <p:cNvPr id="49" name="Ink 48">
@@ -14558,8 +19484,8 @@
             </p:pic>
           </mc:Fallback>
         </mc:AlternateContent>
-        <mc:AlternateContent xmlns:mc="http://schemas.openxmlformats.org/markup-compatibility/2006">
-          <mc:Choice xmlns:p14="http://schemas.microsoft.com/office/powerpoint/2010/main" Requires="p14">
+        <mc:AlternateContent xmlns:mc="http://schemas.openxmlformats.org/markup-compatibility/2006" xmlns:p14="http://schemas.microsoft.com/office/powerpoint/2010/main">
+          <mc:Choice Requires="p14">
             <p:contentPart p14:bwMode="auto" r:id="rId15">
               <p14:nvContentPartPr>
                 <p14:cNvPr id="50" name="Ink 49">
@@ -14578,7 +19504,7 @@
               </p14:xfrm>
             </p:contentPart>
           </mc:Choice>
-          <mc:Fallback>
+          <mc:Fallback xmlns="">
             <p:pic>
               <p:nvPicPr>
                 <p:cNvPr id="50" name="Ink 49">
@@ -14630,8 +19556,8 @@
             <a:chExt cx="3966120" cy="802080"/>
           </a:xfrm>
         </p:grpSpPr>
-        <mc:AlternateContent xmlns:mc="http://schemas.openxmlformats.org/markup-compatibility/2006">
-          <mc:Choice xmlns:p14="http://schemas.microsoft.com/office/powerpoint/2010/main" Requires="p14">
+        <mc:AlternateContent xmlns:mc="http://schemas.openxmlformats.org/markup-compatibility/2006" xmlns:p14="http://schemas.microsoft.com/office/powerpoint/2010/main">
+          <mc:Choice Requires="p14">
             <p:contentPart p14:bwMode="auto" r:id="rId17">
               <p14:nvContentPartPr>
                 <p14:cNvPr id="52" name="Ink 51">
@@ -14650,7 +19576,7 @@
               </p14:xfrm>
             </p:contentPart>
           </mc:Choice>
-          <mc:Fallback>
+          <mc:Fallback xmlns="">
             <p:pic>
               <p:nvPicPr>
                 <p:cNvPr id="52" name="Ink 51">
@@ -14681,8 +19607,8 @@
             </p:pic>
           </mc:Fallback>
         </mc:AlternateContent>
-        <mc:AlternateContent xmlns:mc="http://schemas.openxmlformats.org/markup-compatibility/2006">
-          <mc:Choice xmlns:p14="http://schemas.microsoft.com/office/powerpoint/2010/main" Requires="p14">
+        <mc:AlternateContent xmlns:mc="http://schemas.openxmlformats.org/markup-compatibility/2006" xmlns:p14="http://schemas.microsoft.com/office/powerpoint/2010/main">
+          <mc:Choice Requires="p14">
             <p:contentPart p14:bwMode="auto" r:id="rId19">
               <p14:nvContentPartPr>
                 <p14:cNvPr id="53" name="Ink 52">
@@ -14701,7 +19627,7 @@
               </p14:xfrm>
             </p:contentPart>
           </mc:Choice>
-          <mc:Fallback>
+          <mc:Fallback xmlns="">
             <p:pic>
               <p:nvPicPr>
                 <p:cNvPr id="53" name="Ink 52">
@@ -14732,8 +19658,8 @@
             </p:pic>
           </mc:Fallback>
         </mc:AlternateContent>
-        <mc:AlternateContent xmlns:mc="http://schemas.openxmlformats.org/markup-compatibility/2006">
-          <mc:Choice xmlns:p14="http://schemas.microsoft.com/office/powerpoint/2010/main" Requires="p14">
+        <mc:AlternateContent xmlns:mc="http://schemas.openxmlformats.org/markup-compatibility/2006" xmlns:p14="http://schemas.microsoft.com/office/powerpoint/2010/main">
+          <mc:Choice Requires="p14">
             <p:contentPart p14:bwMode="auto" r:id="rId21">
               <p14:nvContentPartPr>
                 <p14:cNvPr id="54" name="Ink 53">
@@ -14752,7 +19678,7 @@
               </p14:xfrm>
             </p:contentPart>
           </mc:Choice>
-          <mc:Fallback>
+          <mc:Fallback xmlns="">
             <p:pic>
               <p:nvPicPr>
                 <p:cNvPr id="54" name="Ink 53">
@@ -14783,8 +19709,8 @@
             </p:pic>
           </mc:Fallback>
         </mc:AlternateContent>
-        <mc:AlternateContent xmlns:mc="http://schemas.openxmlformats.org/markup-compatibility/2006">
-          <mc:Choice xmlns:p14="http://schemas.microsoft.com/office/powerpoint/2010/main" Requires="p14">
+        <mc:AlternateContent xmlns:mc="http://schemas.openxmlformats.org/markup-compatibility/2006" xmlns:p14="http://schemas.microsoft.com/office/powerpoint/2010/main">
+          <mc:Choice Requires="p14">
             <p:contentPart p14:bwMode="auto" r:id="rId23">
               <p14:nvContentPartPr>
                 <p14:cNvPr id="55" name="Ink 54">
@@ -14803,7 +19729,7 @@
               </p14:xfrm>
             </p:contentPart>
           </mc:Choice>
-          <mc:Fallback>
+          <mc:Fallback xmlns="">
             <p:pic>
               <p:nvPicPr>
                 <p:cNvPr id="55" name="Ink 54">
@@ -14835,8 +19761,8 @@
           </mc:Fallback>
         </mc:AlternateContent>
       </p:grpSp>
-      <mc:AlternateContent xmlns:mc="http://schemas.openxmlformats.org/markup-compatibility/2006">
-        <mc:Choice xmlns:p14="http://schemas.microsoft.com/office/powerpoint/2010/main" Requires="p14">
+      <mc:AlternateContent xmlns:mc="http://schemas.openxmlformats.org/markup-compatibility/2006" xmlns:p14="http://schemas.microsoft.com/office/powerpoint/2010/main">
+        <mc:Choice Requires="p14">
           <p:contentPart p14:bwMode="auto" r:id="rId25">
             <p14:nvContentPartPr>
               <p14:cNvPr id="57" name="Ink 56">
@@ -14855,7 +19781,7 @@
             </p14:xfrm>
           </p:contentPart>
         </mc:Choice>
-        <mc:Fallback>
+        <mc:Fallback xmlns="">
           <p:pic>
             <p:nvPicPr>
               <p:cNvPr id="57" name="Ink 56">
@@ -14886,8 +19812,8 @@
           </p:pic>
         </mc:Fallback>
       </mc:AlternateContent>
-      <mc:AlternateContent xmlns:mc="http://schemas.openxmlformats.org/markup-compatibility/2006">
-        <mc:Choice xmlns:p14="http://schemas.microsoft.com/office/powerpoint/2010/main" Requires="p14">
+      <mc:AlternateContent xmlns:mc="http://schemas.openxmlformats.org/markup-compatibility/2006" xmlns:p14="http://schemas.microsoft.com/office/powerpoint/2010/main">
+        <mc:Choice Requires="p14">
           <p:contentPart p14:bwMode="auto" r:id="rId27">
             <p14:nvContentPartPr>
               <p14:cNvPr id="58" name="Ink 57">
@@ -14906,7 +19832,7 @@
             </p14:xfrm>
           </p:contentPart>
         </mc:Choice>
-        <mc:Fallback>
+        <mc:Fallback xmlns="">
           <p:pic>
             <p:nvPicPr>
               <p:cNvPr id="58" name="Ink 57">
@@ -14937,8 +19863,8 @@
           </p:pic>
         </mc:Fallback>
       </mc:AlternateContent>
-      <mc:AlternateContent xmlns:mc="http://schemas.openxmlformats.org/markup-compatibility/2006">
-        <mc:Choice xmlns:p14="http://schemas.microsoft.com/office/powerpoint/2010/main" Requires="p14">
+      <mc:AlternateContent xmlns:mc="http://schemas.openxmlformats.org/markup-compatibility/2006" xmlns:p14="http://schemas.microsoft.com/office/powerpoint/2010/main">
+        <mc:Choice Requires="p14">
           <p:contentPart p14:bwMode="auto" r:id="rId29">
             <p14:nvContentPartPr>
               <p14:cNvPr id="59" name="Ink 58">
@@ -14957,7 +19883,7 @@
             </p14:xfrm>
           </p:contentPart>
         </mc:Choice>
-        <mc:Fallback>
+        <mc:Fallback xmlns="">
           <p:pic>
             <p:nvPicPr>
               <p:cNvPr id="59" name="Ink 58">
@@ -15001,7 +19927,7 @@
 </p:sld>
 </file>
 
-<file path=ppt/slides/slide5.xml><?xml version="1.0" encoding="utf-8"?>
+<file path=ppt/slides/slide6.xml><?xml version="1.0" encoding="utf-8"?>
 <p:sld xmlns:a="http://schemas.openxmlformats.org/drawingml/2006/main" xmlns:r="http://schemas.openxmlformats.org/officeDocument/2006/relationships" xmlns:p="http://schemas.openxmlformats.org/presentationml/2006/main">
   <p:cSld>
     <p:spTree>
@@ -15101,8 +20027,13 @@
                   </a:schemeClr>
                 </a:solidFill>
               </a:rPr>
-              <a:t>Simple Random Sampling:   </a:t>
+              <a:t>Simple Random Sampling:</a:t>
             </a:r>
+          </a:p>
+          <a:p>
+            <a:pPr>
+              <a:buNone/>
+            </a:pPr>
             <a:r>
               <a:rPr lang="en-US" sz="2400" dirty="0">
                 <a:solidFill>
@@ -15183,7 +20114,7 @@
 </p:sld>
 </file>
 
-<file path=ppt/slides/slide6.xml><?xml version="1.0" encoding="utf-8"?>
+<file path=ppt/slides/slide7.xml><?xml version="1.0" encoding="utf-8"?>
 <p:sld xmlns:a="http://schemas.openxmlformats.org/drawingml/2006/main" xmlns:r="http://schemas.openxmlformats.org/officeDocument/2006/relationships" xmlns:p="http://schemas.openxmlformats.org/presentationml/2006/main">
   <p:cSld>
     <p:spTree>
@@ -15258,7 +20189,7 @@
         <p:spPr>
           <a:xfrm>
             <a:off x="370332" y="1269230"/>
-            <a:ext cx="9642348" cy="1200329"/>
+            <a:ext cx="9642348" cy="1938992"/>
           </a:xfrm>
           <a:prstGeom prst="rect">
             <a:avLst/>
@@ -15285,6 +20216,11 @@
               </a:rPr>
               <a:t>Systematic Sampling: </a:t>
             </a:r>
+          </a:p>
+          <a:p>
+            <a:pPr>
+              <a:buNone/>
+            </a:pPr>
             <a:r>
               <a:rPr lang="en-US" sz="2400" dirty="0">
                 <a:solidFill>
@@ -15345,7 +20281,23 @@
                   </a:schemeClr>
                 </a:solidFill>
               </a:rPr>
-              <a:t>Example: Pick every 3rd student from a list</a:t>
+              <a:t>Example: </a:t>
+            </a:r>
+          </a:p>
+          <a:p>
+            <a:pPr>
+              <a:buNone/>
+            </a:pPr>
+            <a:r>
+              <a:rPr lang="en-US" sz="2400" dirty="0">
+                <a:solidFill>
+                  <a:schemeClr val="accent6">
+                    <a:lumMod val="60000"/>
+                    <a:lumOff val="40000"/>
+                  </a:schemeClr>
+                </a:solidFill>
+              </a:rPr>
+              <a:t>Pick every 3rd student from a list</a:t>
             </a:r>
           </a:p>
         </p:txBody>
@@ -15393,7 +20345,7 @@
 </p:sld>
 </file>
 
-<file path=ppt/slides/slide7.xml><?xml version="1.0" encoding="utf-8"?>
+<file path=ppt/slides/slide8.xml><?xml version="1.0" encoding="utf-8"?>
 <p:sld xmlns:a="http://schemas.openxmlformats.org/drawingml/2006/main" xmlns:r="http://schemas.openxmlformats.org/officeDocument/2006/relationships" xmlns:p="http://schemas.openxmlformats.org/presentationml/2006/main">
   <p:cSld>
     <p:spTree>
@@ -15467,8 +20419,8 @@
         </p:nvSpPr>
         <p:spPr>
           <a:xfrm>
-            <a:off x="370332" y="921758"/>
-            <a:ext cx="10346436" cy="2554545"/>
+            <a:off x="333756" y="848606"/>
+            <a:ext cx="10346436" cy="3046988"/>
           </a:xfrm>
           <a:prstGeom prst="rect">
             <a:avLst/>
@@ -15485,7 +20437,7 @@
               <a:buNone/>
             </a:pPr>
             <a:r>
-              <a:rPr lang="en-US" sz="2000" b="1" dirty="0">
+              <a:rPr lang="en-US" sz="2400" b="1" dirty="0">
                 <a:solidFill>
                   <a:schemeClr val="accent6">
                     <a:lumMod val="60000"/>
@@ -15493,10 +20445,26 @@
                   </a:schemeClr>
                 </a:solidFill>
               </a:rPr>
-              <a:t>Stratified Sampling: </a:t>
+              <a:t>Stratified Sampling:</a:t>
+            </a:r>
+          </a:p>
+          <a:p>
+            <a:pPr>
+              <a:buNone/>
+            </a:pPr>
+            <a:r>
+              <a:rPr lang="en-US" sz="2400" b="1" dirty="0">
+                <a:solidFill>
+                  <a:schemeClr val="accent6">
+                    <a:lumMod val="60000"/>
+                    <a:lumOff val="40000"/>
+                  </a:schemeClr>
+                </a:solidFill>
+              </a:rPr>
+              <a:t> </a:t>
             </a:r>
             <a:r>
-              <a:rPr lang="en-US" sz="2000" dirty="0">
+              <a:rPr lang="en-US" sz="2400" dirty="0">
                 <a:solidFill>
                   <a:schemeClr val="accent6">
                     <a:lumMod val="60000"/>
@@ -15511,7 +20479,7 @@
             <a:pPr>
               <a:buNone/>
             </a:pPr>
-            <a:endParaRPr lang="en-US" sz="2000" dirty="0">
+            <a:endParaRPr lang="en-US" sz="2400" dirty="0">
               <a:solidFill>
                 <a:schemeClr val="accent6">
                   <a:lumMod val="60000"/>
@@ -15522,7 +20490,7 @@
           </a:p>
           <a:p>
             <a:r>
-              <a:rPr lang="en-US" sz="2000" dirty="0">
+              <a:rPr lang="en-US" sz="2400" b="1" dirty="0">
                 <a:solidFill>
                   <a:schemeClr val="accent6">
                     <a:lumMod val="60000"/>
@@ -15530,10 +20498,21 @@
                   </a:schemeClr>
                 </a:solidFill>
               </a:rPr>
-              <a:t>Example:  You want a </a:t>
+              <a:t>Example:  </a:t>
             </a:r>
             <a:r>
-              <a:rPr lang="en-US" sz="2000" b="1" dirty="0">
+              <a:rPr lang="en-US" sz="2400" dirty="0">
+                <a:solidFill>
+                  <a:schemeClr val="accent6">
+                    <a:lumMod val="60000"/>
+                    <a:lumOff val="40000"/>
+                  </a:schemeClr>
+                </a:solidFill>
+              </a:rPr>
+              <a:t>You want a </a:t>
+            </a:r>
+            <a:r>
+              <a:rPr lang="en-US" sz="2400" b="1" dirty="0">
                 <a:solidFill>
                   <a:schemeClr val="accent6">
                     <a:lumMod val="60000"/>
@@ -15544,7 +20523,7 @@
               <a:t>sample of 40 students</a:t>
             </a:r>
             <a:r>
-              <a:rPr lang="en-US" sz="2000" dirty="0">
+              <a:rPr lang="en-US" sz="2400" dirty="0">
                 <a:solidFill>
                   <a:schemeClr val="accent6">
                     <a:lumMod val="60000"/>
@@ -15555,7 +20534,7 @@
               <a:t> from a population of 400 that represents all years </a:t>
             </a:r>
             <a:r>
-              <a:rPr lang="en-US" sz="2000" b="1" dirty="0">
+              <a:rPr lang="en-US" sz="2400" b="1" dirty="0">
                 <a:solidFill>
                   <a:schemeClr val="accent6">
                     <a:lumMod val="60000"/>
@@ -15566,7 +20545,7 @@
               <a:t>proportionally</a:t>
             </a:r>
             <a:r>
-              <a:rPr lang="en-US" sz="2000" dirty="0">
+              <a:rPr lang="en-US" sz="2400" dirty="0">
                 <a:solidFill>
                   <a:schemeClr val="accent6">
                     <a:lumMod val="60000"/>
@@ -15582,7 +20561,7 @@
               <a:buNone/>
             </a:pPr>
             <a:r>
-              <a:rPr lang="en-US" sz="2000" dirty="0">
+              <a:rPr lang="en-US" sz="2400" dirty="0">
                 <a:solidFill>
                   <a:schemeClr val="accent6">
                     <a:lumMod val="60000"/>
@@ -15598,7 +20577,7 @@
               <a:buAutoNum type="arabicParenR"/>
             </a:pPr>
             <a:r>
-              <a:rPr lang="en-US" sz="2000" dirty="0">
+              <a:rPr lang="en-US" sz="2400" dirty="0">
                 <a:solidFill>
                   <a:schemeClr val="accent6">
                     <a:lumMod val="60000"/>
@@ -15614,7 +20593,7 @@
               <a:buAutoNum type="arabicParenR"/>
             </a:pPr>
             <a:r>
-              <a:rPr lang="en-US" sz="2000" dirty="0">
+              <a:rPr lang="en-US" sz="2400" dirty="0">
                 <a:solidFill>
                   <a:schemeClr val="accent6">
                     <a:lumMod val="60000"/>
@@ -15762,7 +20741,7 @@
                         <a:buNone/>
                       </a:pPr>
                       <a:r>
-                        <a:rPr lang="en-US">
+                        <a:rPr lang="en-US" dirty="0">
                           <a:solidFill>
                             <a:schemeClr val="accent6">
                               <a:lumMod val="60000"/>
@@ -15799,7 +20778,7 @@
                         <a:buNone/>
                       </a:pPr>
                       <a:r>
-                        <a:rPr lang="en-US">
+                        <a:rPr lang="en-US" dirty="0">
                           <a:solidFill>
                             <a:schemeClr val="accent6">
                               <a:lumMod val="60000"/>
@@ -17168,6 +22147,288 @@
           </a:p>
         </p:txBody>
       </p:sp>
+      <p:sp>
+        <p:nvSpPr>
+          <p:cNvPr id="6" name="Rectangle 5">
+            <a:extLst>
+              <a:ext uri="{FF2B5EF4-FFF2-40B4-BE49-F238E27FC236}">
+                <a16:creationId xmlns:a16="http://schemas.microsoft.com/office/drawing/2014/main" id="{97D43319-44D5-C51E-25A3-651ED985CAFD}"/>
+              </a:ext>
+            </a:extLst>
+          </p:cNvPr>
+          <p:cNvSpPr/>
+          <p:nvPr/>
+        </p:nvSpPr>
+        <p:spPr>
+          <a:xfrm>
+            <a:off x="9508234" y="2323512"/>
+            <a:ext cx="2343915" cy="1740503"/>
+          </a:xfrm>
+          <a:prstGeom prst="rect">
+            <a:avLst/>
+          </a:prstGeom>
+        </p:spPr>
+        <p:style>
+          <a:lnRef idx="2">
+            <a:schemeClr val="accent1">
+              <a:shade val="15000"/>
+            </a:schemeClr>
+          </a:lnRef>
+          <a:fillRef idx="1">
+            <a:schemeClr val="accent1"/>
+          </a:fillRef>
+          <a:effectRef idx="0">
+            <a:schemeClr val="accent1"/>
+          </a:effectRef>
+          <a:fontRef idx="minor">
+            <a:schemeClr val="lt1"/>
+          </a:fontRef>
+        </p:style>
+        <p:txBody>
+          <a:bodyPr rtlCol="0" anchor="ctr"/>
+          <a:lstStyle/>
+          <a:p>
+            <a:pPr algn="ctr"/>
+            <a:endParaRPr lang="en-US"/>
+          </a:p>
+        </p:txBody>
+      </p:sp>
+      <p:sp>
+        <p:nvSpPr>
+          <p:cNvPr id="8" name="Oval 7">
+            <a:extLst>
+              <a:ext uri="{FF2B5EF4-FFF2-40B4-BE49-F238E27FC236}">
+                <a16:creationId xmlns:a16="http://schemas.microsoft.com/office/drawing/2014/main" id="{0804791B-219A-4872-7B1E-4BA949DEA39D}"/>
+              </a:ext>
+            </a:extLst>
+          </p:cNvPr>
+          <p:cNvSpPr/>
+          <p:nvPr/>
+        </p:nvSpPr>
+        <p:spPr>
+          <a:xfrm>
+            <a:off x="9748357" y="2508504"/>
+            <a:ext cx="931835" cy="740759"/>
+          </a:xfrm>
+          <a:prstGeom prst="ellipse">
+            <a:avLst/>
+          </a:prstGeom>
+          <a:solidFill>
+            <a:schemeClr val="accent2">
+              <a:lumMod val="60000"/>
+              <a:lumOff val="40000"/>
+            </a:schemeClr>
+          </a:solidFill>
+        </p:spPr>
+        <p:style>
+          <a:lnRef idx="2">
+            <a:schemeClr val="accent1">
+              <a:shade val="15000"/>
+            </a:schemeClr>
+          </a:lnRef>
+          <a:fillRef idx="1">
+            <a:schemeClr val="accent1"/>
+          </a:fillRef>
+          <a:effectRef idx="0">
+            <a:schemeClr val="accent1"/>
+          </a:effectRef>
+          <a:fontRef idx="minor">
+            <a:schemeClr val="lt1"/>
+          </a:fontRef>
+        </p:style>
+        <p:txBody>
+          <a:bodyPr rtlCol="0" anchor="ctr"/>
+          <a:lstStyle/>
+          <a:p>
+            <a:pPr algn="ctr"/>
+            <a:r>
+              <a:rPr lang="en-US" dirty="0">
+                <a:solidFill>
+                  <a:schemeClr val="tx1"/>
+                </a:solidFill>
+              </a:rPr>
+              <a:t>1st yr</a:t>
+            </a:r>
+          </a:p>
+        </p:txBody>
+      </p:sp>
+      <p:sp>
+        <p:nvSpPr>
+          <p:cNvPr id="10" name="Oval 9">
+            <a:extLst>
+              <a:ext uri="{FF2B5EF4-FFF2-40B4-BE49-F238E27FC236}">
+                <a16:creationId xmlns:a16="http://schemas.microsoft.com/office/drawing/2014/main" id="{8547ACA4-B922-371B-E005-6150E49A69AD}"/>
+              </a:ext>
+            </a:extLst>
+          </p:cNvPr>
+          <p:cNvSpPr/>
+          <p:nvPr/>
+        </p:nvSpPr>
+        <p:spPr>
+          <a:xfrm>
+            <a:off x="10800253" y="2510375"/>
+            <a:ext cx="931835" cy="740759"/>
+          </a:xfrm>
+          <a:prstGeom prst="ellipse">
+            <a:avLst/>
+          </a:prstGeom>
+          <a:solidFill>
+            <a:schemeClr val="accent2">
+              <a:lumMod val="60000"/>
+              <a:lumOff val="40000"/>
+            </a:schemeClr>
+          </a:solidFill>
+        </p:spPr>
+        <p:style>
+          <a:lnRef idx="2">
+            <a:schemeClr val="accent1">
+              <a:shade val="15000"/>
+            </a:schemeClr>
+          </a:lnRef>
+          <a:fillRef idx="1">
+            <a:schemeClr val="accent1"/>
+          </a:fillRef>
+          <a:effectRef idx="0">
+            <a:schemeClr val="accent1"/>
+          </a:effectRef>
+          <a:fontRef idx="minor">
+            <a:schemeClr val="lt1"/>
+          </a:fontRef>
+        </p:style>
+        <p:txBody>
+          <a:bodyPr rtlCol="0" anchor="ctr"/>
+          <a:lstStyle/>
+          <a:p>
+            <a:pPr algn="ctr"/>
+            <a:r>
+              <a:rPr lang="en-US" dirty="0">
+                <a:solidFill>
+                  <a:schemeClr val="tx1"/>
+                </a:solidFill>
+              </a:rPr>
+              <a:t> 2nd yr</a:t>
+            </a:r>
+          </a:p>
+        </p:txBody>
+      </p:sp>
+      <p:sp>
+        <p:nvSpPr>
+          <p:cNvPr id="11" name="Oval 10">
+            <a:extLst>
+              <a:ext uri="{FF2B5EF4-FFF2-40B4-BE49-F238E27FC236}">
+                <a16:creationId xmlns:a16="http://schemas.microsoft.com/office/drawing/2014/main" id="{9EF023E6-5F13-80E8-F200-E54CE235C0C9}"/>
+              </a:ext>
+            </a:extLst>
+          </p:cNvPr>
+          <p:cNvSpPr/>
+          <p:nvPr/>
+        </p:nvSpPr>
+        <p:spPr>
+          <a:xfrm>
+            <a:off x="9693828" y="3285744"/>
+            <a:ext cx="931835" cy="740759"/>
+          </a:xfrm>
+          <a:prstGeom prst="ellipse">
+            <a:avLst/>
+          </a:prstGeom>
+          <a:solidFill>
+            <a:schemeClr val="accent2">
+              <a:lumMod val="60000"/>
+              <a:lumOff val="40000"/>
+            </a:schemeClr>
+          </a:solidFill>
+        </p:spPr>
+        <p:style>
+          <a:lnRef idx="2">
+            <a:schemeClr val="accent1">
+              <a:shade val="15000"/>
+            </a:schemeClr>
+          </a:lnRef>
+          <a:fillRef idx="1">
+            <a:schemeClr val="accent1"/>
+          </a:fillRef>
+          <a:effectRef idx="0">
+            <a:schemeClr val="accent1"/>
+          </a:effectRef>
+          <a:fontRef idx="minor">
+            <a:schemeClr val="lt1"/>
+          </a:fontRef>
+        </p:style>
+        <p:txBody>
+          <a:bodyPr rtlCol="0" anchor="ctr"/>
+          <a:lstStyle/>
+          <a:p>
+            <a:pPr algn="ctr"/>
+            <a:r>
+              <a:rPr lang="en-US" dirty="0">
+                <a:solidFill>
+                  <a:schemeClr val="tx1"/>
+                </a:solidFill>
+              </a:rPr>
+              <a:t>3rd yr</a:t>
+            </a:r>
+          </a:p>
+        </p:txBody>
+      </p:sp>
+      <p:sp>
+        <p:nvSpPr>
+          <p:cNvPr id="12" name="Oval 11">
+            <a:extLst>
+              <a:ext uri="{FF2B5EF4-FFF2-40B4-BE49-F238E27FC236}">
+                <a16:creationId xmlns:a16="http://schemas.microsoft.com/office/drawing/2014/main" id="{EDA67E12-0BC6-05C7-4850-A3BE2B7372A8}"/>
+              </a:ext>
+            </a:extLst>
+          </p:cNvPr>
+          <p:cNvSpPr/>
+          <p:nvPr/>
+        </p:nvSpPr>
+        <p:spPr>
+          <a:xfrm>
+            <a:off x="10822198" y="3280549"/>
+            <a:ext cx="931835" cy="740759"/>
+          </a:xfrm>
+          <a:prstGeom prst="ellipse">
+            <a:avLst/>
+          </a:prstGeom>
+          <a:solidFill>
+            <a:schemeClr val="accent2">
+              <a:lumMod val="60000"/>
+              <a:lumOff val="40000"/>
+            </a:schemeClr>
+          </a:solidFill>
+        </p:spPr>
+        <p:style>
+          <a:lnRef idx="2">
+            <a:schemeClr val="accent1">
+              <a:shade val="15000"/>
+            </a:schemeClr>
+          </a:lnRef>
+          <a:fillRef idx="1">
+            <a:schemeClr val="accent1"/>
+          </a:fillRef>
+          <a:effectRef idx="0">
+            <a:schemeClr val="accent1"/>
+          </a:effectRef>
+          <a:fontRef idx="minor">
+            <a:schemeClr val="lt1"/>
+          </a:fontRef>
+        </p:style>
+        <p:txBody>
+          <a:bodyPr rtlCol="0" anchor="ctr"/>
+          <a:lstStyle/>
+          <a:p>
+            <a:pPr algn="ctr"/>
+            <a:r>
+              <a:rPr lang="en-US" dirty="0">
+                <a:solidFill>
+                  <a:schemeClr val="tx1"/>
+                </a:solidFill>
+              </a:rPr>
+              <a:t>4th yr</a:t>
+            </a:r>
+          </a:p>
+        </p:txBody>
+      </p:sp>
     </p:spTree>
     <p:extLst>
       <p:ext uri="{BB962C8B-B14F-4D97-AF65-F5344CB8AC3E}">
@@ -17181,7 +22442,7 @@
 </p:sld>
 </file>
 
-<file path=ppt/slides/slide8.xml><?xml version="1.0" encoding="utf-8"?>
+<file path=ppt/slides/slide9.xml><?xml version="1.0" encoding="utf-8"?>
 <p:sld xmlns:a="http://schemas.openxmlformats.org/drawingml/2006/main" xmlns:r="http://schemas.openxmlformats.org/officeDocument/2006/relationships" xmlns:p="http://schemas.openxmlformats.org/presentationml/2006/main">
   <p:cSld>
     <p:spTree>
@@ -17256,7 +22517,7 @@
         <p:spPr>
           <a:xfrm>
             <a:off x="370332" y="894326"/>
-            <a:ext cx="11458376" cy="1200329"/>
+            <a:ext cx="11458376" cy="2308324"/>
           </a:xfrm>
           <a:prstGeom prst="rect">
             <a:avLst/>
@@ -17273,7 +22534,7 @@
               <a:buNone/>
             </a:pPr>
             <a:r>
-              <a:rPr lang="en-US" b="1" dirty="0">
+              <a:rPr lang="en-US" sz="2400" b="1" dirty="0">
                 <a:solidFill>
                   <a:schemeClr val="accent6">
                     <a:lumMod val="60000"/>
@@ -17281,21 +22542,15 @@
                   </a:schemeClr>
                 </a:solidFill>
               </a:rPr>
-              <a:t>Cluster Sampling</a:t>
+              <a:t>Cluster Sampling: </a:t>
             </a:r>
+          </a:p>
+          <a:p>
+            <a:pPr>
+              <a:buNone/>
+            </a:pPr>
             <a:r>
-              <a:rPr lang="en-US" sz="1800" b="1" dirty="0">
-                <a:solidFill>
-                  <a:schemeClr val="accent6">
-                    <a:lumMod val="60000"/>
-                    <a:lumOff val="40000"/>
-                  </a:schemeClr>
-                </a:solidFill>
-              </a:rPr>
-              <a:t>: </a:t>
-            </a:r>
-            <a:r>
-              <a:rPr lang="en-US" dirty="0">
+              <a:rPr lang="en-US" sz="2400" dirty="0">
                 <a:solidFill>
                   <a:schemeClr val="accent6">
                     <a:lumMod val="60000"/>
@@ -17311,7 +22566,7 @@
               <a:buNone/>
             </a:pPr>
             <a:r>
-              <a:rPr lang="en-US" dirty="0">
+              <a:rPr lang="en-US" sz="2400" dirty="0">
                 <a:solidFill>
                   <a:schemeClr val="accent6">
                     <a:lumMod val="60000"/>
@@ -17322,7 +22577,7 @@
               <a:t>Example: Suppose we want to conduct survey from students. Here divide student’s population into </a:t>
             </a:r>
             <a:r>
-              <a:rPr lang="en-US" b="1" dirty="0">
+              <a:rPr lang="en-US" sz="2400" b="1" dirty="0">
                 <a:solidFill>
                   <a:schemeClr val="accent6">
                     <a:lumMod val="60000"/>
@@ -17333,7 +22588,7 @@
               <a:t>20 clusters based on colleges</a:t>
             </a:r>
             <a:r>
-              <a:rPr lang="en-US" dirty="0">
+              <a:rPr lang="en-US" sz="2400" dirty="0">
                 <a:solidFill>
                   <a:schemeClr val="accent6">
                     <a:lumMod val="60000"/>
@@ -17341,10 +22596,32 @@
                   </a:schemeClr>
                 </a:solidFill>
               </a:rPr>
-              <a:t>. Randomly select 5 colleges (say C, F, K, N, S) and survey </a:t>
+              <a:t>. Randomly select 5 colleges (say </a:t>
             </a:r>
             <a:r>
-              <a:rPr lang="en-US" b="1" dirty="0">
+              <a:rPr lang="en-US" sz="2400" dirty="0">
+                <a:solidFill>
+                  <a:schemeClr val="accent4">
+                    <a:lumMod val="60000"/>
+                    <a:lumOff val="40000"/>
+                  </a:schemeClr>
+                </a:solidFill>
+              </a:rPr>
+              <a:t>C, F, K, N, S</a:t>
+            </a:r>
+            <a:r>
+              <a:rPr lang="en-US" sz="2400" dirty="0">
+                <a:solidFill>
+                  <a:schemeClr val="accent6">
+                    <a:lumMod val="60000"/>
+                    <a:lumOff val="40000"/>
+                  </a:schemeClr>
+                </a:solidFill>
+              </a:rPr>
+              <a:t>) and survey </a:t>
+            </a:r>
+            <a:r>
+              <a:rPr lang="en-US" sz="2400" b="1" dirty="0">
                 <a:solidFill>
                   <a:schemeClr val="accent6">
                     <a:lumMod val="60000"/>
@@ -17355,7 +22632,7 @@
               <a:t>all students </a:t>
             </a:r>
             <a:r>
-              <a:rPr lang="en-US" dirty="0">
+              <a:rPr lang="en-US" sz="2400" dirty="0">
                 <a:solidFill>
                   <a:schemeClr val="accent6">
                     <a:lumMod val="60000"/>
@@ -17383,28 +22660,28 @@
           <p:nvPr>
             <p:extLst>
               <p:ext uri="{D42A27DB-BD31-4B8C-83A1-F6EECF244321}">
-                <p14:modId xmlns:p14="http://schemas.microsoft.com/office/powerpoint/2010/main" val="2506114322"/>
+                <p14:modId xmlns:p14="http://schemas.microsoft.com/office/powerpoint/2010/main" val="2283631954"/>
               </p:ext>
             </p:extLst>
           </p:nvPr>
         </p:nvGraphicFramePr>
         <p:xfrm>
-          <a:off x="363292" y="2201590"/>
-          <a:ext cx="5686408" cy="4558848"/>
+          <a:off x="74312" y="3931920"/>
+          <a:ext cx="4168504" cy="2125488"/>
         </p:xfrm>
         <a:graphic>
           <a:graphicData uri="http://schemas.openxmlformats.org/drawingml/2006/table">
             <a:tbl>
               <a:tblPr/>
               <a:tblGrid>
-                <a:gridCol w="2843204">
+                <a:gridCol w="2129392">
                   <a:extLst>
                     <a:ext uri="{9D8B030D-6E8A-4147-A177-3AD203B41FA5}">
                       <a16:colId xmlns:a16="http://schemas.microsoft.com/office/drawing/2014/main" val="4024592154"/>
                     </a:ext>
                   </a:extLst>
                 </a:gridCol>
-                <a:gridCol w="2843204">
+                <a:gridCol w="2039112">
                   <a:extLst>
                     <a:ext uri="{9D8B030D-6E8A-4147-A177-3AD203B41FA5}">
                       <a16:colId xmlns:a16="http://schemas.microsoft.com/office/drawing/2014/main" val="895800267"/>
@@ -17422,7 +22699,7 @@
                         <a:buNone/>
                       </a:pPr>
                       <a:r>
-                        <a:rPr lang="en-US" sz="1100" b="1" u="sng" dirty="0">
+                        <a:rPr lang="en-US" sz="2000" b="1" u="sng" dirty="0">
                           <a:solidFill>
                             <a:schemeClr val="accent6">
                               <a:lumMod val="60000"/>
@@ -17459,7 +22736,7 @@
                         <a:buNone/>
                       </a:pPr>
                       <a:r>
-                        <a:rPr lang="en-US" sz="1100" b="1" u="sng" dirty="0">
+                        <a:rPr lang="en-US" sz="2000" b="1" u="sng" dirty="0">
                           <a:solidFill>
                             <a:schemeClr val="accent6">
                               <a:lumMod val="60000"/>
@@ -17503,7 +22780,7 @@
                         <a:buNone/>
                       </a:pPr>
                       <a:r>
-                        <a:rPr lang="en-US" sz="1100">
+                        <a:rPr lang="en-US" sz="2000" dirty="0">
                           <a:solidFill>
                             <a:schemeClr val="accent6">
                               <a:lumMod val="60000"/>
@@ -17540,7 +22817,7 @@
                         <a:buNone/>
                       </a:pPr>
                       <a:r>
-                        <a:rPr lang="en-US" sz="1100">
+                        <a:rPr lang="en-US" sz="2000" dirty="0">
                           <a:solidFill>
                             <a:schemeClr val="accent6">
                               <a:lumMod val="60000"/>
@@ -17584,7 +22861,7 @@
                         <a:buNone/>
                       </a:pPr>
                       <a:r>
-                        <a:rPr lang="en-US" sz="1100">
+                        <a:rPr lang="en-US" sz="2000" dirty="0">
                           <a:solidFill>
                             <a:schemeClr val="accent6">
                               <a:lumMod val="60000"/>
@@ -17621,7 +22898,7 @@
                         <a:buNone/>
                       </a:pPr>
                       <a:r>
-                        <a:rPr lang="en-US" sz="1100">
+                        <a:rPr lang="en-US" sz="2000">
                           <a:solidFill>
                             <a:schemeClr val="accent6">
                               <a:lumMod val="60000"/>
@@ -17665,7 +22942,7 @@
                         <a:buNone/>
                       </a:pPr>
                       <a:r>
-                        <a:rPr lang="en-US" sz="1100" b="1" dirty="0">
+                        <a:rPr lang="en-US" sz="2000" b="1" dirty="0">
                           <a:solidFill>
                             <a:schemeClr val="accent4">
                               <a:lumMod val="40000"/>
@@ -17702,7 +22979,7 @@
                         <a:buNone/>
                       </a:pPr>
                       <a:r>
-                        <a:rPr lang="en-US" sz="1100" b="1" dirty="0">
+                        <a:rPr lang="en-US" sz="2000" b="1" dirty="0">
                           <a:solidFill>
                             <a:schemeClr val="accent4">
                               <a:lumMod val="40000"/>
@@ -17746,7 +23023,7 @@
                         <a:buNone/>
                       </a:pPr>
                       <a:r>
-                        <a:rPr lang="en-US" sz="1100">
+                        <a:rPr lang="en-US" sz="2000" dirty="0">
                           <a:solidFill>
                             <a:schemeClr val="accent6">
                               <a:lumMod val="60000"/>
@@ -17783,7 +23060,7 @@
                         <a:buNone/>
                       </a:pPr>
                       <a:r>
-                        <a:rPr lang="en-US" sz="1100">
+                        <a:rPr lang="en-US" sz="2000">
                           <a:solidFill>
                             <a:schemeClr val="accent6">
                               <a:lumMod val="60000"/>
@@ -17827,7 +23104,7 @@
                         <a:buNone/>
                       </a:pPr>
                       <a:r>
-                        <a:rPr lang="en-US" sz="1100">
+                        <a:rPr lang="en-US" sz="2000">
                           <a:solidFill>
                             <a:schemeClr val="accent6">
                               <a:lumMod val="60000"/>
@@ -17864,7 +23141,7 @@
                         <a:buNone/>
                       </a:pPr>
                       <a:r>
-                        <a:rPr lang="en-US" sz="1100" dirty="0">
+                        <a:rPr lang="en-US" sz="2000" dirty="0">
                           <a:solidFill>
                             <a:schemeClr val="accent6">
                               <a:lumMod val="60000"/>
@@ -17898,6 +23175,54 @@
                   </a:ext>
                 </a:extLst>
               </a:tr>
+            </a:tbl>
+          </a:graphicData>
+        </a:graphic>
+      </p:graphicFrame>
+      <p:graphicFrame>
+        <p:nvGraphicFramePr>
+          <p:cNvPr id="4" name="Table 3">
+            <a:extLst>
+              <a:ext uri="{FF2B5EF4-FFF2-40B4-BE49-F238E27FC236}">
+                <a16:creationId xmlns:a16="http://schemas.microsoft.com/office/drawing/2014/main" id="{662B4D9D-EBD2-4D64-2378-CBF09B3F23CD}"/>
+              </a:ext>
+            </a:extLst>
+          </p:cNvPr>
+          <p:cNvGraphicFramePr>
+            <a:graphicFrameLocks noGrp="1"/>
+          </p:cNvGraphicFramePr>
+          <p:nvPr>
+            <p:extLst>
+              <p:ext uri="{D42A27DB-BD31-4B8C-83A1-F6EECF244321}">
+                <p14:modId xmlns:p14="http://schemas.microsoft.com/office/powerpoint/2010/main" val="3999502696"/>
+              </p:ext>
+            </p:extLst>
+          </p:nvPr>
+        </p:nvGraphicFramePr>
+        <p:xfrm>
+          <a:off x="4749946" y="4390632"/>
+          <a:ext cx="3199240" cy="1771240"/>
+        </p:xfrm>
+        <a:graphic>
+          <a:graphicData uri="http://schemas.openxmlformats.org/drawingml/2006/table">
+            <a:tbl>
+              <a:tblPr/>
+              <a:tblGrid>
+                <a:gridCol w="1608184">
+                  <a:extLst>
+                    <a:ext uri="{9D8B030D-6E8A-4147-A177-3AD203B41FA5}">
+                      <a16:colId xmlns:a16="http://schemas.microsoft.com/office/drawing/2014/main" val="564864659"/>
+                    </a:ext>
+                  </a:extLst>
+                </a:gridCol>
+                <a:gridCol w="1591056">
+                  <a:extLst>
+                    <a:ext uri="{9D8B030D-6E8A-4147-A177-3AD203B41FA5}">
+                      <a16:colId xmlns:a16="http://schemas.microsoft.com/office/drawing/2014/main" val="1755944980"/>
+                    </a:ext>
+                  </a:extLst>
+                </a:gridCol>
+              </a:tblGrid>
               <a:tr h="197788">
                 <a:tc>
                   <a:txBody>
@@ -17908,7 +23233,7 @@
                         <a:buNone/>
                       </a:pPr>
                       <a:r>
-                        <a:rPr lang="en-US" sz="1100" b="1" dirty="0">
+                        <a:rPr lang="en-US" sz="2000" b="1" dirty="0">
                           <a:solidFill>
                             <a:schemeClr val="accent4">
                               <a:lumMod val="40000"/>
@@ -17945,7 +23270,7 @@
                         <a:buNone/>
                       </a:pPr>
                       <a:r>
-                        <a:rPr lang="en-US" sz="1100" b="1" dirty="0">
+                        <a:rPr lang="en-US" sz="2000" b="1" dirty="0">
                           <a:solidFill>
                             <a:schemeClr val="accent4">
                               <a:lumMod val="40000"/>
@@ -17975,7 +23300,7 @@
                 </a:tc>
                 <a:extLst>
                   <a:ext uri="{0D108BD9-81ED-4DB2-BD59-A6C34878D82A}">
-                    <a16:rowId xmlns:a16="http://schemas.microsoft.com/office/drawing/2014/main" val="3611008656"/>
+                    <a16:rowId xmlns:a16="http://schemas.microsoft.com/office/drawing/2014/main" val="2886163123"/>
                   </a:ext>
                 </a:extLst>
               </a:tr>
@@ -17989,7 +23314,7 @@
                         <a:buNone/>
                       </a:pPr>
                       <a:r>
-                        <a:rPr lang="en-US" sz="1100">
+                        <a:rPr lang="en-US" sz="2000" dirty="0">
                           <a:solidFill>
                             <a:schemeClr val="accent6">
                               <a:lumMod val="60000"/>
@@ -18026,7 +23351,7 @@
                         <a:buNone/>
                       </a:pPr>
                       <a:r>
-                        <a:rPr lang="en-US" sz="1100" dirty="0">
+                        <a:rPr lang="en-US" sz="2000" dirty="0">
                           <a:solidFill>
                             <a:schemeClr val="accent6">
                               <a:lumMod val="60000"/>
@@ -18056,7 +23381,7 @@
                 </a:tc>
                 <a:extLst>
                   <a:ext uri="{0D108BD9-81ED-4DB2-BD59-A6C34878D82A}">
-                    <a16:rowId xmlns:a16="http://schemas.microsoft.com/office/drawing/2014/main" val="2969631108"/>
+                    <a16:rowId xmlns:a16="http://schemas.microsoft.com/office/drawing/2014/main" val="3599449434"/>
                   </a:ext>
                 </a:extLst>
               </a:tr>
@@ -18070,7 +23395,7 @@
                         <a:buNone/>
                       </a:pPr>
                       <a:r>
-                        <a:rPr lang="en-US" sz="1100">
+                        <a:rPr lang="en-US" sz="2000" dirty="0">
                           <a:solidFill>
                             <a:schemeClr val="accent6">
                               <a:lumMod val="60000"/>
@@ -18107,7 +23432,7 @@
                         <a:buNone/>
                       </a:pPr>
                       <a:r>
-                        <a:rPr lang="en-US" sz="1100">
+                        <a:rPr lang="en-US" sz="2000">
                           <a:solidFill>
                             <a:schemeClr val="accent6">
                               <a:lumMod val="60000"/>
@@ -18137,7 +23462,7 @@
                 </a:tc>
                 <a:extLst>
                   <a:ext uri="{0D108BD9-81ED-4DB2-BD59-A6C34878D82A}">
-                    <a16:rowId xmlns:a16="http://schemas.microsoft.com/office/drawing/2014/main" val="544873426"/>
+                    <a16:rowId xmlns:a16="http://schemas.microsoft.com/office/drawing/2014/main" val="1695557102"/>
                   </a:ext>
                 </a:extLst>
               </a:tr>
@@ -18151,7 +23476,7 @@
                         <a:buNone/>
                       </a:pPr>
                       <a:r>
-                        <a:rPr lang="en-US" sz="1100" dirty="0">
+                        <a:rPr lang="en-US" sz="2000" dirty="0">
                           <a:solidFill>
                             <a:schemeClr val="accent6">
                               <a:lumMod val="60000"/>
@@ -18188,7 +23513,7 @@
                         <a:buNone/>
                       </a:pPr>
                       <a:r>
-                        <a:rPr lang="en-US" sz="1100">
+                        <a:rPr lang="en-US" sz="2000">
                           <a:solidFill>
                             <a:schemeClr val="accent6">
                               <a:lumMod val="60000"/>
@@ -18218,7 +23543,7 @@
                 </a:tc>
                 <a:extLst>
                   <a:ext uri="{0D108BD9-81ED-4DB2-BD59-A6C34878D82A}">
-                    <a16:rowId xmlns:a16="http://schemas.microsoft.com/office/drawing/2014/main" val="591412566"/>
+                    <a16:rowId xmlns:a16="http://schemas.microsoft.com/office/drawing/2014/main" val="984178687"/>
                   </a:ext>
                 </a:extLst>
               </a:tr>
@@ -18232,7 +23557,7 @@
                         <a:buNone/>
                       </a:pPr>
                       <a:r>
-                        <a:rPr lang="en-US" sz="1100">
+                        <a:rPr lang="en-US" sz="2000" dirty="0">
                           <a:solidFill>
                             <a:schemeClr val="accent6">
                               <a:lumMod val="60000"/>
@@ -18269,7 +23594,7 @@
                         <a:buNone/>
                       </a:pPr>
                       <a:r>
-                        <a:rPr lang="en-US" sz="1100">
+                        <a:rPr lang="en-US" sz="2000" dirty="0">
                           <a:solidFill>
                             <a:schemeClr val="accent6">
                               <a:lumMod val="60000"/>
@@ -18299,7 +23624,136 @@
                 </a:tc>
                 <a:extLst>
                   <a:ext uri="{0D108BD9-81ED-4DB2-BD59-A6C34878D82A}">
-                    <a16:rowId xmlns:a16="http://schemas.microsoft.com/office/drawing/2014/main" val="1005198812"/>
+                    <a16:rowId xmlns:a16="http://schemas.microsoft.com/office/drawing/2014/main" val="3448409186"/>
+                  </a:ext>
+                </a:extLst>
+              </a:tr>
+            </a:tbl>
+          </a:graphicData>
+        </a:graphic>
+      </p:graphicFrame>
+      <p:graphicFrame>
+        <p:nvGraphicFramePr>
+          <p:cNvPr id="5" name="Table 4">
+            <a:extLst>
+              <a:ext uri="{FF2B5EF4-FFF2-40B4-BE49-F238E27FC236}">
+                <a16:creationId xmlns:a16="http://schemas.microsoft.com/office/drawing/2014/main" id="{6135B656-F67D-D7FD-1BE2-97B11F78752D}"/>
+              </a:ext>
+            </a:extLst>
+          </p:cNvPr>
+          <p:cNvGraphicFramePr>
+            <a:graphicFrameLocks noGrp="1"/>
+          </p:cNvGraphicFramePr>
+          <p:nvPr>
+            <p:extLst>
+              <p:ext uri="{D42A27DB-BD31-4B8C-83A1-F6EECF244321}">
+                <p14:modId xmlns:p14="http://schemas.microsoft.com/office/powerpoint/2010/main" val="4016887487"/>
+              </p:ext>
+            </p:extLst>
+          </p:nvPr>
+        </p:nvGraphicFramePr>
+        <p:xfrm>
+          <a:off x="8541656" y="3089350"/>
+          <a:ext cx="3199240" cy="3542480"/>
+        </p:xfrm>
+        <a:graphic>
+          <a:graphicData uri="http://schemas.openxmlformats.org/drawingml/2006/table">
+            <a:tbl>
+              <a:tblPr/>
+              <a:tblGrid>
+                <a:gridCol w="1608184">
+                  <a:extLst>
+                    <a:ext uri="{9D8B030D-6E8A-4147-A177-3AD203B41FA5}">
+                      <a16:colId xmlns:a16="http://schemas.microsoft.com/office/drawing/2014/main" val="1852883831"/>
+                    </a:ext>
+                  </a:extLst>
+                </a:gridCol>
+                <a:gridCol w="1591056">
+                  <a:extLst>
+                    <a:ext uri="{9D8B030D-6E8A-4147-A177-3AD203B41FA5}">
+                      <a16:colId xmlns:a16="http://schemas.microsoft.com/office/drawing/2014/main" val="2380151086"/>
+                    </a:ext>
+                  </a:extLst>
+                </a:gridCol>
+              </a:tblGrid>
+              <a:tr h="197788">
+                <a:tc>
+                  <a:txBody>
+                    <a:bodyPr/>
+                    <a:lstStyle/>
+                    <a:p>
+                      <a:pPr algn="ctr">
+                        <a:buNone/>
+                      </a:pPr>
+                      <a:r>
+                        <a:rPr lang="en-US" sz="2000" b="1" dirty="0">
+                          <a:solidFill>
+                            <a:schemeClr val="accent4">
+                              <a:lumMod val="40000"/>
+                              <a:lumOff val="60000"/>
+                            </a:schemeClr>
+                          </a:solidFill>
+                        </a:rPr>
+                        <a:t>College K</a:t>
+                      </a:r>
+                    </a:p>
+                  </a:txBody>
+                  <a:tcPr marL="49447" marR="49447" marT="24724" marB="24724" anchor="ctr">
+                    <a:lnL>
+                      <a:noFill/>
+                    </a:lnL>
+                    <a:lnR>
+                      <a:noFill/>
+                    </a:lnR>
+                    <a:lnT>
+                      <a:noFill/>
+                    </a:lnT>
+                    <a:lnB>
+                      <a:noFill/>
+                    </a:lnB>
+                    <a:noFill/>
+                  </a:tcPr>
+                </a:tc>
+                <a:tc>
+                  <a:txBody>
+                    <a:bodyPr/>
+                    <a:lstStyle/>
+                    <a:p>
+                      <a:pPr algn="ctr">
+                        <a:buNone/>
+                      </a:pPr>
+                      <a:r>
+                        <a:rPr lang="en-US" sz="2000" b="1" dirty="0">
+                          <a:solidFill>
+                            <a:schemeClr val="accent4">
+                              <a:lumMod val="40000"/>
+                              <a:lumOff val="60000"/>
+                            </a:schemeClr>
+                          </a:solidFill>
+                        </a:rPr>
+                        <a:t>480</a:t>
+                      </a:r>
+                    </a:p>
+                  </a:txBody>
+                  <a:tcPr marL="49447" marR="49447" marT="24724" marB="24724" anchor="ctr">
+                    <a:lnL>
+                      <a:noFill/>
+                    </a:lnL>
+                    <a:lnR>
+                      <a:noFill/>
+                    </a:lnR>
+                    <a:lnT>
+                      <a:noFill/>
+                    </a:lnT>
+                    <a:lnB>
+                      <a:noFill/>
+                    </a:lnB>
+                    <a:noFill/>
+                  </a:tcPr>
+                </a:tc>
+                <a:extLst>
+                  <a:ext uri="{0D108BD9-81ED-4DB2-BD59-A6C34878D82A}">
+                    <a16:rowId xmlns:a16="http://schemas.microsoft.com/office/drawing/2014/main" val="886006795"/>
                   </a:ext>
                 </a:extLst>
               </a:tr>
@@ -18313,15 +23767,15 @@
                         <a:buNone/>
                       </a:pPr>
                       <a:r>
-                        <a:rPr lang="en-US" sz="1100" b="1" dirty="0">
+                        <a:rPr lang="en-US" sz="2000" dirty="0">
                           <a:solidFill>
-                            <a:schemeClr val="accent4">
-                              <a:lumMod val="40000"/>
-                              <a:lumOff val="60000"/>
+                            <a:schemeClr val="accent6">
+                              <a:lumMod val="60000"/>
+                              <a:lumOff val="40000"/>
                             </a:schemeClr>
                           </a:solidFill>
                         </a:rPr>
-                        <a:t>College K</a:t>
+                        <a:t>College L</a:t>
                       </a:r>
                     </a:p>
                   </a:txBody>
@@ -18350,15 +23804,15 @@
                         <a:buNone/>
                       </a:pPr>
                       <a:r>
-                        <a:rPr lang="en-US" sz="1100" b="1" dirty="0">
+                        <a:rPr lang="en-US" sz="2000" dirty="0">
                           <a:solidFill>
-                            <a:schemeClr val="accent4">
-                              <a:lumMod val="40000"/>
-                              <a:lumOff val="60000"/>
+                            <a:schemeClr val="accent6">
+                              <a:lumMod val="60000"/>
+                              <a:lumOff val="40000"/>
                             </a:schemeClr>
                           </a:solidFill>
                         </a:rPr>
-                        <a:t>480</a:t>
+                        <a:t>335</a:t>
                       </a:r>
                     </a:p>
                   </a:txBody>
@@ -18380,7 +23834,7 @@
                 </a:tc>
                 <a:extLst>
                   <a:ext uri="{0D108BD9-81ED-4DB2-BD59-A6C34878D82A}">
-                    <a16:rowId xmlns:a16="http://schemas.microsoft.com/office/drawing/2014/main" val="2465600088"/>
+                    <a16:rowId xmlns:a16="http://schemas.microsoft.com/office/drawing/2014/main" val="1094354140"/>
                   </a:ext>
                 </a:extLst>
               </a:tr>
@@ -18394,7 +23848,7 @@
                         <a:buNone/>
                       </a:pPr>
                       <a:r>
-                        <a:rPr lang="en-US" sz="1100">
+                        <a:rPr lang="en-US" sz="2000" dirty="0">
                           <a:solidFill>
                             <a:schemeClr val="accent6">
                               <a:lumMod val="60000"/>
@@ -18402,7 +23856,7 @@
                             </a:schemeClr>
                           </a:solidFill>
                         </a:rPr>
-                        <a:t>College L</a:t>
+                        <a:t>College M</a:t>
                       </a:r>
                     </a:p>
                   </a:txBody>
@@ -18431,7 +23885,7 @@
                         <a:buNone/>
                       </a:pPr>
                       <a:r>
-                        <a:rPr lang="en-US" sz="1100" dirty="0">
+                        <a:rPr lang="en-US" sz="2000" dirty="0">
                           <a:solidFill>
                             <a:schemeClr val="accent6">
                               <a:lumMod val="60000"/>
@@ -18439,7 +23893,7 @@
                             </a:schemeClr>
                           </a:solidFill>
                         </a:rPr>
-                        <a:t>335</a:t>
+                        <a:t>255</a:t>
                       </a:r>
                     </a:p>
                   </a:txBody>
@@ -18461,7 +23915,7 @@
                 </a:tc>
                 <a:extLst>
                   <a:ext uri="{0D108BD9-81ED-4DB2-BD59-A6C34878D82A}">
-                    <a16:rowId xmlns:a16="http://schemas.microsoft.com/office/drawing/2014/main" val="3879382451"/>
+                    <a16:rowId xmlns:a16="http://schemas.microsoft.com/office/drawing/2014/main" val="651642228"/>
                   </a:ext>
                 </a:extLst>
               </a:tr>
@@ -18475,15 +23929,15 @@
                         <a:buNone/>
                       </a:pPr>
                       <a:r>
-                        <a:rPr lang="en-US" sz="1100">
+                        <a:rPr lang="en-US" sz="2000" b="1" dirty="0">
                           <a:solidFill>
-                            <a:schemeClr val="accent6">
-                              <a:lumMod val="60000"/>
-                              <a:lumOff val="40000"/>
+                            <a:schemeClr val="accent4">
+                              <a:lumMod val="40000"/>
+                              <a:lumOff val="60000"/>
                             </a:schemeClr>
                           </a:solidFill>
                         </a:rPr>
-                        <a:t>College M</a:t>
+                        <a:t>College N</a:t>
                       </a:r>
                     </a:p>
                   </a:txBody>
@@ -18512,15 +23966,15 @@
                         <a:buNone/>
                       </a:pPr>
                       <a:r>
-                        <a:rPr lang="en-US" sz="1100">
+                        <a:rPr lang="en-US" sz="2000" dirty="0">
                           <a:solidFill>
-                            <a:schemeClr val="accent6">
-                              <a:lumMod val="60000"/>
-                              <a:lumOff val="40000"/>
+                            <a:schemeClr val="accent4">
+                              <a:lumMod val="40000"/>
+                              <a:lumOff val="60000"/>
                             </a:schemeClr>
                           </a:solidFill>
                         </a:rPr>
-                        <a:t>255</a:t>
+                        <a:t>305</a:t>
                       </a:r>
                     </a:p>
                   </a:txBody>
@@ -18542,7 +23996,7 @@
                 </a:tc>
                 <a:extLst>
                   <a:ext uri="{0D108BD9-81ED-4DB2-BD59-A6C34878D82A}">
-                    <a16:rowId xmlns:a16="http://schemas.microsoft.com/office/drawing/2014/main" val="2624325951"/>
+                    <a16:rowId xmlns:a16="http://schemas.microsoft.com/office/drawing/2014/main" val="2523627479"/>
                   </a:ext>
                 </a:extLst>
               </a:tr>
@@ -18556,15 +24010,15 @@
                         <a:buNone/>
                       </a:pPr>
                       <a:r>
-                        <a:rPr lang="en-US" sz="1100" dirty="0">
+                        <a:rPr lang="en-US" sz="2000" dirty="0">
                           <a:solidFill>
-                            <a:schemeClr val="accent4">
-                              <a:lumMod val="40000"/>
-                              <a:lumOff val="60000"/>
+                            <a:schemeClr val="accent6">
+                              <a:lumMod val="60000"/>
+                              <a:lumOff val="40000"/>
                             </a:schemeClr>
                           </a:solidFill>
                         </a:rPr>
-                        <a:t>College N</a:t>
+                        <a:t>College O</a:t>
                       </a:r>
                     </a:p>
                   </a:txBody>
@@ -18593,15 +24047,15 @@
                         <a:buNone/>
                       </a:pPr>
                       <a:r>
-                        <a:rPr lang="en-US" sz="1100" dirty="0">
+                        <a:rPr lang="en-US" sz="2000" dirty="0">
                           <a:solidFill>
-                            <a:schemeClr val="accent4">
-                              <a:lumMod val="40000"/>
-                              <a:lumOff val="60000"/>
+                            <a:schemeClr val="accent6">
+                              <a:lumMod val="60000"/>
+                              <a:lumOff val="40000"/>
                             </a:schemeClr>
                           </a:solidFill>
                         </a:rPr>
-                        <a:t>305</a:t>
+                        <a:t>225</a:t>
                       </a:r>
                     </a:p>
                   </a:txBody>
@@ -18623,7 +24077,7 @@
                 </a:tc>
                 <a:extLst>
                   <a:ext uri="{0D108BD9-81ED-4DB2-BD59-A6C34878D82A}">
-                    <a16:rowId xmlns:a16="http://schemas.microsoft.com/office/drawing/2014/main" val="2498570746"/>
+                    <a16:rowId xmlns:a16="http://schemas.microsoft.com/office/drawing/2014/main" val="93813209"/>
                   </a:ext>
                 </a:extLst>
               </a:tr>
@@ -18637,7 +24091,7 @@
                         <a:buNone/>
                       </a:pPr>
                       <a:r>
-                        <a:rPr lang="en-US" sz="1100">
+                        <a:rPr lang="en-US" sz="2000" dirty="0">
                           <a:solidFill>
                             <a:schemeClr val="accent6">
                               <a:lumMod val="60000"/>
@@ -18645,7 +24099,7 @@
                             </a:schemeClr>
                           </a:solidFill>
                         </a:rPr>
-                        <a:t>College O</a:t>
+                        <a:t>College P</a:t>
                       </a:r>
                     </a:p>
                   </a:txBody>
@@ -18674,7 +24128,7 @@
                         <a:buNone/>
                       </a:pPr>
                       <a:r>
-                        <a:rPr lang="en-US" sz="1100">
+                        <a:rPr lang="en-US" sz="2000" dirty="0">
                           <a:solidFill>
                             <a:schemeClr val="accent6">
                               <a:lumMod val="60000"/>
@@ -18682,7 +24136,7 @@
                             </a:schemeClr>
                           </a:solidFill>
                         </a:rPr>
-                        <a:t>225</a:t>
+                        <a:t>410</a:t>
                       </a:r>
                     </a:p>
                   </a:txBody>
@@ -18704,7 +24158,7 @@
                 </a:tc>
                 <a:extLst>
                   <a:ext uri="{0D108BD9-81ED-4DB2-BD59-A6C34878D82A}">
-                    <a16:rowId xmlns:a16="http://schemas.microsoft.com/office/drawing/2014/main" val="3043649514"/>
+                    <a16:rowId xmlns:a16="http://schemas.microsoft.com/office/drawing/2014/main" val="29633860"/>
                   </a:ext>
                 </a:extLst>
               </a:tr>
@@ -18718,7 +24172,7 @@
                         <a:buNone/>
                       </a:pPr>
                       <a:r>
-                        <a:rPr lang="en-US" sz="1100">
+                        <a:rPr lang="en-US" sz="2000" dirty="0">
                           <a:solidFill>
                             <a:schemeClr val="accent6">
                               <a:lumMod val="60000"/>
@@ -18726,7 +24180,7 @@
                             </a:schemeClr>
                           </a:solidFill>
                         </a:rPr>
-                        <a:t>College P</a:t>
+                        <a:t>College Q</a:t>
                       </a:r>
                     </a:p>
                   </a:txBody>
@@ -18755,7 +24209,7 @@
                         <a:buNone/>
                       </a:pPr>
                       <a:r>
-                        <a:rPr lang="en-US" sz="1100">
+                        <a:rPr lang="en-US" sz="2000" dirty="0">
                           <a:solidFill>
                             <a:schemeClr val="accent6">
                               <a:lumMod val="60000"/>
@@ -18763,7 +24217,7 @@
                             </a:schemeClr>
                           </a:solidFill>
                         </a:rPr>
-                        <a:t>410</a:t>
+                        <a:t>380</a:t>
                       </a:r>
                     </a:p>
                   </a:txBody>
@@ -18785,7 +24239,7 @@
                 </a:tc>
                 <a:extLst>
                   <a:ext uri="{0D108BD9-81ED-4DB2-BD59-A6C34878D82A}">
-                    <a16:rowId xmlns:a16="http://schemas.microsoft.com/office/drawing/2014/main" val="712288253"/>
+                    <a16:rowId xmlns:a16="http://schemas.microsoft.com/office/drawing/2014/main" val="4261086156"/>
                   </a:ext>
                 </a:extLst>
               </a:tr>
@@ -18799,7 +24253,7 @@
                         <a:buNone/>
                       </a:pPr>
                       <a:r>
-                        <a:rPr lang="en-US" sz="1100">
+                        <a:rPr lang="en-US" sz="2000" dirty="0">
                           <a:solidFill>
                             <a:schemeClr val="accent6">
                               <a:lumMod val="60000"/>
@@ -18807,7 +24261,7 @@
                             </a:schemeClr>
                           </a:solidFill>
                         </a:rPr>
-                        <a:t>College Q</a:t>
+                        <a:t>College R</a:t>
                       </a:r>
                     </a:p>
                   </a:txBody>
@@ -18836,7 +24290,7 @@
                         <a:buNone/>
                       </a:pPr>
                       <a:r>
-                        <a:rPr lang="en-US" sz="1100">
+                        <a:rPr lang="en-US" sz="2000" dirty="0">
                           <a:solidFill>
                             <a:schemeClr val="accent6">
                               <a:lumMod val="60000"/>
@@ -18844,7 +24298,7 @@
                             </a:schemeClr>
                           </a:solidFill>
                         </a:rPr>
-                        <a:t>380</a:t>
+                        <a:t>300</a:t>
                       </a:r>
                     </a:p>
                   </a:txBody>
@@ -18866,7 +24320,7 @@
                 </a:tc>
                 <a:extLst>
                   <a:ext uri="{0D108BD9-81ED-4DB2-BD59-A6C34878D82A}">
-                    <a16:rowId xmlns:a16="http://schemas.microsoft.com/office/drawing/2014/main" val="1788349151"/>
+                    <a16:rowId xmlns:a16="http://schemas.microsoft.com/office/drawing/2014/main" val="242761435"/>
                   </a:ext>
                 </a:extLst>
               </a:tr>
@@ -18880,15 +24334,15 @@
                         <a:buNone/>
                       </a:pPr>
                       <a:r>
-                        <a:rPr lang="en-US" sz="1100" dirty="0">
+                        <a:rPr lang="en-US" sz="2000" b="1" dirty="0">
                           <a:solidFill>
-                            <a:schemeClr val="accent6">
-                              <a:lumMod val="60000"/>
-                              <a:lumOff val="40000"/>
+                            <a:schemeClr val="accent4">
+                              <a:lumMod val="40000"/>
+                              <a:lumOff val="60000"/>
                             </a:schemeClr>
                           </a:solidFill>
                         </a:rPr>
-                        <a:t>College R</a:t>
+                        <a:t>College S</a:t>
                       </a:r>
                     </a:p>
                   </a:txBody>
@@ -18917,15 +24371,15 @@
                         <a:buNone/>
                       </a:pPr>
                       <a:r>
-                        <a:rPr lang="en-US" sz="1100">
+                        <a:rPr lang="en-US" sz="2000" b="1" dirty="0">
                           <a:solidFill>
-                            <a:schemeClr val="accent6">
-                              <a:lumMod val="60000"/>
-                              <a:lumOff val="40000"/>
+                            <a:schemeClr val="accent4">
+                              <a:lumMod val="40000"/>
+                              <a:lumOff val="60000"/>
                             </a:schemeClr>
                           </a:solidFill>
                         </a:rPr>
-                        <a:t>300</a:t>
+                        <a:t>420</a:t>
                       </a:r>
                     </a:p>
                   </a:txBody>
@@ -18947,7 +24401,7 @@
                 </a:tc>
                 <a:extLst>
                   <a:ext uri="{0D108BD9-81ED-4DB2-BD59-A6C34878D82A}">
-                    <a16:rowId xmlns:a16="http://schemas.microsoft.com/office/drawing/2014/main" val="1451777309"/>
+                    <a16:rowId xmlns:a16="http://schemas.microsoft.com/office/drawing/2014/main" val="1972207603"/>
                   </a:ext>
                 </a:extLst>
               </a:tr>
@@ -18961,15 +24415,15 @@
                         <a:buNone/>
                       </a:pPr>
                       <a:r>
-                        <a:rPr lang="en-US" sz="1100" b="1" dirty="0">
+                        <a:rPr lang="en-US" sz="2000">
                           <a:solidFill>
-                            <a:schemeClr val="accent4">
-                              <a:lumMod val="40000"/>
-                              <a:lumOff val="60000"/>
+                            <a:schemeClr val="accent6">
+                              <a:lumMod val="60000"/>
+                              <a:lumOff val="40000"/>
                             </a:schemeClr>
                           </a:solidFill>
                         </a:rPr>
-                        <a:t>College S</a:t>
+                        <a:t>College T</a:t>
                       </a:r>
                     </a:p>
                   </a:txBody>
@@ -18998,88 +24452,7 @@
                         <a:buNone/>
                       </a:pPr>
                       <a:r>
-                        <a:rPr lang="en-US" sz="1100" b="1" dirty="0">
-                          <a:solidFill>
-                            <a:schemeClr val="accent4">
-                              <a:lumMod val="40000"/>
-                              <a:lumOff val="60000"/>
-                            </a:schemeClr>
-                          </a:solidFill>
-                        </a:rPr>
-                        <a:t>420</a:t>
-                      </a:r>
-                    </a:p>
-                  </a:txBody>
-                  <a:tcPr marL="49447" marR="49447" marT="24724" marB="24724" anchor="ctr">
-                    <a:lnL>
-                      <a:noFill/>
-                    </a:lnL>
-                    <a:lnR>
-                      <a:noFill/>
-                    </a:lnR>
-                    <a:lnT>
-                      <a:noFill/>
-                    </a:lnT>
-                    <a:lnB>
-                      <a:noFill/>
-                    </a:lnB>
-                    <a:noFill/>
-                  </a:tcPr>
-                </a:tc>
-                <a:extLst>
-                  <a:ext uri="{0D108BD9-81ED-4DB2-BD59-A6C34878D82A}">
-                    <a16:rowId xmlns:a16="http://schemas.microsoft.com/office/drawing/2014/main" val="4054616021"/>
-                  </a:ext>
-                </a:extLst>
-              </a:tr>
-              <a:tr h="197788">
-                <a:tc>
-                  <a:txBody>
-                    <a:bodyPr/>
-                    <a:lstStyle/>
-                    <a:p>
-                      <a:pPr algn="ctr">
-                        <a:buNone/>
-                      </a:pPr>
-                      <a:r>
-                        <a:rPr lang="en-US" sz="1100">
-                          <a:solidFill>
-                            <a:schemeClr val="accent6">
-                              <a:lumMod val="60000"/>
-                              <a:lumOff val="40000"/>
-                            </a:schemeClr>
-                          </a:solidFill>
-                        </a:rPr>
-                        <a:t>College T</a:t>
-                      </a:r>
-                    </a:p>
-                  </a:txBody>
-                  <a:tcPr marL="49447" marR="49447" marT="24724" marB="24724" anchor="ctr">
-                    <a:lnL>
-                      <a:noFill/>
-                    </a:lnL>
-                    <a:lnR>
-                      <a:noFill/>
-                    </a:lnR>
-                    <a:lnT>
-                      <a:noFill/>
-                    </a:lnT>
-                    <a:lnB>
-                      <a:noFill/>
-                    </a:lnB>
-                    <a:noFill/>
-                  </a:tcPr>
-                </a:tc>
-                <a:tc>
-                  <a:txBody>
-                    <a:bodyPr/>
-                    <a:lstStyle/>
-                    <a:p>
-                      <a:pPr algn="ctr">
-                        <a:buNone/>
-                      </a:pPr>
-                      <a:r>
-                        <a:rPr lang="en-US" sz="1100" dirty="0">
+                        <a:rPr lang="en-US" sz="2000" dirty="0">
                           <a:solidFill>
                             <a:schemeClr val="accent6">
                               <a:lumMod val="60000"/>
@@ -19109,7 +24482,7 @@
                 </a:tc>
                 <a:extLst>
                   <a:ext uri="{0D108BD9-81ED-4DB2-BD59-A6C34878D82A}">
-                    <a16:rowId xmlns:a16="http://schemas.microsoft.com/office/drawing/2014/main" val="48612500"/>
+                    <a16:rowId xmlns:a16="http://schemas.microsoft.com/office/drawing/2014/main" val="2056461475"/>
                   </a:ext>
                 </a:extLst>
               </a:tr>
@@ -19121,1438 +24494,6 @@
     <p:extLst>
       <p:ext uri="{BB962C8B-B14F-4D97-AF65-F5344CB8AC3E}">
         <p14:creationId xmlns:p14="http://schemas.microsoft.com/office/powerpoint/2010/main" val="571297107"/>
-      </p:ext>
-    </p:extLst>
-  </p:cSld>
-  <p:clrMapOvr>
-    <a:masterClrMapping/>
-  </p:clrMapOvr>
-</p:sld>
-</file>
-
-<file path=ppt/slides/slide9.xml><?xml version="1.0" encoding="utf-8"?>
-<p:sld xmlns:a="http://schemas.openxmlformats.org/drawingml/2006/main" xmlns:r="http://schemas.openxmlformats.org/officeDocument/2006/relationships" xmlns:p="http://schemas.openxmlformats.org/presentationml/2006/main">
-  <p:cSld>
-    <p:spTree>
-      <p:nvGrpSpPr>
-        <p:cNvPr id="1" name="">
-          <a:extLst>
-            <a:ext uri="{FF2B5EF4-FFF2-40B4-BE49-F238E27FC236}">
-              <a16:creationId xmlns:a16="http://schemas.microsoft.com/office/drawing/2014/main" id="{35B916AE-C25E-5260-D21B-147FC161BEBD}"/>
-            </a:ext>
-          </a:extLst>
-        </p:cNvPr>
-        <p:cNvGrpSpPr/>
-        <p:nvPr/>
-      </p:nvGrpSpPr>
-      <p:grpSpPr>
-        <a:xfrm>
-          <a:off x="0" y="0"/>
-          <a:ext cx="0" cy="0"/>
-          <a:chOff x="0" y="0"/>
-          <a:chExt cx="0" cy="0"/>
-        </a:xfrm>
-      </p:grpSpPr>
-      <p:sp>
-        <p:nvSpPr>
-          <p:cNvPr id="3" name="TextBox 2">
-            <a:extLst>
-              <a:ext uri="{FF2B5EF4-FFF2-40B4-BE49-F238E27FC236}">
-                <a16:creationId xmlns:a16="http://schemas.microsoft.com/office/drawing/2014/main" id="{B070326C-4B9C-CDA3-FF65-58604DAAF70E}"/>
-              </a:ext>
-            </a:extLst>
-          </p:cNvPr>
-          <p:cNvSpPr txBox="1"/>
-          <p:nvPr/>
-        </p:nvSpPr>
-        <p:spPr>
-          <a:xfrm>
-            <a:off x="160020" y="830318"/>
-            <a:ext cx="10693908" cy="5909310"/>
-          </a:xfrm>
-          <a:prstGeom prst="rect">
-            <a:avLst/>
-          </a:prstGeom>
-          <a:noFill/>
-        </p:spPr>
-        <p:txBody>
-          <a:bodyPr wrap="square">
-            <a:spAutoFit/>
-          </a:bodyPr>
-          <a:lstStyle/>
-          <a:p>
-            <a:pPr>
-              <a:buNone/>
-            </a:pPr>
-            <a:r>
-              <a:rPr lang="en-US" dirty="0">
-                <a:solidFill>
-                  <a:schemeClr val="accent6">
-                    <a:lumMod val="60000"/>
-                    <a:lumOff val="40000"/>
-                  </a:schemeClr>
-                </a:solidFill>
-              </a:rPr>
-              <a:t>Problem: You’re the </a:t>
-            </a:r>
-            <a:r>
-              <a:rPr lang="en-US" b="1" dirty="0">
-                <a:solidFill>
-                  <a:schemeClr val="accent6">
-                    <a:lumMod val="60000"/>
-                    <a:lumOff val="40000"/>
-                  </a:schemeClr>
-                </a:solidFill>
-              </a:rPr>
-              <a:t>quality manager</a:t>
-            </a:r>
-            <a:r>
-              <a:rPr lang="en-US" dirty="0">
-                <a:solidFill>
-                  <a:schemeClr val="accent6">
-                    <a:lumMod val="60000"/>
-                    <a:lumOff val="40000"/>
-                  </a:schemeClr>
-                </a:solidFill>
-              </a:rPr>
-              <a:t> at a company that just received a </a:t>
-            </a:r>
-            <a:r>
-              <a:rPr lang="en-US" b="1" dirty="0">
-                <a:solidFill>
-                  <a:schemeClr val="accent6">
-                    <a:lumMod val="60000"/>
-                    <a:lumOff val="40000"/>
-                  </a:schemeClr>
-                </a:solidFill>
-              </a:rPr>
-              <a:t>truckload of 10,000 mangoes</a:t>
-            </a:r>
-            <a:r>
-              <a:rPr lang="en-US" dirty="0">
-                <a:solidFill>
-                  <a:schemeClr val="accent6">
-                    <a:lumMod val="60000"/>
-                    <a:lumOff val="40000"/>
-                  </a:schemeClr>
-                </a:solidFill>
-              </a:rPr>
-              <a:t> from farmers living in East, West, North, South of country.</a:t>
-            </a:r>
-          </a:p>
-          <a:p>
-            <a:pPr>
-              <a:buNone/>
-            </a:pPr>
-            <a:r>
-              <a:rPr lang="en-US" dirty="0">
-                <a:solidFill>
-                  <a:schemeClr val="accent6">
-                    <a:lumMod val="60000"/>
-                    <a:lumOff val="40000"/>
-                  </a:schemeClr>
-                </a:solidFill>
-              </a:rPr>
-              <a:t>Your boss says:  “Check if the shipment is good enough to send to the export market.”</a:t>
-            </a:r>
-          </a:p>
-          <a:p>
-            <a:pPr>
-              <a:buNone/>
-            </a:pPr>
-            <a:r>
-              <a:rPr lang="en-US" dirty="0">
-                <a:solidFill>
-                  <a:schemeClr val="accent6">
-                    <a:lumMod val="60000"/>
-                    <a:lumOff val="40000"/>
-                  </a:schemeClr>
-                </a:solidFill>
-              </a:rPr>
-              <a:t>You can’t cut open </a:t>
-            </a:r>
-            <a:r>
-              <a:rPr lang="en-US" b="1" dirty="0">
-                <a:solidFill>
-                  <a:schemeClr val="accent6">
-                    <a:lumMod val="60000"/>
-                    <a:lumOff val="40000"/>
-                  </a:schemeClr>
-                </a:solidFill>
-              </a:rPr>
-              <a:t>all 10,000 mangoes</a:t>
-            </a:r>
-            <a:r>
-              <a:rPr lang="en-US" dirty="0">
-                <a:solidFill>
-                  <a:schemeClr val="accent6">
-                    <a:lumMod val="60000"/>
-                    <a:lumOff val="40000"/>
-                  </a:schemeClr>
-                </a:solidFill>
-              </a:rPr>
-              <a:t> to test sweetness and ripeness.  You only have time to test </a:t>
-            </a:r>
-            <a:r>
-              <a:rPr lang="en-US" b="1" dirty="0">
-                <a:solidFill>
-                  <a:schemeClr val="accent6">
-                    <a:lumMod val="60000"/>
-                    <a:lumOff val="40000"/>
-                  </a:schemeClr>
-                </a:solidFill>
-              </a:rPr>
-              <a:t>50 mangoes</a:t>
-            </a:r>
-            <a:r>
-              <a:rPr lang="en-US" dirty="0">
-                <a:solidFill>
-                  <a:schemeClr val="accent6">
-                    <a:lumMod val="60000"/>
-                    <a:lumOff val="40000"/>
-                  </a:schemeClr>
-                </a:solidFill>
-              </a:rPr>
-              <a:t>.</a:t>
-            </a:r>
-          </a:p>
-          <a:p>
-            <a:pPr>
-              <a:buNone/>
-            </a:pPr>
-            <a:r>
-              <a:rPr lang="en-US" dirty="0">
-                <a:solidFill>
-                  <a:schemeClr val="accent6">
-                    <a:lumMod val="60000"/>
-                    <a:lumOff val="40000"/>
-                  </a:schemeClr>
-                </a:solidFill>
-              </a:rPr>
-              <a:t>How will you pick those 50 mangoes so that your decision represents the </a:t>
-            </a:r>
-            <a:r>
-              <a:rPr lang="en-US" b="1" dirty="0">
-                <a:solidFill>
-                  <a:schemeClr val="accent6">
-                    <a:lumMod val="60000"/>
-                    <a:lumOff val="40000"/>
-                  </a:schemeClr>
-                </a:solidFill>
-              </a:rPr>
-              <a:t>whole truckload </a:t>
-            </a:r>
-            <a:r>
-              <a:rPr lang="en-US" dirty="0">
-                <a:solidFill>
-                  <a:schemeClr val="accent6">
-                    <a:lumMod val="60000"/>
-                    <a:lumOff val="40000"/>
-                  </a:schemeClr>
-                </a:solidFill>
-              </a:rPr>
-              <a:t>?</a:t>
-            </a:r>
-          </a:p>
-          <a:p>
-            <a:endParaRPr lang="en-US" dirty="0">
-              <a:solidFill>
-                <a:schemeClr val="accent6">
-                  <a:lumMod val="60000"/>
-                  <a:lumOff val="40000"/>
-                </a:schemeClr>
-              </a:solidFill>
-            </a:endParaRPr>
-          </a:p>
-          <a:p>
-            <a:r>
-              <a:rPr lang="en-US" dirty="0">
-                <a:solidFill>
-                  <a:schemeClr val="accent6">
-                    <a:lumMod val="60000"/>
-                    <a:lumOff val="40000"/>
-                  </a:schemeClr>
-                </a:solidFill>
-              </a:rPr>
-              <a:t>Ans: Since the mangoes came from </a:t>
-            </a:r>
-            <a:r>
-              <a:rPr lang="en-US" b="1" dirty="0">
-                <a:solidFill>
-                  <a:schemeClr val="accent6">
-                    <a:lumMod val="60000"/>
-                    <a:lumOff val="40000"/>
-                  </a:schemeClr>
-                </a:solidFill>
-              </a:rPr>
-              <a:t>different regions</a:t>
-            </a:r>
-            <a:r>
-              <a:rPr lang="en-US" dirty="0">
-                <a:solidFill>
-                  <a:schemeClr val="accent6">
-                    <a:lumMod val="60000"/>
-                    <a:lumOff val="40000"/>
-                  </a:schemeClr>
-                </a:solidFill>
-              </a:rPr>
-              <a:t> (E, W, N, S), their quality may differ by source.</a:t>
-            </a:r>
-            <a:br>
-              <a:rPr lang="en-US" dirty="0">
-                <a:solidFill>
-                  <a:schemeClr val="accent6">
-                    <a:lumMod val="60000"/>
-                    <a:lumOff val="40000"/>
-                  </a:schemeClr>
-                </a:solidFill>
-              </a:rPr>
-            </a:br>
-            <a:r>
-              <a:rPr lang="en-US" dirty="0">
-                <a:solidFill>
-                  <a:schemeClr val="accent6">
-                    <a:lumMod val="60000"/>
-                    <a:lumOff val="40000"/>
-                  </a:schemeClr>
-                </a:solidFill>
-              </a:rPr>
-              <a:t>So, you should d</a:t>
-            </a:r>
-            <a:r>
-              <a:rPr lang="en-US" b="1" dirty="0">
-                <a:solidFill>
-                  <a:schemeClr val="accent6">
-                    <a:lumMod val="60000"/>
-                    <a:lumOff val="40000"/>
-                  </a:schemeClr>
-                </a:solidFill>
-              </a:rPr>
-              <a:t>ivide</a:t>
-            </a:r>
-            <a:r>
-              <a:rPr lang="en-US" dirty="0">
-                <a:solidFill>
-                  <a:schemeClr val="accent6">
-                    <a:lumMod val="60000"/>
-                    <a:lumOff val="40000"/>
-                  </a:schemeClr>
-                </a:solidFill>
-              </a:rPr>
-              <a:t> the 10,000 mangoes into 4 strata (E, W, N, S). </a:t>
-            </a:r>
-          </a:p>
-          <a:p>
-            <a:r>
-              <a:rPr lang="en-US" dirty="0">
-                <a:solidFill>
-                  <a:schemeClr val="accent6">
-                    <a:lumMod val="60000"/>
-                    <a:lumOff val="40000"/>
-                  </a:schemeClr>
-                </a:solidFill>
-              </a:rPr>
-              <a:t>Example:</a:t>
-            </a:r>
-          </a:p>
-          <a:p>
-            <a:pPr lvl="1"/>
-            <a:r>
-              <a:rPr lang="en-US" dirty="0">
-                <a:solidFill>
-                  <a:schemeClr val="accent6">
-                    <a:lumMod val="60000"/>
-                    <a:lumOff val="40000"/>
-                  </a:schemeClr>
-                </a:solidFill>
-              </a:rPr>
-              <a:t>East:     4,000 mangoes</a:t>
-            </a:r>
-          </a:p>
-          <a:p>
-            <a:pPr lvl="1"/>
-            <a:r>
-              <a:rPr lang="en-US" dirty="0">
-                <a:solidFill>
-                  <a:schemeClr val="accent6">
-                    <a:lumMod val="60000"/>
-                    <a:lumOff val="40000"/>
-                  </a:schemeClr>
-                </a:solidFill>
-              </a:rPr>
-              <a:t>West:   3,000 mangoes</a:t>
-            </a:r>
-          </a:p>
-          <a:p>
-            <a:pPr lvl="1"/>
-            <a:r>
-              <a:rPr lang="en-US" dirty="0">
-                <a:solidFill>
-                  <a:schemeClr val="accent6">
-                    <a:lumMod val="60000"/>
-                    <a:lumOff val="40000"/>
-                  </a:schemeClr>
-                </a:solidFill>
-              </a:rPr>
-              <a:t>North:  3,000 mangoes</a:t>
-            </a:r>
-          </a:p>
-          <a:p>
-            <a:pPr lvl="1"/>
-            <a:r>
-              <a:rPr lang="en-US" dirty="0">
-                <a:solidFill>
-                  <a:schemeClr val="accent6">
-                    <a:lumMod val="60000"/>
-                    <a:lumOff val="40000"/>
-                  </a:schemeClr>
-                </a:solidFill>
-              </a:rPr>
-              <a:t>South:  0 mangoes</a:t>
-            </a:r>
-          </a:p>
-          <a:p>
-            <a:endParaRPr lang="en-US" dirty="0">
-              <a:solidFill>
-                <a:schemeClr val="accent6">
-                  <a:lumMod val="60000"/>
-                  <a:lumOff val="40000"/>
-                </a:schemeClr>
-              </a:solidFill>
-            </a:endParaRPr>
-          </a:p>
-          <a:p>
-            <a:r>
-              <a:rPr lang="en-US" dirty="0">
-                <a:solidFill>
-                  <a:schemeClr val="accent6">
-                    <a:lumMod val="60000"/>
-                    <a:lumOff val="40000"/>
-                  </a:schemeClr>
-                </a:solidFill>
-              </a:rPr>
-              <a:t>Here 50 is 50/10,000 x 100 = 0.5%. So, </a:t>
-            </a:r>
-            <a:r>
-              <a:rPr lang="en-US" b="1" dirty="0">
-                <a:solidFill>
-                  <a:schemeClr val="accent6">
-                    <a:lumMod val="60000"/>
-                    <a:lumOff val="40000"/>
-                  </a:schemeClr>
-                </a:solidFill>
-              </a:rPr>
-              <a:t>Sample proportionally</a:t>
-            </a:r>
-            <a:r>
-              <a:rPr lang="en-US" dirty="0">
-                <a:solidFill>
-                  <a:schemeClr val="accent6">
-                    <a:lumMod val="60000"/>
-                    <a:lumOff val="40000"/>
-                  </a:schemeClr>
-                </a:solidFill>
-              </a:rPr>
-              <a:t> from each stratum, that is, 0.5% from each strata:</a:t>
-            </a:r>
-          </a:p>
-          <a:p>
-            <a:pPr lvl="1"/>
-            <a:r>
-              <a:rPr lang="en-US" dirty="0">
-                <a:solidFill>
-                  <a:schemeClr val="accent6">
-                    <a:lumMod val="60000"/>
-                    <a:lumOff val="40000"/>
-                  </a:schemeClr>
-                </a:solidFill>
-              </a:rPr>
-              <a:t>East     → 4,000  × 0.5 = </a:t>
-            </a:r>
-            <a:r>
-              <a:rPr lang="en-US" b="1" dirty="0">
-                <a:solidFill>
-                  <a:schemeClr val="accent6">
-                    <a:lumMod val="60000"/>
-                    <a:lumOff val="40000"/>
-                  </a:schemeClr>
-                </a:solidFill>
-              </a:rPr>
-              <a:t>20 mangoes</a:t>
-            </a:r>
-            <a:endParaRPr lang="en-US" dirty="0">
-              <a:solidFill>
-                <a:schemeClr val="accent6">
-                  <a:lumMod val="60000"/>
-                  <a:lumOff val="40000"/>
-                </a:schemeClr>
-              </a:solidFill>
-            </a:endParaRPr>
-          </a:p>
-          <a:p>
-            <a:pPr lvl="1"/>
-            <a:r>
-              <a:rPr lang="en-US" dirty="0">
-                <a:solidFill>
-                  <a:schemeClr val="accent6">
-                    <a:lumMod val="60000"/>
-                    <a:lumOff val="40000"/>
-                  </a:schemeClr>
-                </a:solidFill>
-              </a:rPr>
-              <a:t>West   → 3,000 × 0.5 = </a:t>
-            </a:r>
-            <a:r>
-              <a:rPr lang="en-US" b="1" dirty="0">
-                <a:solidFill>
-                  <a:schemeClr val="accent6">
-                    <a:lumMod val="60000"/>
-                    <a:lumOff val="40000"/>
-                  </a:schemeClr>
-                </a:solidFill>
-              </a:rPr>
-              <a:t>15 mangoes</a:t>
-            </a:r>
-            <a:endParaRPr lang="en-US" dirty="0">
-              <a:solidFill>
-                <a:schemeClr val="accent6">
-                  <a:lumMod val="60000"/>
-                  <a:lumOff val="40000"/>
-                </a:schemeClr>
-              </a:solidFill>
-            </a:endParaRPr>
-          </a:p>
-          <a:p>
-            <a:pPr lvl="1"/>
-            <a:r>
-              <a:rPr lang="en-US" dirty="0">
-                <a:solidFill>
-                  <a:schemeClr val="accent6">
-                    <a:lumMod val="60000"/>
-                    <a:lumOff val="40000"/>
-                  </a:schemeClr>
-                </a:solidFill>
-              </a:rPr>
-              <a:t>North  → 3,000 × 0.5 = </a:t>
-            </a:r>
-            <a:r>
-              <a:rPr lang="en-US" b="1" dirty="0">
-                <a:solidFill>
-                  <a:schemeClr val="accent6">
-                    <a:lumMod val="60000"/>
-                    <a:lumOff val="40000"/>
-                  </a:schemeClr>
-                </a:solidFill>
-              </a:rPr>
-              <a:t>15 mangoes</a:t>
-            </a:r>
-          </a:p>
-          <a:p>
-            <a:pPr lvl="1"/>
-            <a:r>
-              <a:rPr lang="en-US" dirty="0">
-                <a:solidFill>
-                  <a:schemeClr val="accent6">
-                    <a:lumMod val="60000"/>
-                    <a:lumOff val="40000"/>
-                  </a:schemeClr>
-                </a:solidFill>
-              </a:rPr>
-              <a:t>South  → 0 × 0.5 = </a:t>
-            </a:r>
-            <a:r>
-              <a:rPr lang="en-US" b="1" dirty="0">
-                <a:solidFill>
-                  <a:schemeClr val="accent6">
-                    <a:lumMod val="60000"/>
-                    <a:lumOff val="40000"/>
-                  </a:schemeClr>
-                </a:solidFill>
-              </a:rPr>
-              <a:t>0   mangoes</a:t>
-            </a:r>
-          </a:p>
-          <a:p>
-            <a:pPr lvl="1"/>
-            <a:endParaRPr lang="en-US" dirty="0">
-              <a:solidFill>
-                <a:schemeClr val="accent6">
-                  <a:lumMod val="60000"/>
-                  <a:lumOff val="40000"/>
-                </a:schemeClr>
-              </a:solidFill>
-            </a:endParaRPr>
-          </a:p>
-          <a:p>
-            <a:r>
-              <a:rPr lang="en-US" dirty="0">
-                <a:solidFill>
-                  <a:schemeClr val="accent6">
-                    <a:lumMod val="60000"/>
-                    <a:lumOff val="40000"/>
-                  </a:schemeClr>
-                </a:solidFill>
-              </a:rPr>
-              <a:t>Then </a:t>
-            </a:r>
-            <a:r>
-              <a:rPr lang="en-US" b="1" dirty="0">
-                <a:solidFill>
-                  <a:schemeClr val="accent6">
-                    <a:lumMod val="60000"/>
-                    <a:lumOff val="40000"/>
-                  </a:schemeClr>
-                </a:solidFill>
-              </a:rPr>
-              <a:t>randomly select</a:t>
-            </a:r>
-            <a:r>
-              <a:rPr lang="en-US" dirty="0">
-                <a:solidFill>
-                  <a:schemeClr val="accent6">
-                    <a:lumMod val="60000"/>
-                    <a:lumOff val="40000"/>
-                  </a:schemeClr>
-                </a:solidFill>
-              </a:rPr>
-              <a:t> those mangoes within each group. So, we use </a:t>
-            </a:r>
-            <a:r>
-              <a:rPr lang="en-US" b="1" dirty="0">
-                <a:solidFill>
-                  <a:schemeClr val="accent4">
-                    <a:lumMod val="60000"/>
-                    <a:lumOff val="40000"/>
-                  </a:schemeClr>
-                </a:solidFill>
-              </a:rPr>
-              <a:t>Stratified Random Sampling</a:t>
-            </a:r>
-            <a:r>
-              <a:rPr lang="en-US" dirty="0">
-                <a:solidFill>
-                  <a:schemeClr val="accent6">
-                    <a:lumMod val="60000"/>
-                    <a:lumOff val="40000"/>
-                  </a:schemeClr>
-                </a:solidFill>
-              </a:rPr>
-              <a:t>.</a:t>
-            </a:r>
-          </a:p>
-        </p:txBody>
-      </p:sp>
-      <mc:AlternateContent xmlns:mc="http://schemas.openxmlformats.org/markup-compatibility/2006">
-        <mc:Choice xmlns:p14="http://schemas.microsoft.com/office/powerpoint/2010/main" Requires="p14">
-          <p:contentPart p14:bwMode="auto" r:id="rId2">
-            <p14:nvContentPartPr>
-              <p14:cNvPr id="2" name="Ink 1">
-                <a:extLst>
-                  <a:ext uri="{FF2B5EF4-FFF2-40B4-BE49-F238E27FC236}">
-                    <a16:creationId xmlns:a16="http://schemas.microsoft.com/office/drawing/2014/main" id="{B161FC14-D3CE-80E2-8840-22E7FA551260}"/>
-                  </a:ext>
-                </a:extLst>
-              </p14:cNvPr>
-              <p14:cNvContentPartPr/>
-              <p14:nvPr/>
-            </p14:nvContentPartPr>
-            <p14:xfrm>
-              <a:off x="9476424" y="2912760"/>
-              <a:ext cx="2489400" cy="1425600"/>
-            </p14:xfrm>
-          </p:contentPart>
-        </mc:Choice>
-        <mc:Fallback>
-          <p:pic>
-            <p:nvPicPr>
-              <p:cNvPr id="2" name="Ink 1">
-                <a:extLst>
-                  <a:ext uri="{FF2B5EF4-FFF2-40B4-BE49-F238E27FC236}">
-                    <a16:creationId xmlns:a16="http://schemas.microsoft.com/office/drawing/2014/main" id="{B161FC14-D3CE-80E2-8840-22E7FA551260}"/>
-                  </a:ext>
-                </a:extLst>
-              </p:cNvPr>
-              <p:cNvPicPr/>
-              <p:nvPr/>
-            </p:nvPicPr>
-            <p:blipFill>
-              <a:blip r:embed="rId3"/>
-              <a:stretch>
-                <a:fillRect/>
-              </a:stretch>
-            </p:blipFill>
-            <p:spPr>
-              <a:xfrm>
-                <a:off x="9440424" y="2877120"/>
-                <a:ext cx="2561040" cy="1497240"/>
-              </a:xfrm>
-              <a:prstGeom prst="rect">
-                <a:avLst/>
-              </a:prstGeom>
-            </p:spPr>
-          </p:pic>
-        </mc:Fallback>
-      </mc:AlternateContent>
-      <p:grpSp>
-        <p:nvGrpSpPr>
-          <p:cNvPr id="4" name="Group 3">
-            <a:extLst>
-              <a:ext uri="{FF2B5EF4-FFF2-40B4-BE49-F238E27FC236}">
-                <a16:creationId xmlns:a16="http://schemas.microsoft.com/office/drawing/2014/main" id="{8AC39236-A046-EB91-BAB1-E51F26599046}"/>
-              </a:ext>
-            </a:extLst>
-          </p:cNvPr>
-          <p:cNvGrpSpPr/>
-          <p:nvPr/>
-        </p:nvGrpSpPr>
-        <p:grpSpPr>
-          <a:xfrm>
-            <a:off x="9747864" y="3046320"/>
-            <a:ext cx="1705320" cy="1038600"/>
-            <a:chOff x="9564984" y="1894176"/>
-            <a:chExt cx="1705320" cy="1038600"/>
-          </a:xfrm>
-        </p:grpSpPr>
-        <mc:AlternateContent xmlns:mc="http://schemas.openxmlformats.org/markup-compatibility/2006">
-          <mc:Choice xmlns:p14="http://schemas.microsoft.com/office/powerpoint/2010/main" Requires="p14">
-            <p:contentPart p14:bwMode="auto" r:id="rId4">
-              <p14:nvContentPartPr>
-                <p14:cNvPr id="5" name="Ink 4">
-                  <a:extLst>
-                    <a:ext uri="{FF2B5EF4-FFF2-40B4-BE49-F238E27FC236}">
-                      <a16:creationId xmlns:a16="http://schemas.microsoft.com/office/drawing/2014/main" id="{CD78B032-F2D8-FB01-2198-1E953D59B685}"/>
-                    </a:ext>
-                  </a:extLst>
-                </p14:cNvPr>
-                <p14:cNvContentPartPr/>
-                <p14:nvPr/>
-              </p14:nvContentPartPr>
-              <p14:xfrm>
-                <a:off x="10197504" y="1894176"/>
-                <a:ext cx="213840" cy="233280"/>
-              </p14:xfrm>
-            </p:contentPart>
-          </mc:Choice>
-          <mc:Fallback>
-            <p:pic>
-              <p:nvPicPr>
-                <p:cNvPr id="5" name="Ink 4">
-                  <a:extLst>
-                    <a:ext uri="{FF2B5EF4-FFF2-40B4-BE49-F238E27FC236}">
-                      <a16:creationId xmlns:a16="http://schemas.microsoft.com/office/drawing/2014/main" id="{CD78B032-F2D8-FB01-2198-1E953D59B685}"/>
-                    </a:ext>
-                  </a:extLst>
-                </p:cNvPr>
-                <p:cNvPicPr/>
-                <p:nvPr/>
-              </p:nvPicPr>
-              <p:blipFill>
-                <a:blip r:embed="rId5"/>
-                <a:stretch>
-                  <a:fillRect/>
-                </a:stretch>
-              </p:blipFill>
-              <p:spPr>
-                <a:xfrm>
-                  <a:off x="10161864" y="1858176"/>
-                  <a:ext cx="285480" cy="304920"/>
-                </a:xfrm>
-                <a:prstGeom prst="rect">
-                  <a:avLst/>
-                </a:prstGeom>
-              </p:spPr>
-            </p:pic>
-          </mc:Fallback>
-        </mc:AlternateContent>
-        <mc:AlternateContent xmlns:mc="http://schemas.openxmlformats.org/markup-compatibility/2006">
-          <mc:Choice xmlns:p14="http://schemas.microsoft.com/office/powerpoint/2010/main" Requires="p14">
-            <p:contentPart p14:bwMode="auto" r:id="rId6">
-              <p14:nvContentPartPr>
-                <p14:cNvPr id="6" name="Ink 5">
-                  <a:extLst>
-                    <a:ext uri="{FF2B5EF4-FFF2-40B4-BE49-F238E27FC236}">
-                      <a16:creationId xmlns:a16="http://schemas.microsoft.com/office/drawing/2014/main" id="{AABFE765-875C-CEB7-D011-CA09C0F1C3F2}"/>
-                    </a:ext>
-                  </a:extLst>
-                </p14:cNvPr>
-                <p14:cNvContentPartPr/>
-                <p14:nvPr/>
-              </p14:nvContentPartPr>
-              <p14:xfrm>
-                <a:off x="10129464" y="2691216"/>
-                <a:ext cx="284760" cy="182160"/>
-              </p14:xfrm>
-            </p:contentPart>
-          </mc:Choice>
-          <mc:Fallback>
-            <p:pic>
-              <p:nvPicPr>
-                <p:cNvPr id="6" name="Ink 5">
-                  <a:extLst>
-                    <a:ext uri="{FF2B5EF4-FFF2-40B4-BE49-F238E27FC236}">
-                      <a16:creationId xmlns:a16="http://schemas.microsoft.com/office/drawing/2014/main" id="{AABFE765-875C-CEB7-D011-CA09C0F1C3F2}"/>
-                    </a:ext>
-                  </a:extLst>
-                </p:cNvPr>
-                <p:cNvPicPr/>
-                <p:nvPr/>
-              </p:nvPicPr>
-              <p:blipFill>
-                <a:blip r:embed="rId7"/>
-                <a:stretch>
-                  <a:fillRect/>
-                </a:stretch>
-              </p:blipFill>
-              <p:spPr>
-                <a:xfrm>
-                  <a:off x="10093824" y="2655216"/>
-                  <a:ext cx="356400" cy="253800"/>
-                </a:xfrm>
-                <a:prstGeom prst="rect">
-                  <a:avLst/>
-                </a:prstGeom>
-              </p:spPr>
-            </p:pic>
-          </mc:Fallback>
-        </mc:AlternateContent>
-        <mc:AlternateContent xmlns:mc="http://schemas.openxmlformats.org/markup-compatibility/2006">
-          <mc:Choice xmlns:p14="http://schemas.microsoft.com/office/powerpoint/2010/main" Requires="p14">
-            <p:contentPart p14:bwMode="auto" r:id="rId8">
-              <p14:nvContentPartPr>
-                <p14:cNvPr id="7" name="Ink 6">
-                  <a:extLst>
-                    <a:ext uri="{FF2B5EF4-FFF2-40B4-BE49-F238E27FC236}">
-                      <a16:creationId xmlns:a16="http://schemas.microsoft.com/office/drawing/2014/main" id="{BD6E7E84-4609-24DF-0A31-13E704E79263}"/>
-                    </a:ext>
-                  </a:extLst>
-                </p14:cNvPr>
-                <p14:cNvContentPartPr/>
-                <p14:nvPr/>
-              </p14:nvContentPartPr>
-              <p14:xfrm>
-                <a:off x="9658584" y="2311776"/>
-                <a:ext cx="295200" cy="199800"/>
-              </p14:xfrm>
-            </p:contentPart>
-          </mc:Choice>
-          <mc:Fallback>
-            <p:pic>
-              <p:nvPicPr>
-                <p:cNvPr id="7" name="Ink 6">
-                  <a:extLst>
-                    <a:ext uri="{FF2B5EF4-FFF2-40B4-BE49-F238E27FC236}">
-                      <a16:creationId xmlns:a16="http://schemas.microsoft.com/office/drawing/2014/main" id="{BD6E7E84-4609-24DF-0A31-13E704E79263}"/>
-                    </a:ext>
-                  </a:extLst>
-                </p:cNvPr>
-                <p:cNvPicPr/>
-                <p:nvPr/>
-              </p:nvPicPr>
-              <p:blipFill>
-                <a:blip r:embed="rId9"/>
-                <a:stretch>
-                  <a:fillRect/>
-                </a:stretch>
-              </p:blipFill>
-              <p:spPr>
-                <a:xfrm>
-                  <a:off x="9622944" y="2275776"/>
-                  <a:ext cx="366840" cy="271440"/>
-                </a:xfrm>
-                <a:prstGeom prst="rect">
-                  <a:avLst/>
-                </a:prstGeom>
-              </p:spPr>
-            </p:pic>
-          </mc:Fallback>
-        </mc:AlternateContent>
-        <mc:AlternateContent xmlns:mc="http://schemas.openxmlformats.org/markup-compatibility/2006">
-          <mc:Choice xmlns:p14="http://schemas.microsoft.com/office/powerpoint/2010/main" Requires="p14">
-            <p:contentPart p14:bwMode="auto" r:id="rId10">
-              <p14:nvContentPartPr>
-                <p14:cNvPr id="8" name="Ink 7">
-                  <a:extLst>
-                    <a:ext uri="{FF2B5EF4-FFF2-40B4-BE49-F238E27FC236}">
-                      <a16:creationId xmlns:a16="http://schemas.microsoft.com/office/drawing/2014/main" id="{B62A6372-100D-62C6-0456-24EC049412BA}"/>
-                    </a:ext>
-                  </a:extLst>
-                </p14:cNvPr>
-                <p14:cNvContentPartPr/>
-                <p14:nvPr/>
-              </p14:nvContentPartPr>
-              <p14:xfrm>
-                <a:off x="10820664" y="2324736"/>
-                <a:ext cx="55800" cy="173520"/>
-              </p14:xfrm>
-            </p:contentPart>
-          </mc:Choice>
-          <mc:Fallback>
-            <p:pic>
-              <p:nvPicPr>
-                <p:cNvPr id="8" name="Ink 7">
-                  <a:extLst>
-                    <a:ext uri="{FF2B5EF4-FFF2-40B4-BE49-F238E27FC236}">
-                      <a16:creationId xmlns:a16="http://schemas.microsoft.com/office/drawing/2014/main" id="{B62A6372-100D-62C6-0456-24EC049412BA}"/>
-                    </a:ext>
-                  </a:extLst>
-                </p:cNvPr>
-                <p:cNvPicPr/>
-                <p:nvPr/>
-              </p:nvPicPr>
-              <p:blipFill>
-                <a:blip r:embed="rId11"/>
-                <a:stretch>
-                  <a:fillRect/>
-                </a:stretch>
-              </p:blipFill>
-              <p:spPr>
-                <a:xfrm>
-                  <a:off x="10785024" y="2288736"/>
-                  <a:ext cx="127440" cy="245160"/>
-                </a:xfrm>
-                <a:prstGeom prst="rect">
-                  <a:avLst/>
-                </a:prstGeom>
-              </p:spPr>
-            </p:pic>
-          </mc:Fallback>
-        </mc:AlternateContent>
-        <mc:AlternateContent xmlns:mc="http://schemas.openxmlformats.org/markup-compatibility/2006">
-          <mc:Choice xmlns:p14="http://schemas.microsoft.com/office/powerpoint/2010/main" Requires="p14">
-            <p:contentPart p14:bwMode="auto" r:id="rId12">
-              <p14:nvContentPartPr>
-                <p14:cNvPr id="9" name="Ink 8">
-                  <a:extLst>
-                    <a:ext uri="{FF2B5EF4-FFF2-40B4-BE49-F238E27FC236}">
-                      <a16:creationId xmlns:a16="http://schemas.microsoft.com/office/drawing/2014/main" id="{F3E672FC-7A41-4A53-2D23-4AB778D04C7F}"/>
-                    </a:ext>
-                  </a:extLst>
-                </p14:cNvPr>
-                <p14:cNvContentPartPr/>
-                <p14:nvPr/>
-              </p14:nvContentPartPr>
-              <p14:xfrm>
-                <a:off x="10833624" y="2276496"/>
-                <a:ext cx="299160" cy="25200"/>
-              </p14:xfrm>
-            </p:contentPart>
-          </mc:Choice>
-          <mc:Fallback>
-            <p:pic>
-              <p:nvPicPr>
-                <p:cNvPr id="9" name="Ink 8">
-                  <a:extLst>
-                    <a:ext uri="{FF2B5EF4-FFF2-40B4-BE49-F238E27FC236}">
-                      <a16:creationId xmlns:a16="http://schemas.microsoft.com/office/drawing/2014/main" id="{F3E672FC-7A41-4A53-2D23-4AB778D04C7F}"/>
-                    </a:ext>
-                  </a:extLst>
-                </p:cNvPr>
-                <p:cNvPicPr/>
-                <p:nvPr/>
-              </p:nvPicPr>
-              <p:blipFill>
-                <a:blip r:embed="rId13"/>
-                <a:stretch>
-                  <a:fillRect/>
-                </a:stretch>
-              </p:blipFill>
-              <p:spPr>
-                <a:xfrm>
-                  <a:off x="10797624" y="2240856"/>
-                  <a:ext cx="370800" cy="96840"/>
-                </a:xfrm>
-                <a:prstGeom prst="rect">
-                  <a:avLst/>
-                </a:prstGeom>
-              </p:spPr>
-            </p:pic>
-          </mc:Fallback>
-        </mc:AlternateContent>
-        <mc:AlternateContent xmlns:mc="http://schemas.openxmlformats.org/markup-compatibility/2006">
-          <mc:Choice xmlns:p14="http://schemas.microsoft.com/office/powerpoint/2010/main" Requires="p14">
-            <p:contentPart p14:bwMode="auto" r:id="rId14">
-              <p14:nvContentPartPr>
-                <p14:cNvPr id="10" name="Ink 9">
-                  <a:extLst>
-                    <a:ext uri="{FF2B5EF4-FFF2-40B4-BE49-F238E27FC236}">
-                      <a16:creationId xmlns:a16="http://schemas.microsoft.com/office/drawing/2014/main" id="{CC9F2E77-A6BA-F1CD-EFB6-52D76FEEA777}"/>
-                    </a:ext>
-                  </a:extLst>
-                </p14:cNvPr>
-                <p14:cNvContentPartPr/>
-                <p14:nvPr/>
-              </p14:nvContentPartPr>
-              <p14:xfrm>
-                <a:off x="10930464" y="2393136"/>
-                <a:ext cx="135720" cy="14760"/>
-              </p14:xfrm>
-            </p:contentPart>
-          </mc:Choice>
-          <mc:Fallback>
-            <p:pic>
-              <p:nvPicPr>
-                <p:cNvPr id="10" name="Ink 9">
-                  <a:extLst>
-                    <a:ext uri="{FF2B5EF4-FFF2-40B4-BE49-F238E27FC236}">
-                      <a16:creationId xmlns:a16="http://schemas.microsoft.com/office/drawing/2014/main" id="{CC9F2E77-A6BA-F1CD-EFB6-52D76FEEA777}"/>
-                    </a:ext>
-                  </a:extLst>
-                </p:cNvPr>
-                <p:cNvPicPr/>
-                <p:nvPr/>
-              </p:nvPicPr>
-              <p:blipFill>
-                <a:blip r:embed="rId15"/>
-                <a:stretch>
-                  <a:fillRect/>
-                </a:stretch>
-              </p:blipFill>
-              <p:spPr>
-                <a:xfrm>
-                  <a:off x="10894464" y="2357136"/>
-                  <a:ext cx="207360" cy="86400"/>
-                </a:xfrm>
-                <a:prstGeom prst="rect">
-                  <a:avLst/>
-                </a:prstGeom>
-              </p:spPr>
-            </p:pic>
-          </mc:Fallback>
-        </mc:AlternateContent>
-        <mc:AlternateContent xmlns:mc="http://schemas.openxmlformats.org/markup-compatibility/2006">
-          <mc:Choice xmlns:p14="http://schemas.microsoft.com/office/powerpoint/2010/main" Requires="p14">
-            <p:contentPart p14:bwMode="auto" r:id="rId16">
-              <p14:nvContentPartPr>
-                <p14:cNvPr id="11" name="Ink 10">
-                  <a:extLst>
-                    <a:ext uri="{FF2B5EF4-FFF2-40B4-BE49-F238E27FC236}">
-                      <a16:creationId xmlns:a16="http://schemas.microsoft.com/office/drawing/2014/main" id="{0A1C3762-7FB2-2270-CCC6-5D290214B965}"/>
-                    </a:ext>
-                  </a:extLst>
-                </p14:cNvPr>
-                <p14:cNvContentPartPr/>
-                <p14:nvPr/>
-              </p14:nvContentPartPr>
-              <p14:xfrm>
-                <a:off x="10878624" y="2528856"/>
-                <a:ext cx="173520" cy="5400"/>
-              </p14:xfrm>
-            </p:contentPart>
-          </mc:Choice>
-          <mc:Fallback>
-            <p:pic>
-              <p:nvPicPr>
-                <p:cNvPr id="11" name="Ink 10">
-                  <a:extLst>
-                    <a:ext uri="{FF2B5EF4-FFF2-40B4-BE49-F238E27FC236}">
-                      <a16:creationId xmlns:a16="http://schemas.microsoft.com/office/drawing/2014/main" id="{0A1C3762-7FB2-2270-CCC6-5D290214B965}"/>
-                    </a:ext>
-                  </a:extLst>
-                </p:cNvPr>
-                <p:cNvPicPr/>
-                <p:nvPr/>
-              </p:nvPicPr>
-              <p:blipFill>
-                <a:blip r:embed="rId17"/>
-                <a:stretch>
-                  <a:fillRect/>
-                </a:stretch>
-              </p:blipFill>
-              <p:spPr>
-                <a:xfrm>
-                  <a:off x="10842984" y="2493216"/>
-                  <a:ext cx="245160" cy="77040"/>
-                </a:xfrm>
-                <a:prstGeom prst="rect">
-                  <a:avLst/>
-                </a:prstGeom>
-              </p:spPr>
-            </p:pic>
-          </mc:Fallback>
-        </mc:AlternateContent>
-        <mc:AlternateContent xmlns:mc="http://schemas.openxmlformats.org/markup-compatibility/2006">
-          <mc:Choice xmlns:p14="http://schemas.microsoft.com/office/powerpoint/2010/main" Requires="p14">
-            <p:contentPart p14:bwMode="auto" r:id="rId18">
-              <p14:nvContentPartPr>
-                <p14:cNvPr id="12" name="Ink 11">
-                  <a:extLst>
-                    <a:ext uri="{FF2B5EF4-FFF2-40B4-BE49-F238E27FC236}">
-                      <a16:creationId xmlns:a16="http://schemas.microsoft.com/office/drawing/2014/main" id="{C665B3D5-75FF-DFD8-75D2-7BCFBF5A9D27}"/>
-                    </a:ext>
-                  </a:extLst>
-                </p14:cNvPr>
-                <p14:cNvContentPartPr/>
-                <p14:nvPr/>
-              </p14:nvContentPartPr>
-              <p14:xfrm>
-                <a:off x="10420344" y="2306736"/>
-                <a:ext cx="849960" cy="626040"/>
-              </p14:xfrm>
-            </p:contentPart>
-          </mc:Choice>
-          <mc:Fallback>
-            <p:pic>
-              <p:nvPicPr>
-                <p:cNvPr id="12" name="Ink 11">
-                  <a:extLst>
-                    <a:ext uri="{FF2B5EF4-FFF2-40B4-BE49-F238E27FC236}">
-                      <a16:creationId xmlns:a16="http://schemas.microsoft.com/office/drawing/2014/main" id="{C665B3D5-75FF-DFD8-75D2-7BCFBF5A9D27}"/>
-                    </a:ext>
-                  </a:extLst>
-                </p:cNvPr>
-                <p:cNvPicPr/>
-                <p:nvPr/>
-              </p:nvPicPr>
-              <p:blipFill>
-                <a:blip r:embed="rId19"/>
-                <a:stretch>
-                  <a:fillRect/>
-                </a:stretch>
-              </p:blipFill>
-              <p:spPr>
-                <a:xfrm>
-                  <a:off x="10384344" y="2271096"/>
-                  <a:ext cx="921600" cy="697680"/>
-                </a:xfrm>
-                <a:prstGeom prst="rect">
-                  <a:avLst/>
-                </a:prstGeom>
-              </p:spPr>
-            </p:pic>
-          </mc:Fallback>
-        </mc:AlternateContent>
-        <mc:AlternateContent xmlns:mc="http://schemas.openxmlformats.org/markup-compatibility/2006">
-          <mc:Choice xmlns:p14="http://schemas.microsoft.com/office/powerpoint/2010/main" Requires="p14">
-            <p:contentPart p14:bwMode="auto" r:id="rId20">
-              <p14:nvContentPartPr>
-                <p14:cNvPr id="13" name="Ink 12">
-                  <a:extLst>
-                    <a:ext uri="{FF2B5EF4-FFF2-40B4-BE49-F238E27FC236}">
-                      <a16:creationId xmlns:a16="http://schemas.microsoft.com/office/drawing/2014/main" id="{BB77EF42-67FF-51C3-197B-DAD9D1FA2277}"/>
-                    </a:ext>
-                  </a:extLst>
-                </p14:cNvPr>
-                <p14:cNvContentPartPr/>
-                <p14:nvPr/>
-              </p14:nvContentPartPr>
-              <p14:xfrm>
-                <a:off x="9564984" y="2473776"/>
-                <a:ext cx="890640" cy="315000"/>
-              </p14:xfrm>
-            </p:contentPart>
-          </mc:Choice>
-          <mc:Fallback>
-            <p:pic>
-              <p:nvPicPr>
-                <p:cNvPr id="13" name="Ink 12">
-                  <a:extLst>
-                    <a:ext uri="{FF2B5EF4-FFF2-40B4-BE49-F238E27FC236}">
-                      <a16:creationId xmlns:a16="http://schemas.microsoft.com/office/drawing/2014/main" id="{BB77EF42-67FF-51C3-197B-DAD9D1FA2277}"/>
-                    </a:ext>
-                  </a:extLst>
-                </p:cNvPr>
-                <p:cNvPicPr/>
-                <p:nvPr/>
-              </p:nvPicPr>
-              <p:blipFill>
-                <a:blip r:embed="rId21"/>
-                <a:stretch>
-                  <a:fillRect/>
-                </a:stretch>
-              </p:blipFill>
-              <p:spPr>
-                <a:xfrm>
-                  <a:off x="9528984" y="2438136"/>
-                  <a:ext cx="962280" cy="386640"/>
-                </a:xfrm>
-                <a:prstGeom prst="rect">
-                  <a:avLst/>
-                </a:prstGeom>
-              </p:spPr>
-            </p:pic>
-          </mc:Fallback>
-        </mc:AlternateContent>
-        <mc:AlternateContent xmlns:mc="http://schemas.openxmlformats.org/markup-compatibility/2006">
-          <mc:Choice xmlns:p14="http://schemas.microsoft.com/office/powerpoint/2010/main" Requires="p14">
-            <p:contentPart p14:bwMode="auto" r:id="rId22">
-              <p14:nvContentPartPr>
-                <p14:cNvPr id="14" name="Ink 13">
-                  <a:extLst>
-                    <a:ext uri="{FF2B5EF4-FFF2-40B4-BE49-F238E27FC236}">
-                      <a16:creationId xmlns:a16="http://schemas.microsoft.com/office/drawing/2014/main" id="{2274C4E0-C1EE-A89C-4509-8AB995F38CF5}"/>
-                    </a:ext>
-                  </a:extLst>
-                </p14:cNvPr>
-                <p14:cNvContentPartPr/>
-                <p14:nvPr/>
-              </p14:nvContentPartPr>
-              <p14:xfrm>
-                <a:off x="10390104" y="2300616"/>
-                <a:ext cx="70560" cy="146160"/>
-              </p14:xfrm>
-            </p:contentPart>
-          </mc:Choice>
-          <mc:Fallback>
-            <p:pic>
-              <p:nvPicPr>
-                <p:cNvPr id="14" name="Ink 13">
-                  <a:extLst>
-                    <a:ext uri="{FF2B5EF4-FFF2-40B4-BE49-F238E27FC236}">
-                      <a16:creationId xmlns:a16="http://schemas.microsoft.com/office/drawing/2014/main" id="{2274C4E0-C1EE-A89C-4509-8AB995F38CF5}"/>
-                    </a:ext>
-                  </a:extLst>
-                </p:cNvPr>
-                <p:cNvPicPr/>
-                <p:nvPr/>
-              </p:nvPicPr>
-              <p:blipFill>
-                <a:blip r:embed="rId23"/>
-                <a:stretch>
-                  <a:fillRect/>
-                </a:stretch>
-              </p:blipFill>
-              <p:spPr>
-                <a:xfrm>
-                  <a:off x="10354464" y="2264616"/>
-                  <a:ext cx="142200" cy="217800"/>
-                </a:xfrm>
-                <a:prstGeom prst="rect">
-                  <a:avLst/>
-                </a:prstGeom>
-              </p:spPr>
-            </p:pic>
-          </mc:Fallback>
-        </mc:AlternateContent>
-      </p:grpSp>
-      <p:grpSp>
-        <p:nvGrpSpPr>
-          <p:cNvPr id="19" name="Group 18">
-            <a:extLst>
-              <a:ext uri="{FF2B5EF4-FFF2-40B4-BE49-F238E27FC236}">
-                <a16:creationId xmlns:a16="http://schemas.microsoft.com/office/drawing/2014/main" id="{FFA449C8-E412-BC7C-A090-D4B45AE10894}"/>
-              </a:ext>
-            </a:extLst>
-          </p:cNvPr>
-          <p:cNvGrpSpPr/>
-          <p:nvPr/>
-        </p:nvGrpSpPr>
-        <p:grpSpPr>
-          <a:xfrm>
-            <a:off x="9805104" y="3041496"/>
-            <a:ext cx="1516680" cy="1008720"/>
-            <a:chOff x="9805104" y="3041496"/>
-            <a:chExt cx="1516680" cy="1008720"/>
-          </a:xfrm>
-        </p:grpSpPr>
-        <mc:AlternateContent xmlns:mc="http://schemas.openxmlformats.org/markup-compatibility/2006">
-          <mc:Choice xmlns:p14="http://schemas.microsoft.com/office/powerpoint/2010/main" Requires="p14">
-            <p:contentPart p14:bwMode="auto" r:id="rId24">
-              <p14:nvContentPartPr>
-                <p14:cNvPr id="15" name="Ink 14">
-                  <a:extLst>
-                    <a:ext uri="{FF2B5EF4-FFF2-40B4-BE49-F238E27FC236}">
-                      <a16:creationId xmlns:a16="http://schemas.microsoft.com/office/drawing/2014/main" id="{D4DEBE2D-B27B-11F0-DAD9-5515AD09ECAF}"/>
-                    </a:ext>
-                  </a:extLst>
-                </p14:cNvPr>
-                <p14:cNvContentPartPr/>
-                <p14:nvPr/>
-              </p14:nvContentPartPr>
-              <p14:xfrm>
-                <a:off x="9895824" y="3041496"/>
-                <a:ext cx="1230840" cy="414000"/>
-              </p14:xfrm>
-            </p:contentPart>
-          </mc:Choice>
-          <mc:Fallback>
-            <p:pic>
-              <p:nvPicPr>
-                <p:cNvPr id="15" name="Ink 14">
-                  <a:extLst>
-                    <a:ext uri="{FF2B5EF4-FFF2-40B4-BE49-F238E27FC236}">
-                      <a16:creationId xmlns:a16="http://schemas.microsoft.com/office/drawing/2014/main" id="{D4DEBE2D-B27B-11F0-DAD9-5515AD09ECAF}"/>
-                    </a:ext>
-                  </a:extLst>
-                </p:cNvPr>
-                <p:cNvPicPr/>
-                <p:nvPr/>
-              </p:nvPicPr>
-              <p:blipFill>
-                <a:blip r:embed="rId25"/>
-                <a:stretch>
-                  <a:fillRect/>
-                </a:stretch>
-              </p:blipFill>
-              <p:spPr>
-                <a:xfrm>
-                  <a:off x="9859824" y="3005856"/>
-                  <a:ext cx="1302480" cy="485640"/>
-                </a:xfrm>
-                <a:prstGeom prst="rect">
-                  <a:avLst/>
-                </a:prstGeom>
-              </p:spPr>
-            </p:pic>
-          </mc:Fallback>
-        </mc:AlternateContent>
-        <mc:AlternateContent xmlns:mc="http://schemas.openxmlformats.org/markup-compatibility/2006">
-          <mc:Choice xmlns:p14="http://schemas.microsoft.com/office/powerpoint/2010/main" Requires="p14">
-            <p:contentPart p14:bwMode="auto" r:id="rId26">
-              <p14:nvContentPartPr>
-                <p14:cNvPr id="16" name="Ink 15">
-                  <a:extLst>
-                    <a:ext uri="{FF2B5EF4-FFF2-40B4-BE49-F238E27FC236}">
-                      <a16:creationId xmlns:a16="http://schemas.microsoft.com/office/drawing/2014/main" id="{ADA55B22-B992-D36D-B302-E2726A8CB298}"/>
-                    </a:ext>
-                  </a:extLst>
-                </p14:cNvPr>
-                <p14:cNvContentPartPr/>
-                <p14:nvPr/>
-              </p14:nvContentPartPr>
-              <p14:xfrm>
-                <a:off x="10621944" y="3497976"/>
-                <a:ext cx="21960" cy="64800"/>
-              </p14:xfrm>
-            </p:contentPart>
-          </mc:Choice>
-          <mc:Fallback>
-            <p:pic>
-              <p:nvPicPr>
-                <p:cNvPr id="16" name="Ink 15">
-                  <a:extLst>
-                    <a:ext uri="{FF2B5EF4-FFF2-40B4-BE49-F238E27FC236}">
-                      <a16:creationId xmlns:a16="http://schemas.microsoft.com/office/drawing/2014/main" id="{ADA55B22-B992-D36D-B302-E2726A8CB298}"/>
-                    </a:ext>
-                  </a:extLst>
-                </p:cNvPr>
-                <p:cNvPicPr/>
-                <p:nvPr/>
-              </p:nvPicPr>
-              <p:blipFill>
-                <a:blip r:embed="rId27"/>
-                <a:stretch>
-                  <a:fillRect/>
-                </a:stretch>
-              </p:blipFill>
-              <p:spPr>
-                <a:xfrm>
-                  <a:off x="10586304" y="3461976"/>
-                  <a:ext cx="93600" cy="136440"/>
-                </a:xfrm>
-                <a:prstGeom prst="rect">
-                  <a:avLst/>
-                </a:prstGeom>
-              </p:spPr>
-            </p:pic>
-          </mc:Fallback>
-        </mc:AlternateContent>
-        <mc:AlternateContent xmlns:mc="http://schemas.openxmlformats.org/markup-compatibility/2006">
-          <mc:Choice xmlns:p14="http://schemas.microsoft.com/office/powerpoint/2010/main" Requires="p14">
-            <p:contentPart p14:bwMode="auto" r:id="rId28">
-              <p14:nvContentPartPr>
-                <p14:cNvPr id="17" name="Ink 16">
-                  <a:extLst>
-                    <a:ext uri="{FF2B5EF4-FFF2-40B4-BE49-F238E27FC236}">
-                      <a16:creationId xmlns:a16="http://schemas.microsoft.com/office/drawing/2014/main" id="{694DBAD0-D11F-04AD-69E9-78AC3BD13DC3}"/>
-                    </a:ext>
-                  </a:extLst>
-                </p14:cNvPr>
-                <p14:cNvContentPartPr/>
-                <p14:nvPr/>
-              </p14:nvContentPartPr>
-              <p14:xfrm>
-                <a:off x="9805104" y="3618216"/>
-                <a:ext cx="792720" cy="309240"/>
-              </p14:xfrm>
-            </p:contentPart>
-          </mc:Choice>
-          <mc:Fallback>
-            <p:pic>
-              <p:nvPicPr>
-                <p:cNvPr id="17" name="Ink 16">
-                  <a:extLst>
-                    <a:ext uri="{FF2B5EF4-FFF2-40B4-BE49-F238E27FC236}">
-                      <a16:creationId xmlns:a16="http://schemas.microsoft.com/office/drawing/2014/main" id="{694DBAD0-D11F-04AD-69E9-78AC3BD13DC3}"/>
-                    </a:ext>
-                  </a:extLst>
-                </p:cNvPr>
-                <p:cNvPicPr/>
-                <p:nvPr/>
-              </p:nvPicPr>
-              <p:blipFill>
-                <a:blip r:embed="rId29"/>
-                <a:stretch>
-                  <a:fillRect/>
-                </a:stretch>
-              </p:blipFill>
-              <p:spPr>
-                <a:xfrm>
-                  <a:off x="9769464" y="3582216"/>
-                  <a:ext cx="864360" cy="380880"/>
-                </a:xfrm>
-                <a:prstGeom prst="rect">
-                  <a:avLst/>
-                </a:prstGeom>
-              </p:spPr>
-            </p:pic>
-          </mc:Fallback>
-        </mc:AlternateContent>
-        <mc:AlternateContent xmlns:mc="http://schemas.openxmlformats.org/markup-compatibility/2006">
-          <mc:Choice xmlns:p14="http://schemas.microsoft.com/office/powerpoint/2010/main" Requires="p14">
-            <p:contentPart p14:bwMode="auto" r:id="rId30">
-              <p14:nvContentPartPr>
-                <p14:cNvPr id="18" name="Ink 17">
-                  <a:extLst>
-                    <a:ext uri="{FF2B5EF4-FFF2-40B4-BE49-F238E27FC236}">
-                      <a16:creationId xmlns:a16="http://schemas.microsoft.com/office/drawing/2014/main" id="{8501ECDD-3854-77FA-51C4-D6BC2020D5D2}"/>
-                    </a:ext>
-                  </a:extLst>
-                </p14:cNvPr>
-                <p14:cNvContentPartPr/>
-                <p14:nvPr/>
-              </p14:nvContentPartPr>
-              <p14:xfrm>
-                <a:off x="10579464" y="3657456"/>
-                <a:ext cx="742320" cy="392760"/>
-              </p14:xfrm>
-            </p:contentPart>
-          </mc:Choice>
-          <mc:Fallback>
-            <p:pic>
-              <p:nvPicPr>
-                <p:cNvPr id="18" name="Ink 17">
-                  <a:extLst>
-                    <a:ext uri="{FF2B5EF4-FFF2-40B4-BE49-F238E27FC236}">
-                      <a16:creationId xmlns:a16="http://schemas.microsoft.com/office/drawing/2014/main" id="{8501ECDD-3854-77FA-51C4-D6BC2020D5D2}"/>
-                    </a:ext>
-                  </a:extLst>
-                </p:cNvPr>
-                <p:cNvPicPr/>
-                <p:nvPr/>
-              </p:nvPicPr>
-              <p:blipFill>
-                <a:blip r:embed="rId31"/>
-                <a:stretch>
-                  <a:fillRect/>
-                </a:stretch>
-              </p:blipFill>
-              <p:spPr>
-                <a:xfrm>
-                  <a:off x="10543464" y="3621456"/>
-                  <a:ext cx="813960" cy="464400"/>
-                </a:xfrm>
-                <a:prstGeom prst="rect">
-                  <a:avLst/>
-                </a:prstGeom>
-              </p:spPr>
-            </p:pic>
-          </mc:Fallback>
-        </mc:AlternateContent>
-      </p:grpSp>
-    </p:spTree>
-    <p:extLst>
-      <p:ext uri="{BB962C8B-B14F-4D97-AF65-F5344CB8AC3E}">
-        <p14:creationId xmlns:p14="http://schemas.microsoft.com/office/powerpoint/2010/main" val="699487337"/>
       </p:ext>
     </p:extLst>
   </p:cSld>
